--- a/docs/plots/carbo/jx_carbo_linsubhr_egfrdisc_anemia3.pptx
+++ b/docs/plots/carbo/jx_carbo_linsubhr_egfrdisc_anemia3.pptx
@@ -3003,476 +3003,479 @@
           <p:spPr>
             <a:xfrm>
               <a:off x="1172049" y="2073503"/>
-              <a:ext cx="7090630" cy="3357475"/>
+              <a:ext cx="7090630" cy="3350245"/>
             </a:xfrm>
             <a:custGeom>
               <a:avLst/>
               <a:pathLst>
-                <a:path w="7090630" h="3357475">
+                <a:path w="7090630" h="3350245">
                   <a:moveTo>
-                    <a:pt x="3229565" y="0"/>
+                    <a:pt x="3178969" y="0"/>
                   </a:moveTo>
                   <a:lnTo>
-                    <a:pt x="3294636" y="189930"/>
-                  </a:lnTo>
-                  <a:lnTo>
-                    <a:pt x="3366258" y="386505"/>
-                  </a:lnTo>
-                  <a:lnTo>
-                    <a:pt x="3437881" y="571350"/>
-                  </a:lnTo>
-                  <a:lnTo>
-                    <a:pt x="3509503" y="745162"/>
-                  </a:lnTo>
-                  <a:lnTo>
-                    <a:pt x="3581126" y="908602"/>
-                  </a:lnTo>
-                  <a:lnTo>
-                    <a:pt x="3652748" y="1062287"/>
-                  </a:lnTo>
-                  <a:lnTo>
-                    <a:pt x="3724371" y="1206800"/>
-                  </a:lnTo>
-                  <a:lnTo>
-                    <a:pt x="3795993" y="1342689"/>
-                  </a:lnTo>
-                  <a:lnTo>
-                    <a:pt x="3867616" y="1470468"/>
-                  </a:lnTo>
-                  <a:lnTo>
-                    <a:pt x="3939238" y="1590621"/>
-                  </a:lnTo>
-                  <a:lnTo>
-                    <a:pt x="4010861" y="1703603"/>
-                  </a:lnTo>
-                  <a:lnTo>
-                    <a:pt x="4082483" y="1809843"/>
-                  </a:lnTo>
-                  <a:lnTo>
-                    <a:pt x="4154106" y="1909742"/>
-                  </a:lnTo>
-                  <a:lnTo>
-                    <a:pt x="4225729" y="2003679"/>
-                  </a:lnTo>
-                  <a:lnTo>
-                    <a:pt x="4297351" y="2092010"/>
-                  </a:lnTo>
-                  <a:lnTo>
-                    <a:pt x="4368974" y="2175069"/>
-                  </a:lnTo>
-                  <a:lnTo>
-                    <a:pt x="4440596" y="2253171"/>
-                  </a:lnTo>
-                  <a:lnTo>
-                    <a:pt x="4512219" y="2326612"/>
-                  </a:lnTo>
-                  <a:lnTo>
-                    <a:pt x="4583841" y="2395670"/>
-                  </a:lnTo>
-                  <a:lnTo>
-                    <a:pt x="4655464" y="2460607"/>
-                  </a:lnTo>
-                  <a:lnTo>
-                    <a:pt x="4727086" y="2521668"/>
-                  </a:lnTo>
-                  <a:lnTo>
-                    <a:pt x="4798709" y="2579085"/>
-                  </a:lnTo>
-                  <a:lnTo>
-                    <a:pt x="4870331" y="2633076"/>
-                  </a:lnTo>
-                  <a:lnTo>
-                    <a:pt x="4941954" y="2657060"/>
-                  </a:lnTo>
-                  <a:lnTo>
-                    <a:pt x="5013576" y="2661747"/>
-                  </a:lnTo>
-                  <a:lnTo>
-                    <a:pt x="5085199" y="2666408"/>
-                  </a:lnTo>
-                  <a:lnTo>
-                    <a:pt x="5156821" y="2671042"/>
-                  </a:lnTo>
-                  <a:lnTo>
-                    <a:pt x="5228444" y="2675650"/>
-                  </a:lnTo>
-                  <a:lnTo>
-                    <a:pt x="5300066" y="2680232"/>
-                  </a:lnTo>
-                  <a:lnTo>
-                    <a:pt x="5371689" y="2684788"/>
-                  </a:lnTo>
-                  <a:lnTo>
-                    <a:pt x="5443311" y="2689318"/>
-                  </a:lnTo>
-                  <a:lnTo>
-                    <a:pt x="5514934" y="2693823"/>
-                  </a:lnTo>
-                  <a:lnTo>
-                    <a:pt x="5586557" y="2698302"/>
-                  </a:lnTo>
-                  <a:lnTo>
-                    <a:pt x="5658179" y="2702755"/>
-                  </a:lnTo>
-                  <a:lnTo>
-                    <a:pt x="5729802" y="2707183"/>
-                  </a:lnTo>
-                  <a:lnTo>
-                    <a:pt x="5801424" y="2711587"/>
-                  </a:lnTo>
-                  <a:lnTo>
-                    <a:pt x="5873047" y="2715965"/>
-                  </a:lnTo>
-                  <a:lnTo>
-                    <a:pt x="5944669" y="2720318"/>
-                  </a:lnTo>
-                  <a:lnTo>
-                    <a:pt x="6016292" y="2724647"/>
-                  </a:lnTo>
-                  <a:lnTo>
-                    <a:pt x="6087914" y="2728951"/>
-                  </a:lnTo>
-                  <a:lnTo>
-                    <a:pt x="6159537" y="2733231"/>
-                  </a:lnTo>
-                  <a:lnTo>
-                    <a:pt x="6231159" y="2737486"/>
-                  </a:lnTo>
-                  <a:lnTo>
-                    <a:pt x="6302782" y="2741717"/>
-                  </a:lnTo>
-                  <a:lnTo>
-                    <a:pt x="6374404" y="2745925"/>
-                  </a:lnTo>
-                  <a:lnTo>
-                    <a:pt x="6446027" y="2750108"/>
-                  </a:lnTo>
-                  <a:lnTo>
-                    <a:pt x="6517649" y="2754268"/>
-                  </a:lnTo>
-                  <a:lnTo>
-                    <a:pt x="6589272" y="2758404"/>
-                  </a:lnTo>
-                  <a:lnTo>
-                    <a:pt x="6660894" y="2762517"/>
-                  </a:lnTo>
-                  <a:lnTo>
-                    <a:pt x="6732517" y="2766606"/>
-                  </a:lnTo>
-                  <a:lnTo>
-                    <a:pt x="6804139" y="2770672"/>
-                  </a:lnTo>
-                  <a:lnTo>
-                    <a:pt x="6875762" y="2774716"/>
-                  </a:lnTo>
-                  <a:lnTo>
-                    <a:pt x="6947385" y="2778736"/>
-                  </a:lnTo>
-                  <a:lnTo>
-                    <a:pt x="7019007" y="2782733"/>
-                  </a:lnTo>
-                  <a:lnTo>
-                    <a:pt x="7090630" y="2786708"/>
-                  </a:lnTo>
-                  <a:lnTo>
-                    <a:pt x="7090630" y="3357475"/>
-                  </a:lnTo>
-                  <a:lnTo>
-                    <a:pt x="7019007" y="3349461"/>
-                  </a:lnTo>
-                  <a:lnTo>
-                    <a:pt x="6947385" y="3340938"/>
-                  </a:lnTo>
-                  <a:lnTo>
-                    <a:pt x="6875762" y="3331875"/>
-                  </a:lnTo>
-                  <a:lnTo>
-                    <a:pt x="6804139" y="3322236"/>
-                  </a:lnTo>
-                  <a:lnTo>
-                    <a:pt x="6732517" y="3311985"/>
-                  </a:lnTo>
-                  <a:lnTo>
-                    <a:pt x="6660894" y="3301084"/>
-                  </a:lnTo>
-                  <a:lnTo>
-                    <a:pt x="6589272" y="3289490"/>
-                  </a:lnTo>
-                  <a:lnTo>
-                    <a:pt x="6517649" y="3277161"/>
-                  </a:lnTo>
-                  <a:lnTo>
-                    <a:pt x="6446027" y="3264050"/>
-                  </a:lnTo>
-                  <a:lnTo>
-                    <a:pt x="6374404" y="3250106"/>
-                  </a:lnTo>
-                  <a:lnTo>
-                    <a:pt x="6302782" y="3235277"/>
-                  </a:lnTo>
-                  <a:lnTo>
-                    <a:pt x="6231159" y="3219507"/>
-                  </a:lnTo>
-                  <a:lnTo>
-                    <a:pt x="6159537" y="3202737"/>
-                  </a:lnTo>
-                  <a:lnTo>
-                    <a:pt x="6087914" y="3184902"/>
-                  </a:lnTo>
-                  <a:lnTo>
-                    <a:pt x="6016292" y="3165934"/>
-                  </a:lnTo>
-                  <a:lnTo>
-                    <a:pt x="5944669" y="3145764"/>
-                  </a:lnTo>
-                  <a:lnTo>
-                    <a:pt x="5873047" y="3124312"/>
-                  </a:lnTo>
-                  <a:lnTo>
-                    <a:pt x="5801424" y="3101500"/>
-                  </a:lnTo>
-                  <a:lnTo>
-                    <a:pt x="5729802" y="3077239"/>
-                  </a:lnTo>
-                  <a:lnTo>
-                    <a:pt x="5658179" y="3051439"/>
-                  </a:lnTo>
-                  <a:lnTo>
-                    <a:pt x="5586557" y="3024002"/>
-                  </a:lnTo>
-                  <a:lnTo>
-                    <a:pt x="5514934" y="2994822"/>
-                  </a:lnTo>
-                  <a:lnTo>
-                    <a:pt x="5443311" y="2963791"/>
-                  </a:lnTo>
-                  <a:lnTo>
-                    <a:pt x="5371689" y="2930791"/>
-                  </a:lnTo>
-                  <a:lnTo>
-                    <a:pt x="5300066" y="2895696"/>
-                  </a:lnTo>
-                  <a:lnTo>
-                    <a:pt x="5228444" y="2858373"/>
-                  </a:lnTo>
-                  <a:lnTo>
-                    <a:pt x="5156821" y="2818682"/>
-                  </a:lnTo>
-                  <a:lnTo>
-                    <a:pt x="5085199" y="2776472"/>
-                  </a:lnTo>
-                  <a:lnTo>
-                    <a:pt x="5013576" y="2731582"/>
-                  </a:lnTo>
-                  <a:lnTo>
-                    <a:pt x="4941954" y="2683844"/>
-                  </a:lnTo>
-                  <a:lnTo>
-                    <a:pt x="4870331" y="2652346"/>
-                  </a:lnTo>
-                  <a:lnTo>
-                    <a:pt x="4798709" y="2647605"/>
-                  </a:lnTo>
-                  <a:lnTo>
-                    <a:pt x="4727086" y="2642837"/>
-                  </a:lnTo>
-                  <a:lnTo>
-                    <a:pt x="4655464" y="2638041"/>
-                  </a:lnTo>
-                  <a:lnTo>
-                    <a:pt x="4583841" y="2633219"/>
-                  </a:lnTo>
-                  <a:lnTo>
-                    <a:pt x="4512219" y="2628369"/>
-                  </a:lnTo>
-                  <a:lnTo>
-                    <a:pt x="4440596" y="2623491"/>
-                  </a:lnTo>
-                  <a:lnTo>
-                    <a:pt x="4368974" y="2618586"/>
-                  </a:lnTo>
-                  <a:lnTo>
-                    <a:pt x="4297351" y="2613652"/>
-                  </a:lnTo>
-                  <a:lnTo>
-                    <a:pt x="4225729" y="2608691"/>
-                  </a:lnTo>
-                  <a:lnTo>
-                    <a:pt x="4154106" y="2603701"/>
-                  </a:lnTo>
-                  <a:lnTo>
-                    <a:pt x="4082483" y="2598682"/>
-                  </a:lnTo>
-                  <a:lnTo>
-                    <a:pt x="4010861" y="2593635"/>
-                  </a:lnTo>
-                  <a:lnTo>
-                    <a:pt x="3939238" y="2588560"/>
-                  </a:lnTo>
-                  <a:lnTo>
-                    <a:pt x="3867616" y="2583455"/>
-                  </a:lnTo>
-                  <a:lnTo>
-                    <a:pt x="3795993" y="2578321"/>
-                  </a:lnTo>
-                  <a:lnTo>
-                    <a:pt x="3724371" y="2573158"/>
-                  </a:lnTo>
-                  <a:lnTo>
-                    <a:pt x="3652748" y="2567966"/>
-                  </a:lnTo>
-                  <a:lnTo>
-                    <a:pt x="3581126" y="2562743"/>
-                  </a:lnTo>
-                  <a:lnTo>
-                    <a:pt x="3509503" y="2557492"/>
-                  </a:lnTo>
-                  <a:lnTo>
-                    <a:pt x="3437881" y="2552210"/>
-                  </a:lnTo>
-                  <a:lnTo>
-                    <a:pt x="3366258" y="2546898"/>
-                  </a:lnTo>
-                  <a:lnTo>
-                    <a:pt x="3294636" y="2541555"/>
-                  </a:lnTo>
-                  <a:lnTo>
-                    <a:pt x="3223013" y="2536183"/>
-                  </a:lnTo>
-                  <a:lnTo>
-                    <a:pt x="3151391" y="2530779"/>
-                  </a:lnTo>
-                  <a:lnTo>
-                    <a:pt x="3079768" y="2525345"/>
-                  </a:lnTo>
-                  <a:lnTo>
-                    <a:pt x="3008146" y="2519880"/>
-                  </a:lnTo>
-                  <a:lnTo>
-                    <a:pt x="2936523" y="2514384"/>
-                  </a:lnTo>
-                  <a:lnTo>
-                    <a:pt x="2864901" y="2508856"/>
-                  </a:lnTo>
-                  <a:lnTo>
-                    <a:pt x="2793278" y="2503297"/>
-                  </a:lnTo>
-                  <a:lnTo>
-                    <a:pt x="2721655" y="2497706"/>
-                  </a:lnTo>
-                  <a:lnTo>
-                    <a:pt x="2650033" y="2492083"/>
-                  </a:lnTo>
-                  <a:lnTo>
-                    <a:pt x="2578410" y="2486428"/>
-                  </a:lnTo>
-                  <a:lnTo>
-                    <a:pt x="2506788" y="2480741"/>
-                  </a:lnTo>
-                  <a:lnTo>
-                    <a:pt x="2435165" y="2475022"/>
-                  </a:lnTo>
-                  <a:lnTo>
-                    <a:pt x="2363543" y="2469270"/>
-                  </a:lnTo>
-                  <a:lnTo>
-                    <a:pt x="2291920" y="2463485"/>
-                  </a:lnTo>
-                  <a:lnTo>
-                    <a:pt x="2220298" y="2457667"/>
-                  </a:lnTo>
-                  <a:lnTo>
-                    <a:pt x="2148675" y="2451816"/>
-                  </a:lnTo>
-                  <a:lnTo>
-                    <a:pt x="2077053" y="2445931"/>
-                  </a:lnTo>
-                  <a:lnTo>
-                    <a:pt x="2005430" y="2440013"/>
-                  </a:lnTo>
-                  <a:lnTo>
-                    <a:pt x="1933808" y="2434061"/>
-                  </a:lnTo>
-                  <a:lnTo>
-                    <a:pt x="1862185" y="2428076"/>
-                  </a:lnTo>
-                  <a:lnTo>
-                    <a:pt x="1790563" y="2422056"/>
-                  </a:lnTo>
-                  <a:lnTo>
-                    <a:pt x="1718940" y="2416002"/>
-                  </a:lnTo>
-                  <a:lnTo>
-                    <a:pt x="1647318" y="2409913"/>
-                  </a:lnTo>
-                  <a:lnTo>
-                    <a:pt x="1575695" y="2403790"/>
-                  </a:lnTo>
-                  <a:lnTo>
-                    <a:pt x="1504073" y="2397631"/>
-                  </a:lnTo>
-                  <a:lnTo>
-                    <a:pt x="1432450" y="2391438"/>
-                  </a:lnTo>
-                  <a:lnTo>
-                    <a:pt x="1360827" y="2385209"/>
-                  </a:lnTo>
-                  <a:lnTo>
-                    <a:pt x="1289205" y="2378945"/>
-                  </a:lnTo>
-                  <a:lnTo>
-                    <a:pt x="1217582" y="2372645"/>
-                  </a:lnTo>
-                  <a:lnTo>
-                    <a:pt x="1145960" y="2366309"/>
-                  </a:lnTo>
-                  <a:lnTo>
-                    <a:pt x="1074337" y="2359937"/>
-                  </a:lnTo>
-                  <a:lnTo>
-                    <a:pt x="1002715" y="2353528"/>
-                  </a:lnTo>
-                  <a:lnTo>
-                    <a:pt x="931092" y="2347083"/>
-                  </a:lnTo>
-                  <a:lnTo>
-                    <a:pt x="859470" y="2340602"/>
-                  </a:lnTo>
-                  <a:lnTo>
-                    <a:pt x="787847" y="2334083"/>
-                  </a:lnTo>
-                  <a:lnTo>
-                    <a:pt x="716225" y="2327527"/>
-                  </a:lnTo>
-                  <a:lnTo>
-                    <a:pt x="644602" y="2320934"/>
-                  </a:lnTo>
-                  <a:lnTo>
-                    <a:pt x="572980" y="2314303"/>
-                  </a:lnTo>
-                  <a:lnTo>
-                    <a:pt x="501357" y="2307635"/>
-                  </a:lnTo>
-                  <a:lnTo>
-                    <a:pt x="429735" y="2300928"/>
-                  </a:lnTo>
-                  <a:lnTo>
-                    <a:pt x="358112" y="2294183"/>
-                  </a:lnTo>
-                  <a:lnTo>
-                    <a:pt x="286490" y="2287400"/>
-                  </a:lnTo>
-                  <a:lnTo>
-                    <a:pt x="214867" y="2280578"/>
-                  </a:lnTo>
-                  <a:lnTo>
-                    <a:pt x="143245" y="2273717"/>
-                  </a:lnTo>
-                  <a:lnTo>
-                    <a:pt x="71622" y="2266817"/>
-                  </a:lnTo>
-                  <a:lnTo>
-                    <a:pt x="0" y="2259877"/>
+                    <a:pt x="3223013" y="127019"/>
+                  </a:lnTo>
+                  <a:lnTo>
+                    <a:pt x="3294636" y="321598"/>
+                  </a:lnTo>
+                  <a:lnTo>
+                    <a:pt x="3366258" y="504898"/>
+                  </a:lnTo>
+                  <a:lnTo>
+                    <a:pt x="3437881" y="677573"/>
+                  </a:lnTo>
+                  <a:lnTo>
+                    <a:pt x="3509503" y="840238"/>
+                  </a:lnTo>
+                  <a:lnTo>
+                    <a:pt x="3581126" y="993474"/>
+                  </a:lnTo>
+                  <a:lnTo>
+                    <a:pt x="3652748" y="1137828"/>
+                  </a:lnTo>
+                  <a:lnTo>
+                    <a:pt x="3724371" y="1273814"/>
+                  </a:lnTo>
+                  <a:lnTo>
+                    <a:pt x="3795993" y="1401917"/>
+                  </a:lnTo>
+                  <a:lnTo>
+                    <a:pt x="3867616" y="1522594"/>
+                  </a:lnTo>
+                  <a:lnTo>
+                    <a:pt x="3939238" y="1636276"/>
+                  </a:lnTo>
+                  <a:lnTo>
+                    <a:pt x="4010861" y="1743369"/>
+                  </a:lnTo>
+                  <a:lnTo>
+                    <a:pt x="4082483" y="1844253"/>
+                  </a:lnTo>
+                  <a:lnTo>
+                    <a:pt x="4154106" y="1939289"/>
+                  </a:lnTo>
+                  <a:lnTo>
+                    <a:pt x="4225729" y="2028817"/>
+                  </a:lnTo>
+                  <a:lnTo>
+                    <a:pt x="4297351" y="2113155"/>
+                  </a:lnTo>
+                  <a:lnTo>
+                    <a:pt x="4368974" y="2192604"/>
+                  </a:lnTo>
+                  <a:lnTo>
+                    <a:pt x="4440596" y="2267447"/>
+                  </a:lnTo>
+                  <a:lnTo>
+                    <a:pt x="4512219" y="2337953"/>
+                  </a:lnTo>
+                  <a:lnTo>
+                    <a:pt x="4583841" y="2404371"/>
+                  </a:lnTo>
+                  <a:lnTo>
+                    <a:pt x="4655464" y="2466939"/>
+                  </a:lnTo>
+                  <a:lnTo>
+                    <a:pt x="4727086" y="2525880"/>
+                  </a:lnTo>
+                  <a:lnTo>
+                    <a:pt x="4798709" y="2581405"/>
+                  </a:lnTo>
+                  <a:lnTo>
+                    <a:pt x="4870331" y="2633711"/>
+                  </a:lnTo>
+                  <a:lnTo>
+                    <a:pt x="4941954" y="2650551"/>
+                  </a:lnTo>
+                  <a:lnTo>
+                    <a:pt x="5013576" y="2644185"/>
+                  </a:lnTo>
+                  <a:lnTo>
+                    <a:pt x="5085199" y="2637770"/>
+                  </a:lnTo>
+                  <a:lnTo>
+                    <a:pt x="5156821" y="2631307"/>
+                  </a:lnTo>
+                  <a:lnTo>
+                    <a:pt x="5228444" y="2624794"/>
+                  </a:lnTo>
+                  <a:lnTo>
+                    <a:pt x="5300066" y="2618231"/>
+                  </a:lnTo>
+                  <a:lnTo>
+                    <a:pt x="5371689" y="2611618"/>
+                  </a:lnTo>
+                  <a:lnTo>
+                    <a:pt x="5443311" y="2604954"/>
+                  </a:lnTo>
+                  <a:lnTo>
+                    <a:pt x="5514934" y="2598240"/>
+                  </a:lnTo>
+                  <a:lnTo>
+                    <a:pt x="5586557" y="2591474"/>
+                  </a:lnTo>
+                  <a:lnTo>
+                    <a:pt x="5658179" y="2584657"/>
+                  </a:lnTo>
+                  <a:lnTo>
+                    <a:pt x="5729802" y="2577787"/>
+                  </a:lnTo>
+                  <a:lnTo>
+                    <a:pt x="5801424" y="2570865"/>
+                  </a:lnTo>
+                  <a:lnTo>
+                    <a:pt x="5873047" y="2563890"/>
+                  </a:lnTo>
+                  <a:lnTo>
+                    <a:pt x="5944669" y="2556862"/>
+                  </a:lnTo>
+                  <a:lnTo>
+                    <a:pt x="6016292" y="2549780"/>
+                  </a:lnTo>
+                  <a:lnTo>
+                    <a:pt x="6087914" y="2542644"/>
+                  </a:lnTo>
+                  <a:lnTo>
+                    <a:pt x="6159537" y="2535454"/>
+                  </a:lnTo>
+                  <a:lnTo>
+                    <a:pt x="6231159" y="2528208"/>
+                  </a:lnTo>
+                  <a:lnTo>
+                    <a:pt x="6302782" y="2520908"/>
+                  </a:lnTo>
+                  <a:lnTo>
+                    <a:pt x="6374404" y="2513551"/>
+                  </a:lnTo>
+                  <a:lnTo>
+                    <a:pt x="6446027" y="2506138"/>
+                  </a:lnTo>
+                  <a:lnTo>
+                    <a:pt x="6517649" y="2498669"/>
+                  </a:lnTo>
+                  <a:lnTo>
+                    <a:pt x="6589272" y="2491142"/>
+                  </a:lnTo>
+                  <a:lnTo>
+                    <a:pt x="6660894" y="2483558"/>
+                  </a:lnTo>
+                  <a:lnTo>
+                    <a:pt x="6732517" y="2475916"/>
+                  </a:lnTo>
+                  <a:lnTo>
+                    <a:pt x="6804139" y="2468216"/>
+                  </a:lnTo>
+                  <a:lnTo>
+                    <a:pt x="6875762" y="2460457"/>
+                  </a:lnTo>
+                  <a:lnTo>
+                    <a:pt x="6947385" y="2452638"/>
+                  </a:lnTo>
+                  <a:lnTo>
+                    <a:pt x="7019007" y="2444760"/>
+                  </a:lnTo>
+                  <a:lnTo>
+                    <a:pt x="7090630" y="2436822"/>
+                  </a:lnTo>
+                  <a:lnTo>
+                    <a:pt x="7090630" y="3350245"/>
+                  </a:lnTo>
+                  <a:lnTo>
+                    <a:pt x="7019007" y="3342030"/>
+                  </a:lnTo>
+                  <a:lnTo>
+                    <a:pt x="6947385" y="3333309"/>
+                  </a:lnTo>
+                  <a:lnTo>
+                    <a:pt x="6875762" y="3324052"/>
+                  </a:lnTo>
+                  <a:lnTo>
+                    <a:pt x="6804139" y="3314226"/>
+                  </a:lnTo>
+                  <a:lnTo>
+                    <a:pt x="6732517" y="3303795"/>
+                  </a:lnTo>
+                  <a:lnTo>
+                    <a:pt x="6660894" y="3292721"/>
+                  </a:lnTo>
+                  <a:lnTo>
+                    <a:pt x="6589272" y="3280967"/>
+                  </a:lnTo>
+                  <a:lnTo>
+                    <a:pt x="6517649" y="3268489"/>
+                  </a:lnTo>
+                  <a:lnTo>
+                    <a:pt x="6446027" y="3255243"/>
+                  </a:lnTo>
+                  <a:lnTo>
+                    <a:pt x="6374404" y="3241183"/>
+                  </a:lnTo>
+                  <a:lnTo>
+                    <a:pt x="6302782" y="3226257"/>
+                  </a:lnTo>
+                  <a:lnTo>
+                    <a:pt x="6231159" y="3210412"/>
+                  </a:lnTo>
+                  <a:lnTo>
+                    <a:pt x="6159537" y="3193593"/>
+                  </a:lnTo>
+                  <a:lnTo>
+                    <a:pt x="6087914" y="3175739"/>
+                  </a:lnTo>
+                  <a:lnTo>
+                    <a:pt x="6016292" y="3156786"/>
+                  </a:lnTo>
+                  <a:lnTo>
+                    <a:pt x="5944669" y="3136667"/>
+                  </a:lnTo>
+                  <a:lnTo>
+                    <a:pt x="5873047" y="3115310"/>
+                  </a:lnTo>
+                  <a:lnTo>
+                    <a:pt x="5801424" y="3092638"/>
+                  </a:lnTo>
+                  <a:lnTo>
+                    <a:pt x="5729802" y="3068572"/>
+                  </a:lnTo>
+                  <a:lnTo>
+                    <a:pt x="5658179" y="3043025"/>
+                  </a:lnTo>
+                  <a:lnTo>
+                    <a:pt x="5586557" y="3015905"/>
+                  </a:lnTo>
+                  <a:lnTo>
+                    <a:pt x="5514934" y="2987117"/>
+                  </a:lnTo>
+                  <a:lnTo>
+                    <a:pt x="5443311" y="2956558"/>
+                  </a:lnTo>
+                  <a:lnTo>
+                    <a:pt x="5371689" y="2924118"/>
+                  </a:lnTo>
+                  <a:lnTo>
+                    <a:pt x="5300066" y="2889682"/>
+                  </a:lnTo>
+                  <a:lnTo>
+                    <a:pt x="5228444" y="2853126"/>
+                  </a:lnTo>
+                  <a:lnTo>
+                    <a:pt x="5156821" y="2814322"/>
+                  </a:lnTo>
+                  <a:lnTo>
+                    <a:pt x="5085199" y="2773130"/>
+                  </a:lnTo>
+                  <a:lnTo>
+                    <a:pt x="5013576" y="2729403"/>
+                  </a:lnTo>
+                  <a:lnTo>
+                    <a:pt x="4941954" y="2682985"/>
+                  </a:lnTo>
+                  <a:lnTo>
+                    <a:pt x="4870331" y="2656869"/>
+                  </a:lnTo>
+                  <a:lnTo>
+                    <a:pt x="4798709" y="2663139"/>
+                  </a:lnTo>
+                  <a:lnTo>
+                    <a:pt x="4727086" y="2669361"/>
+                  </a:lnTo>
+                  <a:lnTo>
+                    <a:pt x="4655464" y="2675536"/>
+                  </a:lnTo>
+                  <a:lnTo>
+                    <a:pt x="4583841" y="2681665"/>
+                  </a:lnTo>
+                  <a:lnTo>
+                    <a:pt x="4512219" y="2687747"/>
+                  </a:lnTo>
+                  <a:lnTo>
+                    <a:pt x="4440596" y="2693782"/>
+                  </a:lnTo>
+                  <a:lnTo>
+                    <a:pt x="4368974" y="2699772"/>
+                  </a:lnTo>
+                  <a:lnTo>
+                    <a:pt x="4297351" y="2705717"/>
+                  </a:lnTo>
+                  <a:lnTo>
+                    <a:pt x="4225729" y="2711616"/>
+                  </a:lnTo>
+                  <a:lnTo>
+                    <a:pt x="4154106" y="2717471"/>
+                  </a:lnTo>
+                  <a:lnTo>
+                    <a:pt x="4082483" y="2723281"/>
+                  </a:lnTo>
+                  <a:lnTo>
+                    <a:pt x="4010861" y="2729048"/>
+                  </a:lnTo>
+                  <a:lnTo>
+                    <a:pt x="3939238" y="2734770"/>
+                  </a:lnTo>
+                  <a:lnTo>
+                    <a:pt x="3867616" y="2740449"/>
+                  </a:lnTo>
+                  <a:lnTo>
+                    <a:pt x="3795993" y="2746086"/>
+                  </a:lnTo>
+                  <a:lnTo>
+                    <a:pt x="3724371" y="2751679"/>
+                  </a:lnTo>
+                  <a:lnTo>
+                    <a:pt x="3652748" y="2757230"/>
+                  </a:lnTo>
+                  <a:lnTo>
+                    <a:pt x="3581126" y="2762739"/>
+                  </a:lnTo>
+                  <a:lnTo>
+                    <a:pt x="3509503" y="2768206"/>
+                  </a:lnTo>
+                  <a:lnTo>
+                    <a:pt x="3437881" y="2773632"/>
+                  </a:lnTo>
+                  <a:lnTo>
+                    <a:pt x="3366258" y="2779016"/>
+                  </a:lnTo>
+                  <a:lnTo>
+                    <a:pt x="3294636" y="2784360"/>
+                  </a:lnTo>
+                  <a:lnTo>
+                    <a:pt x="3223013" y="2789663"/>
+                  </a:lnTo>
+                  <a:lnTo>
+                    <a:pt x="3151391" y="2794926"/>
+                  </a:lnTo>
+                  <a:lnTo>
+                    <a:pt x="3079768" y="2800149"/>
+                  </a:lnTo>
+                  <a:lnTo>
+                    <a:pt x="3008146" y="2805332"/>
+                  </a:lnTo>
+                  <a:lnTo>
+                    <a:pt x="2936523" y="2810476"/>
+                  </a:lnTo>
+                  <a:lnTo>
+                    <a:pt x="2864901" y="2815582"/>
+                  </a:lnTo>
+                  <a:lnTo>
+                    <a:pt x="2793278" y="2820648"/>
+                  </a:lnTo>
+                  <a:lnTo>
+                    <a:pt x="2721655" y="2825676"/>
+                  </a:lnTo>
+                  <a:lnTo>
+                    <a:pt x="2650033" y="2830666"/>
+                  </a:lnTo>
+                  <a:lnTo>
+                    <a:pt x="2578410" y="2835618"/>
+                  </a:lnTo>
+                  <a:lnTo>
+                    <a:pt x="2506788" y="2840532"/>
+                  </a:lnTo>
+                  <a:lnTo>
+                    <a:pt x="2435165" y="2845410"/>
+                  </a:lnTo>
+                  <a:lnTo>
+                    <a:pt x="2363543" y="2850250"/>
+                  </a:lnTo>
+                  <a:lnTo>
+                    <a:pt x="2291920" y="2855053"/>
+                  </a:lnTo>
+                  <a:lnTo>
+                    <a:pt x="2220298" y="2859821"/>
+                  </a:lnTo>
+                  <a:lnTo>
+                    <a:pt x="2148675" y="2864552"/>
+                  </a:lnTo>
+                  <a:lnTo>
+                    <a:pt x="2077053" y="2869247"/>
+                  </a:lnTo>
+                  <a:lnTo>
+                    <a:pt x="2005430" y="2873906"/>
+                  </a:lnTo>
+                  <a:lnTo>
+                    <a:pt x="1933808" y="2878530"/>
+                  </a:lnTo>
+                  <a:lnTo>
+                    <a:pt x="1862185" y="2883119"/>
+                  </a:lnTo>
+                  <a:lnTo>
+                    <a:pt x="1790563" y="2887674"/>
+                  </a:lnTo>
+                  <a:lnTo>
+                    <a:pt x="1718940" y="2892194"/>
+                  </a:lnTo>
+                  <a:lnTo>
+                    <a:pt x="1647318" y="2896679"/>
+                  </a:lnTo>
+                  <a:lnTo>
+                    <a:pt x="1575695" y="2901130"/>
+                  </a:lnTo>
+                  <a:lnTo>
+                    <a:pt x="1504073" y="2905548"/>
+                  </a:lnTo>
+                  <a:lnTo>
+                    <a:pt x="1432450" y="2909932"/>
+                  </a:lnTo>
+                  <a:lnTo>
+                    <a:pt x="1360827" y="2914283"/>
+                  </a:lnTo>
+                  <a:lnTo>
+                    <a:pt x="1289205" y="2918601"/>
+                  </a:lnTo>
+                  <a:lnTo>
+                    <a:pt x="1217582" y="2922887"/>
+                  </a:lnTo>
+                  <a:lnTo>
+                    <a:pt x="1145960" y="2927140"/>
+                  </a:lnTo>
+                  <a:lnTo>
+                    <a:pt x="1074337" y="2931360"/>
+                  </a:lnTo>
+                  <a:lnTo>
+                    <a:pt x="1002715" y="2935549"/>
+                  </a:lnTo>
+                  <a:lnTo>
+                    <a:pt x="931092" y="2939705"/>
+                  </a:lnTo>
+                  <a:lnTo>
+                    <a:pt x="859470" y="2943831"/>
+                  </a:lnTo>
+                  <a:lnTo>
+                    <a:pt x="787847" y="2947925"/>
+                  </a:lnTo>
+                  <a:lnTo>
+                    <a:pt x="716225" y="2951987"/>
+                  </a:lnTo>
+                  <a:lnTo>
+                    <a:pt x="644602" y="2956020"/>
+                  </a:lnTo>
+                  <a:lnTo>
+                    <a:pt x="572980" y="2960021"/>
+                  </a:lnTo>
+                  <a:lnTo>
+                    <a:pt x="501357" y="2963992"/>
+                  </a:lnTo>
+                  <a:lnTo>
+                    <a:pt x="429735" y="2967933"/>
+                  </a:lnTo>
+                  <a:lnTo>
+                    <a:pt x="358112" y="2971845"/>
+                  </a:lnTo>
+                  <a:lnTo>
+                    <a:pt x="286490" y="2975726"/>
+                  </a:lnTo>
+                  <a:lnTo>
+                    <a:pt x="214867" y="2979578"/>
+                  </a:lnTo>
+                  <a:lnTo>
+                    <a:pt x="143245" y="2983401"/>
+                  </a:lnTo>
+                  <a:lnTo>
+                    <a:pt x="71622" y="2987195"/>
+                  </a:lnTo>
+                  <a:lnTo>
+                    <a:pt x="0" y="2990960"/>
                   </a:lnTo>
                   <a:lnTo>
                     <a:pt x="0" y="0"/>
@@ -3501,177 +3504,180 @@
           </p:nvSpPr>
           <p:spPr>
             <a:xfrm>
-              <a:off x="4401614" y="2073503"/>
-              <a:ext cx="3861065" cy="2786708"/>
+              <a:off x="4351018" y="2073503"/>
+              <a:ext cx="3911660" cy="2650551"/>
             </a:xfrm>
             <a:custGeom>
               <a:avLst/>
               <a:pathLst>
-                <a:path w="3861065" h="2786708">
+                <a:path w="3911660" h="2650551">
                   <a:moveTo>
                     <a:pt x="0" y="0"/>
                   </a:moveTo>
                   <a:lnTo>
-                    <a:pt x="65071" y="189930"/>
-                  </a:lnTo>
-                  <a:lnTo>
-                    <a:pt x="136693" y="386505"/>
-                  </a:lnTo>
-                  <a:lnTo>
-                    <a:pt x="208316" y="571350"/>
-                  </a:lnTo>
-                  <a:lnTo>
-                    <a:pt x="279938" y="745162"/>
-                  </a:lnTo>
-                  <a:lnTo>
-                    <a:pt x="351561" y="908602"/>
-                  </a:lnTo>
-                  <a:lnTo>
-                    <a:pt x="423183" y="1062287"/>
-                  </a:lnTo>
-                  <a:lnTo>
-                    <a:pt x="494806" y="1206800"/>
-                  </a:lnTo>
-                  <a:lnTo>
-                    <a:pt x="566428" y="1342689"/>
-                  </a:lnTo>
-                  <a:lnTo>
-                    <a:pt x="638051" y="1470468"/>
-                  </a:lnTo>
-                  <a:lnTo>
-                    <a:pt x="709673" y="1590621"/>
-                  </a:lnTo>
-                  <a:lnTo>
-                    <a:pt x="781296" y="1703603"/>
-                  </a:lnTo>
-                  <a:lnTo>
-                    <a:pt x="852918" y="1809843"/>
-                  </a:lnTo>
-                  <a:lnTo>
-                    <a:pt x="924541" y="1909742"/>
-                  </a:lnTo>
-                  <a:lnTo>
-                    <a:pt x="996163" y="2003679"/>
-                  </a:lnTo>
-                  <a:lnTo>
-                    <a:pt x="1067786" y="2092010"/>
-                  </a:lnTo>
-                  <a:lnTo>
-                    <a:pt x="1139409" y="2175069"/>
-                  </a:lnTo>
-                  <a:lnTo>
-                    <a:pt x="1211031" y="2253171"/>
-                  </a:lnTo>
-                  <a:lnTo>
-                    <a:pt x="1282654" y="2326612"/>
-                  </a:lnTo>
-                  <a:lnTo>
-                    <a:pt x="1354276" y="2395670"/>
-                  </a:lnTo>
-                  <a:lnTo>
-                    <a:pt x="1425899" y="2460607"/>
-                  </a:lnTo>
-                  <a:lnTo>
-                    <a:pt x="1497521" y="2521668"/>
-                  </a:lnTo>
-                  <a:lnTo>
-                    <a:pt x="1569144" y="2579085"/>
-                  </a:lnTo>
-                  <a:lnTo>
-                    <a:pt x="1640766" y="2633076"/>
-                  </a:lnTo>
-                  <a:lnTo>
-                    <a:pt x="1712389" y="2657060"/>
-                  </a:lnTo>
-                  <a:lnTo>
-                    <a:pt x="1784011" y="2661747"/>
-                  </a:lnTo>
-                  <a:lnTo>
-                    <a:pt x="1855634" y="2666408"/>
-                  </a:lnTo>
-                  <a:lnTo>
-                    <a:pt x="1927256" y="2671042"/>
-                  </a:lnTo>
-                  <a:lnTo>
-                    <a:pt x="1998879" y="2675650"/>
-                  </a:lnTo>
-                  <a:lnTo>
-                    <a:pt x="2070501" y="2680232"/>
-                  </a:lnTo>
-                  <a:lnTo>
-                    <a:pt x="2142124" y="2684788"/>
-                  </a:lnTo>
-                  <a:lnTo>
-                    <a:pt x="2213746" y="2689318"/>
-                  </a:lnTo>
-                  <a:lnTo>
-                    <a:pt x="2285369" y="2693823"/>
-                  </a:lnTo>
-                  <a:lnTo>
-                    <a:pt x="2356991" y="2698302"/>
-                  </a:lnTo>
-                  <a:lnTo>
-                    <a:pt x="2428614" y="2702755"/>
-                  </a:lnTo>
-                  <a:lnTo>
-                    <a:pt x="2500237" y="2707183"/>
-                  </a:lnTo>
-                  <a:lnTo>
-                    <a:pt x="2571859" y="2711587"/>
-                  </a:lnTo>
-                  <a:lnTo>
-                    <a:pt x="2643482" y="2715965"/>
-                  </a:lnTo>
-                  <a:lnTo>
-                    <a:pt x="2715104" y="2720318"/>
-                  </a:lnTo>
-                  <a:lnTo>
-                    <a:pt x="2786727" y="2724647"/>
-                  </a:lnTo>
-                  <a:lnTo>
-                    <a:pt x="2858349" y="2728951"/>
-                  </a:lnTo>
-                  <a:lnTo>
-                    <a:pt x="2929972" y="2733231"/>
-                  </a:lnTo>
-                  <a:lnTo>
-                    <a:pt x="3001594" y="2737486"/>
-                  </a:lnTo>
-                  <a:lnTo>
-                    <a:pt x="3073217" y="2741717"/>
-                  </a:lnTo>
-                  <a:lnTo>
-                    <a:pt x="3144839" y="2745925"/>
-                  </a:lnTo>
-                  <a:lnTo>
-                    <a:pt x="3216462" y="2750108"/>
-                  </a:lnTo>
-                  <a:lnTo>
-                    <a:pt x="3288084" y="2754268"/>
-                  </a:lnTo>
-                  <a:lnTo>
-                    <a:pt x="3359707" y="2758404"/>
-                  </a:lnTo>
-                  <a:lnTo>
-                    <a:pt x="3431329" y="2762517"/>
-                  </a:lnTo>
-                  <a:lnTo>
-                    <a:pt x="3502952" y="2766606"/>
-                  </a:lnTo>
-                  <a:lnTo>
-                    <a:pt x="3574574" y="2770672"/>
-                  </a:lnTo>
-                  <a:lnTo>
-                    <a:pt x="3646197" y="2774716"/>
-                  </a:lnTo>
-                  <a:lnTo>
-                    <a:pt x="3717819" y="2778736"/>
-                  </a:lnTo>
-                  <a:lnTo>
-                    <a:pt x="3789442" y="2782733"/>
-                  </a:lnTo>
-                  <a:lnTo>
-                    <a:pt x="3861065" y="2786708"/>
+                    <a:pt x="44044" y="127019"/>
+                  </a:lnTo>
+                  <a:lnTo>
+                    <a:pt x="115666" y="321598"/>
+                  </a:lnTo>
+                  <a:lnTo>
+                    <a:pt x="187289" y="504898"/>
+                  </a:lnTo>
+                  <a:lnTo>
+                    <a:pt x="258911" y="677573"/>
+                  </a:lnTo>
+                  <a:lnTo>
+                    <a:pt x="330534" y="840238"/>
+                  </a:lnTo>
+                  <a:lnTo>
+                    <a:pt x="402156" y="993474"/>
+                  </a:lnTo>
+                  <a:lnTo>
+                    <a:pt x="473779" y="1137828"/>
+                  </a:lnTo>
+                  <a:lnTo>
+                    <a:pt x="545401" y="1273814"/>
+                  </a:lnTo>
+                  <a:lnTo>
+                    <a:pt x="617024" y="1401917"/>
+                  </a:lnTo>
+                  <a:lnTo>
+                    <a:pt x="688646" y="1522594"/>
+                  </a:lnTo>
+                  <a:lnTo>
+                    <a:pt x="760269" y="1636276"/>
+                  </a:lnTo>
+                  <a:lnTo>
+                    <a:pt x="831891" y="1743369"/>
+                  </a:lnTo>
+                  <a:lnTo>
+                    <a:pt x="903514" y="1844253"/>
+                  </a:lnTo>
+                  <a:lnTo>
+                    <a:pt x="975136" y="1939289"/>
+                  </a:lnTo>
+                  <a:lnTo>
+                    <a:pt x="1046759" y="2028817"/>
+                  </a:lnTo>
+                  <a:lnTo>
+                    <a:pt x="1118381" y="2113155"/>
+                  </a:lnTo>
+                  <a:lnTo>
+                    <a:pt x="1190004" y="2192604"/>
+                  </a:lnTo>
+                  <a:lnTo>
+                    <a:pt x="1261627" y="2267447"/>
+                  </a:lnTo>
+                  <a:lnTo>
+                    <a:pt x="1333249" y="2337953"/>
+                  </a:lnTo>
+                  <a:lnTo>
+                    <a:pt x="1404872" y="2404371"/>
+                  </a:lnTo>
+                  <a:lnTo>
+                    <a:pt x="1476494" y="2466939"/>
+                  </a:lnTo>
+                  <a:lnTo>
+                    <a:pt x="1548117" y="2525880"/>
+                  </a:lnTo>
+                  <a:lnTo>
+                    <a:pt x="1619739" y="2581405"/>
+                  </a:lnTo>
+                  <a:lnTo>
+                    <a:pt x="1691362" y="2633711"/>
+                  </a:lnTo>
+                  <a:lnTo>
+                    <a:pt x="1762984" y="2650551"/>
+                  </a:lnTo>
+                  <a:lnTo>
+                    <a:pt x="1834607" y="2644185"/>
+                  </a:lnTo>
+                  <a:lnTo>
+                    <a:pt x="1906229" y="2637770"/>
+                  </a:lnTo>
+                  <a:lnTo>
+                    <a:pt x="1977852" y="2631307"/>
+                  </a:lnTo>
+                  <a:lnTo>
+                    <a:pt x="2049474" y="2624794"/>
+                  </a:lnTo>
+                  <a:lnTo>
+                    <a:pt x="2121097" y="2618231"/>
+                  </a:lnTo>
+                  <a:lnTo>
+                    <a:pt x="2192719" y="2611618"/>
+                  </a:lnTo>
+                  <a:lnTo>
+                    <a:pt x="2264342" y="2604954"/>
+                  </a:lnTo>
+                  <a:lnTo>
+                    <a:pt x="2335964" y="2598240"/>
+                  </a:lnTo>
+                  <a:lnTo>
+                    <a:pt x="2407587" y="2591474"/>
+                  </a:lnTo>
+                  <a:lnTo>
+                    <a:pt x="2479209" y="2584657"/>
+                  </a:lnTo>
+                  <a:lnTo>
+                    <a:pt x="2550832" y="2577787"/>
+                  </a:lnTo>
+                  <a:lnTo>
+                    <a:pt x="2622455" y="2570865"/>
+                  </a:lnTo>
+                  <a:lnTo>
+                    <a:pt x="2694077" y="2563890"/>
+                  </a:lnTo>
+                  <a:lnTo>
+                    <a:pt x="2765700" y="2556862"/>
+                  </a:lnTo>
+                  <a:lnTo>
+                    <a:pt x="2837322" y="2549780"/>
+                  </a:lnTo>
+                  <a:lnTo>
+                    <a:pt x="2908945" y="2542644"/>
+                  </a:lnTo>
+                  <a:lnTo>
+                    <a:pt x="2980567" y="2535454"/>
+                  </a:lnTo>
+                  <a:lnTo>
+                    <a:pt x="3052190" y="2528208"/>
+                  </a:lnTo>
+                  <a:lnTo>
+                    <a:pt x="3123812" y="2520908"/>
+                  </a:lnTo>
+                  <a:lnTo>
+                    <a:pt x="3195435" y="2513551"/>
+                  </a:lnTo>
+                  <a:lnTo>
+                    <a:pt x="3267057" y="2506138"/>
+                  </a:lnTo>
+                  <a:lnTo>
+                    <a:pt x="3338680" y="2498669"/>
+                  </a:lnTo>
+                  <a:lnTo>
+                    <a:pt x="3410302" y="2491142"/>
+                  </a:lnTo>
+                  <a:lnTo>
+                    <a:pt x="3481925" y="2483558"/>
+                  </a:lnTo>
+                  <a:lnTo>
+                    <a:pt x="3553547" y="2475916"/>
+                  </a:lnTo>
+                  <a:lnTo>
+                    <a:pt x="3625170" y="2468216"/>
+                  </a:lnTo>
+                  <a:lnTo>
+                    <a:pt x="3696792" y="2460457"/>
+                  </a:lnTo>
+                  <a:lnTo>
+                    <a:pt x="3768415" y="2452638"/>
+                  </a:lnTo>
+                  <a:lnTo>
+                    <a:pt x="3840037" y="2444760"/>
+                  </a:lnTo>
+                  <a:lnTo>
+                    <a:pt x="3911660" y="2436822"/>
                   </a:lnTo>
                 </a:path>
               </a:pathLst>
@@ -3691,312 +3697,312 @@
           </p:nvSpPr>
           <p:spPr>
             <a:xfrm>
-              <a:off x="1172049" y="4333381"/>
-              <a:ext cx="7090630" cy="1097598"/>
+              <a:off x="1172049" y="4730372"/>
+              <a:ext cx="7090630" cy="693375"/>
             </a:xfrm>
             <a:custGeom>
               <a:avLst/>
               <a:pathLst>
-                <a:path w="7090630" h="1097598">
+                <a:path w="7090630" h="693375">
                   <a:moveTo>
-                    <a:pt x="7090630" y="1097598"/>
+                    <a:pt x="7090630" y="693375"/>
                   </a:moveTo>
                   <a:lnTo>
-                    <a:pt x="7019007" y="1089583"/>
-                  </a:lnTo>
-                  <a:lnTo>
-                    <a:pt x="6947385" y="1081061"/>
-                  </a:lnTo>
-                  <a:lnTo>
-                    <a:pt x="6875762" y="1071997"/>
-                  </a:lnTo>
-                  <a:lnTo>
-                    <a:pt x="6804139" y="1062358"/>
-                  </a:lnTo>
-                  <a:lnTo>
-                    <a:pt x="6732517" y="1052107"/>
-                  </a:lnTo>
-                  <a:lnTo>
-                    <a:pt x="6660894" y="1041206"/>
-                  </a:lnTo>
-                  <a:lnTo>
-                    <a:pt x="6589272" y="1029612"/>
-                  </a:lnTo>
-                  <a:lnTo>
-                    <a:pt x="6517649" y="1017283"/>
-                  </a:lnTo>
-                  <a:lnTo>
-                    <a:pt x="6446027" y="1004172"/>
-                  </a:lnTo>
-                  <a:lnTo>
-                    <a:pt x="6374404" y="990228"/>
-                  </a:lnTo>
-                  <a:lnTo>
-                    <a:pt x="6302782" y="975399"/>
-                  </a:lnTo>
-                  <a:lnTo>
-                    <a:pt x="6231159" y="959629"/>
-                  </a:lnTo>
-                  <a:lnTo>
-                    <a:pt x="6159537" y="942859"/>
-                  </a:lnTo>
-                  <a:lnTo>
-                    <a:pt x="6087914" y="925024"/>
-                  </a:lnTo>
-                  <a:lnTo>
-                    <a:pt x="6016292" y="906057"/>
-                  </a:lnTo>
-                  <a:lnTo>
-                    <a:pt x="5944669" y="885886"/>
-                  </a:lnTo>
-                  <a:lnTo>
-                    <a:pt x="5873047" y="864434"/>
-                  </a:lnTo>
-                  <a:lnTo>
-                    <a:pt x="5801424" y="841622"/>
-                  </a:lnTo>
-                  <a:lnTo>
-                    <a:pt x="5729802" y="817361"/>
-                  </a:lnTo>
-                  <a:lnTo>
-                    <a:pt x="5658179" y="791561"/>
-                  </a:lnTo>
-                  <a:lnTo>
-                    <a:pt x="5586557" y="764124"/>
-                  </a:lnTo>
-                  <a:lnTo>
-                    <a:pt x="5514934" y="734944"/>
-                  </a:lnTo>
-                  <a:lnTo>
-                    <a:pt x="5443311" y="703913"/>
-                  </a:lnTo>
-                  <a:lnTo>
-                    <a:pt x="5371689" y="670913"/>
-                  </a:lnTo>
-                  <a:lnTo>
-                    <a:pt x="5300066" y="635818"/>
-                  </a:lnTo>
-                  <a:lnTo>
-                    <a:pt x="5228444" y="598495"/>
-                  </a:lnTo>
-                  <a:lnTo>
-                    <a:pt x="5156821" y="558804"/>
-                  </a:lnTo>
-                  <a:lnTo>
-                    <a:pt x="5085199" y="516594"/>
-                  </a:lnTo>
-                  <a:lnTo>
-                    <a:pt x="5013576" y="471704"/>
-                  </a:lnTo>
-                  <a:lnTo>
-                    <a:pt x="4941954" y="423966"/>
-                  </a:lnTo>
-                  <a:lnTo>
-                    <a:pt x="4870331" y="392468"/>
-                  </a:lnTo>
-                  <a:lnTo>
-                    <a:pt x="4798709" y="387727"/>
-                  </a:lnTo>
-                  <a:lnTo>
-                    <a:pt x="4727086" y="382959"/>
-                  </a:lnTo>
-                  <a:lnTo>
-                    <a:pt x="4655464" y="378163"/>
-                  </a:lnTo>
-                  <a:lnTo>
-                    <a:pt x="4583841" y="373341"/>
-                  </a:lnTo>
-                  <a:lnTo>
-                    <a:pt x="4512219" y="368491"/>
-                  </a:lnTo>
-                  <a:lnTo>
-                    <a:pt x="4440596" y="363613"/>
-                  </a:lnTo>
-                  <a:lnTo>
-                    <a:pt x="4368974" y="358708"/>
-                  </a:lnTo>
-                  <a:lnTo>
-                    <a:pt x="4297351" y="353774"/>
-                  </a:lnTo>
-                  <a:lnTo>
-                    <a:pt x="4225729" y="348813"/>
-                  </a:lnTo>
-                  <a:lnTo>
-                    <a:pt x="4154106" y="343823"/>
-                  </a:lnTo>
-                  <a:lnTo>
-                    <a:pt x="4082483" y="338804"/>
-                  </a:lnTo>
-                  <a:lnTo>
-                    <a:pt x="4010861" y="333757"/>
-                  </a:lnTo>
-                  <a:lnTo>
-                    <a:pt x="3939238" y="328682"/>
-                  </a:lnTo>
-                  <a:lnTo>
-                    <a:pt x="3867616" y="323577"/>
-                  </a:lnTo>
-                  <a:lnTo>
-                    <a:pt x="3795993" y="318443"/>
-                  </a:lnTo>
-                  <a:lnTo>
-                    <a:pt x="3724371" y="313280"/>
-                  </a:lnTo>
-                  <a:lnTo>
-                    <a:pt x="3652748" y="308088"/>
-                  </a:lnTo>
-                  <a:lnTo>
-                    <a:pt x="3581126" y="302865"/>
-                  </a:lnTo>
-                  <a:lnTo>
-                    <a:pt x="3509503" y="297614"/>
-                  </a:lnTo>
-                  <a:lnTo>
-                    <a:pt x="3437881" y="292332"/>
-                  </a:lnTo>
-                  <a:lnTo>
-                    <a:pt x="3366258" y="287020"/>
-                  </a:lnTo>
-                  <a:lnTo>
-                    <a:pt x="3294636" y="281677"/>
-                  </a:lnTo>
-                  <a:lnTo>
-                    <a:pt x="3223013" y="276305"/>
-                  </a:lnTo>
-                  <a:lnTo>
-                    <a:pt x="3151391" y="270901"/>
-                  </a:lnTo>
-                  <a:lnTo>
-                    <a:pt x="3079768" y="265467"/>
-                  </a:lnTo>
-                  <a:lnTo>
-                    <a:pt x="3008146" y="260002"/>
-                  </a:lnTo>
-                  <a:lnTo>
-                    <a:pt x="2936523" y="254506"/>
-                  </a:lnTo>
-                  <a:lnTo>
-                    <a:pt x="2864901" y="248978"/>
-                  </a:lnTo>
-                  <a:lnTo>
-                    <a:pt x="2793278" y="243419"/>
-                  </a:lnTo>
-                  <a:lnTo>
-                    <a:pt x="2721655" y="237828"/>
-                  </a:lnTo>
-                  <a:lnTo>
-                    <a:pt x="2650033" y="232205"/>
-                  </a:lnTo>
-                  <a:lnTo>
-                    <a:pt x="2578410" y="226550"/>
-                  </a:lnTo>
-                  <a:lnTo>
-                    <a:pt x="2506788" y="220863"/>
-                  </a:lnTo>
-                  <a:lnTo>
-                    <a:pt x="2435165" y="215144"/>
-                  </a:lnTo>
-                  <a:lnTo>
-                    <a:pt x="2363543" y="209392"/>
-                  </a:lnTo>
-                  <a:lnTo>
-                    <a:pt x="2291920" y="203607"/>
-                  </a:lnTo>
-                  <a:lnTo>
-                    <a:pt x="2220298" y="197789"/>
-                  </a:lnTo>
-                  <a:lnTo>
-                    <a:pt x="2148675" y="191938"/>
-                  </a:lnTo>
-                  <a:lnTo>
-                    <a:pt x="2077053" y="186053"/>
-                  </a:lnTo>
-                  <a:lnTo>
-                    <a:pt x="2005430" y="180135"/>
-                  </a:lnTo>
-                  <a:lnTo>
-                    <a:pt x="1933808" y="174183"/>
-                  </a:lnTo>
-                  <a:lnTo>
-                    <a:pt x="1862185" y="168198"/>
-                  </a:lnTo>
-                  <a:lnTo>
-                    <a:pt x="1790563" y="162178"/>
-                  </a:lnTo>
-                  <a:lnTo>
-                    <a:pt x="1718940" y="156124"/>
-                  </a:lnTo>
-                  <a:lnTo>
-                    <a:pt x="1647318" y="150035"/>
-                  </a:lnTo>
-                  <a:lnTo>
-                    <a:pt x="1575695" y="143912"/>
-                  </a:lnTo>
-                  <a:lnTo>
-                    <a:pt x="1504073" y="137753"/>
-                  </a:lnTo>
-                  <a:lnTo>
-                    <a:pt x="1432450" y="131560"/>
-                  </a:lnTo>
-                  <a:lnTo>
-                    <a:pt x="1360827" y="125331"/>
-                  </a:lnTo>
-                  <a:lnTo>
-                    <a:pt x="1289205" y="119067"/>
-                  </a:lnTo>
-                  <a:lnTo>
-                    <a:pt x="1217582" y="112767"/>
-                  </a:lnTo>
-                  <a:lnTo>
-                    <a:pt x="1145960" y="106431"/>
-                  </a:lnTo>
-                  <a:lnTo>
-                    <a:pt x="1074337" y="100059"/>
-                  </a:lnTo>
-                  <a:lnTo>
-                    <a:pt x="1002715" y="93650"/>
-                  </a:lnTo>
-                  <a:lnTo>
-                    <a:pt x="931092" y="87205"/>
-                  </a:lnTo>
-                  <a:lnTo>
-                    <a:pt x="859470" y="80724"/>
-                  </a:lnTo>
-                  <a:lnTo>
-                    <a:pt x="787847" y="74205"/>
-                  </a:lnTo>
-                  <a:lnTo>
-                    <a:pt x="716225" y="67649"/>
-                  </a:lnTo>
-                  <a:lnTo>
-                    <a:pt x="644602" y="61056"/>
-                  </a:lnTo>
-                  <a:lnTo>
-                    <a:pt x="572980" y="54425"/>
-                  </a:lnTo>
-                  <a:lnTo>
-                    <a:pt x="501357" y="47757"/>
-                  </a:lnTo>
-                  <a:lnTo>
-                    <a:pt x="429735" y="41050"/>
-                  </a:lnTo>
-                  <a:lnTo>
-                    <a:pt x="358112" y="34305"/>
-                  </a:lnTo>
-                  <a:lnTo>
-                    <a:pt x="286490" y="27522"/>
-                  </a:lnTo>
-                  <a:lnTo>
-                    <a:pt x="214867" y="20700"/>
-                  </a:lnTo>
-                  <a:lnTo>
-                    <a:pt x="143245" y="13839"/>
-                  </a:lnTo>
-                  <a:lnTo>
-                    <a:pt x="71622" y="6939"/>
-                  </a:lnTo>
-                  <a:lnTo>
-                    <a:pt x="0" y="0"/>
+                    <a:pt x="7019007" y="685160"/>
+                  </a:lnTo>
+                  <a:lnTo>
+                    <a:pt x="6947385" y="676440"/>
+                  </a:lnTo>
+                  <a:lnTo>
+                    <a:pt x="6875762" y="667183"/>
+                  </a:lnTo>
+                  <a:lnTo>
+                    <a:pt x="6804139" y="657356"/>
+                  </a:lnTo>
+                  <a:lnTo>
+                    <a:pt x="6732517" y="646925"/>
+                  </a:lnTo>
+                  <a:lnTo>
+                    <a:pt x="6660894" y="635852"/>
+                  </a:lnTo>
+                  <a:lnTo>
+                    <a:pt x="6589272" y="624097"/>
+                  </a:lnTo>
+                  <a:lnTo>
+                    <a:pt x="6517649" y="611620"/>
+                  </a:lnTo>
+                  <a:lnTo>
+                    <a:pt x="6446027" y="598374"/>
+                  </a:lnTo>
+                  <a:lnTo>
+                    <a:pt x="6374404" y="584313"/>
+                  </a:lnTo>
+                  <a:lnTo>
+                    <a:pt x="6302782" y="569387"/>
+                  </a:lnTo>
+                  <a:lnTo>
+                    <a:pt x="6231159" y="553543"/>
+                  </a:lnTo>
+                  <a:lnTo>
+                    <a:pt x="6159537" y="536724"/>
+                  </a:lnTo>
+                  <a:lnTo>
+                    <a:pt x="6087914" y="518869"/>
+                  </a:lnTo>
+                  <a:lnTo>
+                    <a:pt x="6016292" y="499916"/>
+                  </a:lnTo>
+                  <a:lnTo>
+                    <a:pt x="5944669" y="479797"/>
+                  </a:lnTo>
+                  <a:lnTo>
+                    <a:pt x="5873047" y="458440"/>
+                  </a:lnTo>
+                  <a:lnTo>
+                    <a:pt x="5801424" y="435769"/>
+                  </a:lnTo>
+                  <a:lnTo>
+                    <a:pt x="5729802" y="411702"/>
+                  </a:lnTo>
+                  <a:lnTo>
+                    <a:pt x="5658179" y="386155"/>
+                  </a:lnTo>
+                  <a:lnTo>
+                    <a:pt x="5586557" y="359036"/>
+                  </a:lnTo>
+                  <a:lnTo>
+                    <a:pt x="5514934" y="330248"/>
+                  </a:lnTo>
+                  <a:lnTo>
+                    <a:pt x="5443311" y="299688"/>
+                  </a:lnTo>
+                  <a:lnTo>
+                    <a:pt x="5371689" y="267248"/>
+                  </a:lnTo>
+                  <a:lnTo>
+                    <a:pt x="5300066" y="232812"/>
+                  </a:lnTo>
+                  <a:lnTo>
+                    <a:pt x="5228444" y="196257"/>
+                  </a:lnTo>
+                  <a:lnTo>
+                    <a:pt x="5156821" y="157452"/>
+                  </a:lnTo>
+                  <a:lnTo>
+                    <a:pt x="5085199" y="116260"/>
+                  </a:lnTo>
+                  <a:lnTo>
+                    <a:pt x="5013576" y="72533"/>
+                  </a:lnTo>
+                  <a:lnTo>
+                    <a:pt x="4941954" y="26115"/>
+                  </a:lnTo>
+                  <a:lnTo>
+                    <a:pt x="4870331" y="0"/>
+                  </a:lnTo>
+                  <a:lnTo>
+                    <a:pt x="4798709" y="6269"/>
+                  </a:lnTo>
+                  <a:lnTo>
+                    <a:pt x="4727086" y="12492"/>
+                  </a:lnTo>
+                  <a:lnTo>
+                    <a:pt x="4655464" y="18667"/>
+                  </a:lnTo>
+                  <a:lnTo>
+                    <a:pt x="4583841" y="24795"/>
+                  </a:lnTo>
+                  <a:lnTo>
+                    <a:pt x="4512219" y="30877"/>
+                  </a:lnTo>
+                  <a:lnTo>
+                    <a:pt x="4440596" y="36913"/>
+                  </a:lnTo>
+                  <a:lnTo>
+                    <a:pt x="4368974" y="42903"/>
+                  </a:lnTo>
+                  <a:lnTo>
+                    <a:pt x="4297351" y="48847"/>
+                  </a:lnTo>
+                  <a:lnTo>
+                    <a:pt x="4225729" y="54747"/>
+                  </a:lnTo>
+                  <a:lnTo>
+                    <a:pt x="4154106" y="60602"/>
+                  </a:lnTo>
+                  <a:lnTo>
+                    <a:pt x="4082483" y="66412"/>
+                  </a:lnTo>
+                  <a:lnTo>
+                    <a:pt x="4010861" y="72178"/>
+                  </a:lnTo>
+                  <a:lnTo>
+                    <a:pt x="3939238" y="77901"/>
+                  </a:lnTo>
+                  <a:lnTo>
+                    <a:pt x="3867616" y="83580"/>
+                  </a:lnTo>
+                  <a:lnTo>
+                    <a:pt x="3795993" y="89216"/>
+                  </a:lnTo>
+                  <a:lnTo>
+                    <a:pt x="3724371" y="94809"/>
+                  </a:lnTo>
+                  <a:lnTo>
+                    <a:pt x="3652748" y="100360"/>
+                  </a:lnTo>
+                  <a:lnTo>
+                    <a:pt x="3581126" y="105869"/>
+                  </a:lnTo>
+                  <a:lnTo>
+                    <a:pt x="3509503" y="111336"/>
+                  </a:lnTo>
+                  <a:lnTo>
+                    <a:pt x="3437881" y="116762"/>
+                  </a:lnTo>
+                  <a:lnTo>
+                    <a:pt x="3366258" y="122147"/>
+                  </a:lnTo>
+                  <a:lnTo>
+                    <a:pt x="3294636" y="127490"/>
+                  </a:lnTo>
+                  <a:lnTo>
+                    <a:pt x="3223013" y="132793"/>
+                  </a:lnTo>
+                  <a:lnTo>
+                    <a:pt x="3151391" y="138056"/>
+                  </a:lnTo>
+                  <a:lnTo>
+                    <a:pt x="3079768" y="143279"/>
+                  </a:lnTo>
+                  <a:lnTo>
+                    <a:pt x="3008146" y="148463"/>
+                  </a:lnTo>
+                  <a:lnTo>
+                    <a:pt x="2936523" y="153607"/>
+                  </a:lnTo>
+                  <a:lnTo>
+                    <a:pt x="2864901" y="158712"/>
+                  </a:lnTo>
+                  <a:lnTo>
+                    <a:pt x="2793278" y="163778"/>
+                  </a:lnTo>
+                  <a:lnTo>
+                    <a:pt x="2721655" y="168807"/>
+                  </a:lnTo>
+                  <a:lnTo>
+                    <a:pt x="2650033" y="173796"/>
+                  </a:lnTo>
+                  <a:lnTo>
+                    <a:pt x="2578410" y="178748"/>
+                  </a:lnTo>
+                  <a:lnTo>
+                    <a:pt x="2506788" y="183663"/>
+                  </a:lnTo>
+                  <a:lnTo>
+                    <a:pt x="2435165" y="188540"/>
+                  </a:lnTo>
+                  <a:lnTo>
+                    <a:pt x="2363543" y="193380"/>
+                  </a:lnTo>
+                  <a:lnTo>
+                    <a:pt x="2291920" y="198184"/>
+                  </a:lnTo>
+                  <a:lnTo>
+                    <a:pt x="2220298" y="202951"/>
+                  </a:lnTo>
+                  <a:lnTo>
+                    <a:pt x="2148675" y="207682"/>
+                  </a:lnTo>
+                  <a:lnTo>
+                    <a:pt x="2077053" y="212377"/>
+                  </a:lnTo>
+                  <a:lnTo>
+                    <a:pt x="2005430" y="217037"/>
+                  </a:lnTo>
+                  <a:lnTo>
+                    <a:pt x="1933808" y="221661"/>
+                  </a:lnTo>
+                  <a:lnTo>
+                    <a:pt x="1862185" y="226250"/>
+                  </a:lnTo>
+                  <a:lnTo>
+                    <a:pt x="1790563" y="230804"/>
+                  </a:lnTo>
+                  <a:lnTo>
+                    <a:pt x="1718940" y="235324"/>
+                  </a:lnTo>
+                  <a:lnTo>
+                    <a:pt x="1647318" y="239809"/>
+                  </a:lnTo>
+                  <a:lnTo>
+                    <a:pt x="1575695" y="244261"/>
+                  </a:lnTo>
+                  <a:lnTo>
+                    <a:pt x="1504073" y="248679"/>
+                  </a:lnTo>
+                  <a:lnTo>
+                    <a:pt x="1432450" y="253063"/>
+                  </a:lnTo>
+                  <a:lnTo>
+                    <a:pt x="1360827" y="257414"/>
+                  </a:lnTo>
+                  <a:lnTo>
+                    <a:pt x="1289205" y="261732"/>
+                  </a:lnTo>
+                  <a:lnTo>
+                    <a:pt x="1217582" y="266017"/>
+                  </a:lnTo>
+                  <a:lnTo>
+                    <a:pt x="1145960" y="270270"/>
+                  </a:lnTo>
+                  <a:lnTo>
+                    <a:pt x="1074337" y="274491"/>
+                  </a:lnTo>
+                  <a:lnTo>
+                    <a:pt x="1002715" y="278679"/>
+                  </a:lnTo>
+                  <a:lnTo>
+                    <a:pt x="931092" y="282836"/>
+                  </a:lnTo>
+                  <a:lnTo>
+                    <a:pt x="859470" y="286961"/>
+                  </a:lnTo>
+                  <a:lnTo>
+                    <a:pt x="787847" y="291055"/>
+                  </a:lnTo>
+                  <a:lnTo>
+                    <a:pt x="716225" y="295118"/>
+                  </a:lnTo>
+                  <a:lnTo>
+                    <a:pt x="644602" y="299150"/>
+                  </a:lnTo>
+                  <a:lnTo>
+                    <a:pt x="572980" y="303152"/>
+                  </a:lnTo>
+                  <a:lnTo>
+                    <a:pt x="501357" y="307123"/>
+                  </a:lnTo>
+                  <a:lnTo>
+                    <a:pt x="429735" y="311064"/>
+                  </a:lnTo>
+                  <a:lnTo>
+                    <a:pt x="358112" y="314975"/>
+                  </a:lnTo>
+                  <a:lnTo>
+                    <a:pt x="286490" y="318857"/>
+                  </a:lnTo>
+                  <a:lnTo>
+                    <a:pt x="214867" y="322709"/>
+                  </a:lnTo>
+                  <a:lnTo>
+                    <a:pt x="143245" y="326532"/>
+                  </a:lnTo>
+                  <a:lnTo>
+                    <a:pt x="71622" y="330326"/>
+                  </a:lnTo>
+                  <a:lnTo>
+                    <a:pt x="0" y="334091"/>
                   </a:lnTo>
                 </a:path>
               </a:pathLst>
@@ -4016,237 +4022,273 @@
           </p:nvSpPr>
           <p:spPr>
             <a:xfrm>
-              <a:off x="3013931" y="2073503"/>
-              <a:ext cx="5248748" cy="3187072"/>
+              <a:off x="2126574" y="2073503"/>
+              <a:ext cx="6136104" cy="3109893"/>
             </a:xfrm>
             <a:custGeom>
               <a:avLst/>
               <a:pathLst>
-                <a:path w="5248748" h="3187072">
+                <a:path w="6136104" h="3109893">
                   <a:moveTo>
                     <a:pt x="0" y="0"/>
                   </a:moveTo>
                   <a:lnTo>
-                    <a:pt x="20303" y="33433"/>
-                  </a:lnTo>
-                  <a:lnTo>
-                    <a:pt x="91926" y="147474"/>
-                  </a:lnTo>
-                  <a:lnTo>
-                    <a:pt x="163548" y="257745"/>
-                  </a:lnTo>
-                  <a:lnTo>
-                    <a:pt x="235171" y="364371"/>
-                  </a:lnTo>
-                  <a:lnTo>
-                    <a:pt x="306793" y="467473"/>
-                  </a:lnTo>
-                  <a:lnTo>
-                    <a:pt x="378416" y="567168"/>
-                  </a:lnTo>
-                  <a:lnTo>
-                    <a:pt x="450038" y="663567"/>
-                  </a:lnTo>
-                  <a:lnTo>
-                    <a:pt x="521661" y="756780"/>
-                  </a:lnTo>
-                  <a:lnTo>
-                    <a:pt x="593284" y="846912"/>
-                  </a:lnTo>
-                  <a:lnTo>
-                    <a:pt x="664906" y="934066"/>
-                  </a:lnTo>
-                  <a:lnTo>
-                    <a:pt x="736529" y="1018338"/>
-                  </a:lnTo>
-                  <a:lnTo>
-                    <a:pt x="808151" y="1099825"/>
-                  </a:lnTo>
-                  <a:lnTo>
-                    <a:pt x="879774" y="1178619"/>
-                  </a:lnTo>
-                  <a:lnTo>
-                    <a:pt x="951396" y="1254809"/>
-                  </a:lnTo>
-                  <a:lnTo>
-                    <a:pt x="1023019" y="1328480"/>
-                  </a:lnTo>
-                  <a:lnTo>
-                    <a:pt x="1094641" y="1399716"/>
-                  </a:lnTo>
-                  <a:lnTo>
-                    <a:pt x="1166264" y="1468598"/>
-                  </a:lnTo>
-                  <a:lnTo>
-                    <a:pt x="1237886" y="1535203"/>
-                  </a:lnTo>
-                  <a:lnTo>
-                    <a:pt x="1309509" y="1599607"/>
-                  </a:lnTo>
-                  <a:lnTo>
-                    <a:pt x="1381131" y="1661882"/>
-                  </a:lnTo>
-                  <a:lnTo>
-                    <a:pt x="1452754" y="1722098"/>
-                  </a:lnTo>
-                  <a:lnTo>
-                    <a:pt x="1524376" y="1780324"/>
-                  </a:lnTo>
-                  <a:lnTo>
-                    <a:pt x="1595999" y="1836626"/>
-                  </a:lnTo>
-                  <a:lnTo>
-                    <a:pt x="1667621" y="1891067"/>
-                  </a:lnTo>
-                  <a:lnTo>
-                    <a:pt x="1739244" y="1943709"/>
-                  </a:lnTo>
-                  <a:lnTo>
-                    <a:pt x="1810866" y="1994610"/>
-                  </a:lnTo>
-                  <a:lnTo>
-                    <a:pt x="1882489" y="2043830"/>
-                  </a:lnTo>
-                  <a:lnTo>
-                    <a:pt x="1954112" y="2091422"/>
-                  </a:lnTo>
-                  <a:lnTo>
-                    <a:pt x="2025734" y="2137441"/>
-                  </a:lnTo>
-                  <a:lnTo>
-                    <a:pt x="2097357" y="2181940"/>
-                  </a:lnTo>
-                  <a:lnTo>
-                    <a:pt x="2168979" y="2224967"/>
-                  </a:lnTo>
-                  <a:lnTo>
-                    <a:pt x="2240602" y="2266573"/>
-                  </a:lnTo>
-                  <a:lnTo>
-                    <a:pt x="2312224" y="2306803"/>
-                  </a:lnTo>
-                  <a:lnTo>
-                    <a:pt x="2383847" y="2345703"/>
-                  </a:lnTo>
-                  <a:lnTo>
-                    <a:pt x="2455469" y="2383318"/>
-                  </a:lnTo>
-                  <a:lnTo>
-                    <a:pt x="2527092" y="2419690"/>
-                  </a:lnTo>
-                  <a:lnTo>
-                    <a:pt x="2598714" y="2454859"/>
-                  </a:lnTo>
-                  <a:lnTo>
-                    <a:pt x="2670337" y="2488866"/>
-                  </a:lnTo>
-                  <a:lnTo>
-                    <a:pt x="2741959" y="2521749"/>
-                  </a:lnTo>
-                  <a:lnTo>
-                    <a:pt x="2813582" y="2553545"/>
-                  </a:lnTo>
-                  <a:lnTo>
-                    <a:pt x="2885204" y="2584290"/>
-                  </a:lnTo>
-                  <a:lnTo>
-                    <a:pt x="2956827" y="2614019"/>
-                  </a:lnTo>
-                  <a:lnTo>
-                    <a:pt x="3028449" y="2642766"/>
-                  </a:lnTo>
-                  <a:lnTo>
-                    <a:pt x="3100072" y="2670562"/>
-                  </a:lnTo>
-                  <a:lnTo>
-                    <a:pt x="3171694" y="2697440"/>
-                  </a:lnTo>
-                  <a:lnTo>
-                    <a:pt x="3243317" y="2723429"/>
-                  </a:lnTo>
-                  <a:lnTo>
-                    <a:pt x="3314940" y="2748559"/>
-                  </a:lnTo>
-                  <a:lnTo>
-                    <a:pt x="3386562" y="2772859"/>
-                  </a:lnTo>
-                  <a:lnTo>
-                    <a:pt x="3458185" y="2796355"/>
-                  </a:lnTo>
-                  <a:lnTo>
-                    <a:pt x="3529807" y="2819075"/>
-                  </a:lnTo>
-                  <a:lnTo>
-                    <a:pt x="3601430" y="2841044"/>
-                  </a:lnTo>
-                  <a:lnTo>
-                    <a:pt x="3673052" y="2862286"/>
-                  </a:lnTo>
-                  <a:lnTo>
-                    <a:pt x="3744675" y="2882827"/>
-                  </a:lnTo>
-                  <a:lnTo>
-                    <a:pt x="3816297" y="2902689"/>
-                  </a:lnTo>
-                  <a:lnTo>
-                    <a:pt x="3887920" y="2921894"/>
-                  </a:lnTo>
-                  <a:lnTo>
-                    <a:pt x="3959542" y="2940464"/>
-                  </a:lnTo>
-                  <a:lnTo>
-                    <a:pt x="4031165" y="2958421"/>
-                  </a:lnTo>
-                  <a:lnTo>
-                    <a:pt x="4102787" y="2975784"/>
-                  </a:lnTo>
-                  <a:lnTo>
-                    <a:pt x="4174410" y="2992573"/>
-                  </a:lnTo>
-                  <a:lnTo>
-                    <a:pt x="4246032" y="3008808"/>
-                  </a:lnTo>
-                  <a:lnTo>
-                    <a:pt x="4317655" y="3024506"/>
-                  </a:lnTo>
-                  <a:lnTo>
-                    <a:pt x="4389277" y="3039684"/>
-                  </a:lnTo>
-                  <a:lnTo>
-                    <a:pt x="4460900" y="3054362"/>
-                  </a:lnTo>
-                  <a:lnTo>
-                    <a:pt x="4532522" y="3068554"/>
-                  </a:lnTo>
-                  <a:lnTo>
-                    <a:pt x="4604145" y="3082277"/>
-                  </a:lnTo>
-                  <a:lnTo>
-                    <a:pt x="4675768" y="3095546"/>
-                  </a:lnTo>
-                  <a:lnTo>
-                    <a:pt x="4747390" y="3108377"/>
-                  </a:lnTo>
-                  <a:lnTo>
-                    <a:pt x="4819013" y="3120784"/>
-                  </a:lnTo>
-                  <a:lnTo>
-                    <a:pt x="4890635" y="3132781"/>
-                  </a:lnTo>
-                  <a:lnTo>
-                    <a:pt x="4962258" y="3144381"/>
-                  </a:lnTo>
-                  <a:lnTo>
-                    <a:pt x="5033880" y="3155598"/>
-                  </a:lnTo>
-                  <a:lnTo>
-                    <a:pt x="5105503" y="3166444"/>
-                  </a:lnTo>
-                  <a:lnTo>
-                    <a:pt x="5177125" y="3176931"/>
-                  </a:lnTo>
-                  <a:lnTo>
-                    <a:pt x="5248748" y="3187072"/>
+                    <a:pt x="48190" y="60787"/>
+                  </a:lnTo>
+                  <a:lnTo>
+                    <a:pt x="119812" y="148810"/>
+                  </a:lnTo>
+                  <a:lnTo>
+                    <a:pt x="191435" y="234569"/>
+                  </a:lnTo>
+                  <a:lnTo>
+                    <a:pt x="263057" y="318122"/>
+                  </a:lnTo>
+                  <a:lnTo>
+                    <a:pt x="334680" y="399527"/>
+                  </a:lnTo>
+                  <a:lnTo>
+                    <a:pt x="406302" y="478839"/>
+                  </a:lnTo>
+                  <a:lnTo>
+                    <a:pt x="477925" y="556111"/>
+                  </a:lnTo>
+                  <a:lnTo>
+                    <a:pt x="549547" y="631396"/>
+                  </a:lnTo>
+                  <a:lnTo>
+                    <a:pt x="621170" y="704745"/>
+                  </a:lnTo>
+                  <a:lnTo>
+                    <a:pt x="692792" y="776208"/>
+                  </a:lnTo>
+                  <a:lnTo>
+                    <a:pt x="764415" y="845833"/>
+                  </a:lnTo>
+                  <a:lnTo>
+                    <a:pt x="836037" y="913668"/>
+                  </a:lnTo>
+                  <a:lnTo>
+                    <a:pt x="907660" y="979758"/>
+                  </a:lnTo>
+                  <a:lnTo>
+                    <a:pt x="979282" y="1044149"/>
+                  </a:lnTo>
+                  <a:lnTo>
+                    <a:pt x="1050905" y="1106884"/>
+                  </a:lnTo>
+                  <a:lnTo>
+                    <a:pt x="1122527" y="1168006"/>
+                  </a:lnTo>
+                  <a:lnTo>
+                    <a:pt x="1194150" y="1227556"/>
+                  </a:lnTo>
+                  <a:lnTo>
+                    <a:pt x="1265772" y="1285575"/>
+                  </a:lnTo>
+                  <a:lnTo>
+                    <a:pt x="1337395" y="1342101"/>
+                  </a:lnTo>
+                  <a:lnTo>
+                    <a:pt x="1409018" y="1397174"/>
+                  </a:lnTo>
+                  <a:lnTo>
+                    <a:pt x="1480640" y="1450831"/>
+                  </a:lnTo>
+                  <a:lnTo>
+                    <a:pt x="1552263" y="1503108"/>
+                  </a:lnTo>
+                  <a:lnTo>
+                    <a:pt x="1623885" y="1554041"/>
+                  </a:lnTo>
+                  <a:lnTo>
+                    <a:pt x="1695508" y="1603664"/>
+                  </a:lnTo>
+                  <a:lnTo>
+                    <a:pt x="1767130" y="1652011"/>
+                  </a:lnTo>
+                  <a:lnTo>
+                    <a:pt x="1838753" y="1699114"/>
+                  </a:lnTo>
+                  <a:lnTo>
+                    <a:pt x="1910375" y="1745007"/>
+                  </a:lnTo>
+                  <a:lnTo>
+                    <a:pt x="1981998" y="1789719"/>
+                  </a:lnTo>
+                  <a:lnTo>
+                    <a:pt x="2053620" y="1833281"/>
+                  </a:lnTo>
+                  <a:lnTo>
+                    <a:pt x="2125243" y="1875724"/>
+                  </a:lnTo>
+                  <a:lnTo>
+                    <a:pt x="2196865" y="1917075"/>
+                  </a:lnTo>
+                  <a:lnTo>
+                    <a:pt x="2268488" y="1957362"/>
+                  </a:lnTo>
+                  <a:lnTo>
+                    <a:pt x="2340110" y="1996613"/>
+                  </a:lnTo>
+                  <a:lnTo>
+                    <a:pt x="2411733" y="2034856"/>
+                  </a:lnTo>
+                  <a:lnTo>
+                    <a:pt x="2483355" y="2072114"/>
+                  </a:lnTo>
+                  <a:lnTo>
+                    <a:pt x="2554978" y="2108415"/>
+                  </a:lnTo>
+                  <a:lnTo>
+                    <a:pt x="2626600" y="2143782"/>
+                  </a:lnTo>
+                  <a:lnTo>
+                    <a:pt x="2698223" y="2178239"/>
+                  </a:lnTo>
+                  <a:lnTo>
+                    <a:pt x="2769846" y="2211811"/>
+                  </a:lnTo>
+                  <a:lnTo>
+                    <a:pt x="2841468" y="2244519"/>
+                  </a:lnTo>
+                  <a:lnTo>
+                    <a:pt x="2913091" y="2276386"/>
+                  </a:lnTo>
+                  <a:lnTo>
+                    <a:pt x="2984713" y="2307434"/>
+                  </a:lnTo>
+                  <a:lnTo>
+                    <a:pt x="3056336" y="2337683"/>
+                  </a:lnTo>
+                  <a:lnTo>
+                    <a:pt x="3127958" y="2367155"/>
+                  </a:lnTo>
+                  <a:lnTo>
+                    <a:pt x="3199581" y="2395868"/>
+                  </a:lnTo>
+                  <a:lnTo>
+                    <a:pt x="3271203" y="2423843"/>
+                  </a:lnTo>
+                  <a:lnTo>
+                    <a:pt x="3342826" y="2451099"/>
+                  </a:lnTo>
+                  <a:lnTo>
+                    <a:pt x="3414448" y="2477654"/>
+                  </a:lnTo>
+                  <a:lnTo>
+                    <a:pt x="3486071" y="2503526"/>
+                  </a:lnTo>
+                  <a:lnTo>
+                    <a:pt x="3557693" y="2528732"/>
+                  </a:lnTo>
+                  <a:lnTo>
+                    <a:pt x="3629316" y="2553291"/>
+                  </a:lnTo>
+                  <a:lnTo>
+                    <a:pt x="3700938" y="2577218"/>
+                  </a:lnTo>
+                  <a:lnTo>
+                    <a:pt x="3772561" y="2600530"/>
+                  </a:lnTo>
+                  <a:lnTo>
+                    <a:pt x="3844183" y="2623242"/>
+                  </a:lnTo>
+                  <a:lnTo>
+                    <a:pt x="3915806" y="2645370"/>
+                  </a:lnTo>
+                  <a:lnTo>
+                    <a:pt x="3987428" y="2666929"/>
+                  </a:lnTo>
+                  <a:lnTo>
+                    <a:pt x="4059051" y="2687934"/>
+                  </a:lnTo>
+                  <a:lnTo>
+                    <a:pt x="4130673" y="2708398"/>
+                  </a:lnTo>
+                  <a:lnTo>
+                    <a:pt x="4202296" y="2728337"/>
+                  </a:lnTo>
+                  <a:lnTo>
+                    <a:pt x="4273919" y="2747762"/>
+                  </a:lnTo>
+                  <a:lnTo>
+                    <a:pt x="4345541" y="2766688"/>
+                  </a:lnTo>
+                  <a:lnTo>
+                    <a:pt x="4417164" y="2785128"/>
+                  </a:lnTo>
+                  <a:lnTo>
+                    <a:pt x="4488786" y="2803093"/>
+                  </a:lnTo>
+                  <a:lnTo>
+                    <a:pt x="4560409" y="2820596"/>
+                  </a:lnTo>
+                  <a:lnTo>
+                    <a:pt x="4632031" y="2837649"/>
+                  </a:lnTo>
+                  <a:lnTo>
+                    <a:pt x="4703654" y="2854264"/>
+                  </a:lnTo>
+                  <a:lnTo>
+                    <a:pt x="4775276" y="2870451"/>
+                  </a:lnTo>
+                  <a:lnTo>
+                    <a:pt x="4846899" y="2886222"/>
+                  </a:lnTo>
+                  <a:lnTo>
+                    <a:pt x="4918521" y="2901588"/>
+                  </a:lnTo>
+                  <a:lnTo>
+                    <a:pt x="4990144" y="2916558"/>
+                  </a:lnTo>
+                  <a:lnTo>
+                    <a:pt x="5061766" y="2931144"/>
+                  </a:lnTo>
+                  <a:lnTo>
+                    <a:pt x="5133389" y="2945354"/>
+                  </a:lnTo>
+                  <a:lnTo>
+                    <a:pt x="5205011" y="2959199"/>
+                  </a:lnTo>
+                  <a:lnTo>
+                    <a:pt x="5276634" y="2972688"/>
+                  </a:lnTo>
+                  <a:lnTo>
+                    <a:pt x="5348256" y="2985830"/>
+                  </a:lnTo>
+                  <a:lnTo>
+                    <a:pt x="5419879" y="2998634"/>
+                  </a:lnTo>
+                  <a:lnTo>
+                    <a:pt x="5491501" y="3011109"/>
+                  </a:lnTo>
+                  <a:lnTo>
+                    <a:pt x="5563124" y="3023263"/>
+                  </a:lnTo>
+                  <a:lnTo>
+                    <a:pt x="5634747" y="3035104"/>
+                  </a:lnTo>
+                  <a:lnTo>
+                    <a:pt x="5706369" y="3046641"/>
+                  </a:lnTo>
+                  <a:lnTo>
+                    <a:pt x="5777992" y="3057881"/>
+                  </a:lnTo>
+                  <a:lnTo>
+                    <a:pt x="5849614" y="3068833"/>
+                  </a:lnTo>
+                  <a:lnTo>
+                    <a:pt x="5921237" y="3079502"/>
+                  </a:lnTo>
+                  <a:lnTo>
+                    <a:pt x="5992859" y="3089898"/>
+                  </a:lnTo>
+                  <a:lnTo>
+                    <a:pt x="6064482" y="3100026"/>
+                  </a:lnTo>
+                  <a:lnTo>
+                    <a:pt x="6136104" y="3109893"/>
                   </a:lnTo>
                 </a:path>
               </a:pathLst>
@@ -4986,7 +5028,7 @@
                   <a:latin typeface="Helvetica"/>
                   <a:cs typeface="Helvetica"/>
                 </a:rPr>
-                <a:t>subHR per 1 mL/min: 0.96 (0.92-0.99)  |  per IQR (Δ = 18.2): 0.45 (0.24-0.87)  |  IQR: [-11.5, 6.7]</a:t>
+                <a:t>subHR per 1 mL/min: 0.97 (0.93-1.01)  |  per IQR (Δ = 18.2): 0.54 (0.25-1.20)  |  IQR: [-11.5, 6.7]</a:t>
               </a:r>
             </a:p>
           </p:txBody>

--- a/docs/plots/carbo/jx_carbo_linsubhr_egfrdisc_anemia3.pptx
+++ b/docs/plots/carbo/jx_carbo_linsubhr_egfrdisc_anemia3.pptx
@@ -3003,479 +3003,482 @@
           <p:spPr>
             <a:xfrm>
               <a:off x="1172049" y="2073503"/>
-              <a:ext cx="7090630" cy="3350245"/>
+              <a:ext cx="7090630" cy="3339135"/>
             </a:xfrm>
             <a:custGeom>
               <a:avLst/>
               <a:pathLst>
-                <a:path w="7090630" h="3350245">
+                <a:path w="7090630" h="3339135">
                   <a:moveTo>
-                    <a:pt x="3178969" y="0"/>
+                    <a:pt x="3100109" y="0"/>
                   </a:moveTo>
                   <a:lnTo>
-                    <a:pt x="3223013" y="127019"/>
-                  </a:lnTo>
-                  <a:lnTo>
-                    <a:pt x="3294636" y="321598"/>
-                  </a:lnTo>
-                  <a:lnTo>
-                    <a:pt x="3366258" y="504898"/>
-                  </a:lnTo>
-                  <a:lnTo>
-                    <a:pt x="3437881" y="677573"/>
-                  </a:lnTo>
-                  <a:lnTo>
-                    <a:pt x="3509503" y="840238"/>
-                  </a:lnTo>
-                  <a:lnTo>
-                    <a:pt x="3581126" y="993474"/>
-                  </a:lnTo>
-                  <a:lnTo>
-                    <a:pt x="3652748" y="1137828"/>
-                  </a:lnTo>
-                  <a:lnTo>
-                    <a:pt x="3724371" y="1273814"/>
-                  </a:lnTo>
-                  <a:lnTo>
-                    <a:pt x="3795993" y="1401917"/>
-                  </a:lnTo>
-                  <a:lnTo>
-                    <a:pt x="3867616" y="1522594"/>
-                  </a:lnTo>
-                  <a:lnTo>
-                    <a:pt x="3939238" y="1636276"/>
-                  </a:lnTo>
-                  <a:lnTo>
-                    <a:pt x="4010861" y="1743369"/>
-                  </a:lnTo>
-                  <a:lnTo>
-                    <a:pt x="4082483" y="1844253"/>
-                  </a:lnTo>
-                  <a:lnTo>
-                    <a:pt x="4154106" y="1939289"/>
-                  </a:lnTo>
-                  <a:lnTo>
-                    <a:pt x="4225729" y="2028817"/>
-                  </a:lnTo>
-                  <a:lnTo>
-                    <a:pt x="4297351" y="2113155"/>
-                  </a:lnTo>
-                  <a:lnTo>
-                    <a:pt x="4368974" y="2192604"/>
-                  </a:lnTo>
-                  <a:lnTo>
-                    <a:pt x="4440596" y="2267447"/>
-                  </a:lnTo>
-                  <a:lnTo>
-                    <a:pt x="4512219" y="2337953"/>
-                  </a:lnTo>
-                  <a:lnTo>
-                    <a:pt x="4583841" y="2404371"/>
-                  </a:lnTo>
-                  <a:lnTo>
-                    <a:pt x="4655464" y="2466939"/>
-                  </a:lnTo>
-                  <a:lnTo>
-                    <a:pt x="4727086" y="2525880"/>
-                  </a:lnTo>
-                  <a:lnTo>
-                    <a:pt x="4798709" y="2581405"/>
-                  </a:lnTo>
-                  <a:lnTo>
-                    <a:pt x="4870331" y="2633711"/>
-                  </a:lnTo>
-                  <a:lnTo>
-                    <a:pt x="4941954" y="2650551"/>
-                  </a:lnTo>
-                  <a:lnTo>
-                    <a:pt x="5013576" y="2644185"/>
-                  </a:lnTo>
-                  <a:lnTo>
-                    <a:pt x="5085199" y="2637770"/>
-                  </a:lnTo>
-                  <a:lnTo>
-                    <a:pt x="5156821" y="2631307"/>
-                  </a:lnTo>
-                  <a:lnTo>
-                    <a:pt x="5228444" y="2624794"/>
-                  </a:lnTo>
-                  <a:lnTo>
-                    <a:pt x="5300066" y="2618231"/>
-                  </a:lnTo>
-                  <a:lnTo>
-                    <a:pt x="5371689" y="2611618"/>
-                  </a:lnTo>
-                  <a:lnTo>
-                    <a:pt x="5443311" y="2604954"/>
-                  </a:lnTo>
-                  <a:lnTo>
-                    <a:pt x="5514934" y="2598240"/>
-                  </a:lnTo>
-                  <a:lnTo>
-                    <a:pt x="5586557" y="2591474"/>
-                  </a:lnTo>
-                  <a:lnTo>
-                    <a:pt x="5658179" y="2584657"/>
-                  </a:lnTo>
-                  <a:lnTo>
-                    <a:pt x="5729802" y="2577787"/>
-                  </a:lnTo>
-                  <a:lnTo>
-                    <a:pt x="5801424" y="2570865"/>
-                  </a:lnTo>
-                  <a:lnTo>
-                    <a:pt x="5873047" y="2563890"/>
-                  </a:lnTo>
-                  <a:lnTo>
-                    <a:pt x="5944669" y="2556862"/>
-                  </a:lnTo>
-                  <a:lnTo>
-                    <a:pt x="6016292" y="2549780"/>
-                  </a:lnTo>
-                  <a:lnTo>
-                    <a:pt x="6087914" y="2542644"/>
-                  </a:lnTo>
-                  <a:lnTo>
-                    <a:pt x="6159537" y="2535454"/>
-                  </a:lnTo>
-                  <a:lnTo>
-                    <a:pt x="6231159" y="2528208"/>
-                  </a:lnTo>
-                  <a:lnTo>
-                    <a:pt x="6302782" y="2520908"/>
-                  </a:lnTo>
-                  <a:lnTo>
-                    <a:pt x="6374404" y="2513551"/>
-                  </a:lnTo>
-                  <a:lnTo>
-                    <a:pt x="6446027" y="2506138"/>
-                  </a:lnTo>
-                  <a:lnTo>
-                    <a:pt x="6517649" y="2498669"/>
-                  </a:lnTo>
-                  <a:lnTo>
-                    <a:pt x="6589272" y="2491142"/>
-                  </a:lnTo>
-                  <a:lnTo>
-                    <a:pt x="6660894" y="2483558"/>
-                  </a:lnTo>
-                  <a:lnTo>
-                    <a:pt x="6732517" y="2475916"/>
-                  </a:lnTo>
-                  <a:lnTo>
-                    <a:pt x="6804139" y="2468216"/>
-                  </a:lnTo>
-                  <a:lnTo>
-                    <a:pt x="6875762" y="2460457"/>
-                  </a:lnTo>
-                  <a:lnTo>
-                    <a:pt x="6947385" y="2452638"/>
-                  </a:lnTo>
-                  <a:lnTo>
-                    <a:pt x="7019007" y="2444760"/>
-                  </a:lnTo>
-                  <a:lnTo>
-                    <a:pt x="7090630" y="2436822"/>
-                  </a:lnTo>
-                  <a:lnTo>
-                    <a:pt x="7090630" y="3350245"/>
-                  </a:lnTo>
-                  <a:lnTo>
-                    <a:pt x="7019007" y="3342030"/>
-                  </a:lnTo>
-                  <a:lnTo>
-                    <a:pt x="6947385" y="3333309"/>
-                  </a:lnTo>
-                  <a:lnTo>
-                    <a:pt x="6875762" y="3324052"/>
-                  </a:lnTo>
-                  <a:lnTo>
-                    <a:pt x="6804139" y="3314226"/>
-                  </a:lnTo>
-                  <a:lnTo>
-                    <a:pt x="6732517" y="3303795"/>
-                  </a:lnTo>
-                  <a:lnTo>
-                    <a:pt x="6660894" y="3292721"/>
-                  </a:lnTo>
-                  <a:lnTo>
-                    <a:pt x="6589272" y="3280967"/>
-                  </a:lnTo>
-                  <a:lnTo>
-                    <a:pt x="6517649" y="3268489"/>
-                  </a:lnTo>
-                  <a:lnTo>
-                    <a:pt x="6446027" y="3255243"/>
-                  </a:lnTo>
-                  <a:lnTo>
-                    <a:pt x="6374404" y="3241183"/>
-                  </a:lnTo>
-                  <a:lnTo>
-                    <a:pt x="6302782" y="3226257"/>
-                  </a:lnTo>
-                  <a:lnTo>
-                    <a:pt x="6231159" y="3210412"/>
-                  </a:lnTo>
-                  <a:lnTo>
-                    <a:pt x="6159537" y="3193593"/>
-                  </a:lnTo>
-                  <a:lnTo>
-                    <a:pt x="6087914" y="3175739"/>
-                  </a:lnTo>
-                  <a:lnTo>
-                    <a:pt x="6016292" y="3156786"/>
-                  </a:lnTo>
-                  <a:lnTo>
-                    <a:pt x="5944669" y="3136667"/>
-                  </a:lnTo>
-                  <a:lnTo>
-                    <a:pt x="5873047" y="3115310"/>
-                  </a:lnTo>
-                  <a:lnTo>
-                    <a:pt x="5801424" y="3092638"/>
-                  </a:lnTo>
-                  <a:lnTo>
-                    <a:pt x="5729802" y="3068572"/>
-                  </a:lnTo>
-                  <a:lnTo>
-                    <a:pt x="5658179" y="3043025"/>
-                  </a:lnTo>
-                  <a:lnTo>
-                    <a:pt x="5586557" y="3015905"/>
-                  </a:lnTo>
-                  <a:lnTo>
-                    <a:pt x="5514934" y="2987117"/>
-                  </a:lnTo>
-                  <a:lnTo>
-                    <a:pt x="5443311" y="2956558"/>
-                  </a:lnTo>
-                  <a:lnTo>
-                    <a:pt x="5371689" y="2924118"/>
-                  </a:lnTo>
-                  <a:lnTo>
-                    <a:pt x="5300066" y="2889682"/>
-                  </a:lnTo>
-                  <a:lnTo>
-                    <a:pt x="5228444" y="2853126"/>
-                  </a:lnTo>
-                  <a:lnTo>
-                    <a:pt x="5156821" y="2814322"/>
-                  </a:lnTo>
-                  <a:lnTo>
-                    <a:pt x="5085199" y="2773130"/>
-                  </a:lnTo>
-                  <a:lnTo>
-                    <a:pt x="5013576" y="2729403"/>
-                  </a:lnTo>
-                  <a:lnTo>
-                    <a:pt x="4941954" y="2682985"/>
-                  </a:lnTo>
-                  <a:lnTo>
-                    <a:pt x="4870331" y="2656869"/>
-                  </a:lnTo>
-                  <a:lnTo>
-                    <a:pt x="4798709" y="2663139"/>
-                  </a:lnTo>
-                  <a:lnTo>
-                    <a:pt x="4727086" y="2669361"/>
-                  </a:lnTo>
-                  <a:lnTo>
-                    <a:pt x="4655464" y="2675536"/>
-                  </a:lnTo>
-                  <a:lnTo>
-                    <a:pt x="4583841" y="2681665"/>
-                  </a:lnTo>
-                  <a:lnTo>
-                    <a:pt x="4512219" y="2687747"/>
-                  </a:lnTo>
-                  <a:lnTo>
-                    <a:pt x="4440596" y="2693782"/>
-                  </a:lnTo>
-                  <a:lnTo>
-                    <a:pt x="4368974" y="2699772"/>
-                  </a:lnTo>
-                  <a:lnTo>
-                    <a:pt x="4297351" y="2705717"/>
-                  </a:lnTo>
-                  <a:lnTo>
-                    <a:pt x="4225729" y="2711616"/>
-                  </a:lnTo>
-                  <a:lnTo>
-                    <a:pt x="4154106" y="2717471"/>
-                  </a:lnTo>
-                  <a:lnTo>
-                    <a:pt x="4082483" y="2723281"/>
-                  </a:lnTo>
-                  <a:lnTo>
-                    <a:pt x="4010861" y="2729048"/>
-                  </a:lnTo>
-                  <a:lnTo>
-                    <a:pt x="3939238" y="2734770"/>
-                  </a:lnTo>
-                  <a:lnTo>
-                    <a:pt x="3867616" y="2740449"/>
-                  </a:lnTo>
-                  <a:lnTo>
-                    <a:pt x="3795993" y="2746086"/>
-                  </a:lnTo>
-                  <a:lnTo>
-                    <a:pt x="3724371" y="2751679"/>
-                  </a:lnTo>
-                  <a:lnTo>
-                    <a:pt x="3652748" y="2757230"/>
-                  </a:lnTo>
-                  <a:lnTo>
-                    <a:pt x="3581126" y="2762739"/>
-                  </a:lnTo>
-                  <a:lnTo>
-                    <a:pt x="3509503" y="2768206"/>
-                  </a:lnTo>
-                  <a:lnTo>
-                    <a:pt x="3437881" y="2773632"/>
-                  </a:lnTo>
-                  <a:lnTo>
-                    <a:pt x="3366258" y="2779016"/>
-                  </a:lnTo>
-                  <a:lnTo>
-                    <a:pt x="3294636" y="2784360"/>
-                  </a:lnTo>
-                  <a:lnTo>
-                    <a:pt x="3223013" y="2789663"/>
-                  </a:lnTo>
-                  <a:lnTo>
-                    <a:pt x="3151391" y="2794926"/>
-                  </a:lnTo>
-                  <a:lnTo>
-                    <a:pt x="3079768" y="2800149"/>
-                  </a:lnTo>
-                  <a:lnTo>
-                    <a:pt x="3008146" y="2805332"/>
-                  </a:lnTo>
-                  <a:lnTo>
-                    <a:pt x="2936523" y="2810476"/>
-                  </a:lnTo>
-                  <a:lnTo>
-                    <a:pt x="2864901" y="2815582"/>
-                  </a:lnTo>
-                  <a:lnTo>
-                    <a:pt x="2793278" y="2820648"/>
-                  </a:lnTo>
-                  <a:lnTo>
-                    <a:pt x="2721655" y="2825676"/>
-                  </a:lnTo>
-                  <a:lnTo>
-                    <a:pt x="2650033" y="2830666"/>
-                  </a:lnTo>
-                  <a:lnTo>
-                    <a:pt x="2578410" y="2835618"/>
-                  </a:lnTo>
-                  <a:lnTo>
-                    <a:pt x="2506788" y="2840532"/>
-                  </a:lnTo>
-                  <a:lnTo>
-                    <a:pt x="2435165" y="2845410"/>
-                  </a:lnTo>
-                  <a:lnTo>
-                    <a:pt x="2363543" y="2850250"/>
-                  </a:lnTo>
-                  <a:lnTo>
-                    <a:pt x="2291920" y="2855053"/>
-                  </a:lnTo>
-                  <a:lnTo>
-                    <a:pt x="2220298" y="2859821"/>
-                  </a:lnTo>
-                  <a:lnTo>
-                    <a:pt x="2148675" y="2864552"/>
-                  </a:lnTo>
-                  <a:lnTo>
-                    <a:pt x="2077053" y="2869247"/>
-                  </a:lnTo>
-                  <a:lnTo>
-                    <a:pt x="2005430" y="2873906"/>
-                  </a:lnTo>
-                  <a:lnTo>
-                    <a:pt x="1933808" y="2878530"/>
-                  </a:lnTo>
-                  <a:lnTo>
-                    <a:pt x="1862185" y="2883119"/>
-                  </a:lnTo>
-                  <a:lnTo>
-                    <a:pt x="1790563" y="2887674"/>
-                  </a:lnTo>
-                  <a:lnTo>
-                    <a:pt x="1718940" y="2892194"/>
-                  </a:lnTo>
-                  <a:lnTo>
-                    <a:pt x="1647318" y="2896679"/>
-                  </a:lnTo>
-                  <a:lnTo>
-                    <a:pt x="1575695" y="2901130"/>
-                  </a:lnTo>
-                  <a:lnTo>
-                    <a:pt x="1504073" y="2905548"/>
-                  </a:lnTo>
-                  <a:lnTo>
-                    <a:pt x="1432450" y="2909932"/>
-                  </a:lnTo>
-                  <a:lnTo>
-                    <a:pt x="1360827" y="2914283"/>
-                  </a:lnTo>
-                  <a:lnTo>
-                    <a:pt x="1289205" y="2918601"/>
-                  </a:lnTo>
-                  <a:lnTo>
-                    <a:pt x="1217582" y="2922887"/>
-                  </a:lnTo>
-                  <a:lnTo>
-                    <a:pt x="1145960" y="2927140"/>
-                  </a:lnTo>
-                  <a:lnTo>
-                    <a:pt x="1074337" y="2931360"/>
-                  </a:lnTo>
-                  <a:lnTo>
-                    <a:pt x="1002715" y="2935549"/>
-                  </a:lnTo>
-                  <a:lnTo>
-                    <a:pt x="931092" y="2939705"/>
-                  </a:lnTo>
-                  <a:lnTo>
-                    <a:pt x="859470" y="2943831"/>
-                  </a:lnTo>
-                  <a:lnTo>
-                    <a:pt x="787847" y="2947925"/>
-                  </a:lnTo>
-                  <a:lnTo>
-                    <a:pt x="716225" y="2951987"/>
-                  </a:lnTo>
-                  <a:lnTo>
-                    <a:pt x="644602" y="2956020"/>
-                  </a:lnTo>
-                  <a:lnTo>
-                    <a:pt x="572980" y="2960021"/>
-                  </a:lnTo>
-                  <a:lnTo>
-                    <a:pt x="501357" y="2963992"/>
-                  </a:lnTo>
-                  <a:lnTo>
-                    <a:pt x="429735" y="2967933"/>
-                  </a:lnTo>
-                  <a:lnTo>
-                    <a:pt x="358112" y="2971845"/>
-                  </a:lnTo>
-                  <a:lnTo>
-                    <a:pt x="286490" y="2975726"/>
-                  </a:lnTo>
-                  <a:lnTo>
-                    <a:pt x="214867" y="2979578"/>
-                  </a:lnTo>
-                  <a:lnTo>
-                    <a:pt x="143245" y="2983401"/>
-                  </a:lnTo>
-                  <a:lnTo>
-                    <a:pt x="71622" y="2987195"/>
-                  </a:lnTo>
-                  <a:lnTo>
-                    <a:pt x="0" y="2990960"/>
+                    <a:pt x="3151391" y="140658"/>
+                  </a:lnTo>
+                  <a:lnTo>
+                    <a:pt x="3223013" y="326206"/>
+                  </a:lnTo>
+                  <a:lnTo>
+                    <a:pt x="3294636" y="501457"/>
+                  </a:lnTo>
+                  <a:lnTo>
+                    <a:pt x="3366258" y="666980"/>
+                  </a:lnTo>
+                  <a:lnTo>
+                    <a:pt x="3437881" y="823317"/>
+                  </a:lnTo>
+                  <a:lnTo>
+                    <a:pt x="3509503" y="970976"/>
+                  </a:lnTo>
+                  <a:lnTo>
+                    <a:pt x="3581126" y="1110440"/>
+                  </a:lnTo>
+                  <a:lnTo>
+                    <a:pt x="3652748" y="1242164"/>
+                  </a:lnTo>
+                  <a:lnTo>
+                    <a:pt x="3724371" y="1366576"/>
+                  </a:lnTo>
+                  <a:lnTo>
+                    <a:pt x="3795993" y="1484084"/>
+                  </a:lnTo>
+                  <a:lnTo>
+                    <a:pt x="3867616" y="1595069"/>
+                  </a:lnTo>
+                  <a:lnTo>
+                    <a:pt x="3939238" y="1699895"/>
+                  </a:lnTo>
+                  <a:lnTo>
+                    <a:pt x="4010861" y="1798902"/>
+                  </a:lnTo>
+                  <a:lnTo>
+                    <a:pt x="4082483" y="1892415"/>
+                  </a:lnTo>
+                  <a:lnTo>
+                    <a:pt x="4154106" y="1980737"/>
+                  </a:lnTo>
+                  <a:lnTo>
+                    <a:pt x="4225729" y="2064157"/>
+                  </a:lnTo>
+                  <a:lnTo>
+                    <a:pt x="4297351" y="2142948"/>
+                  </a:lnTo>
+                  <a:lnTo>
+                    <a:pt x="4368974" y="2217365"/>
+                  </a:lnTo>
+                  <a:lnTo>
+                    <a:pt x="4440596" y="2287652"/>
+                  </a:lnTo>
+                  <a:lnTo>
+                    <a:pt x="4512219" y="2354037"/>
+                  </a:lnTo>
+                  <a:lnTo>
+                    <a:pt x="4583841" y="2416739"/>
+                  </a:lnTo>
+                  <a:lnTo>
+                    <a:pt x="4655464" y="2475960"/>
+                  </a:lnTo>
+                  <a:lnTo>
+                    <a:pt x="4727086" y="2531894"/>
+                  </a:lnTo>
+                  <a:lnTo>
+                    <a:pt x="4798709" y="2584724"/>
+                  </a:lnTo>
+                  <a:lnTo>
+                    <a:pt x="4870331" y="2634622"/>
+                  </a:lnTo>
+                  <a:lnTo>
+                    <a:pt x="4941954" y="2658455"/>
+                  </a:lnTo>
+                  <a:lnTo>
+                    <a:pt x="5013576" y="2665482"/>
+                  </a:lnTo>
+                  <a:lnTo>
+                    <a:pt x="5085199" y="2672448"/>
+                  </a:lnTo>
+                  <a:lnTo>
+                    <a:pt x="5156821" y="2679356"/>
+                  </a:lnTo>
+                  <a:lnTo>
+                    <a:pt x="5228444" y="2686204"/>
+                  </a:lnTo>
+                  <a:lnTo>
+                    <a:pt x="5300066" y="2692995"/>
+                  </a:lnTo>
+                  <a:lnTo>
+                    <a:pt x="5371689" y="2699727"/>
+                  </a:lnTo>
+                  <a:lnTo>
+                    <a:pt x="5443311" y="2706402"/>
+                  </a:lnTo>
+                  <a:lnTo>
+                    <a:pt x="5514934" y="2713021"/>
+                  </a:lnTo>
+                  <a:lnTo>
+                    <a:pt x="5586557" y="2719583"/>
+                  </a:lnTo>
+                  <a:lnTo>
+                    <a:pt x="5658179" y="2726089"/>
+                  </a:lnTo>
+                  <a:lnTo>
+                    <a:pt x="5729802" y="2732540"/>
+                  </a:lnTo>
+                  <a:lnTo>
+                    <a:pt x="5801424" y="2738936"/>
+                  </a:lnTo>
+                  <a:lnTo>
+                    <a:pt x="5873047" y="2745277"/>
+                  </a:lnTo>
+                  <a:lnTo>
+                    <a:pt x="5944669" y="2751564"/>
+                  </a:lnTo>
+                  <a:lnTo>
+                    <a:pt x="6016292" y="2757798"/>
+                  </a:lnTo>
+                  <a:lnTo>
+                    <a:pt x="6087914" y="2763979"/>
+                  </a:lnTo>
+                  <a:lnTo>
+                    <a:pt x="6159537" y="2770107"/>
+                  </a:lnTo>
+                  <a:lnTo>
+                    <a:pt x="6231159" y="2776183"/>
+                  </a:lnTo>
+                  <a:lnTo>
+                    <a:pt x="6302782" y="2782207"/>
+                  </a:lnTo>
+                  <a:lnTo>
+                    <a:pt x="6374404" y="2788180"/>
+                  </a:lnTo>
+                  <a:lnTo>
+                    <a:pt x="6446027" y="2794103"/>
+                  </a:lnTo>
+                  <a:lnTo>
+                    <a:pt x="6517649" y="2799974"/>
+                  </a:lnTo>
+                  <a:lnTo>
+                    <a:pt x="6589272" y="2805796"/>
+                  </a:lnTo>
+                  <a:lnTo>
+                    <a:pt x="6660894" y="2811568"/>
+                  </a:lnTo>
+                  <a:lnTo>
+                    <a:pt x="6732517" y="2817291"/>
+                  </a:lnTo>
+                  <a:lnTo>
+                    <a:pt x="6804139" y="2822965"/>
+                  </a:lnTo>
+                  <a:lnTo>
+                    <a:pt x="6875762" y="2828591"/>
+                  </a:lnTo>
+                  <a:lnTo>
+                    <a:pt x="6947385" y="2834169"/>
+                  </a:lnTo>
+                  <a:lnTo>
+                    <a:pt x="7019007" y="2839700"/>
+                  </a:lnTo>
+                  <a:lnTo>
+                    <a:pt x="7090630" y="2845183"/>
+                  </a:lnTo>
+                  <a:lnTo>
+                    <a:pt x="7090630" y="3339135"/>
+                  </a:lnTo>
+                  <a:lnTo>
+                    <a:pt x="7019007" y="3330637"/>
+                  </a:lnTo>
+                  <a:lnTo>
+                    <a:pt x="6947385" y="3321640"/>
+                  </a:lnTo>
+                  <a:lnTo>
+                    <a:pt x="6875762" y="3312114"/>
+                  </a:lnTo>
+                  <a:lnTo>
+                    <a:pt x="6804139" y="3302028"/>
+                  </a:lnTo>
+                  <a:lnTo>
+                    <a:pt x="6732517" y="3291350"/>
+                  </a:lnTo>
+                  <a:lnTo>
+                    <a:pt x="6660894" y="3280044"/>
+                  </a:lnTo>
+                  <a:lnTo>
+                    <a:pt x="6589272" y="3268074"/>
+                  </a:lnTo>
+                  <a:lnTo>
+                    <a:pt x="6517649" y="3255400"/>
+                  </a:lnTo>
+                  <a:lnTo>
+                    <a:pt x="6446027" y="3241982"/>
+                  </a:lnTo>
+                  <a:lnTo>
+                    <a:pt x="6374404" y="3227775"/>
+                  </a:lnTo>
+                  <a:lnTo>
+                    <a:pt x="6302782" y="3212733"/>
+                  </a:lnTo>
+                  <a:lnTo>
+                    <a:pt x="6231159" y="3196807"/>
+                  </a:lnTo>
+                  <a:lnTo>
+                    <a:pt x="6159537" y="3179945"/>
+                  </a:lnTo>
+                  <a:lnTo>
+                    <a:pt x="6087914" y="3162093"/>
+                  </a:lnTo>
+                  <a:lnTo>
+                    <a:pt x="6016292" y="3143191"/>
+                  </a:lnTo>
+                  <a:lnTo>
+                    <a:pt x="5944669" y="3123179"/>
+                  </a:lnTo>
+                  <a:lnTo>
+                    <a:pt x="5873047" y="3101991"/>
+                  </a:lnTo>
+                  <a:lnTo>
+                    <a:pt x="5801424" y="3079558"/>
+                  </a:lnTo>
+                  <a:lnTo>
+                    <a:pt x="5729802" y="3055806"/>
+                  </a:lnTo>
+                  <a:lnTo>
+                    <a:pt x="5658179" y="3030659"/>
+                  </a:lnTo>
+                  <a:lnTo>
+                    <a:pt x="5586557" y="3004034"/>
+                  </a:lnTo>
+                  <a:lnTo>
+                    <a:pt x="5514934" y="2975844"/>
+                  </a:lnTo>
+                  <a:lnTo>
+                    <a:pt x="5443311" y="2945998"/>
+                  </a:lnTo>
+                  <a:lnTo>
+                    <a:pt x="5371689" y="2914398"/>
+                  </a:lnTo>
+                  <a:lnTo>
+                    <a:pt x="5300066" y="2880941"/>
+                  </a:lnTo>
+                  <a:lnTo>
+                    <a:pt x="5228444" y="2845518"/>
+                  </a:lnTo>
+                  <a:lnTo>
+                    <a:pt x="5156821" y="2808013"/>
+                  </a:lnTo>
+                  <a:lnTo>
+                    <a:pt x="5085199" y="2768304"/>
+                  </a:lnTo>
+                  <a:lnTo>
+                    <a:pt x="5013576" y="2726262"/>
+                  </a:lnTo>
+                  <a:lnTo>
+                    <a:pt x="4941954" y="2681750"/>
+                  </a:lnTo>
+                  <a:lnTo>
+                    <a:pt x="4870331" y="2651368"/>
+                  </a:lnTo>
+                  <a:lnTo>
+                    <a:pt x="4798709" y="2644220"/>
+                  </a:lnTo>
+                  <a:lnTo>
+                    <a:pt x="4727086" y="2637011"/>
+                  </a:lnTo>
+                  <a:lnTo>
+                    <a:pt x="4655464" y="2629740"/>
+                  </a:lnTo>
+                  <a:lnTo>
+                    <a:pt x="4583841" y="2622406"/>
+                  </a:lnTo>
+                  <a:lnTo>
+                    <a:pt x="4512219" y="2615010"/>
+                  </a:lnTo>
+                  <a:lnTo>
+                    <a:pt x="4440596" y="2607550"/>
+                  </a:lnTo>
+                  <a:lnTo>
+                    <a:pt x="4368974" y="2600026"/>
+                  </a:lnTo>
+                  <a:lnTo>
+                    <a:pt x="4297351" y="2592437"/>
+                  </a:lnTo>
+                  <a:lnTo>
+                    <a:pt x="4225729" y="2584783"/>
+                  </a:lnTo>
+                  <a:lnTo>
+                    <a:pt x="4154106" y="2577064"/>
+                  </a:lnTo>
+                  <a:lnTo>
+                    <a:pt x="4082483" y="2569278"/>
+                  </a:lnTo>
+                  <a:lnTo>
+                    <a:pt x="4010861" y="2561425"/>
+                  </a:lnTo>
+                  <a:lnTo>
+                    <a:pt x="3939238" y="2553505"/>
+                  </a:lnTo>
+                  <a:lnTo>
+                    <a:pt x="3867616" y="2545517"/>
+                  </a:lnTo>
+                  <a:lnTo>
+                    <a:pt x="3795993" y="2537460"/>
+                  </a:lnTo>
+                  <a:lnTo>
+                    <a:pt x="3724371" y="2529334"/>
+                  </a:lnTo>
+                  <a:lnTo>
+                    <a:pt x="3652748" y="2521138"/>
+                  </a:lnTo>
+                  <a:lnTo>
+                    <a:pt x="3581126" y="2512872"/>
+                  </a:lnTo>
+                  <a:lnTo>
+                    <a:pt x="3509503" y="2504535"/>
+                  </a:lnTo>
+                  <a:lnTo>
+                    <a:pt x="3437881" y="2496127"/>
+                  </a:lnTo>
+                  <a:lnTo>
+                    <a:pt x="3366258" y="2487646"/>
+                  </a:lnTo>
+                  <a:lnTo>
+                    <a:pt x="3294636" y="2479092"/>
+                  </a:lnTo>
+                  <a:lnTo>
+                    <a:pt x="3223013" y="2470465"/>
+                  </a:lnTo>
+                  <a:lnTo>
+                    <a:pt x="3151391" y="2461763"/>
+                  </a:lnTo>
+                  <a:lnTo>
+                    <a:pt x="3079768" y="2452988"/>
+                  </a:lnTo>
+                  <a:lnTo>
+                    <a:pt x="3008146" y="2444136"/>
+                  </a:lnTo>
+                  <a:lnTo>
+                    <a:pt x="2936523" y="2435209"/>
+                  </a:lnTo>
+                  <a:lnTo>
+                    <a:pt x="2864901" y="2426205"/>
+                  </a:lnTo>
+                  <a:lnTo>
+                    <a:pt x="2793278" y="2417124"/>
+                  </a:lnTo>
+                  <a:lnTo>
+                    <a:pt x="2721655" y="2407964"/>
+                  </a:lnTo>
+                  <a:lnTo>
+                    <a:pt x="2650033" y="2398726"/>
+                  </a:lnTo>
+                  <a:lnTo>
+                    <a:pt x="2578410" y="2389409"/>
+                  </a:lnTo>
+                  <a:lnTo>
+                    <a:pt x="2506788" y="2380012"/>
+                  </a:lnTo>
+                  <a:lnTo>
+                    <a:pt x="2435165" y="2370534"/>
+                  </a:lnTo>
+                  <a:lnTo>
+                    <a:pt x="2363543" y="2360974"/>
+                  </a:lnTo>
+                  <a:lnTo>
+                    <a:pt x="2291920" y="2351333"/>
+                  </a:lnTo>
+                  <a:lnTo>
+                    <a:pt x="2220298" y="2341609"/>
+                  </a:lnTo>
+                  <a:lnTo>
+                    <a:pt x="2148675" y="2331801"/>
+                  </a:lnTo>
+                  <a:lnTo>
+                    <a:pt x="2077053" y="2321909"/>
+                  </a:lnTo>
+                  <a:lnTo>
+                    <a:pt x="2005430" y="2311932"/>
+                  </a:lnTo>
+                  <a:lnTo>
+                    <a:pt x="1933808" y="2301869"/>
+                  </a:lnTo>
+                  <a:lnTo>
+                    <a:pt x="1862185" y="2291720"/>
+                  </a:lnTo>
+                  <a:lnTo>
+                    <a:pt x="1790563" y="2281484"/>
+                  </a:lnTo>
+                  <a:lnTo>
+                    <a:pt x="1718940" y="2271160"/>
+                  </a:lnTo>
+                  <a:lnTo>
+                    <a:pt x="1647318" y="2260747"/>
+                  </a:lnTo>
+                  <a:lnTo>
+                    <a:pt x="1575695" y="2250245"/>
+                  </a:lnTo>
+                  <a:lnTo>
+                    <a:pt x="1504073" y="2239653"/>
+                  </a:lnTo>
+                  <a:lnTo>
+                    <a:pt x="1432450" y="2228970"/>
+                  </a:lnTo>
+                  <a:lnTo>
+                    <a:pt x="1360827" y="2218195"/>
+                  </a:lnTo>
+                  <a:lnTo>
+                    <a:pt x="1289205" y="2207327"/>
+                  </a:lnTo>
+                  <a:lnTo>
+                    <a:pt x="1217582" y="2196366"/>
+                  </a:lnTo>
+                  <a:lnTo>
+                    <a:pt x="1145960" y="2185311"/>
+                  </a:lnTo>
+                  <a:lnTo>
+                    <a:pt x="1074337" y="2174161"/>
+                  </a:lnTo>
+                  <a:lnTo>
+                    <a:pt x="1002715" y="2162916"/>
+                  </a:lnTo>
+                  <a:lnTo>
+                    <a:pt x="931092" y="2151573"/>
+                  </a:lnTo>
+                  <a:lnTo>
+                    <a:pt x="859470" y="2140134"/>
+                  </a:lnTo>
+                  <a:lnTo>
+                    <a:pt x="787847" y="2128596"/>
+                  </a:lnTo>
+                  <a:lnTo>
+                    <a:pt x="716225" y="2116959"/>
+                  </a:lnTo>
+                  <a:lnTo>
+                    <a:pt x="644602" y="2105222"/>
+                  </a:lnTo>
+                  <a:lnTo>
+                    <a:pt x="572980" y="2093384"/>
+                  </a:lnTo>
+                  <a:lnTo>
+                    <a:pt x="501357" y="2081445"/>
+                  </a:lnTo>
+                  <a:lnTo>
+                    <a:pt x="429735" y="2069403"/>
+                  </a:lnTo>
+                  <a:lnTo>
+                    <a:pt x="358112" y="2057258"/>
+                  </a:lnTo>
+                  <a:lnTo>
+                    <a:pt x="286490" y="2045009"/>
+                  </a:lnTo>
+                  <a:lnTo>
+                    <a:pt x="214867" y="2032654"/>
+                  </a:lnTo>
+                  <a:lnTo>
+                    <a:pt x="143245" y="2020193"/>
+                  </a:lnTo>
+                  <a:lnTo>
+                    <a:pt x="71622" y="2007625"/>
+                  </a:lnTo>
+                  <a:lnTo>
+                    <a:pt x="0" y="1994949"/>
                   </a:lnTo>
                   <a:lnTo>
                     <a:pt x="0" y="0"/>
@@ -3504,180 +3507,183 @@
           </p:nvSpPr>
           <p:spPr>
             <a:xfrm>
-              <a:off x="4351018" y="2073503"/>
-              <a:ext cx="3911660" cy="2650551"/>
+              <a:off x="4272159" y="2073503"/>
+              <a:ext cx="3990520" cy="2845183"/>
             </a:xfrm>
             <a:custGeom>
               <a:avLst/>
               <a:pathLst>
-                <a:path w="3911660" h="2650551">
+                <a:path w="3990520" h="2845183">
                   <a:moveTo>
                     <a:pt x="0" y="0"/>
                   </a:moveTo>
                   <a:lnTo>
-                    <a:pt x="44044" y="127019"/>
-                  </a:lnTo>
-                  <a:lnTo>
-                    <a:pt x="115666" y="321598"/>
-                  </a:lnTo>
-                  <a:lnTo>
-                    <a:pt x="187289" y="504898"/>
-                  </a:lnTo>
-                  <a:lnTo>
-                    <a:pt x="258911" y="677573"/>
-                  </a:lnTo>
-                  <a:lnTo>
-                    <a:pt x="330534" y="840238"/>
-                  </a:lnTo>
-                  <a:lnTo>
-                    <a:pt x="402156" y="993474"/>
-                  </a:lnTo>
-                  <a:lnTo>
-                    <a:pt x="473779" y="1137828"/>
-                  </a:lnTo>
-                  <a:lnTo>
-                    <a:pt x="545401" y="1273814"/>
-                  </a:lnTo>
-                  <a:lnTo>
-                    <a:pt x="617024" y="1401917"/>
-                  </a:lnTo>
-                  <a:lnTo>
-                    <a:pt x="688646" y="1522594"/>
-                  </a:lnTo>
-                  <a:lnTo>
-                    <a:pt x="760269" y="1636276"/>
-                  </a:lnTo>
-                  <a:lnTo>
-                    <a:pt x="831891" y="1743369"/>
-                  </a:lnTo>
-                  <a:lnTo>
-                    <a:pt x="903514" y="1844253"/>
-                  </a:lnTo>
-                  <a:lnTo>
-                    <a:pt x="975136" y="1939289"/>
-                  </a:lnTo>
-                  <a:lnTo>
-                    <a:pt x="1046759" y="2028817"/>
-                  </a:lnTo>
-                  <a:lnTo>
-                    <a:pt x="1118381" y="2113155"/>
-                  </a:lnTo>
-                  <a:lnTo>
-                    <a:pt x="1190004" y="2192604"/>
-                  </a:lnTo>
-                  <a:lnTo>
-                    <a:pt x="1261627" y="2267447"/>
-                  </a:lnTo>
-                  <a:lnTo>
-                    <a:pt x="1333249" y="2337953"/>
-                  </a:lnTo>
-                  <a:lnTo>
-                    <a:pt x="1404872" y="2404371"/>
-                  </a:lnTo>
-                  <a:lnTo>
-                    <a:pt x="1476494" y="2466939"/>
-                  </a:lnTo>
-                  <a:lnTo>
-                    <a:pt x="1548117" y="2525880"/>
-                  </a:lnTo>
-                  <a:lnTo>
-                    <a:pt x="1619739" y="2581405"/>
-                  </a:lnTo>
-                  <a:lnTo>
-                    <a:pt x="1691362" y="2633711"/>
-                  </a:lnTo>
-                  <a:lnTo>
-                    <a:pt x="1762984" y="2650551"/>
-                  </a:lnTo>
-                  <a:lnTo>
-                    <a:pt x="1834607" y="2644185"/>
-                  </a:lnTo>
-                  <a:lnTo>
-                    <a:pt x="1906229" y="2637770"/>
-                  </a:lnTo>
-                  <a:lnTo>
-                    <a:pt x="1977852" y="2631307"/>
-                  </a:lnTo>
-                  <a:lnTo>
-                    <a:pt x="2049474" y="2624794"/>
-                  </a:lnTo>
-                  <a:lnTo>
-                    <a:pt x="2121097" y="2618231"/>
-                  </a:lnTo>
-                  <a:lnTo>
-                    <a:pt x="2192719" y="2611618"/>
-                  </a:lnTo>
-                  <a:lnTo>
-                    <a:pt x="2264342" y="2604954"/>
-                  </a:lnTo>
-                  <a:lnTo>
-                    <a:pt x="2335964" y="2598240"/>
-                  </a:lnTo>
-                  <a:lnTo>
-                    <a:pt x="2407587" y="2591474"/>
-                  </a:lnTo>
-                  <a:lnTo>
-                    <a:pt x="2479209" y="2584657"/>
-                  </a:lnTo>
-                  <a:lnTo>
-                    <a:pt x="2550832" y="2577787"/>
-                  </a:lnTo>
-                  <a:lnTo>
-                    <a:pt x="2622455" y="2570865"/>
-                  </a:lnTo>
-                  <a:lnTo>
-                    <a:pt x="2694077" y="2563890"/>
-                  </a:lnTo>
-                  <a:lnTo>
-                    <a:pt x="2765700" y="2556862"/>
-                  </a:lnTo>
-                  <a:lnTo>
-                    <a:pt x="2837322" y="2549780"/>
-                  </a:lnTo>
-                  <a:lnTo>
-                    <a:pt x="2908945" y="2542644"/>
-                  </a:lnTo>
-                  <a:lnTo>
-                    <a:pt x="2980567" y="2535454"/>
-                  </a:lnTo>
-                  <a:lnTo>
-                    <a:pt x="3052190" y="2528208"/>
-                  </a:lnTo>
-                  <a:lnTo>
-                    <a:pt x="3123812" y="2520908"/>
-                  </a:lnTo>
-                  <a:lnTo>
-                    <a:pt x="3195435" y="2513551"/>
-                  </a:lnTo>
-                  <a:lnTo>
-                    <a:pt x="3267057" y="2506138"/>
-                  </a:lnTo>
-                  <a:lnTo>
-                    <a:pt x="3338680" y="2498669"/>
-                  </a:lnTo>
-                  <a:lnTo>
-                    <a:pt x="3410302" y="2491142"/>
-                  </a:lnTo>
-                  <a:lnTo>
-                    <a:pt x="3481925" y="2483558"/>
-                  </a:lnTo>
-                  <a:lnTo>
-                    <a:pt x="3553547" y="2475916"/>
-                  </a:lnTo>
-                  <a:lnTo>
-                    <a:pt x="3625170" y="2468216"/>
-                  </a:lnTo>
-                  <a:lnTo>
-                    <a:pt x="3696792" y="2460457"/>
-                  </a:lnTo>
-                  <a:lnTo>
-                    <a:pt x="3768415" y="2452638"/>
-                  </a:lnTo>
-                  <a:lnTo>
-                    <a:pt x="3840037" y="2444760"/>
-                  </a:lnTo>
-                  <a:lnTo>
-                    <a:pt x="3911660" y="2436822"/>
+                    <a:pt x="51281" y="140658"/>
+                  </a:lnTo>
+                  <a:lnTo>
+                    <a:pt x="122903" y="326206"/>
+                  </a:lnTo>
+                  <a:lnTo>
+                    <a:pt x="194526" y="501457"/>
+                  </a:lnTo>
+                  <a:lnTo>
+                    <a:pt x="266148" y="666980"/>
+                  </a:lnTo>
+                  <a:lnTo>
+                    <a:pt x="337771" y="823317"/>
+                  </a:lnTo>
+                  <a:lnTo>
+                    <a:pt x="409393" y="970976"/>
+                  </a:lnTo>
+                  <a:lnTo>
+                    <a:pt x="481016" y="1110440"/>
+                  </a:lnTo>
+                  <a:lnTo>
+                    <a:pt x="552638" y="1242164"/>
+                  </a:lnTo>
+                  <a:lnTo>
+                    <a:pt x="624261" y="1366576"/>
+                  </a:lnTo>
+                  <a:lnTo>
+                    <a:pt x="695883" y="1484084"/>
+                  </a:lnTo>
+                  <a:lnTo>
+                    <a:pt x="767506" y="1595069"/>
+                  </a:lnTo>
+                  <a:lnTo>
+                    <a:pt x="839129" y="1699895"/>
+                  </a:lnTo>
+                  <a:lnTo>
+                    <a:pt x="910751" y="1798902"/>
+                  </a:lnTo>
+                  <a:lnTo>
+                    <a:pt x="982374" y="1892415"/>
+                  </a:lnTo>
+                  <a:lnTo>
+                    <a:pt x="1053996" y="1980737"/>
+                  </a:lnTo>
+                  <a:lnTo>
+                    <a:pt x="1125619" y="2064157"/>
+                  </a:lnTo>
+                  <a:lnTo>
+                    <a:pt x="1197241" y="2142948"/>
+                  </a:lnTo>
+                  <a:lnTo>
+                    <a:pt x="1268864" y="2217365"/>
+                  </a:lnTo>
+                  <a:lnTo>
+                    <a:pt x="1340486" y="2287652"/>
+                  </a:lnTo>
+                  <a:lnTo>
+                    <a:pt x="1412109" y="2354037"/>
+                  </a:lnTo>
+                  <a:lnTo>
+                    <a:pt x="1483731" y="2416739"/>
+                  </a:lnTo>
+                  <a:lnTo>
+                    <a:pt x="1555354" y="2475960"/>
+                  </a:lnTo>
+                  <a:lnTo>
+                    <a:pt x="1626976" y="2531894"/>
+                  </a:lnTo>
+                  <a:lnTo>
+                    <a:pt x="1698599" y="2584724"/>
+                  </a:lnTo>
+                  <a:lnTo>
+                    <a:pt x="1770221" y="2634622"/>
+                  </a:lnTo>
+                  <a:lnTo>
+                    <a:pt x="1841844" y="2658455"/>
+                  </a:lnTo>
+                  <a:lnTo>
+                    <a:pt x="1913466" y="2665482"/>
+                  </a:lnTo>
+                  <a:lnTo>
+                    <a:pt x="1985089" y="2672448"/>
+                  </a:lnTo>
+                  <a:lnTo>
+                    <a:pt x="2056711" y="2679356"/>
+                  </a:lnTo>
+                  <a:lnTo>
+                    <a:pt x="2128334" y="2686204"/>
+                  </a:lnTo>
+                  <a:lnTo>
+                    <a:pt x="2199957" y="2692995"/>
+                  </a:lnTo>
+                  <a:lnTo>
+                    <a:pt x="2271579" y="2699727"/>
+                  </a:lnTo>
+                  <a:lnTo>
+                    <a:pt x="2343202" y="2706402"/>
+                  </a:lnTo>
+                  <a:lnTo>
+                    <a:pt x="2414824" y="2713021"/>
+                  </a:lnTo>
+                  <a:lnTo>
+                    <a:pt x="2486447" y="2719583"/>
+                  </a:lnTo>
+                  <a:lnTo>
+                    <a:pt x="2558069" y="2726089"/>
+                  </a:lnTo>
+                  <a:lnTo>
+                    <a:pt x="2629692" y="2732540"/>
+                  </a:lnTo>
+                  <a:lnTo>
+                    <a:pt x="2701314" y="2738936"/>
+                  </a:lnTo>
+                  <a:lnTo>
+                    <a:pt x="2772937" y="2745277"/>
+                  </a:lnTo>
+                  <a:lnTo>
+                    <a:pt x="2844559" y="2751564"/>
+                  </a:lnTo>
+                  <a:lnTo>
+                    <a:pt x="2916182" y="2757798"/>
+                  </a:lnTo>
+                  <a:lnTo>
+                    <a:pt x="2987804" y="2763979"/>
+                  </a:lnTo>
+                  <a:lnTo>
+                    <a:pt x="3059427" y="2770107"/>
+                  </a:lnTo>
+                  <a:lnTo>
+                    <a:pt x="3131049" y="2776183"/>
+                  </a:lnTo>
+                  <a:lnTo>
+                    <a:pt x="3202672" y="2782207"/>
+                  </a:lnTo>
+                  <a:lnTo>
+                    <a:pt x="3274294" y="2788180"/>
+                  </a:lnTo>
+                  <a:lnTo>
+                    <a:pt x="3345917" y="2794103"/>
+                  </a:lnTo>
+                  <a:lnTo>
+                    <a:pt x="3417539" y="2799974"/>
+                  </a:lnTo>
+                  <a:lnTo>
+                    <a:pt x="3489162" y="2805796"/>
+                  </a:lnTo>
+                  <a:lnTo>
+                    <a:pt x="3560785" y="2811568"/>
+                  </a:lnTo>
+                  <a:lnTo>
+                    <a:pt x="3632407" y="2817291"/>
+                  </a:lnTo>
+                  <a:lnTo>
+                    <a:pt x="3704030" y="2822965"/>
+                  </a:lnTo>
+                  <a:lnTo>
+                    <a:pt x="3775652" y="2828591"/>
+                  </a:lnTo>
+                  <a:lnTo>
+                    <a:pt x="3847275" y="2834169"/>
+                  </a:lnTo>
+                  <a:lnTo>
+                    <a:pt x="3918897" y="2839700"/>
+                  </a:lnTo>
+                  <a:lnTo>
+                    <a:pt x="3990520" y="2845183"/>
                   </a:lnTo>
                 </a:path>
               </a:pathLst>
@@ -3697,312 +3703,312 @@
           </p:nvSpPr>
           <p:spPr>
             <a:xfrm>
-              <a:off x="1172049" y="4730372"/>
-              <a:ext cx="7090630" cy="693375"/>
+              <a:off x="1172049" y="4068452"/>
+              <a:ext cx="7090630" cy="1344185"/>
             </a:xfrm>
             <a:custGeom>
               <a:avLst/>
               <a:pathLst>
-                <a:path w="7090630" h="693375">
+                <a:path w="7090630" h="1344185">
                   <a:moveTo>
-                    <a:pt x="7090630" y="693375"/>
+                    <a:pt x="7090630" y="1344185"/>
                   </a:moveTo>
                   <a:lnTo>
-                    <a:pt x="7019007" y="685160"/>
-                  </a:lnTo>
-                  <a:lnTo>
-                    <a:pt x="6947385" y="676440"/>
-                  </a:lnTo>
-                  <a:lnTo>
-                    <a:pt x="6875762" y="667183"/>
-                  </a:lnTo>
-                  <a:lnTo>
-                    <a:pt x="6804139" y="657356"/>
-                  </a:lnTo>
-                  <a:lnTo>
-                    <a:pt x="6732517" y="646925"/>
-                  </a:lnTo>
-                  <a:lnTo>
-                    <a:pt x="6660894" y="635852"/>
-                  </a:lnTo>
-                  <a:lnTo>
-                    <a:pt x="6589272" y="624097"/>
-                  </a:lnTo>
-                  <a:lnTo>
-                    <a:pt x="6517649" y="611620"/>
-                  </a:lnTo>
-                  <a:lnTo>
-                    <a:pt x="6446027" y="598374"/>
-                  </a:lnTo>
-                  <a:lnTo>
-                    <a:pt x="6374404" y="584313"/>
-                  </a:lnTo>
-                  <a:lnTo>
-                    <a:pt x="6302782" y="569387"/>
-                  </a:lnTo>
-                  <a:lnTo>
-                    <a:pt x="6231159" y="553543"/>
-                  </a:lnTo>
-                  <a:lnTo>
-                    <a:pt x="6159537" y="536724"/>
-                  </a:lnTo>
-                  <a:lnTo>
-                    <a:pt x="6087914" y="518869"/>
-                  </a:lnTo>
-                  <a:lnTo>
-                    <a:pt x="6016292" y="499916"/>
-                  </a:lnTo>
-                  <a:lnTo>
-                    <a:pt x="5944669" y="479797"/>
-                  </a:lnTo>
-                  <a:lnTo>
-                    <a:pt x="5873047" y="458440"/>
-                  </a:lnTo>
-                  <a:lnTo>
-                    <a:pt x="5801424" y="435769"/>
-                  </a:lnTo>
-                  <a:lnTo>
-                    <a:pt x="5729802" y="411702"/>
-                  </a:lnTo>
-                  <a:lnTo>
-                    <a:pt x="5658179" y="386155"/>
-                  </a:lnTo>
-                  <a:lnTo>
-                    <a:pt x="5586557" y="359036"/>
-                  </a:lnTo>
-                  <a:lnTo>
-                    <a:pt x="5514934" y="330248"/>
-                  </a:lnTo>
-                  <a:lnTo>
-                    <a:pt x="5443311" y="299688"/>
-                  </a:lnTo>
-                  <a:lnTo>
-                    <a:pt x="5371689" y="267248"/>
-                  </a:lnTo>
-                  <a:lnTo>
-                    <a:pt x="5300066" y="232812"/>
-                  </a:lnTo>
-                  <a:lnTo>
-                    <a:pt x="5228444" y="196257"/>
-                  </a:lnTo>
-                  <a:lnTo>
-                    <a:pt x="5156821" y="157452"/>
-                  </a:lnTo>
-                  <a:lnTo>
-                    <a:pt x="5085199" y="116260"/>
-                  </a:lnTo>
-                  <a:lnTo>
-                    <a:pt x="5013576" y="72533"/>
-                  </a:lnTo>
-                  <a:lnTo>
-                    <a:pt x="4941954" y="26115"/>
-                  </a:lnTo>
-                  <a:lnTo>
-                    <a:pt x="4870331" y="0"/>
-                  </a:lnTo>
-                  <a:lnTo>
-                    <a:pt x="4798709" y="6269"/>
-                  </a:lnTo>
-                  <a:lnTo>
-                    <a:pt x="4727086" y="12492"/>
-                  </a:lnTo>
-                  <a:lnTo>
-                    <a:pt x="4655464" y="18667"/>
-                  </a:lnTo>
-                  <a:lnTo>
-                    <a:pt x="4583841" y="24795"/>
-                  </a:lnTo>
-                  <a:lnTo>
-                    <a:pt x="4512219" y="30877"/>
-                  </a:lnTo>
-                  <a:lnTo>
-                    <a:pt x="4440596" y="36913"/>
-                  </a:lnTo>
-                  <a:lnTo>
-                    <a:pt x="4368974" y="42903"/>
-                  </a:lnTo>
-                  <a:lnTo>
-                    <a:pt x="4297351" y="48847"/>
-                  </a:lnTo>
-                  <a:lnTo>
-                    <a:pt x="4225729" y="54747"/>
-                  </a:lnTo>
-                  <a:lnTo>
-                    <a:pt x="4154106" y="60602"/>
-                  </a:lnTo>
-                  <a:lnTo>
-                    <a:pt x="4082483" y="66412"/>
-                  </a:lnTo>
-                  <a:lnTo>
-                    <a:pt x="4010861" y="72178"/>
-                  </a:lnTo>
-                  <a:lnTo>
-                    <a:pt x="3939238" y="77901"/>
-                  </a:lnTo>
-                  <a:lnTo>
-                    <a:pt x="3867616" y="83580"/>
-                  </a:lnTo>
-                  <a:lnTo>
-                    <a:pt x="3795993" y="89216"/>
-                  </a:lnTo>
-                  <a:lnTo>
-                    <a:pt x="3724371" y="94809"/>
-                  </a:lnTo>
-                  <a:lnTo>
-                    <a:pt x="3652748" y="100360"/>
-                  </a:lnTo>
-                  <a:lnTo>
-                    <a:pt x="3581126" y="105869"/>
-                  </a:lnTo>
-                  <a:lnTo>
-                    <a:pt x="3509503" y="111336"/>
-                  </a:lnTo>
-                  <a:lnTo>
-                    <a:pt x="3437881" y="116762"/>
-                  </a:lnTo>
-                  <a:lnTo>
-                    <a:pt x="3366258" y="122147"/>
-                  </a:lnTo>
-                  <a:lnTo>
-                    <a:pt x="3294636" y="127490"/>
-                  </a:lnTo>
-                  <a:lnTo>
-                    <a:pt x="3223013" y="132793"/>
-                  </a:lnTo>
-                  <a:lnTo>
-                    <a:pt x="3151391" y="138056"/>
-                  </a:lnTo>
-                  <a:lnTo>
-                    <a:pt x="3079768" y="143279"/>
-                  </a:lnTo>
-                  <a:lnTo>
-                    <a:pt x="3008146" y="148463"/>
-                  </a:lnTo>
-                  <a:lnTo>
-                    <a:pt x="2936523" y="153607"/>
-                  </a:lnTo>
-                  <a:lnTo>
-                    <a:pt x="2864901" y="158712"/>
-                  </a:lnTo>
-                  <a:lnTo>
-                    <a:pt x="2793278" y="163778"/>
-                  </a:lnTo>
-                  <a:lnTo>
-                    <a:pt x="2721655" y="168807"/>
-                  </a:lnTo>
-                  <a:lnTo>
-                    <a:pt x="2650033" y="173796"/>
-                  </a:lnTo>
-                  <a:lnTo>
-                    <a:pt x="2578410" y="178748"/>
-                  </a:lnTo>
-                  <a:lnTo>
-                    <a:pt x="2506788" y="183663"/>
-                  </a:lnTo>
-                  <a:lnTo>
-                    <a:pt x="2435165" y="188540"/>
-                  </a:lnTo>
-                  <a:lnTo>
-                    <a:pt x="2363543" y="193380"/>
-                  </a:lnTo>
-                  <a:lnTo>
-                    <a:pt x="2291920" y="198184"/>
-                  </a:lnTo>
-                  <a:lnTo>
-                    <a:pt x="2220298" y="202951"/>
-                  </a:lnTo>
-                  <a:lnTo>
-                    <a:pt x="2148675" y="207682"/>
-                  </a:lnTo>
-                  <a:lnTo>
-                    <a:pt x="2077053" y="212377"/>
-                  </a:lnTo>
-                  <a:lnTo>
-                    <a:pt x="2005430" y="217037"/>
-                  </a:lnTo>
-                  <a:lnTo>
-                    <a:pt x="1933808" y="221661"/>
-                  </a:lnTo>
-                  <a:lnTo>
-                    <a:pt x="1862185" y="226250"/>
-                  </a:lnTo>
-                  <a:lnTo>
-                    <a:pt x="1790563" y="230804"/>
-                  </a:lnTo>
-                  <a:lnTo>
-                    <a:pt x="1718940" y="235324"/>
-                  </a:lnTo>
-                  <a:lnTo>
-                    <a:pt x="1647318" y="239809"/>
-                  </a:lnTo>
-                  <a:lnTo>
-                    <a:pt x="1575695" y="244261"/>
-                  </a:lnTo>
-                  <a:lnTo>
-                    <a:pt x="1504073" y="248679"/>
-                  </a:lnTo>
-                  <a:lnTo>
-                    <a:pt x="1432450" y="253063"/>
-                  </a:lnTo>
-                  <a:lnTo>
-                    <a:pt x="1360827" y="257414"/>
-                  </a:lnTo>
-                  <a:lnTo>
-                    <a:pt x="1289205" y="261732"/>
-                  </a:lnTo>
-                  <a:lnTo>
-                    <a:pt x="1217582" y="266017"/>
-                  </a:lnTo>
-                  <a:lnTo>
-                    <a:pt x="1145960" y="270270"/>
-                  </a:lnTo>
-                  <a:lnTo>
-                    <a:pt x="1074337" y="274491"/>
-                  </a:lnTo>
-                  <a:lnTo>
-                    <a:pt x="1002715" y="278679"/>
-                  </a:lnTo>
-                  <a:lnTo>
-                    <a:pt x="931092" y="282836"/>
-                  </a:lnTo>
-                  <a:lnTo>
-                    <a:pt x="859470" y="286961"/>
-                  </a:lnTo>
-                  <a:lnTo>
-                    <a:pt x="787847" y="291055"/>
-                  </a:lnTo>
-                  <a:lnTo>
-                    <a:pt x="716225" y="295118"/>
-                  </a:lnTo>
-                  <a:lnTo>
-                    <a:pt x="644602" y="299150"/>
-                  </a:lnTo>
-                  <a:lnTo>
-                    <a:pt x="572980" y="303152"/>
-                  </a:lnTo>
-                  <a:lnTo>
-                    <a:pt x="501357" y="307123"/>
-                  </a:lnTo>
-                  <a:lnTo>
-                    <a:pt x="429735" y="311064"/>
-                  </a:lnTo>
-                  <a:lnTo>
-                    <a:pt x="358112" y="314975"/>
-                  </a:lnTo>
-                  <a:lnTo>
-                    <a:pt x="286490" y="318857"/>
-                  </a:lnTo>
-                  <a:lnTo>
-                    <a:pt x="214867" y="322709"/>
-                  </a:lnTo>
-                  <a:lnTo>
-                    <a:pt x="143245" y="326532"/>
-                  </a:lnTo>
-                  <a:lnTo>
-                    <a:pt x="71622" y="330326"/>
-                  </a:lnTo>
-                  <a:lnTo>
-                    <a:pt x="0" y="334091"/>
+                    <a:pt x="7019007" y="1335687"/>
+                  </a:lnTo>
+                  <a:lnTo>
+                    <a:pt x="6947385" y="1326690"/>
+                  </a:lnTo>
+                  <a:lnTo>
+                    <a:pt x="6875762" y="1317164"/>
+                  </a:lnTo>
+                  <a:lnTo>
+                    <a:pt x="6804139" y="1307078"/>
+                  </a:lnTo>
+                  <a:lnTo>
+                    <a:pt x="6732517" y="1296400"/>
+                  </a:lnTo>
+                  <a:lnTo>
+                    <a:pt x="6660894" y="1285094"/>
+                  </a:lnTo>
+                  <a:lnTo>
+                    <a:pt x="6589272" y="1273124"/>
+                  </a:lnTo>
+                  <a:lnTo>
+                    <a:pt x="6517649" y="1260450"/>
+                  </a:lnTo>
+                  <a:lnTo>
+                    <a:pt x="6446027" y="1247032"/>
+                  </a:lnTo>
+                  <a:lnTo>
+                    <a:pt x="6374404" y="1232825"/>
+                  </a:lnTo>
+                  <a:lnTo>
+                    <a:pt x="6302782" y="1217783"/>
+                  </a:lnTo>
+                  <a:lnTo>
+                    <a:pt x="6231159" y="1201857"/>
+                  </a:lnTo>
+                  <a:lnTo>
+                    <a:pt x="6159537" y="1184995"/>
+                  </a:lnTo>
+                  <a:lnTo>
+                    <a:pt x="6087914" y="1167143"/>
+                  </a:lnTo>
+                  <a:lnTo>
+                    <a:pt x="6016292" y="1148241"/>
+                  </a:lnTo>
+                  <a:lnTo>
+                    <a:pt x="5944669" y="1128229"/>
+                  </a:lnTo>
+                  <a:lnTo>
+                    <a:pt x="5873047" y="1107041"/>
+                  </a:lnTo>
+                  <a:lnTo>
+                    <a:pt x="5801424" y="1084608"/>
+                  </a:lnTo>
+                  <a:lnTo>
+                    <a:pt x="5729802" y="1060856"/>
+                  </a:lnTo>
+                  <a:lnTo>
+                    <a:pt x="5658179" y="1035709"/>
+                  </a:lnTo>
+                  <a:lnTo>
+                    <a:pt x="5586557" y="1009084"/>
+                  </a:lnTo>
+                  <a:lnTo>
+                    <a:pt x="5514934" y="980894"/>
+                  </a:lnTo>
+                  <a:lnTo>
+                    <a:pt x="5443311" y="951048"/>
+                  </a:lnTo>
+                  <a:lnTo>
+                    <a:pt x="5371689" y="919448"/>
+                  </a:lnTo>
+                  <a:lnTo>
+                    <a:pt x="5300066" y="885991"/>
+                  </a:lnTo>
+                  <a:lnTo>
+                    <a:pt x="5228444" y="850568"/>
+                  </a:lnTo>
+                  <a:lnTo>
+                    <a:pt x="5156821" y="813063"/>
+                  </a:lnTo>
+                  <a:lnTo>
+                    <a:pt x="5085199" y="773354"/>
+                  </a:lnTo>
+                  <a:lnTo>
+                    <a:pt x="5013576" y="731312"/>
+                  </a:lnTo>
+                  <a:lnTo>
+                    <a:pt x="4941954" y="686800"/>
+                  </a:lnTo>
+                  <a:lnTo>
+                    <a:pt x="4870331" y="656418"/>
+                  </a:lnTo>
+                  <a:lnTo>
+                    <a:pt x="4798709" y="649270"/>
+                  </a:lnTo>
+                  <a:lnTo>
+                    <a:pt x="4727086" y="642061"/>
+                  </a:lnTo>
+                  <a:lnTo>
+                    <a:pt x="4655464" y="634790"/>
+                  </a:lnTo>
+                  <a:lnTo>
+                    <a:pt x="4583841" y="627456"/>
+                  </a:lnTo>
+                  <a:lnTo>
+                    <a:pt x="4512219" y="620060"/>
+                  </a:lnTo>
+                  <a:lnTo>
+                    <a:pt x="4440596" y="612600"/>
+                  </a:lnTo>
+                  <a:lnTo>
+                    <a:pt x="4368974" y="605076"/>
+                  </a:lnTo>
+                  <a:lnTo>
+                    <a:pt x="4297351" y="597487"/>
+                  </a:lnTo>
+                  <a:lnTo>
+                    <a:pt x="4225729" y="589833"/>
+                  </a:lnTo>
+                  <a:lnTo>
+                    <a:pt x="4154106" y="582114"/>
+                  </a:lnTo>
+                  <a:lnTo>
+                    <a:pt x="4082483" y="574328"/>
+                  </a:lnTo>
+                  <a:lnTo>
+                    <a:pt x="4010861" y="566475"/>
+                  </a:lnTo>
+                  <a:lnTo>
+                    <a:pt x="3939238" y="558555"/>
+                  </a:lnTo>
+                  <a:lnTo>
+                    <a:pt x="3867616" y="550567"/>
+                  </a:lnTo>
+                  <a:lnTo>
+                    <a:pt x="3795993" y="542510"/>
+                  </a:lnTo>
+                  <a:lnTo>
+                    <a:pt x="3724371" y="534384"/>
+                  </a:lnTo>
+                  <a:lnTo>
+                    <a:pt x="3652748" y="526188"/>
+                  </a:lnTo>
+                  <a:lnTo>
+                    <a:pt x="3581126" y="517922"/>
+                  </a:lnTo>
+                  <a:lnTo>
+                    <a:pt x="3509503" y="509585"/>
+                  </a:lnTo>
+                  <a:lnTo>
+                    <a:pt x="3437881" y="501177"/>
+                  </a:lnTo>
+                  <a:lnTo>
+                    <a:pt x="3366258" y="492696"/>
+                  </a:lnTo>
+                  <a:lnTo>
+                    <a:pt x="3294636" y="484142"/>
+                  </a:lnTo>
+                  <a:lnTo>
+                    <a:pt x="3223013" y="475515"/>
+                  </a:lnTo>
+                  <a:lnTo>
+                    <a:pt x="3151391" y="466814"/>
+                  </a:lnTo>
+                  <a:lnTo>
+                    <a:pt x="3079768" y="458038"/>
+                  </a:lnTo>
+                  <a:lnTo>
+                    <a:pt x="3008146" y="449186"/>
+                  </a:lnTo>
+                  <a:lnTo>
+                    <a:pt x="2936523" y="440259"/>
+                  </a:lnTo>
+                  <a:lnTo>
+                    <a:pt x="2864901" y="431255"/>
+                  </a:lnTo>
+                  <a:lnTo>
+                    <a:pt x="2793278" y="422174"/>
+                  </a:lnTo>
+                  <a:lnTo>
+                    <a:pt x="2721655" y="413014"/>
+                  </a:lnTo>
+                  <a:lnTo>
+                    <a:pt x="2650033" y="403776"/>
+                  </a:lnTo>
+                  <a:lnTo>
+                    <a:pt x="2578410" y="394459"/>
+                  </a:lnTo>
+                  <a:lnTo>
+                    <a:pt x="2506788" y="385062"/>
+                  </a:lnTo>
+                  <a:lnTo>
+                    <a:pt x="2435165" y="375584"/>
+                  </a:lnTo>
+                  <a:lnTo>
+                    <a:pt x="2363543" y="366024"/>
+                  </a:lnTo>
+                  <a:lnTo>
+                    <a:pt x="2291920" y="356383"/>
+                  </a:lnTo>
+                  <a:lnTo>
+                    <a:pt x="2220298" y="346659"/>
+                  </a:lnTo>
+                  <a:lnTo>
+                    <a:pt x="2148675" y="336851"/>
+                  </a:lnTo>
+                  <a:lnTo>
+                    <a:pt x="2077053" y="326959"/>
+                  </a:lnTo>
+                  <a:lnTo>
+                    <a:pt x="2005430" y="316982"/>
+                  </a:lnTo>
+                  <a:lnTo>
+                    <a:pt x="1933808" y="306919"/>
+                  </a:lnTo>
+                  <a:lnTo>
+                    <a:pt x="1862185" y="296770"/>
+                  </a:lnTo>
+                  <a:lnTo>
+                    <a:pt x="1790563" y="286534"/>
+                  </a:lnTo>
+                  <a:lnTo>
+                    <a:pt x="1718940" y="276210"/>
+                  </a:lnTo>
+                  <a:lnTo>
+                    <a:pt x="1647318" y="265797"/>
+                  </a:lnTo>
+                  <a:lnTo>
+                    <a:pt x="1575695" y="255295"/>
+                  </a:lnTo>
+                  <a:lnTo>
+                    <a:pt x="1504073" y="244703"/>
+                  </a:lnTo>
+                  <a:lnTo>
+                    <a:pt x="1432450" y="234020"/>
+                  </a:lnTo>
+                  <a:lnTo>
+                    <a:pt x="1360827" y="223245"/>
+                  </a:lnTo>
+                  <a:lnTo>
+                    <a:pt x="1289205" y="212377"/>
+                  </a:lnTo>
+                  <a:lnTo>
+                    <a:pt x="1217582" y="201416"/>
+                  </a:lnTo>
+                  <a:lnTo>
+                    <a:pt x="1145960" y="190361"/>
+                  </a:lnTo>
+                  <a:lnTo>
+                    <a:pt x="1074337" y="179211"/>
+                  </a:lnTo>
+                  <a:lnTo>
+                    <a:pt x="1002715" y="167966"/>
+                  </a:lnTo>
+                  <a:lnTo>
+                    <a:pt x="931092" y="156624"/>
+                  </a:lnTo>
+                  <a:lnTo>
+                    <a:pt x="859470" y="145184"/>
+                  </a:lnTo>
+                  <a:lnTo>
+                    <a:pt x="787847" y="133646"/>
+                  </a:lnTo>
+                  <a:lnTo>
+                    <a:pt x="716225" y="122009"/>
+                  </a:lnTo>
+                  <a:lnTo>
+                    <a:pt x="644602" y="110272"/>
+                  </a:lnTo>
+                  <a:lnTo>
+                    <a:pt x="572980" y="98435"/>
+                  </a:lnTo>
+                  <a:lnTo>
+                    <a:pt x="501357" y="86495"/>
+                  </a:lnTo>
+                  <a:lnTo>
+                    <a:pt x="429735" y="74453"/>
+                  </a:lnTo>
+                  <a:lnTo>
+                    <a:pt x="358112" y="62308"/>
+                  </a:lnTo>
+                  <a:lnTo>
+                    <a:pt x="286490" y="50059"/>
+                  </a:lnTo>
+                  <a:lnTo>
+                    <a:pt x="214867" y="37704"/>
+                  </a:lnTo>
+                  <a:lnTo>
+                    <a:pt x="143245" y="25243"/>
+                  </a:lnTo>
+                  <a:lnTo>
+                    <a:pt x="71622" y="12675"/>
+                  </a:lnTo>
+                  <a:lnTo>
+                    <a:pt x="0" y="0"/>
                   </a:lnTo>
                 </a:path>
               </a:pathLst>
@@ -4022,273 +4028,240 @@
           </p:nvSpPr>
           <p:spPr>
             <a:xfrm>
-              <a:off x="2126574" y="2073503"/>
-              <a:ext cx="6136104" cy="3109893"/>
+              <a:off x="2940845" y="2073503"/>
+              <a:ext cx="5321834" cy="3179866"/>
             </a:xfrm>
             <a:custGeom>
               <a:avLst/>
               <a:pathLst>
-                <a:path w="6136104" h="3109893">
+                <a:path w="5321834" h="3179866">
                   <a:moveTo>
                     <a:pt x="0" y="0"/>
                   </a:moveTo>
                   <a:lnTo>
-                    <a:pt x="48190" y="60787"/>
-                  </a:lnTo>
-                  <a:lnTo>
-                    <a:pt x="119812" y="148810"/>
-                  </a:lnTo>
-                  <a:lnTo>
-                    <a:pt x="191435" y="234569"/>
-                  </a:lnTo>
-                  <a:lnTo>
-                    <a:pt x="263057" y="318122"/>
-                  </a:lnTo>
-                  <a:lnTo>
-                    <a:pt x="334680" y="399527"/>
-                  </a:lnTo>
-                  <a:lnTo>
-                    <a:pt x="406302" y="478839"/>
-                  </a:lnTo>
-                  <a:lnTo>
-                    <a:pt x="477925" y="556111"/>
-                  </a:lnTo>
-                  <a:lnTo>
-                    <a:pt x="549547" y="631396"/>
-                  </a:lnTo>
-                  <a:lnTo>
-                    <a:pt x="621170" y="704745"/>
-                  </a:lnTo>
-                  <a:lnTo>
-                    <a:pt x="692792" y="776208"/>
-                  </a:lnTo>
-                  <a:lnTo>
-                    <a:pt x="764415" y="845833"/>
-                  </a:lnTo>
-                  <a:lnTo>
-                    <a:pt x="836037" y="913668"/>
-                  </a:lnTo>
-                  <a:lnTo>
-                    <a:pt x="907660" y="979758"/>
-                  </a:lnTo>
-                  <a:lnTo>
-                    <a:pt x="979282" y="1044149"/>
-                  </a:lnTo>
-                  <a:lnTo>
-                    <a:pt x="1050905" y="1106884"/>
-                  </a:lnTo>
-                  <a:lnTo>
-                    <a:pt x="1122527" y="1168006"/>
-                  </a:lnTo>
-                  <a:lnTo>
-                    <a:pt x="1194150" y="1227556"/>
-                  </a:lnTo>
-                  <a:lnTo>
-                    <a:pt x="1265772" y="1285575"/>
-                  </a:lnTo>
-                  <a:lnTo>
-                    <a:pt x="1337395" y="1342101"/>
-                  </a:lnTo>
-                  <a:lnTo>
-                    <a:pt x="1409018" y="1397174"/>
-                  </a:lnTo>
-                  <a:lnTo>
-                    <a:pt x="1480640" y="1450831"/>
-                  </a:lnTo>
-                  <a:lnTo>
-                    <a:pt x="1552263" y="1503108"/>
-                  </a:lnTo>
-                  <a:lnTo>
-                    <a:pt x="1623885" y="1554041"/>
-                  </a:lnTo>
-                  <a:lnTo>
-                    <a:pt x="1695508" y="1603664"/>
-                  </a:lnTo>
-                  <a:lnTo>
-                    <a:pt x="1767130" y="1652011"/>
-                  </a:lnTo>
-                  <a:lnTo>
-                    <a:pt x="1838753" y="1699114"/>
-                  </a:lnTo>
-                  <a:lnTo>
-                    <a:pt x="1910375" y="1745007"/>
-                  </a:lnTo>
-                  <a:lnTo>
-                    <a:pt x="1981998" y="1789719"/>
-                  </a:lnTo>
-                  <a:lnTo>
-                    <a:pt x="2053620" y="1833281"/>
-                  </a:lnTo>
-                  <a:lnTo>
-                    <a:pt x="2125243" y="1875724"/>
-                  </a:lnTo>
-                  <a:lnTo>
-                    <a:pt x="2196865" y="1917075"/>
-                  </a:lnTo>
-                  <a:lnTo>
-                    <a:pt x="2268488" y="1957362"/>
-                  </a:lnTo>
-                  <a:lnTo>
-                    <a:pt x="2340110" y="1996613"/>
-                  </a:lnTo>
-                  <a:lnTo>
-                    <a:pt x="2411733" y="2034856"/>
-                  </a:lnTo>
-                  <a:lnTo>
-                    <a:pt x="2483355" y="2072114"/>
-                  </a:lnTo>
-                  <a:lnTo>
-                    <a:pt x="2554978" y="2108415"/>
-                  </a:lnTo>
-                  <a:lnTo>
-                    <a:pt x="2626600" y="2143782"/>
-                  </a:lnTo>
-                  <a:lnTo>
-                    <a:pt x="2698223" y="2178239"/>
-                  </a:lnTo>
-                  <a:lnTo>
-                    <a:pt x="2769846" y="2211811"/>
-                  </a:lnTo>
-                  <a:lnTo>
-                    <a:pt x="2841468" y="2244519"/>
-                  </a:lnTo>
-                  <a:lnTo>
-                    <a:pt x="2913091" y="2276386"/>
-                  </a:lnTo>
-                  <a:lnTo>
-                    <a:pt x="2984713" y="2307434"/>
-                  </a:lnTo>
-                  <a:lnTo>
-                    <a:pt x="3056336" y="2337683"/>
-                  </a:lnTo>
-                  <a:lnTo>
-                    <a:pt x="3127958" y="2367155"/>
-                  </a:lnTo>
-                  <a:lnTo>
-                    <a:pt x="3199581" y="2395868"/>
-                  </a:lnTo>
-                  <a:lnTo>
-                    <a:pt x="3271203" y="2423843"/>
-                  </a:lnTo>
-                  <a:lnTo>
-                    <a:pt x="3342826" y="2451099"/>
-                  </a:lnTo>
-                  <a:lnTo>
-                    <a:pt x="3414448" y="2477654"/>
-                  </a:lnTo>
-                  <a:lnTo>
-                    <a:pt x="3486071" y="2503526"/>
-                  </a:lnTo>
-                  <a:lnTo>
-                    <a:pt x="3557693" y="2528732"/>
-                  </a:lnTo>
-                  <a:lnTo>
-                    <a:pt x="3629316" y="2553291"/>
-                  </a:lnTo>
-                  <a:lnTo>
-                    <a:pt x="3700938" y="2577218"/>
-                  </a:lnTo>
-                  <a:lnTo>
-                    <a:pt x="3772561" y="2600530"/>
-                  </a:lnTo>
-                  <a:lnTo>
-                    <a:pt x="3844183" y="2623242"/>
-                  </a:lnTo>
-                  <a:lnTo>
-                    <a:pt x="3915806" y="2645370"/>
-                  </a:lnTo>
-                  <a:lnTo>
-                    <a:pt x="3987428" y="2666929"/>
-                  </a:lnTo>
-                  <a:lnTo>
-                    <a:pt x="4059051" y="2687934"/>
-                  </a:lnTo>
-                  <a:lnTo>
-                    <a:pt x="4130673" y="2708398"/>
-                  </a:lnTo>
-                  <a:lnTo>
-                    <a:pt x="4202296" y="2728337"/>
-                  </a:lnTo>
-                  <a:lnTo>
-                    <a:pt x="4273919" y="2747762"/>
-                  </a:lnTo>
-                  <a:lnTo>
-                    <a:pt x="4345541" y="2766688"/>
-                  </a:lnTo>
-                  <a:lnTo>
-                    <a:pt x="4417164" y="2785128"/>
-                  </a:lnTo>
-                  <a:lnTo>
-                    <a:pt x="4488786" y="2803093"/>
-                  </a:lnTo>
-                  <a:lnTo>
-                    <a:pt x="4560409" y="2820596"/>
-                  </a:lnTo>
-                  <a:lnTo>
-                    <a:pt x="4632031" y="2837649"/>
-                  </a:lnTo>
-                  <a:lnTo>
-                    <a:pt x="4703654" y="2854264"/>
-                  </a:lnTo>
-                  <a:lnTo>
-                    <a:pt x="4775276" y="2870451"/>
-                  </a:lnTo>
-                  <a:lnTo>
-                    <a:pt x="4846899" y="2886222"/>
-                  </a:lnTo>
-                  <a:lnTo>
-                    <a:pt x="4918521" y="2901588"/>
-                  </a:lnTo>
-                  <a:lnTo>
-                    <a:pt x="4990144" y="2916558"/>
-                  </a:lnTo>
-                  <a:lnTo>
-                    <a:pt x="5061766" y="2931144"/>
-                  </a:lnTo>
-                  <a:lnTo>
-                    <a:pt x="5133389" y="2945354"/>
-                  </a:lnTo>
-                  <a:lnTo>
-                    <a:pt x="5205011" y="2959199"/>
-                  </a:lnTo>
-                  <a:lnTo>
-                    <a:pt x="5276634" y="2972688"/>
-                  </a:lnTo>
-                  <a:lnTo>
-                    <a:pt x="5348256" y="2985830"/>
-                  </a:lnTo>
-                  <a:lnTo>
-                    <a:pt x="5419879" y="2998634"/>
-                  </a:lnTo>
-                  <a:lnTo>
-                    <a:pt x="5491501" y="3011109"/>
-                  </a:lnTo>
-                  <a:lnTo>
-                    <a:pt x="5563124" y="3023263"/>
-                  </a:lnTo>
-                  <a:lnTo>
-                    <a:pt x="5634747" y="3035104"/>
-                  </a:lnTo>
-                  <a:lnTo>
-                    <a:pt x="5706369" y="3046641"/>
-                  </a:lnTo>
-                  <a:lnTo>
-                    <a:pt x="5777992" y="3057881"/>
-                  </a:lnTo>
-                  <a:lnTo>
-                    <a:pt x="5849614" y="3068833"/>
-                  </a:lnTo>
-                  <a:lnTo>
-                    <a:pt x="5921237" y="3079502"/>
-                  </a:lnTo>
-                  <a:lnTo>
-                    <a:pt x="5992859" y="3089898"/>
-                  </a:lnTo>
-                  <a:lnTo>
-                    <a:pt x="6064482" y="3100026"/>
-                  </a:lnTo>
-                  <a:lnTo>
-                    <a:pt x="6136104" y="3109893"/>
+                    <a:pt x="21767" y="34977"/>
+                  </a:lnTo>
+                  <a:lnTo>
+                    <a:pt x="93389" y="146349"/>
+                  </a:lnTo>
+                  <a:lnTo>
+                    <a:pt x="165012" y="254124"/>
+                  </a:lnTo>
+                  <a:lnTo>
+                    <a:pt x="236634" y="358419"/>
+                  </a:lnTo>
+                  <a:lnTo>
+                    <a:pt x="308257" y="459346"/>
+                  </a:lnTo>
+                  <a:lnTo>
+                    <a:pt x="379879" y="557014"/>
+                  </a:lnTo>
+                  <a:lnTo>
+                    <a:pt x="451502" y="651528"/>
+                  </a:lnTo>
+                  <a:lnTo>
+                    <a:pt x="523124" y="742989"/>
+                  </a:lnTo>
+                  <a:lnTo>
+                    <a:pt x="594747" y="831497"/>
+                  </a:lnTo>
+                  <a:lnTo>
+                    <a:pt x="666369" y="917147"/>
+                  </a:lnTo>
+                  <a:lnTo>
+                    <a:pt x="737992" y="1000031"/>
+                  </a:lnTo>
+                  <a:lnTo>
+                    <a:pt x="809615" y="1080238"/>
+                  </a:lnTo>
+                  <a:lnTo>
+                    <a:pt x="881237" y="1157855"/>
+                  </a:lnTo>
+                  <a:lnTo>
+                    <a:pt x="952860" y="1232966"/>
+                  </a:lnTo>
+                  <a:lnTo>
+                    <a:pt x="1024482" y="1305651"/>
+                  </a:lnTo>
+                  <a:lnTo>
+                    <a:pt x="1096105" y="1375989"/>
+                  </a:lnTo>
+                  <a:lnTo>
+                    <a:pt x="1167727" y="1444055"/>
+                  </a:lnTo>
+                  <a:lnTo>
+                    <a:pt x="1239350" y="1509923"/>
+                  </a:lnTo>
+                  <a:lnTo>
+                    <a:pt x="1310972" y="1573665"/>
+                  </a:lnTo>
+                  <a:lnTo>
+                    <a:pt x="1382595" y="1635347"/>
+                  </a:lnTo>
+                  <a:lnTo>
+                    <a:pt x="1454217" y="1695038"/>
+                  </a:lnTo>
+                  <a:lnTo>
+                    <a:pt x="1525840" y="1752801"/>
+                  </a:lnTo>
+                  <a:lnTo>
+                    <a:pt x="1597462" y="1808699"/>
+                  </a:lnTo>
+                  <a:lnTo>
+                    <a:pt x="1669085" y="1862792"/>
+                  </a:lnTo>
+                  <a:lnTo>
+                    <a:pt x="1740707" y="1915138"/>
+                  </a:lnTo>
+                  <a:lnTo>
+                    <a:pt x="1812330" y="1965793"/>
+                  </a:lnTo>
+                  <a:lnTo>
+                    <a:pt x="1883952" y="2014813"/>
+                  </a:lnTo>
+                  <a:lnTo>
+                    <a:pt x="1955575" y="2062250"/>
+                  </a:lnTo>
+                  <a:lnTo>
+                    <a:pt x="2027197" y="2108154"/>
+                  </a:lnTo>
+                  <a:lnTo>
+                    <a:pt x="2098820" y="2152577"/>
+                  </a:lnTo>
+                  <a:lnTo>
+                    <a:pt x="2170443" y="2195565"/>
+                  </a:lnTo>
+                  <a:lnTo>
+                    <a:pt x="2242065" y="2237164"/>
+                  </a:lnTo>
+                  <a:lnTo>
+                    <a:pt x="2313688" y="2277420"/>
+                  </a:lnTo>
+                  <a:lnTo>
+                    <a:pt x="2385310" y="2316377"/>
+                  </a:lnTo>
+                  <a:lnTo>
+                    <a:pt x="2456933" y="2354075"/>
+                  </a:lnTo>
+                  <a:lnTo>
+                    <a:pt x="2528555" y="2390555"/>
+                  </a:lnTo>
+                  <a:lnTo>
+                    <a:pt x="2600178" y="2425858"/>
+                  </a:lnTo>
+                  <a:lnTo>
+                    <a:pt x="2671800" y="2460021"/>
+                  </a:lnTo>
+                  <a:lnTo>
+                    <a:pt x="2743423" y="2493080"/>
+                  </a:lnTo>
+                  <a:lnTo>
+                    <a:pt x="2815045" y="2525072"/>
+                  </a:lnTo>
+                  <a:lnTo>
+                    <a:pt x="2886668" y="2556031"/>
+                  </a:lnTo>
+                  <a:lnTo>
+                    <a:pt x="2958290" y="2585990"/>
+                  </a:lnTo>
+                  <a:lnTo>
+                    <a:pt x="3029913" y="2614981"/>
+                  </a:lnTo>
+                  <a:lnTo>
+                    <a:pt x="3101535" y="2643037"/>
+                  </a:lnTo>
+                  <a:lnTo>
+                    <a:pt x="3173158" y="2670186"/>
+                  </a:lnTo>
+                  <a:lnTo>
+                    <a:pt x="3244780" y="2696458"/>
+                  </a:lnTo>
+                  <a:lnTo>
+                    <a:pt x="3316403" y="2721882"/>
+                  </a:lnTo>
+                  <a:lnTo>
+                    <a:pt x="3388025" y="2746485"/>
+                  </a:lnTo>
+                  <a:lnTo>
+                    <a:pt x="3459648" y="2770294"/>
+                  </a:lnTo>
+                  <a:lnTo>
+                    <a:pt x="3531271" y="2793334"/>
+                  </a:lnTo>
+                  <a:lnTo>
+                    <a:pt x="3602893" y="2815629"/>
+                  </a:lnTo>
+                  <a:lnTo>
+                    <a:pt x="3674516" y="2837205"/>
+                  </a:lnTo>
+                  <a:lnTo>
+                    <a:pt x="3746138" y="2858084"/>
+                  </a:lnTo>
+                  <a:lnTo>
+                    <a:pt x="3817761" y="2878289"/>
+                  </a:lnTo>
+                  <a:lnTo>
+                    <a:pt x="3889383" y="2897841"/>
+                  </a:lnTo>
+                  <a:lnTo>
+                    <a:pt x="3961006" y="2916762"/>
+                  </a:lnTo>
+                  <a:lnTo>
+                    <a:pt x="4032628" y="2935071"/>
+                  </a:lnTo>
+                  <a:lnTo>
+                    <a:pt x="4104251" y="2952790"/>
+                  </a:lnTo>
+                  <a:lnTo>
+                    <a:pt x="4175873" y="2969936"/>
+                  </a:lnTo>
+                  <a:lnTo>
+                    <a:pt x="4247496" y="2986529"/>
+                  </a:lnTo>
+                  <a:lnTo>
+                    <a:pt x="4319118" y="3002586"/>
+                  </a:lnTo>
+                  <a:lnTo>
+                    <a:pt x="4390741" y="3018124"/>
+                  </a:lnTo>
+                  <a:lnTo>
+                    <a:pt x="4462363" y="3033160"/>
+                  </a:lnTo>
+                  <a:lnTo>
+                    <a:pt x="4533986" y="3047711"/>
+                  </a:lnTo>
+                  <a:lnTo>
+                    <a:pt x="4605608" y="3061792"/>
+                  </a:lnTo>
+                  <a:lnTo>
+                    <a:pt x="4677231" y="3075419"/>
+                  </a:lnTo>
+                  <a:lnTo>
+                    <a:pt x="4748853" y="3088605"/>
+                  </a:lnTo>
+                  <a:lnTo>
+                    <a:pt x="4820476" y="3101365"/>
+                  </a:lnTo>
+                  <a:lnTo>
+                    <a:pt x="4892099" y="3113714"/>
+                  </a:lnTo>
+                  <a:lnTo>
+                    <a:pt x="4963721" y="3125663"/>
+                  </a:lnTo>
+                  <a:lnTo>
+                    <a:pt x="5035344" y="3137227"/>
+                  </a:lnTo>
+                  <a:lnTo>
+                    <a:pt x="5106966" y="3148417"/>
+                  </a:lnTo>
+                  <a:lnTo>
+                    <a:pt x="5178589" y="3159246"/>
+                  </a:lnTo>
+                  <a:lnTo>
+                    <a:pt x="5250211" y="3169725"/>
+                  </a:lnTo>
+                  <a:lnTo>
+                    <a:pt x="5321834" y="3179866"/>
                   </a:lnTo>
                 </a:path>
               </a:pathLst>
@@ -5028,7 +5001,7 @@
                   <a:latin typeface="Helvetica"/>
                   <a:cs typeface="Helvetica"/>
                 </a:rPr>
-                <a:t>subHR per 1 mL/min: 0.97 (0.93-1.01)  |  per IQR (Δ = 18.2): 0.54 (0.25-1.20)  |  IQR: [-11.5, 6.7]</a:t>
+                <a:t>subHR per 1 mL/min: 0.96 (0.93-0.99)  |  per IQR (Δ = 18.2): 0.46 (0.26-0.82)  |  IQR: [-11.5, 6.7]</a:t>
               </a:r>
             </a:p>
           </p:txBody>

--- a/docs/plots/carbo/jx_carbo_linsubhr_egfrdisc_anemia3.pptx
+++ b/docs/plots/carbo/jx_carbo_linsubhr_egfrdisc_anemia3.pptx
@@ -3003,482 +3003,479 @@
           <p:spPr>
             <a:xfrm>
               <a:off x="1172049" y="2073503"/>
-              <a:ext cx="7090630" cy="3339135"/>
+              <a:ext cx="7090630" cy="3350245"/>
             </a:xfrm>
             <a:custGeom>
               <a:avLst/>
               <a:pathLst>
-                <a:path w="7090630" h="3339135">
+                <a:path w="7090630" h="3350245">
                   <a:moveTo>
-                    <a:pt x="3100109" y="0"/>
+                    <a:pt x="3178969" y="0"/>
                   </a:moveTo>
                   <a:lnTo>
-                    <a:pt x="3151391" y="140658"/>
-                  </a:lnTo>
-                  <a:lnTo>
-                    <a:pt x="3223013" y="326206"/>
-                  </a:lnTo>
-                  <a:lnTo>
-                    <a:pt x="3294636" y="501457"/>
-                  </a:lnTo>
-                  <a:lnTo>
-                    <a:pt x="3366258" y="666980"/>
-                  </a:lnTo>
-                  <a:lnTo>
-                    <a:pt x="3437881" y="823317"/>
-                  </a:lnTo>
-                  <a:lnTo>
-                    <a:pt x="3509503" y="970976"/>
-                  </a:lnTo>
-                  <a:lnTo>
-                    <a:pt x="3581126" y="1110440"/>
-                  </a:lnTo>
-                  <a:lnTo>
-                    <a:pt x="3652748" y="1242164"/>
-                  </a:lnTo>
-                  <a:lnTo>
-                    <a:pt x="3724371" y="1366576"/>
-                  </a:lnTo>
-                  <a:lnTo>
-                    <a:pt x="3795993" y="1484084"/>
-                  </a:lnTo>
-                  <a:lnTo>
-                    <a:pt x="3867616" y="1595069"/>
-                  </a:lnTo>
-                  <a:lnTo>
-                    <a:pt x="3939238" y="1699895"/>
-                  </a:lnTo>
-                  <a:lnTo>
-                    <a:pt x="4010861" y="1798902"/>
-                  </a:lnTo>
-                  <a:lnTo>
-                    <a:pt x="4082483" y="1892415"/>
-                  </a:lnTo>
-                  <a:lnTo>
-                    <a:pt x="4154106" y="1980737"/>
-                  </a:lnTo>
-                  <a:lnTo>
-                    <a:pt x="4225729" y="2064157"/>
-                  </a:lnTo>
-                  <a:lnTo>
-                    <a:pt x="4297351" y="2142948"/>
-                  </a:lnTo>
-                  <a:lnTo>
-                    <a:pt x="4368974" y="2217365"/>
-                  </a:lnTo>
-                  <a:lnTo>
-                    <a:pt x="4440596" y="2287652"/>
-                  </a:lnTo>
-                  <a:lnTo>
-                    <a:pt x="4512219" y="2354037"/>
-                  </a:lnTo>
-                  <a:lnTo>
-                    <a:pt x="4583841" y="2416739"/>
-                  </a:lnTo>
-                  <a:lnTo>
-                    <a:pt x="4655464" y="2475960"/>
-                  </a:lnTo>
-                  <a:lnTo>
-                    <a:pt x="4727086" y="2531894"/>
-                  </a:lnTo>
-                  <a:lnTo>
-                    <a:pt x="4798709" y="2584724"/>
-                  </a:lnTo>
-                  <a:lnTo>
-                    <a:pt x="4870331" y="2634622"/>
-                  </a:lnTo>
-                  <a:lnTo>
-                    <a:pt x="4941954" y="2658455"/>
-                  </a:lnTo>
-                  <a:lnTo>
-                    <a:pt x="5013576" y="2665482"/>
-                  </a:lnTo>
-                  <a:lnTo>
-                    <a:pt x="5085199" y="2672448"/>
-                  </a:lnTo>
-                  <a:lnTo>
-                    <a:pt x="5156821" y="2679356"/>
-                  </a:lnTo>
-                  <a:lnTo>
-                    <a:pt x="5228444" y="2686204"/>
-                  </a:lnTo>
-                  <a:lnTo>
-                    <a:pt x="5300066" y="2692995"/>
-                  </a:lnTo>
-                  <a:lnTo>
-                    <a:pt x="5371689" y="2699727"/>
-                  </a:lnTo>
-                  <a:lnTo>
-                    <a:pt x="5443311" y="2706402"/>
-                  </a:lnTo>
-                  <a:lnTo>
-                    <a:pt x="5514934" y="2713021"/>
-                  </a:lnTo>
-                  <a:lnTo>
-                    <a:pt x="5586557" y="2719583"/>
-                  </a:lnTo>
-                  <a:lnTo>
-                    <a:pt x="5658179" y="2726089"/>
-                  </a:lnTo>
-                  <a:lnTo>
-                    <a:pt x="5729802" y="2732540"/>
-                  </a:lnTo>
-                  <a:lnTo>
-                    <a:pt x="5801424" y="2738936"/>
-                  </a:lnTo>
-                  <a:lnTo>
-                    <a:pt x="5873047" y="2745277"/>
-                  </a:lnTo>
-                  <a:lnTo>
-                    <a:pt x="5944669" y="2751564"/>
-                  </a:lnTo>
-                  <a:lnTo>
-                    <a:pt x="6016292" y="2757798"/>
-                  </a:lnTo>
-                  <a:lnTo>
-                    <a:pt x="6087914" y="2763979"/>
-                  </a:lnTo>
-                  <a:lnTo>
-                    <a:pt x="6159537" y="2770107"/>
-                  </a:lnTo>
-                  <a:lnTo>
-                    <a:pt x="6231159" y="2776183"/>
-                  </a:lnTo>
-                  <a:lnTo>
-                    <a:pt x="6302782" y="2782207"/>
-                  </a:lnTo>
-                  <a:lnTo>
-                    <a:pt x="6374404" y="2788180"/>
-                  </a:lnTo>
-                  <a:lnTo>
-                    <a:pt x="6446027" y="2794103"/>
-                  </a:lnTo>
-                  <a:lnTo>
-                    <a:pt x="6517649" y="2799974"/>
-                  </a:lnTo>
-                  <a:lnTo>
-                    <a:pt x="6589272" y="2805796"/>
-                  </a:lnTo>
-                  <a:lnTo>
-                    <a:pt x="6660894" y="2811568"/>
-                  </a:lnTo>
-                  <a:lnTo>
-                    <a:pt x="6732517" y="2817291"/>
-                  </a:lnTo>
-                  <a:lnTo>
-                    <a:pt x="6804139" y="2822965"/>
-                  </a:lnTo>
-                  <a:lnTo>
-                    <a:pt x="6875762" y="2828591"/>
-                  </a:lnTo>
-                  <a:lnTo>
-                    <a:pt x="6947385" y="2834169"/>
-                  </a:lnTo>
-                  <a:lnTo>
-                    <a:pt x="7019007" y="2839700"/>
-                  </a:lnTo>
-                  <a:lnTo>
-                    <a:pt x="7090630" y="2845183"/>
-                  </a:lnTo>
-                  <a:lnTo>
-                    <a:pt x="7090630" y="3339135"/>
-                  </a:lnTo>
-                  <a:lnTo>
-                    <a:pt x="7019007" y="3330637"/>
-                  </a:lnTo>
-                  <a:lnTo>
-                    <a:pt x="6947385" y="3321640"/>
-                  </a:lnTo>
-                  <a:lnTo>
-                    <a:pt x="6875762" y="3312114"/>
-                  </a:lnTo>
-                  <a:lnTo>
-                    <a:pt x="6804139" y="3302028"/>
-                  </a:lnTo>
-                  <a:lnTo>
-                    <a:pt x="6732517" y="3291350"/>
-                  </a:lnTo>
-                  <a:lnTo>
-                    <a:pt x="6660894" y="3280044"/>
-                  </a:lnTo>
-                  <a:lnTo>
-                    <a:pt x="6589272" y="3268074"/>
-                  </a:lnTo>
-                  <a:lnTo>
-                    <a:pt x="6517649" y="3255400"/>
-                  </a:lnTo>
-                  <a:lnTo>
-                    <a:pt x="6446027" y="3241982"/>
-                  </a:lnTo>
-                  <a:lnTo>
-                    <a:pt x="6374404" y="3227775"/>
-                  </a:lnTo>
-                  <a:lnTo>
-                    <a:pt x="6302782" y="3212733"/>
-                  </a:lnTo>
-                  <a:lnTo>
-                    <a:pt x="6231159" y="3196807"/>
-                  </a:lnTo>
-                  <a:lnTo>
-                    <a:pt x="6159537" y="3179945"/>
-                  </a:lnTo>
-                  <a:lnTo>
-                    <a:pt x="6087914" y="3162093"/>
-                  </a:lnTo>
-                  <a:lnTo>
-                    <a:pt x="6016292" y="3143191"/>
-                  </a:lnTo>
-                  <a:lnTo>
-                    <a:pt x="5944669" y="3123179"/>
-                  </a:lnTo>
-                  <a:lnTo>
-                    <a:pt x="5873047" y="3101991"/>
-                  </a:lnTo>
-                  <a:lnTo>
-                    <a:pt x="5801424" y="3079558"/>
-                  </a:lnTo>
-                  <a:lnTo>
-                    <a:pt x="5729802" y="3055806"/>
-                  </a:lnTo>
-                  <a:lnTo>
-                    <a:pt x="5658179" y="3030659"/>
-                  </a:lnTo>
-                  <a:lnTo>
-                    <a:pt x="5586557" y="3004034"/>
-                  </a:lnTo>
-                  <a:lnTo>
-                    <a:pt x="5514934" y="2975844"/>
-                  </a:lnTo>
-                  <a:lnTo>
-                    <a:pt x="5443311" y="2945998"/>
-                  </a:lnTo>
-                  <a:lnTo>
-                    <a:pt x="5371689" y="2914398"/>
-                  </a:lnTo>
-                  <a:lnTo>
-                    <a:pt x="5300066" y="2880941"/>
-                  </a:lnTo>
-                  <a:lnTo>
-                    <a:pt x="5228444" y="2845518"/>
-                  </a:lnTo>
-                  <a:lnTo>
-                    <a:pt x="5156821" y="2808013"/>
-                  </a:lnTo>
-                  <a:lnTo>
-                    <a:pt x="5085199" y="2768304"/>
-                  </a:lnTo>
-                  <a:lnTo>
-                    <a:pt x="5013576" y="2726262"/>
-                  </a:lnTo>
-                  <a:lnTo>
-                    <a:pt x="4941954" y="2681750"/>
-                  </a:lnTo>
-                  <a:lnTo>
-                    <a:pt x="4870331" y="2651368"/>
-                  </a:lnTo>
-                  <a:lnTo>
-                    <a:pt x="4798709" y="2644220"/>
-                  </a:lnTo>
-                  <a:lnTo>
-                    <a:pt x="4727086" y="2637011"/>
-                  </a:lnTo>
-                  <a:lnTo>
-                    <a:pt x="4655464" y="2629740"/>
-                  </a:lnTo>
-                  <a:lnTo>
-                    <a:pt x="4583841" y="2622406"/>
-                  </a:lnTo>
-                  <a:lnTo>
-                    <a:pt x="4512219" y="2615010"/>
-                  </a:lnTo>
-                  <a:lnTo>
-                    <a:pt x="4440596" y="2607550"/>
-                  </a:lnTo>
-                  <a:lnTo>
-                    <a:pt x="4368974" y="2600026"/>
-                  </a:lnTo>
-                  <a:lnTo>
-                    <a:pt x="4297351" y="2592437"/>
-                  </a:lnTo>
-                  <a:lnTo>
-                    <a:pt x="4225729" y="2584783"/>
-                  </a:lnTo>
-                  <a:lnTo>
-                    <a:pt x="4154106" y="2577064"/>
-                  </a:lnTo>
-                  <a:lnTo>
-                    <a:pt x="4082483" y="2569278"/>
-                  </a:lnTo>
-                  <a:lnTo>
-                    <a:pt x="4010861" y="2561425"/>
-                  </a:lnTo>
-                  <a:lnTo>
-                    <a:pt x="3939238" y="2553505"/>
-                  </a:lnTo>
-                  <a:lnTo>
-                    <a:pt x="3867616" y="2545517"/>
-                  </a:lnTo>
-                  <a:lnTo>
-                    <a:pt x="3795993" y="2537460"/>
-                  </a:lnTo>
-                  <a:lnTo>
-                    <a:pt x="3724371" y="2529334"/>
-                  </a:lnTo>
-                  <a:lnTo>
-                    <a:pt x="3652748" y="2521138"/>
-                  </a:lnTo>
-                  <a:lnTo>
-                    <a:pt x="3581126" y="2512872"/>
-                  </a:lnTo>
-                  <a:lnTo>
-                    <a:pt x="3509503" y="2504535"/>
-                  </a:lnTo>
-                  <a:lnTo>
-                    <a:pt x="3437881" y="2496127"/>
-                  </a:lnTo>
-                  <a:lnTo>
-                    <a:pt x="3366258" y="2487646"/>
-                  </a:lnTo>
-                  <a:lnTo>
-                    <a:pt x="3294636" y="2479092"/>
-                  </a:lnTo>
-                  <a:lnTo>
-                    <a:pt x="3223013" y="2470465"/>
-                  </a:lnTo>
-                  <a:lnTo>
-                    <a:pt x="3151391" y="2461763"/>
-                  </a:lnTo>
-                  <a:lnTo>
-                    <a:pt x="3079768" y="2452988"/>
-                  </a:lnTo>
-                  <a:lnTo>
-                    <a:pt x="3008146" y="2444136"/>
-                  </a:lnTo>
-                  <a:lnTo>
-                    <a:pt x="2936523" y="2435209"/>
-                  </a:lnTo>
-                  <a:lnTo>
-                    <a:pt x="2864901" y="2426205"/>
-                  </a:lnTo>
-                  <a:lnTo>
-                    <a:pt x="2793278" y="2417124"/>
-                  </a:lnTo>
-                  <a:lnTo>
-                    <a:pt x="2721655" y="2407964"/>
-                  </a:lnTo>
-                  <a:lnTo>
-                    <a:pt x="2650033" y="2398726"/>
-                  </a:lnTo>
-                  <a:lnTo>
-                    <a:pt x="2578410" y="2389409"/>
-                  </a:lnTo>
-                  <a:lnTo>
-                    <a:pt x="2506788" y="2380012"/>
-                  </a:lnTo>
-                  <a:lnTo>
-                    <a:pt x="2435165" y="2370534"/>
-                  </a:lnTo>
-                  <a:lnTo>
-                    <a:pt x="2363543" y="2360974"/>
-                  </a:lnTo>
-                  <a:lnTo>
-                    <a:pt x="2291920" y="2351333"/>
-                  </a:lnTo>
-                  <a:lnTo>
-                    <a:pt x="2220298" y="2341609"/>
-                  </a:lnTo>
-                  <a:lnTo>
-                    <a:pt x="2148675" y="2331801"/>
-                  </a:lnTo>
-                  <a:lnTo>
-                    <a:pt x="2077053" y="2321909"/>
-                  </a:lnTo>
-                  <a:lnTo>
-                    <a:pt x="2005430" y="2311932"/>
-                  </a:lnTo>
-                  <a:lnTo>
-                    <a:pt x="1933808" y="2301869"/>
-                  </a:lnTo>
-                  <a:lnTo>
-                    <a:pt x="1862185" y="2291720"/>
-                  </a:lnTo>
-                  <a:lnTo>
-                    <a:pt x="1790563" y="2281484"/>
-                  </a:lnTo>
-                  <a:lnTo>
-                    <a:pt x="1718940" y="2271160"/>
-                  </a:lnTo>
-                  <a:lnTo>
-                    <a:pt x="1647318" y="2260747"/>
-                  </a:lnTo>
-                  <a:lnTo>
-                    <a:pt x="1575695" y="2250245"/>
-                  </a:lnTo>
-                  <a:lnTo>
-                    <a:pt x="1504073" y="2239653"/>
-                  </a:lnTo>
-                  <a:lnTo>
-                    <a:pt x="1432450" y="2228970"/>
-                  </a:lnTo>
-                  <a:lnTo>
-                    <a:pt x="1360827" y="2218195"/>
-                  </a:lnTo>
-                  <a:lnTo>
-                    <a:pt x="1289205" y="2207327"/>
-                  </a:lnTo>
-                  <a:lnTo>
-                    <a:pt x="1217582" y="2196366"/>
-                  </a:lnTo>
-                  <a:lnTo>
-                    <a:pt x="1145960" y="2185311"/>
-                  </a:lnTo>
-                  <a:lnTo>
-                    <a:pt x="1074337" y="2174161"/>
-                  </a:lnTo>
-                  <a:lnTo>
-                    <a:pt x="1002715" y="2162916"/>
-                  </a:lnTo>
-                  <a:lnTo>
-                    <a:pt x="931092" y="2151573"/>
-                  </a:lnTo>
-                  <a:lnTo>
-                    <a:pt x="859470" y="2140134"/>
-                  </a:lnTo>
-                  <a:lnTo>
-                    <a:pt x="787847" y="2128596"/>
-                  </a:lnTo>
-                  <a:lnTo>
-                    <a:pt x="716225" y="2116959"/>
-                  </a:lnTo>
-                  <a:lnTo>
-                    <a:pt x="644602" y="2105222"/>
-                  </a:lnTo>
-                  <a:lnTo>
-                    <a:pt x="572980" y="2093384"/>
-                  </a:lnTo>
-                  <a:lnTo>
-                    <a:pt x="501357" y="2081445"/>
-                  </a:lnTo>
-                  <a:lnTo>
-                    <a:pt x="429735" y="2069403"/>
-                  </a:lnTo>
-                  <a:lnTo>
-                    <a:pt x="358112" y="2057258"/>
-                  </a:lnTo>
-                  <a:lnTo>
-                    <a:pt x="286490" y="2045009"/>
-                  </a:lnTo>
-                  <a:lnTo>
-                    <a:pt x="214867" y="2032654"/>
-                  </a:lnTo>
-                  <a:lnTo>
-                    <a:pt x="143245" y="2020193"/>
-                  </a:lnTo>
-                  <a:lnTo>
-                    <a:pt x="71622" y="2007625"/>
-                  </a:lnTo>
-                  <a:lnTo>
-                    <a:pt x="0" y="1994949"/>
+                    <a:pt x="3223013" y="127019"/>
+                  </a:lnTo>
+                  <a:lnTo>
+                    <a:pt x="3294636" y="321598"/>
+                  </a:lnTo>
+                  <a:lnTo>
+                    <a:pt x="3366258" y="504898"/>
+                  </a:lnTo>
+                  <a:lnTo>
+                    <a:pt x="3437881" y="677573"/>
+                  </a:lnTo>
+                  <a:lnTo>
+                    <a:pt x="3509503" y="840238"/>
+                  </a:lnTo>
+                  <a:lnTo>
+                    <a:pt x="3581126" y="993474"/>
+                  </a:lnTo>
+                  <a:lnTo>
+                    <a:pt x="3652748" y="1137828"/>
+                  </a:lnTo>
+                  <a:lnTo>
+                    <a:pt x="3724371" y="1273814"/>
+                  </a:lnTo>
+                  <a:lnTo>
+                    <a:pt x="3795993" y="1401917"/>
+                  </a:lnTo>
+                  <a:lnTo>
+                    <a:pt x="3867616" y="1522594"/>
+                  </a:lnTo>
+                  <a:lnTo>
+                    <a:pt x="3939238" y="1636276"/>
+                  </a:lnTo>
+                  <a:lnTo>
+                    <a:pt x="4010861" y="1743369"/>
+                  </a:lnTo>
+                  <a:lnTo>
+                    <a:pt x="4082483" y="1844253"/>
+                  </a:lnTo>
+                  <a:lnTo>
+                    <a:pt x="4154106" y="1939289"/>
+                  </a:lnTo>
+                  <a:lnTo>
+                    <a:pt x="4225729" y="2028817"/>
+                  </a:lnTo>
+                  <a:lnTo>
+                    <a:pt x="4297351" y="2113155"/>
+                  </a:lnTo>
+                  <a:lnTo>
+                    <a:pt x="4368974" y="2192604"/>
+                  </a:lnTo>
+                  <a:lnTo>
+                    <a:pt x="4440596" y="2267447"/>
+                  </a:lnTo>
+                  <a:lnTo>
+                    <a:pt x="4512219" y="2337953"/>
+                  </a:lnTo>
+                  <a:lnTo>
+                    <a:pt x="4583841" y="2404371"/>
+                  </a:lnTo>
+                  <a:lnTo>
+                    <a:pt x="4655464" y="2466939"/>
+                  </a:lnTo>
+                  <a:lnTo>
+                    <a:pt x="4727086" y="2525880"/>
+                  </a:lnTo>
+                  <a:lnTo>
+                    <a:pt x="4798709" y="2581405"/>
+                  </a:lnTo>
+                  <a:lnTo>
+                    <a:pt x="4870331" y="2633711"/>
+                  </a:lnTo>
+                  <a:lnTo>
+                    <a:pt x="4941954" y="2650551"/>
+                  </a:lnTo>
+                  <a:lnTo>
+                    <a:pt x="5013576" y="2644185"/>
+                  </a:lnTo>
+                  <a:lnTo>
+                    <a:pt x="5085199" y="2637770"/>
+                  </a:lnTo>
+                  <a:lnTo>
+                    <a:pt x="5156821" y="2631307"/>
+                  </a:lnTo>
+                  <a:lnTo>
+                    <a:pt x="5228444" y="2624794"/>
+                  </a:lnTo>
+                  <a:lnTo>
+                    <a:pt x="5300066" y="2618231"/>
+                  </a:lnTo>
+                  <a:lnTo>
+                    <a:pt x="5371689" y="2611618"/>
+                  </a:lnTo>
+                  <a:lnTo>
+                    <a:pt x="5443311" y="2604954"/>
+                  </a:lnTo>
+                  <a:lnTo>
+                    <a:pt x="5514934" y="2598240"/>
+                  </a:lnTo>
+                  <a:lnTo>
+                    <a:pt x="5586557" y="2591474"/>
+                  </a:lnTo>
+                  <a:lnTo>
+                    <a:pt x="5658179" y="2584657"/>
+                  </a:lnTo>
+                  <a:lnTo>
+                    <a:pt x="5729802" y="2577787"/>
+                  </a:lnTo>
+                  <a:lnTo>
+                    <a:pt x="5801424" y="2570865"/>
+                  </a:lnTo>
+                  <a:lnTo>
+                    <a:pt x="5873047" y="2563890"/>
+                  </a:lnTo>
+                  <a:lnTo>
+                    <a:pt x="5944669" y="2556862"/>
+                  </a:lnTo>
+                  <a:lnTo>
+                    <a:pt x="6016292" y="2549780"/>
+                  </a:lnTo>
+                  <a:lnTo>
+                    <a:pt x="6087914" y="2542644"/>
+                  </a:lnTo>
+                  <a:lnTo>
+                    <a:pt x="6159537" y="2535454"/>
+                  </a:lnTo>
+                  <a:lnTo>
+                    <a:pt x="6231159" y="2528208"/>
+                  </a:lnTo>
+                  <a:lnTo>
+                    <a:pt x="6302782" y="2520908"/>
+                  </a:lnTo>
+                  <a:lnTo>
+                    <a:pt x="6374404" y="2513551"/>
+                  </a:lnTo>
+                  <a:lnTo>
+                    <a:pt x="6446027" y="2506138"/>
+                  </a:lnTo>
+                  <a:lnTo>
+                    <a:pt x="6517649" y="2498669"/>
+                  </a:lnTo>
+                  <a:lnTo>
+                    <a:pt x="6589272" y="2491142"/>
+                  </a:lnTo>
+                  <a:lnTo>
+                    <a:pt x="6660894" y="2483558"/>
+                  </a:lnTo>
+                  <a:lnTo>
+                    <a:pt x="6732517" y="2475916"/>
+                  </a:lnTo>
+                  <a:lnTo>
+                    <a:pt x="6804139" y="2468216"/>
+                  </a:lnTo>
+                  <a:lnTo>
+                    <a:pt x="6875762" y="2460457"/>
+                  </a:lnTo>
+                  <a:lnTo>
+                    <a:pt x="6947385" y="2452638"/>
+                  </a:lnTo>
+                  <a:lnTo>
+                    <a:pt x="7019007" y="2444760"/>
+                  </a:lnTo>
+                  <a:lnTo>
+                    <a:pt x="7090630" y="2436822"/>
+                  </a:lnTo>
+                  <a:lnTo>
+                    <a:pt x="7090630" y="3350245"/>
+                  </a:lnTo>
+                  <a:lnTo>
+                    <a:pt x="7019007" y="3342030"/>
+                  </a:lnTo>
+                  <a:lnTo>
+                    <a:pt x="6947385" y="3333309"/>
+                  </a:lnTo>
+                  <a:lnTo>
+                    <a:pt x="6875762" y="3324052"/>
+                  </a:lnTo>
+                  <a:lnTo>
+                    <a:pt x="6804139" y="3314226"/>
+                  </a:lnTo>
+                  <a:lnTo>
+                    <a:pt x="6732517" y="3303795"/>
+                  </a:lnTo>
+                  <a:lnTo>
+                    <a:pt x="6660894" y="3292721"/>
+                  </a:lnTo>
+                  <a:lnTo>
+                    <a:pt x="6589272" y="3280967"/>
+                  </a:lnTo>
+                  <a:lnTo>
+                    <a:pt x="6517649" y="3268489"/>
+                  </a:lnTo>
+                  <a:lnTo>
+                    <a:pt x="6446027" y="3255243"/>
+                  </a:lnTo>
+                  <a:lnTo>
+                    <a:pt x="6374404" y="3241183"/>
+                  </a:lnTo>
+                  <a:lnTo>
+                    <a:pt x="6302782" y="3226257"/>
+                  </a:lnTo>
+                  <a:lnTo>
+                    <a:pt x="6231159" y="3210412"/>
+                  </a:lnTo>
+                  <a:lnTo>
+                    <a:pt x="6159537" y="3193593"/>
+                  </a:lnTo>
+                  <a:lnTo>
+                    <a:pt x="6087914" y="3175739"/>
+                  </a:lnTo>
+                  <a:lnTo>
+                    <a:pt x="6016292" y="3156786"/>
+                  </a:lnTo>
+                  <a:lnTo>
+                    <a:pt x="5944669" y="3136667"/>
+                  </a:lnTo>
+                  <a:lnTo>
+                    <a:pt x="5873047" y="3115310"/>
+                  </a:lnTo>
+                  <a:lnTo>
+                    <a:pt x="5801424" y="3092638"/>
+                  </a:lnTo>
+                  <a:lnTo>
+                    <a:pt x="5729802" y="3068572"/>
+                  </a:lnTo>
+                  <a:lnTo>
+                    <a:pt x="5658179" y="3043025"/>
+                  </a:lnTo>
+                  <a:lnTo>
+                    <a:pt x="5586557" y="3015905"/>
+                  </a:lnTo>
+                  <a:lnTo>
+                    <a:pt x="5514934" y="2987117"/>
+                  </a:lnTo>
+                  <a:lnTo>
+                    <a:pt x="5443311" y="2956558"/>
+                  </a:lnTo>
+                  <a:lnTo>
+                    <a:pt x="5371689" y="2924118"/>
+                  </a:lnTo>
+                  <a:lnTo>
+                    <a:pt x="5300066" y="2889682"/>
+                  </a:lnTo>
+                  <a:lnTo>
+                    <a:pt x="5228444" y="2853126"/>
+                  </a:lnTo>
+                  <a:lnTo>
+                    <a:pt x="5156821" y="2814322"/>
+                  </a:lnTo>
+                  <a:lnTo>
+                    <a:pt x="5085199" y="2773130"/>
+                  </a:lnTo>
+                  <a:lnTo>
+                    <a:pt x="5013576" y="2729403"/>
+                  </a:lnTo>
+                  <a:lnTo>
+                    <a:pt x="4941954" y="2682985"/>
+                  </a:lnTo>
+                  <a:lnTo>
+                    <a:pt x="4870331" y="2656869"/>
+                  </a:lnTo>
+                  <a:lnTo>
+                    <a:pt x="4798709" y="2663139"/>
+                  </a:lnTo>
+                  <a:lnTo>
+                    <a:pt x="4727086" y="2669361"/>
+                  </a:lnTo>
+                  <a:lnTo>
+                    <a:pt x="4655464" y="2675536"/>
+                  </a:lnTo>
+                  <a:lnTo>
+                    <a:pt x="4583841" y="2681665"/>
+                  </a:lnTo>
+                  <a:lnTo>
+                    <a:pt x="4512219" y="2687747"/>
+                  </a:lnTo>
+                  <a:lnTo>
+                    <a:pt x="4440596" y="2693782"/>
+                  </a:lnTo>
+                  <a:lnTo>
+                    <a:pt x="4368974" y="2699772"/>
+                  </a:lnTo>
+                  <a:lnTo>
+                    <a:pt x="4297351" y="2705717"/>
+                  </a:lnTo>
+                  <a:lnTo>
+                    <a:pt x="4225729" y="2711616"/>
+                  </a:lnTo>
+                  <a:lnTo>
+                    <a:pt x="4154106" y="2717471"/>
+                  </a:lnTo>
+                  <a:lnTo>
+                    <a:pt x="4082483" y="2723281"/>
+                  </a:lnTo>
+                  <a:lnTo>
+                    <a:pt x="4010861" y="2729048"/>
+                  </a:lnTo>
+                  <a:lnTo>
+                    <a:pt x="3939238" y="2734770"/>
+                  </a:lnTo>
+                  <a:lnTo>
+                    <a:pt x="3867616" y="2740449"/>
+                  </a:lnTo>
+                  <a:lnTo>
+                    <a:pt x="3795993" y="2746086"/>
+                  </a:lnTo>
+                  <a:lnTo>
+                    <a:pt x="3724371" y="2751679"/>
+                  </a:lnTo>
+                  <a:lnTo>
+                    <a:pt x="3652748" y="2757230"/>
+                  </a:lnTo>
+                  <a:lnTo>
+                    <a:pt x="3581126" y="2762739"/>
+                  </a:lnTo>
+                  <a:lnTo>
+                    <a:pt x="3509503" y="2768206"/>
+                  </a:lnTo>
+                  <a:lnTo>
+                    <a:pt x="3437881" y="2773632"/>
+                  </a:lnTo>
+                  <a:lnTo>
+                    <a:pt x="3366258" y="2779016"/>
+                  </a:lnTo>
+                  <a:lnTo>
+                    <a:pt x="3294636" y="2784360"/>
+                  </a:lnTo>
+                  <a:lnTo>
+                    <a:pt x="3223013" y="2789663"/>
+                  </a:lnTo>
+                  <a:lnTo>
+                    <a:pt x="3151391" y="2794926"/>
+                  </a:lnTo>
+                  <a:lnTo>
+                    <a:pt x="3079768" y="2800149"/>
+                  </a:lnTo>
+                  <a:lnTo>
+                    <a:pt x="3008146" y="2805332"/>
+                  </a:lnTo>
+                  <a:lnTo>
+                    <a:pt x="2936523" y="2810476"/>
+                  </a:lnTo>
+                  <a:lnTo>
+                    <a:pt x="2864901" y="2815582"/>
+                  </a:lnTo>
+                  <a:lnTo>
+                    <a:pt x="2793278" y="2820648"/>
+                  </a:lnTo>
+                  <a:lnTo>
+                    <a:pt x="2721655" y="2825676"/>
+                  </a:lnTo>
+                  <a:lnTo>
+                    <a:pt x="2650033" y="2830666"/>
+                  </a:lnTo>
+                  <a:lnTo>
+                    <a:pt x="2578410" y="2835618"/>
+                  </a:lnTo>
+                  <a:lnTo>
+                    <a:pt x="2506788" y="2840532"/>
+                  </a:lnTo>
+                  <a:lnTo>
+                    <a:pt x="2435165" y="2845410"/>
+                  </a:lnTo>
+                  <a:lnTo>
+                    <a:pt x="2363543" y="2850250"/>
+                  </a:lnTo>
+                  <a:lnTo>
+                    <a:pt x="2291920" y="2855053"/>
+                  </a:lnTo>
+                  <a:lnTo>
+                    <a:pt x="2220298" y="2859821"/>
+                  </a:lnTo>
+                  <a:lnTo>
+                    <a:pt x="2148675" y="2864552"/>
+                  </a:lnTo>
+                  <a:lnTo>
+                    <a:pt x="2077053" y="2869247"/>
+                  </a:lnTo>
+                  <a:lnTo>
+                    <a:pt x="2005430" y="2873906"/>
+                  </a:lnTo>
+                  <a:lnTo>
+                    <a:pt x="1933808" y="2878530"/>
+                  </a:lnTo>
+                  <a:lnTo>
+                    <a:pt x="1862185" y="2883119"/>
+                  </a:lnTo>
+                  <a:lnTo>
+                    <a:pt x="1790563" y="2887674"/>
+                  </a:lnTo>
+                  <a:lnTo>
+                    <a:pt x="1718940" y="2892194"/>
+                  </a:lnTo>
+                  <a:lnTo>
+                    <a:pt x="1647318" y="2896679"/>
+                  </a:lnTo>
+                  <a:lnTo>
+                    <a:pt x="1575695" y="2901130"/>
+                  </a:lnTo>
+                  <a:lnTo>
+                    <a:pt x="1504073" y="2905548"/>
+                  </a:lnTo>
+                  <a:lnTo>
+                    <a:pt x="1432450" y="2909932"/>
+                  </a:lnTo>
+                  <a:lnTo>
+                    <a:pt x="1360827" y="2914283"/>
+                  </a:lnTo>
+                  <a:lnTo>
+                    <a:pt x="1289205" y="2918601"/>
+                  </a:lnTo>
+                  <a:lnTo>
+                    <a:pt x="1217582" y="2922887"/>
+                  </a:lnTo>
+                  <a:lnTo>
+                    <a:pt x="1145960" y="2927140"/>
+                  </a:lnTo>
+                  <a:lnTo>
+                    <a:pt x="1074337" y="2931360"/>
+                  </a:lnTo>
+                  <a:lnTo>
+                    <a:pt x="1002715" y="2935549"/>
+                  </a:lnTo>
+                  <a:lnTo>
+                    <a:pt x="931092" y="2939705"/>
+                  </a:lnTo>
+                  <a:lnTo>
+                    <a:pt x="859470" y="2943831"/>
+                  </a:lnTo>
+                  <a:lnTo>
+                    <a:pt x="787847" y="2947925"/>
+                  </a:lnTo>
+                  <a:lnTo>
+                    <a:pt x="716225" y="2951987"/>
+                  </a:lnTo>
+                  <a:lnTo>
+                    <a:pt x="644602" y="2956020"/>
+                  </a:lnTo>
+                  <a:lnTo>
+                    <a:pt x="572980" y="2960021"/>
+                  </a:lnTo>
+                  <a:lnTo>
+                    <a:pt x="501357" y="2963992"/>
+                  </a:lnTo>
+                  <a:lnTo>
+                    <a:pt x="429735" y="2967933"/>
+                  </a:lnTo>
+                  <a:lnTo>
+                    <a:pt x="358112" y="2971845"/>
+                  </a:lnTo>
+                  <a:lnTo>
+                    <a:pt x="286490" y="2975726"/>
+                  </a:lnTo>
+                  <a:lnTo>
+                    <a:pt x="214867" y="2979578"/>
+                  </a:lnTo>
+                  <a:lnTo>
+                    <a:pt x="143245" y="2983401"/>
+                  </a:lnTo>
+                  <a:lnTo>
+                    <a:pt x="71622" y="2987195"/>
+                  </a:lnTo>
+                  <a:lnTo>
+                    <a:pt x="0" y="2990960"/>
                   </a:lnTo>
                   <a:lnTo>
                     <a:pt x="0" y="0"/>
@@ -3507,183 +3504,180 @@
           </p:nvSpPr>
           <p:spPr>
             <a:xfrm>
-              <a:off x="4272159" y="2073503"/>
-              <a:ext cx="3990520" cy="2845183"/>
+              <a:off x="4351018" y="2073503"/>
+              <a:ext cx="3911660" cy="2650551"/>
             </a:xfrm>
             <a:custGeom>
               <a:avLst/>
               <a:pathLst>
-                <a:path w="3990520" h="2845183">
+                <a:path w="3911660" h="2650551">
                   <a:moveTo>
                     <a:pt x="0" y="0"/>
                   </a:moveTo>
                   <a:lnTo>
-                    <a:pt x="51281" y="140658"/>
-                  </a:lnTo>
-                  <a:lnTo>
-                    <a:pt x="122903" y="326206"/>
-                  </a:lnTo>
-                  <a:lnTo>
-                    <a:pt x="194526" y="501457"/>
-                  </a:lnTo>
-                  <a:lnTo>
-                    <a:pt x="266148" y="666980"/>
-                  </a:lnTo>
-                  <a:lnTo>
-                    <a:pt x="337771" y="823317"/>
-                  </a:lnTo>
-                  <a:lnTo>
-                    <a:pt x="409393" y="970976"/>
-                  </a:lnTo>
-                  <a:lnTo>
-                    <a:pt x="481016" y="1110440"/>
-                  </a:lnTo>
-                  <a:lnTo>
-                    <a:pt x="552638" y="1242164"/>
-                  </a:lnTo>
-                  <a:lnTo>
-                    <a:pt x="624261" y="1366576"/>
-                  </a:lnTo>
-                  <a:lnTo>
-                    <a:pt x="695883" y="1484084"/>
-                  </a:lnTo>
-                  <a:lnTo>
-                    <a:pt x="767506" y="1595069"/>
-                  </a:lnTo>
-                  <a:lnTo>
-                    <a:pt x="839129" y="1699895"/>
-                  </a:lnTo>
-                  <a:lnTo>
-                    <a:pt x="910751" y="1798902"/>
-                  </a:lnTo>
-                  <a:lnTo>
-                    <a:pt x="982374" y="1892415"/>
-                  </a:lnTo>
-                  <a:lnTo>
-                    <a:pt x="1053996" y="1980737"/>
-                  </a:lnTo>
-                  <a:lnTo>
-                    <a:pt x="1125619" y="2064157"/>
-                  </a:lnTo>
-                  <a:lnTo>
-                    <a:pt x="1197241" y="2142948"/>
-                  </a:lnTo>
-                  <a:lnTo>
-                    <a:pt x="1268864" y="2217365"/>
-                  </a:lnTo>
-                  <a:lnTo>
-                    <a:pt x="1340486" y="2287652"/>
-                  </a:lnTo>
-                  <a:lnTo>
-                    <a:pt x="1412109" y="2354037"/>
-                  </a:lnTo>
-                  <a:lnTo>
-                    <a:pt x="1483731" y="2416739"/>
-                  </a:lnTo>
-                  <a:lnTo>
-                    <a:pt x="1555354" y="2475960"/>
-                  </a:lnTo>
-                  <a:lnTo>
-                    <a:pt x="1626976" y="2531894"/>
-                  </a:lnTo>
-                  <a:lnTo>
-                    <a:pt x="1698599" y="2584724"/>
-                  </a:lnTo>
-                  <a:lnTo>
-                    <a:pt x="1770221" y="2634622"/>
-                  </a:lnTo>
-                  <a:lnTo>
-                    <a:pt x="1841844" y="2658455"/>
-                  </a:lnTo>
-                  <a:lnTo>
-                    <a:pt x="1913466" y="2665482"/>
-                  </a:lnTo>
-                  <a:lnTo>
-                    <a:pt x="1985089" y="2672448"/>
-                  </a:lnTo>
-                  <a:lnTo>
-                    <a:pt x="2056711" y="2679356"/>
-                  </a:lnTo>
-                  <a:lnTo>
-                    <a:pt x="2128334" y="2686204"/>
-                  </a:lnTo>
-                  <a:lnTo>
-                    <a:pt x="2199957" y="2692995"/>
-                  </a:lnTo>
-                  <a:lnTo>
-                    <a:pt x="2271579" y="2699727"/>
-                  </a:lnTo>
-                  <a:lnTo>
-                    <a:pt x="2343202" y="2706402"/>
-                  </a:lnTo>
-                  <a:lnTo>
-                    <a:pt x="2414824" y="2713021"/>
-                  </a:lnTo>
-                  <a:lnTo>
-                    <a:pt x="2486447" y="2719583"/>
-                  </a:lnTo>
-                  <a:lnTo>
-                    <a:pt x="2558069" y="2726089"/>
-                  </a:lnTo>
-                  <a:lnTo>
-                    <a:pt x="2629692" y="2732540"/>
-                  </a:lnTo>
-                  <a:lnTo>
-                    <a:pt x="2701314" y="2738936"/>
-                  </a:lnTo>
-                  <a:lnTo>
-                    <a:pt x="2772937" y="2745277"/>
-                  </a:lnTo>
-                  <a:lnTo>
-                    <a:pt x="2844559" y="2751564"/>
-                  </a:lnTo>
-                  <a:lnTo>
-                    <a:pt x="2916182" y="2757798"/>
-                  </a:lnTo>
-                  <a:lnTo>
-                    <a:pt x="2987804" y="2763979"/>
-                  </a:lnTo>
-                  <a:lnTo>
-                    <a:pt x="3059427" y="2770107"/>
-                  </a:lnTo>
-                  <a:lnTo>
-                    <a:pt x="3131049" y="2776183"/>
-                  </a:lnTo>
-                  <a:lnTo>
-                    <a:pt x="3202672" y="2782207"/>
-                  </a:lnTo>
-                  <a:lnTo>
-                    <a:pt x="3274294" y="2788180"/>
-                  </a:lnTo>
-                  <a:lnTo>
-                    <a:pt x="3345917" y="2794103"/>
-                  </a:lnTo>
-                  <a:lnTo>
-                    <a:pt x="3417539" y="2799974"/>
-                  </a:lnTo>
-                  <a:lnTo>
-                    <a:pt x="3489162" y="2805796"/>
-                  </a:lnTo>
-                  <a:lnTo>
-                    <a:pt x="3560785" y="2811568"/>
-                  </a:lnTo>
-                  <a:lnTo>
-                    <a:pt x="3632407" y="2817291"/>
-                  </a:lnTo>
-                  <a:lnTo>
-                    <a:pt x="3704030" y="2822965"/>
-                  </a:lnTo>
-                  <a:lnTo>
-                    <a:pt x="3775652" y="2828591"/>
-                  </a:lnTo>
-                  <a:lnTo>
-                    <a:pt x="3847275" y="2834169"/>
-                  </a:lnTo>
-                  <a:lnTo>
-                    <a:pt x="3918897" y="2839700"/>
-                  </a:lnTo>
-                  <a:lnTo>
-                    <a:pt x="3990520" y="2845183"/>
+                    <a:pt x="44044" y="127019"/>
+                  </a:lnTo>
+                  <a:lnTo>
+                    <a:pt x="115666" y="321598"/>
+                  </a:lnTo>
+                  <a:lnTo>
+                    <a:pt x="187289" y="504898"/>
+                  </a:lnTo>
+                  <a:lnTo>
+                    <a:pt x="258911" y="677573"/>
+                  </a:lnTo>
+                  <a:lnTo>
+                    <a:pt x="330534" y="840238"/>
+                  </a:lnTo>
+                  <a:lnTo>
+                    <a:pt x="402156" y="993474"/>
+                  </a:lnTo>
+                  <a:lnTo>
+                    <a:pt x="473779" y="1137828"/>
+                  </a:lnTo>
+                  <a:lnTo>
+                    <a:pt x="545401" y="1273814"/>
+                  </a:lnTo>
+                  <a:lnTo>
+                    <a:pt x="617024" y="1401917"/>
+                  </a:lnTo>
+                  <a:lnTo>
+                    <a:pt x="688646" y="1522594"/>
+                  </a:lnTo>
+                  <a:lnTo>
+                    <a:pt x="760269" y="1636276"/>
+                  </a:lnTo>
+                  <a:lnTo>
+                    <a:pt x="831891" y="1743369"/>
+                  </a:lnTo>
+                  <a:lnTo>
+                    <a:pt x="903514" y="1844253"/>
+                  </a:lnTo>
+                  <a:lnTo>
+                    <a:pt x="975136" y="1939289"/>
+                  </a:lnTo>
+                  <a:lnTo>
+                    <a:pt x="1046759" y="2028817"/>
+                  </a:lnTo>
+                  <a:lnTo>
+                    <a:pt x="1118381" y="2113155"/>
+                  </a:lnTo>
+                  <a:lnTo>
+                    <a:pt x="1190004" y="2192604"/>
+                  </a:lnTo>
+                  <a:lnTo>
+                    <a:pt x="1261627" y="2267447"/>
+                  </a:lnTo>
+                  <a:lnTo>
+                    <a:pt x="1333249" y="2337953"/>
+                  </a:lnTo>
+                  <a:lnTo>
+                    <a:pt x="1404872" y="2404371"/>
+                  </a:lnTo>
+                  <a:lnTo>
+                    <a:pt x="1476494" y="2466939"/>
+                  </a:lnTo>
+                  <a:lnTo>
+                    <a:pt x="1548117" y="2525880"/>
+                  </a:lnTo>
+                  <a:lnTo>
+                    <a:pt x="1619739" y="2581405"/>
+                  </a:lnTo>
+                  <a:lnTo>
+                    <a:pt x="1691362" y="2633711"/>
+                  </a:lnTo>
+                  <a:lnTo>
+                    <a:pt x="1762984" y="2650551"/>
+                  </a:lnTo>
+                  <a:lnTo>
+                    <a:pt x="1834607" y="2644185"/>
+                  </a:lnTo>
+                  <a:lnTo>
+                    <a:pt x="1906229" y="2637770"/>
+                  </a:lnTo>
+                  <a:lnTo>
+                    <a:pt x="1977852" y="2631307"/>
+                  </a:lnTo>
+                  <a:lnTo>
+                    <a:pt x="2049474" y="2624794"/>
+                  </a:lnTo>
+                  <a:lnTo>
+                    <a:pt x="2121097" y="2618231"/>
+                  </a:lnTo>
+                  <a:lnTo>
+                    <a:pt x="2192719" y="2611618"/>
+                  </a:lnTo>
+                  <a:lnTo>
+                    <a:pt x="2264342" y="2604954"/>
+                  </a:lnTo>
+                  <a:lnTo>
+                    <a:pt x="2335964" y="2598240"/>
+                  </a:lnTo>
+                  <a:lnTo>
+                    <a:pt x="2407587" y="2591474"/>
+                  </a:lnTo>
+                  <a:lnTo>
+                    <a:pt x="2479209" y="2584657"/>
+                  </a:lnTo>
+                  <a:lnTo>
+                    <a:pt x="2550832" y="2577787"/>
+                  </a:lnTo>
+                  <a:lnTo>
+                    <a:pt x="2622455" y="2570865"/>
+                  </a:lnTo>
+                  <a:lnTo>
+                    <a:pt x="2694077" y="2563890"/>
+                  </a:lnTo>
+                  <a:lnTo>
+                    <a:pt x="2765700" y="2556862"/>
+                  </a:lnTo>
+                  <a:lnTo>
+                    <a:pt x="2837322" y="2549780"/>
+                  </a:lnTo>
+                  <a:lnTo>
+                    <a:pt x="2908945" y="2542644"/>
+                  </a:lnTo>
+                  <a:lnTo>
+                    <a:pt x="2980567" y="2535454"/>
+                  </a:lnTo>
+                  <a:lnTo>
+                    <a:pt x="3052190" y="2528208"/>
+                  </a:lnTo>
+                  <a:lnTo>
+                    <a:pt x="3123812" y="2520908"/>
+                  </a:lnTo>
+                  <a:lnTo>
+                    <a:pt x="3195435" y="2513551"/>
+                  </a:lnTo>
+                  <a:lnTo>
+                    <a:pt x="3267057" y="2506138"/>
+                  </a:lnTo>
+                  <a:lnTo>
+                    <a:pt x="3338680" y="2498669"/>
+                  </a:lnTo>
+                  <a:lnTo>
+                    <a:pt x="3410302" y="2491142"/>
+                  </a:lnTo>
+                  <a:lnTo>
+                    <a:pt x="3481925" y="2483558"/>
+                  </a:lnTo>
+                  <a:lnTo>
+                    <a:pt x="3553547" y="2475916"/>
+                  </a:lnTo>
+                  <a:lnTo>
+                    <a:pt x="3625170" y="2468216"/>
+                  </a:lnTo>
+                  <a:lnTo>
+                    <a:pt x="3696792" y="2460457"/>
+                  </a:lnTo>
+                  <a:lnTo>
+                    <a:pt x="3768415" y="2452638"/>
+                  </a:lnTo>
+                  <a:lnTo>
+                    <a:pt x="3840037" y="2444760"/>
+                  </a:lnTo>
+                  <a:lnTo>
+                    <a:pt x="3911660" y="2436822"/>
                   </a:lnTo>
                 </a:path>
               </a:pathLst>
@@ -3703,312 +3697,312 @@
           </p:nvSpPr>
           <p:spPr>
             <a:xfrm>
-              <a:off x="1172049" y="4068452"/>
-              <a:ext cx="7090630" cy="1344185"/>
+              <a:off x="1172049" y="4730372"/>
+              <a:ext cx="7090630" cy="693375"/>
             </a:xfrm>
             <a:custGeom>
               <a:avLst/>
               <a:pathLst>
-                <a:path w="7090630" h="1344185">
+                <a:path w="7090630" h="693375">
                   <a:moveTo>
-                    <a:pt x="7090630" y="1344185"/>
+                    <a:pt x="7090630" y="693375"/>
                   </a:moveTo>
                   <a:lnTo>
-                    <a:pt x="7019007" y="1335687"/>
-                  </a:lnTo>
-                  <a:lnTo>
-                    <a:pt x="6947385" y="1326690"/>
-                  </a:lnTo>
-                  <a:lnTo>
-                    <a:pt x="6875762" y="1317164"/>
-                  </a:lnTo>
-                  <a:lnTo>
-                    <a:pt x="6804139" y="1307078"/>
-                  </a:lnTo>
-                  <a:lnTo>
-                    <a:pt x="6732517" y="1296400"/>
-                  </a:lnTo>
-                  <a:lnTo>
-                    <a:pt x="6660894" y="1285094"/>
-                  </a:lnTo>
-                  <a:lnTo>
-                    <a:pt x="6589272" y="1273124"/>
-                  </a:lnTo>
-                  <a:lnTo>
-                    <a:pt x="6517649" y="1260450"/>
-                  </a:lnTo>
-                  <a:lnTo>
-                    <a:pt x="6446027" y="1247032"/>
-                  </a:lnTo>
-                  <a:lnTo>
-                    <a:pt x="6374404" y="1232825"/>
-                  </a:lnTo>
-                  <a:lnTo>
-                    <a:pt x="6302782" y="1217783"/>
-                  </a:lnTo>
-                  <a:lnTo>
-                    <a:pt x="6231159" y="1201857"/>
-                  </a:lnTo>
-                  <a:lnTo>
-                    <a:pt x="6159537" y="1184995"/>
-                  </a:lnTo>
-                  <a:lnTo>
-                    <a:pt x="6087914" y="1167143"/>
-                  </a:lnTo>
-                  <a:lnTo>
-                    <a:pt x="6016292" y="1148241"/>
-                  </a:lnTo>
-                  <a:lnTo>
-                    <a:pt x="5944669" y="1128229"/>
-                  </a:lnTo>
-                  <a:lnTo>
-                    <a:pt x="5873047" y="1107041"/>
-                  </a:lnTo>
-                  <a:lnTo>
-                    <a:pt x="5801424" y="1084608"/>
-                  </a:lnTo>
-                  <a:lnTo>
-                    <a:pt x="5729802" y="1060856"/>
-                  </a:lnTo>
-                  <a:lnTo>
-                    <a:pt x="5658179" y="1035709"/>
-                  </a:lnTo>
-                  <a:lnTo>
-                    <a:pt x="5586557" y="1009084"/>
-                  </a:lnTo>
-                  <a:lnTo>
-                    <a:pt x="5514934" y="980894"/>
-                  </a:lnTo>
-                  <a:lnTo>
-                    <a:pt x="5443311" y="951048"/>
-                  </a:lnTo>
-                  <a:lnTo>
-                    <a:pt x="5371689" y="919448"/>
-                  </a:lnTo>
-                  <a:lnTo>
-                    <a:pt x="5300066" y="885991"/>
-                  </a:lnTo>
-                  <a:lnTo>
-                    <a:pt x="5228444" y="850568"/>
-                  </a:lnTo>
-                  <a:lnTo>
-                    <a:pt x="5156821" y="813063"/>
-                  </a:lnTo>
-                  <a:lnTo>
-                    <a:pt x="5085199" y="773354"/>
-                  </a:lnTo>
-                  <a:lnTo>
-                    <a:pt x="5013576" y="731312"/>
-                  </a:lnTo>
-                  <a:lnTo>
-                    <a:pt x="4941954" y="686800"/>
-                  </a:lnTo>
-                  <a:lnTo>
-                    <a:pt x="4870331" y="656418"/>
-                  </a:lnTo>
-                  <a:lnTo>
-                    <a:pt x="4798709" y="649270"/>
-                  </a:lnTo>
-                  <a:lnTo>
-                    <a:pt x="4727086" y="642061"/>
-                  </a:lnTo>
-                  <a:lnTo>
-                    <a:pt x="4655464" y="634790"/>
-                  </a:lnTo>
-                  <a:lnTo>
-                    <a:pt x="4583841" y="627456"/>
-                  </a:lnTo>
-                  <a:lnTo>
-                    <a:pt x="4512219" y="620060"/>
-                  </a:lnTo>
-                  <a:lnTo>
-                    <a:pt x="4440596" y="612600"/>
-                  </a:lnTo>
-                  <a:lnTo>
-                    <a:pt x="4368974" y="605076"/>
-                  </a:lnTo>
-                  <a:lnTo>
-                    <a:pt x="4297351" y="597487"/>
-                  </a:lnTo>
-                  <a:lnTo>
-                    <a:pt x="4225729" y="589833"/>
-                  </a:lnTo>
-                  <a:lnTo>
-                    <a:pt x="4154106" y="582114"/>
-                  </a:lnTo>
-                  <a:lnTo>
-                    <a:pt x="4082483" y="574328"/>
-                  </a:lnTo>
-                  <a:lnTo>
-                    <a:pt x="4010861" y="566475"/>
-                  </a:lnTo>
-                  <a:lnTo>
-                    <a:pt x="3939238" y="558555"/>
-                  </a:lnTo>
-                  <a:lnTo>
-                    <a:pt x="3867616" y="550567"/>
-                  </a:lnTo>
-                  <a:lnTo>
-                    <a:pt x="3795993" y="542510"/>
-                  </a:lnTo>
-                  <a:lnTo>
-                    <a:pt x="3724371" y="534384"/>
-                  </a:lnTo>
-                  <a:lnTo>
-                    <a:pt x="3652748" y="526188"/>
-                  </a:lnTo>
-                  <a:lnTo>
-                    <a:pt x="3581126" y="517922"/>
-                  </a:lnTo>
-                  <a:lnTo>
-                    <a:pt x="3509503" y="509585"/>
-                  </a:lnTo>
-                  <a:lnTo>
-                    <a:pt x="3437881" y="501177"/>
-                  </a:lnTo>
-                  <a:lnTo>
-                    <a:pt x="3366258" y="492696"/>
-                  </a:lnTo>
-                  <a:lnTo>
-                    <a:pt x="3294636" y="484142"/>
-                  </a:lnTo>
-                  <a:lnTo>
-                    <a:pt x="3223013" y="475515"/>
-                  </a:lnTo>
-                  <a:lnTo>
-                    <a:pt x="3151391" y="466814"/>
-                  </a:lnTo>
-                  <a:lnTo>
-                    <a:pt x="3079768" y="458038"/>
-                  </a:lnTo>
-                  <a:lnTo>
-                    <a:pt x="3008146" y="449186"/>
-                  </a:lnTo>
-                  <a:lnTo>
-                    <a:pt x="2936523" y="440259"/>
-                  </a:lnTo>
-                  <a:lnTo>
-                    <a:pt x="2864901" y="431255"/>
-                  </a:lnTo>
-                  <a:lnTo>
-                    <a:pt x="2793278" y="422174"/>
-                  </a:lnTo>
-                  <a:lnTo>
-                    <a:pt x="2721655" y="413014"/>
-                  </a:lnTo>
-                  <a:lnTo>
-                    <a:pt x="2650033" y="403776"/>
-                  </a:lnTo>
-                  <a:lnTo>
-                    <a:pt x="2578410" y="394459"/>
-                  </a:lnTo>
-                  <a:lnTo>
-                    <a:pt x="2506788" y="385062"/>
-                  </a:lnTo>
-                  <a:lnTo>
-                    <a:pt x="2435165" y="375584"/>
-                  </a:lnTo>
-                  <a:lnTo>
-                    <a:pt x="2363543" y="366024"/>
-                  </a:lnTo>
-                  <a:lnTo>
-                    <a:pt x="2291920" y="356383"/>
-                  </a:lnTo>
-                  <a:lnTo>
-                    <a:pt x="2220298" y="346659"/>
-                  </a:lnTo>
-                  <a:lnTo>
-                    <a:pt x="2148675" y="336851"/>
-                  </a:lnTo>
-                  <a:lnTo>
-                    <a:pt x="2077053" y="326959"/>
-                  </a:lnTo>
-                  <a:lnTo>
-                    <a:pt x="2005430" y="316982"/>
-                  </a:lnTo>
-                  <a:lnTo>
-                    <a:pt x="1933808" y="306919"/>
-                  </a:lnTo>
-                  <a:lnTo>
-                    <a:pt x="1862185" y="296770"/>
-                  </a:lnTo>
-                  <a:lnTo>
-                    <a:pt x="1790563" y="286534"/>
-                  </a:lnTo>
-                  <a:lnTo>
-                    <a:pt x="1718940" y="276210"/>
-                  </a:lnTo>
-                  <a:lnTo>
-                    <a:pt x="1647318" y="265797"/>
-                  </a:lnTo>
-                  <a:lnTo>
-                    <a:pt x="1575695" y="255295"/>
-                  </a:lnTo>
-                  <a:lnTo>
-                    <a:pt x="1504073" y="244703"/>
-                  </a:lnTo>
-                  <a:lnTo>
-                    <a:pt x="1432450" y="234020"/>
-                  </a:lnTo>
-                  <a:lnTo>
-                    <a:pt x="1360827" y="223245"/>
-                  </a:lnTo>
-                  <a:lnTo>
-                    <a:pt x="1289205" y="212377"/>
-                  </a:lnTo>
-                  <a:lnTo>
-                    <a:pt x="1217582" y="201416"/>
-                  </a:lnTo>
-                  <a:lnTo>
-                    <a:pt x="1145960" y="190361"/>
-                  </a:lnTo>
-                  <a:lnTo>
-                    <a:pt x="1074337" y="179211"/>
-                  </a:lnTo>
-                  <a:lnTo>
-                    <a:pt x="1002715" y="167966"/>
-                  </a:lnTo>
-                  <a:lnTo>
-                    <a:pt x="931092" y="156624"/>
-                  </a:lnTo>
-                  <a:lnTo>
-                    <a:pt x="859470" y="145184"/>
-                  </a:lnTo>
-                  <a:lnTo>
-                    <a:pt x="787847" y="133646"/>
-                  </a:lnTo>
-                  <a:lnTo>
-                    <a:pt x="716225" y="122009"/>
-                  </a:lnTo>
-                  <a:lnTo>
-                    <a:pt x="644602" y="110272"/>
-                  </a:lnTo>
-                  <a:lnTo>
-                    <a:pt x="572980" y="98435"/>
-                  </a:lnTo>
-                  <a:lnTo>
-                    <a:pt x="501357" y="86495"/>
-                  </a:lnTo>
-                  <a:lnTo>
-                    <a:pt x="429735" y="74453"/>
-                  </a:lnTo>
-                  <a:lnTo>
-                    <a:pt x="358112" y="62308"/>
-                  </a:lnTo>
-                  <a:lnTo>
-                    <a:pt x="286490" y="50059"/>
-                  </a:lnTo>
-                  <a:lnTo>
-                    <a:pt x="214867" y="37704"/>
-                  </a:lnTo>
-                  <a:lnTo>
-                    <a:pt x="143245" y="25243"/>
-                  </a:lnTo>
-                  <a:lnTo>
-                    <a:pt x="71622" y="12675"/>
-                  </a:lnTo>
-                  <a:lnTo>
-                    <a:pt x="0" y="0"/>
+                    <a:pt x="7019007" y="685160"/>
+                  </a:lnTo>
+                  <a:lnTo>
+                    <a:pt x="6947385" y="676440"/>
+                  </a:lnTo>
+                  <a:lnTo>
+                    <a:pt x="6875762" y="667183"/>
+                  </a:lnTo>
+                  <a:lnTo>
+                    <a:pt x="6804139" y="657356"/>
+                  </a:lnTo>
+                  <a:lnTo>
+                    <a:pt x="6732517" y="646925"/>
+                  </a:lnTo>
+                  <a:lnTo>
+                    <a:pt x="6660894" y="635852"/>
+                  </a:lnTo>
+                  <a:lnTo>
+                    <a:pt x="6589272" y="624097"/>
+                  </a:lnTo>
+                  <a:lnTo>
+                    <a:pt x="6517649" y="611620"/>
+                  </a:lnTo>
+                  <a:lnTo>
+                    <a:pt x="6446027" y="598374"/>
+                  </a:lnTo>
+                  <a:lnTo>
+                    <a:pt x="6374404" y="584313"/>
+                  </a:lnTo>
+                  <a:lnTo>
+                    <a:pt x="6302782" y="569387"/>
+                  </a:lnTo>
+                  <a:lnTo>
+                    <a:pt x="6231159" y="553543"/>
+                  </a:lnTo>
+                  <a:lnTo>
+                    <a:pt x="6159537" y="536724"/>
+                  </a:lnTo>
+                  <a:lnTo>
+                    <a:pt x="6087914" y="518869"/>
+                  </a:lnTo>
+                  <a:lnTo>
+                    <a:pt x="6016292" y="499916"/>
+                  </a:lnTo>
+                  <a:lnTo>
+                    <a:pt x="5944669" y="479797"/>
+                  </a:lnTo>
+                  <a:lnTo>
+                    <a:pt x="5873047" y="458440"/>
+                  </a:lnTo>
+                  <a:lnTo>
+                    <a:pt x="5801424" y="435769"/>
+                  </a:lnTo>
+                  <a:lnTo>
+                    <a:pt x="5729802" y="411702"/>
+                  </a:lnTo>
+                  <a:lnTo>
+                    <a:pt x="5658179" y="386155"/>
+                  </a:lnTo>
+                  <a:lnTo>
+                    <a:pt x="5586557" y="359036"/>
+                  </a:lnTo>
+                  <a:lnTo>
+                    <a:pt x="5514934" y="330248"/>
+                  </a:lnTo>
+                  <a:lnTo>
+                    <a:pt x="5443311" y="299688"/>
+                  </a:lnTo>
+                  <a:lnTo>
+                    <a:pt x="5371689" y="267248"/>
+                  </a:lnTo>
+                  <a:lnTo>
+                    <a:pt x="5300066" y="232812"/>
+                  </a:lnTo>
+                  <a:lnTo>
+                    <a:pt x="5228444" y="196257"/>
+                  </a:lnTo>
+                  <a:lnTo>
+                    <a:pt x="5156821" y="157452"/>
+                  </a:lnTo>
+                  <a:lnTo>
+                    <a:pt x="5085199" y="116260"/>
+                  </a:lnTo>
+                  <a:lnTo>
+                    <a:pt x="5013576" y="72533"/>
+                  </a:lnTo>
+                  <a:lnTo>
+                    <a:pt x="4941954" y="26115"/>
+                  </a:lnTo>
+                  <a:lnTo>
+                    <a:pt x="4870331" y="0"/>
+                  </a:lnTo>
+                  <a:lnTo>
+                    <a:pt x="4798709" y="6269"/>
+                  </a:lnTo>
+                  <a:lnTo>
+                    <a:pt x="4727086" y="12492"/>
+                  </a:lnTo>
+                  <a:lnTo>
+                    <a:pt x="4655464" y="18667"/>
+                  </a:lnTo>
+                  <a:lnTo>
+                    <a:pt x="4583841" y="24795"/>
+                  </a:lnTo>
+                  <a:lnTo>
+                    <a:pt x="4512219" y="30877"/>
+                  </a:lnTo>
+                  <a:lnTo>
+                    <a:pt x="4440596" y="36913"/>
+                  </a:lnTo>
+                  <a:lnTo>
+                    <a:pt x="4368974" y="42903"/>
+                  </a:lnTo>
+                  <a:lnTo>
+                    <a:pt x="4297351" y="48847"/>
+                  </a:lnTo>
+                  <a:lnTo>
+                    <a:pt x="4225729" y="54747"/>
+                  </a:lnTo>
+                  <a:lnTo>
+                    <a:pt x="4154106" y="60602"/>
+                  </a:lnTo>
+                  <a:lnTo>
+                    <a:pt x="4082483" y="66412"/>
+                  </a:lnTo>
+                  <a:lnTo>
+                    <a:pt x="4010861" y="72178"/>
+                  </a:lnTo>
+                  <a:lnTo>
+                    <a:pt x="3939238" y="77901"/>
+                  </a:lnTo>
+                  <a:lnTo>
+                    <a:pt x="3867616" y="83580"/>
+                  </a:lnTo>
+                  <a:lnTo>
+                    <a:pt x="3795993" y="89216"/>
+                  </a:lnTo>
+                  <a:lnTo>
+                    <a:pt x="3724371" y="94809"/>
+                  </a:lnTo>
+                  <a:lnTo>
+                    <a:pt x="3652748" y="100360"/>
+                  </a:lnTo>
+                  <a:lnTo>
+                    <a:pt x="3581126" y="105869"/>
+                  </a:lnTo>
+                  <a:lnTo>
+                    <a:pt x="3509503" y="111336"/>
+                  </a:lnTo>
+                  <a:lnTo>
+                    <a:pt x="3437881" y="116762"/>
+                  </a:lnTo>
+                  <a:lnTo>
+                    <a:pt x="3366258" y="122147"/>
+                  </a:lnTo>
+                  <a:lnTo>
+                    <a:pt x="3294636" y="127490"/>
+                  </a:lnTo>
+                  <a:lnTo>
+                    <a:pt x="3223013" y="132793"/>
+                  </a:lnTo>
+                  <a:lnTo>
+                    <a:pt x="3151391" y="138056"/>
+                  </a:lnTo>
+                  <a:lnTo>
+                    <a:pt x="3079768" y="143279"/>
+                  </a:lnTo>
+                  <a:lnTo>
+                    <a:pt x="3008146" y="148463"/>
+                  </a:lnTo>
+                  <a:lnTo>
+                    <a:pt x="2936523" y="153607"/>
+                  </a:lnTo>
+                  <a:lnTo>
+                    <a:pt x="2864901" y="158712"/>
+                  </a:lnTo>
+                  <a:lnTo>
+                    <a:pt x="2793278" y="163778"/>
+                  </a:lnTo>
+                  <a:lnTo>
+                    <a:pt x="2721655" y="168807"/>
+                  </a:lnTo>
+                  <a:lnTo>
+                    <a:pt x="2650033" y="173796"/>
+                  </a:lnTo>
+                  <a:lnTo>
+                    <a:pt x="2578410" y="178748"/>
+                  </a:lnTo>
+                  <a:lnTo>
+                    <a:pt x="2506788" y="183663"/>
+                  </a:lnTo>
+                  <a:lnTo>
+                    <a:pt x="2435165" y="188540"/>
+                  </a:lnTo>
+                  <a:lnTo>
+                    <a:pt x="2363543" y="193380"/>
+                  </a:lnTo>
+                  <a:lnTo>
+                    <a:pt x="2291920" y="198184"/>
+                  </a:lnTo>
+                  <a:lnTo>
+                    <a:pt x="2220298" y="202951"/>
+                  </a:lnTo>
+                  <a:lnTo>
+                    <a:pt x="2148675" y="207682"/>
+                  </a:lnTo>
+                  <a:lnTo>
+                    <a:pt x="2077053" y="212377"/>
+                  </a:lnTo>
+                  <a:lnTo>
+                    <a:pt x="2005430" y="217037"/>
+                  </a:lnTo>
+                  <a:lnTo>
+                    <a:pt x="1933808" y="221661"/>
+                  </a:lnTo>
+                  <a:lnTo>
+                    <a:pt x="1862185" y="226250"/>
+                  </a:lnTo>
+                  <a:lnTo>
+                    <a:pt x="1790563" y="230804"/>
+                  </a:lnTo>
+                  <a:lnTo>
+                    <a:pt x="1718940" y="235324"/>
+                  </a:lnTo>
+                  <a:lnTo>
+                    <a:pt x="1647318" y="239809"/>
+                  </a:lnTo>
+                  <a:lnTo>
+                    <a:pt x="1575695" y="244261"/>
+                  </a:lnTo>
+                  <a:lnTo>
+                    <a:pt x="1504073" y="248679"/>
+                  </a:lnTo>
+                  <a:lnTo>
+                    <a:pt x="1432450" y="253063"/>
+                  </a:lnTo>
+                  <a:lnTo>
+                    <a:pt x="1360827" y="257414"/>
+                  </a:lnTo>
+                  <a:lnTo>
+                    <a:pt x="1289205" y="261732"/>
+                  </a:lnTo>
+                  <a:lnTo>
+                    <a:pt x="1217582" y="266017"/>
+                  </a:lnTo>
+                  <a:lnTo>
+                    <a:pt x="1145960" y="270270"/>
+                  </a:lnTo>
+                  <a:lnTo>
+                    <a:pt x="1074337" y="274491"/>
+                  </a:lnTo>
+                  <a:lnTo>
+                    <a:pt x="1002715" y="278679"/>
+                  </a:lnTo>
+                  <a:lnTo>
+                    <a:pt x="931092" y="282836"/>
+                  </a:lnTo>
+                  <a:lnTo>
+                    <a:pt x="859470" y="286961"/>
+                  </a:lnTo>
+                  <a:lnTo>
+                    <a:pt x="787847" y="291055"/>
+                  </a:lnTo>
+                  <a:lnTo>
+                    <a:pt x="716225" y="295118"/>
+                  </a:lnTo>
+                  <a:lnTo>
+                    <a:pt x="644602" y="299150"/>
+                  </a:lnTo>
+                  <a:lnTo>
+                    <a:pt x="572980" y="303152"/>
+                  </a:lnTo>
+                  <a:lnTo>
+                    <a:pt x="501357" y="307123"/>
+                  </a:lnTo>
+                  <a:lnTo>
+                    <a:pt x="429735" y="311064"/>
+                  </a:lnTo>
+                  <a:lnTo>
+                    <a:pt x="358112" y="314975"/>
+                  </a:lnTo>
+                  <a:lnTo>
+                    <a:pt x="286490" y="318857"/>
+                  </a:lnTo>
+                  <a:lnTo>
+                    <a:pt x="214867" y="322709"/>
+                  </a:lnTo>
+                  <a:lnTo>
+                    <a:pt x="143245" y="326532"/>
+                  </a:lnTo>
+                  <a:lnTo>
+                    <a:pt x="71622" y="330326"/>
+                  </a:lnTo>
+                  <a:lnTo>
+                    <a:pt x="0" y="334091"/>
                   </a:lnTo>
                 </a:path>
               </a:pathLst>
@@ -4028,240 +4022,273 @@
           </p:nvSpPr>
           <p:spPr>
             <a:xfrm>
-              <a:off x="2940845" y="2073503"/>
-              <a:ext cx="5321834" cy="3179866"/>
+              <a:off x="2126574" y="2073503"/>
+              <a:ext cx="6136104" cy="3109893"/>
             </a:xfrm>
             <a:custGeom>
               <a:avLst/>
               <a:pathLst>
-                <a:path w="5321834" h="3179866">
+                <a:path w="6136104" h="3109893">
                   <a:moveTo>
                     <a:pt x="0" y="0"/>
                   </a:moveTo>
                   <a:lnTo>
-                    <a:pt x="21767" y="34977"/>
-                  </a:lnTo>
-                  <a:lnTo>
-                    <a:pt x="93389" y="146349"/>
-                  </a:lnTo>
-                  <a:lnTo>
-                    <a:pt x="165012" y="254124"/>
-                  </a:lnTo>
-                  <a:lnTo>
-                    <a:pt x="236634" y="358419"/>
-                  </a:lnTo>
-                  <a:lnTo>
-                    <a:pt x="308257" y="459346"/>
-                  </a:lnTo>
-                  <a:lnTo>
-                    <a:pt x="379879" y="557014"/>
-                  </a:lnTo>
-                  <a:lnTo>
-                    <a:pt x="451502" y="651528"/>
-                  </a:lnTo>
-                  <a:lnTo>
-                    <a:pt x="523124" y="742989"/>
-                  </a:lnTo>
-                  <a:lnTo>
-                    <a:pt x="594747" y="831497"/>
-                  </a:lnTo>
-                  <a:lnTo>
-                    <a:pt x="666369" y="917147"/>
-                  </a:lnTo>
-                  <a:lnTo>
-                    <a:pt x="737992" y="1000031"/>
-                  </a:lnTo>
-                  <a:lnTo>
-                    <a:pt x="809615" y="1080238"/>
-                  </a:lnTo>
-                  <a:lnTo>
-                    <a:pt x="881237" y="1157855"/>
-                  </a:lnTo>
-                  <a:lnTo>
-                    <a:pt x="952860" y="1232966"/>
-                  </a:lnTo>
-                  <a:lnTo>
-                    <a:pt x="1024482" y="1305651"/>
-                  </a:lnTo>
-                  <a:lnTo>
-                    <a:pt x="1096105" y="1375989"/>
-                  </a:lnTo>
-                  <a:lnTo>
-                    <a:pt x="1167727" y="1444055"/>
-                  </a:lnTo>
-                  <a:lnTo>
-                    <a:pt x="1239350" y="1509923"/>
-                  </a:lnTo>
-                  <a:lnTo>
-                    <a:pt x="1310972" y="1573665"/>
-                  </a:lnTo>
-                  <a:lnTo>
-                    <a:pt x="1382595" y="1635347"/>
-                  </a:lnTo>
-                  <a:lnTo>
-                    <a:pt x="1454217" y="1695038"/>
-                  </a:lnTo>
-                  <a:lnTo>
-                    <a:pt x="1525840" y="1752801"/>
-                  </a:lnTo>
-                  <a:lnTo>
-                    <a:pt x="1597462" y="1808699"/>
-                  </a:lnTo>
-                  <a:lnTo>
-                    <a:pt x="1669085" y="1862792"/>
-                  </a:lnTo>
-                  <a:lnTo>
-                    <a:pt x="1740707" y="1915138"/>
-                  </a:lnTo>
-                  <a:lnTo>
-                    <a:pt x="1812330" y="1965793"/>
-                  </a:lnTo>
-                  <a:lnTo>
-                    <a:pt x="1883952" y="2014813"/>
-                  </a:lnTo>
-                  <a:lnTo>
-                    <a:pt x="1955575" y="2062250"/>
-                  </a:lnTo>
-                  <a:lnTo>
-                    <a:pt x="2027197" y="2108154"/>
-                  </a:lnTo>
-                  <a:lnTo>
-                    <a:pt x="2098820" y="2152577"/>
-                  </a:lnTo>
-                  <a:lnTo>
-                    <a:pt x="2170443" y="2195565"/>
-                  </a:lnTo>
-                  <a:lnTo>
-                    <a:pt x="2242065" y="2237164"/>
-                  </a:lnTo>
-                  <a:lnTo>
-                    <a:pt x="2313688" y="2277420"/>
-                  </a:lnTo>
-                  <a:lnTo>
-                    <a:pt x="2385310" y="2316377"/>
-                  </a:lnTo>
-                  <a:lnTo>
-                    <a:pt x="2456933" y="2354075"/>
-                  </a:lnTo>
-                  <a:lnTo>
-                    <a:pt x="2528555" y="2390555"/>
-                  </a:lnTo>
-                  <a:lnTo>
-                    <a:pt x="2600178" y="2425858"/>
-                  </a:lnTo>
-                  <a:lnTo>
-                    <a:pt x="2671800" y="2460021"/>
-                  </a:lnTo>
-                  <a:lnTo>
-                    <a:pt x="2743423" y="2493080"/>
-                  </a:lnTo>
-                  <a:lnTo>
-                    <a:pt x="2815045" y="2525072"/>
-                  </a:lnTo>
-                  <a:lnTo>
-                    <a:pt x="2886668" y="2556031"/>
-                  </a:lnTo>
-                  <a:lnTo>
-                    <a:pt x="2958290" y="2585990"/>
-                  </a:lnTo>
-                  <a:lnTo>
-                    <a:pt x="3029913" y="2614981"/>
-                  </a:lnTo>
-                  <a:lnTo>
-                    <a:pt x="3101535" y="2643037"/>
-                  </a:lnTo>
-                  <a:lnTo>
-                    <a:pt x="3173158" y="2670186"/>
-                  </a:lnTo>
-                  <a:lnTo>
-                    <a:pt x="3244780" y="2696458"/>
-                  </a:lnTo>
-                  <a:lnTo>
-                    <a:pt x="3316403" y="2721882"/>
-                  </a:lnTo>
-                  <a:lnTo>
-                    <a:pt x="3388025" y="2746485"/>
-                  </a:lnTo>
-                  <a:lnTo>
-                    <a:pt x="3459648" y="2770294"/>
-                  </a:lnTo>
-                  <a:lnTo>
-                    <a:pt x="3531271" y="2793334"/>
-                  </a:lnTo>
-                  <a:lnTo>
-                    <a:pt x="3602893" y="2815629"/>
-                  </a:lnTo>
-                  <a:lnTo>
-                    <a:pt x="3674516" y="2837205"/>
-                  </a:lnTo>
-                  <a:lnTo>
-                    <a:pt x="3746138" y="2858084"/>
-                  </a:lnTo>
-                  <a:lnTo>
-                    <a:pt x="3817761" y="2878289"/>
-                  </a:lnTo>
-                  <a:lnTo>
-                    <a:pt x="3889383" y="2897841"/>
-                  </a:lnTo>
-                  <a:lnTo>
-                    <a:pt x="3961006" y="2916762"/>
-                  </a:lnTo>
-                  <a:lnTo>
-                    <a:pt x="4032628" y="2935071"/>
-                  </a:lnTo>
-                  <a:lnTo>
-                    <a:pt x="4104251" y="2952790"/>
-                  </a:lnTo>
-                  <a:lnTo>
-                    <a:pt x="4175873" y="2969936"/>
-                  </a:lnTo>
-                  <a:lnTo>
-                    <a:pt x="4247496" y="2986529"/>
-                  </a:lnTo>
-                  <a:lnTo>
-                    <a:pt x="4319118" y="3002586"/>
-                  </a:lnTo>
-                  <a:lnTo>
-                    <a:pt x="4390741" y="3018124"/>
-                  </a:lnTo>
-                  <a:lnTo>
-                    <a:pt x="4462363" y="3033160"/>
-                  </a:lnTo>
-                  <a:lnTo>
-                    <a:pt x="4533986" y="3047711"/>
-                  </a:lnTo>
-                  <a:lnTo>
-                    <a:pt x="4605608" y="3061792"/>
-                  </a:lnTo>
-                  <a:lnTo>
-                    <a:pt x="4677231" y="3075419"/>
-                  </a:lnTo>
-                  <a:lnTo>
-                    <a:pt x="4748853" y="3088605"/>
-                  </a:lnTo>
-                  <a:lnTo>
-                    <a:pt x="4820476" y="3101365"/>
-                  </a:lnTo>
-                  <a:lnTo>
-                    <a:pt x="4892099" y="3113714"/>
-                  </a:lnTo>
-                  <a:lnTo>
-                    <a:pt x="4963721" y="3125663"/>
-                  </a:lnTo>
-                  <a:lnTo>
-                    <a:pt x="5035344" y="3137227"/>
-                  </a:lnTo>
-                  <a:lnTo>
-                    <a:pt x="5106966" y="3148417"/>
-                  </a:lnTo>
-                  <a:lnTo>
-                    <a:pt x="5178589" y="3159246"/>
-                  </a:lnTo>
-                  <a:lnTo>
-                    <a:pt x="5250211" y="3169725"/>
-                  </a:lnTo>
-                  <a:lnTo>
-                    <a:pt x="5321834" y="3179866"/>
+                    <a:pt x="48190" y="60787"/>
+                  </a:lnTo>
+                  <a:lnTo>
+                    <a:pt x="119812" y="148810"/>
+                  </a:lnTo>
+                  <a:lnTo>
+                    <a:pt x="191435" y="234569"/>
+                  </a:lnTo>
+                  <a:lnTo>
+                    <a:pt x="263057" y="318122"/>
+                  </a:lnTo>
+                  <a:lnTo>
+                    <a:pt x="334680" y="399527"/>
+                  </a:lnTo>
+                  <a:lnTo>
+                    <a:pt x="406302" y="478839"/>
+                  </a:lnTo>
+                  <a:lnTo>
+                    <a:pt x="477925" y="556111"/>
+                  </a:lnTo>
+                  <a:lnTo>
+                    <a:pt x="549547" y="631396"/>
+                  </a:lnTo>
+                  <a:lnTo>
+                    <a:pt x="621170" y="704745"/>
+                  </a:lnTo>
+                  <a:lnTo>
+                    <a:pt x="692792" y="776208"/>
+                  </a:lnTo>
+                  <a:lnTo>
+                    <a:pt x="764415" y="845833"/>
+                  </a:lnTo>
+                  <a:lnTo>
+                    <a:pt x="836037" y="913668"/>
+                  </a:lnTo>
+                  <a:lnTo>
+                    <a:pt x="907660" y="979758"/>
+                  </a:lnTo>
+                  <a:lnTo>
+                    <a:pt x="979282" y="1044149"/>
+                  </a:lnTo>
+                  <a:lnTo>
+                    <a:pt x="1050905" y="1106884"/>
+                  </a:lnTo>
+                  <a:lnTo>
+                    <a:pt x="1122527" y="1168006"/>
+                  </a:lnTo>
+                  <a:lnTo>
+                    <a:pt x="1194150" y="1227556"/>
+                  </a:lnTo>
+                  <a:lnTo>
+                    <a:pt x="1265772" y="1285575"/>
+                  </a:lnTo>
+                  <a:lnTo>
+                    <a:pt x="1337395" y="1342101"/>
+                  </a:lnTo>
+                  <a:lnTo>
+                    <a:pt x="1409018" y="1397174"/>
+                  </a:lnTo>
+                  <a:lnTo>
+                    <a:pt x="1480640" y="1450831"/>
+                  </a:lnTo>
+                  <a:lnTo>
+                    <a:pt x="1552263" y="1503108"/>
+                  </a:lnTo>
+                  <a:lnTo>
+                    <a:pt x="1623885" y="1554041"/>
+                  </a:lnTo>
+                  <a:lnTo>
+                    <a:pt x="1695508" y="1603664"/>
+                  </a:lnTo>
+                  <a:lnTo>
+                    <a:pt x="1767130" y="1652011"/>
+                  </a:lnTo>
+                  <a:lnTo>
+                    <a:pt x="1838753" y="1699114"/>
+                  </a:lnTo>
+                  <a:lnTo>
+                    <a:pt x="1910375" y="1745007"/>
+                  </a:lnTo>
+                  <a:lnTo>
+                    <a:pt x="1981998" y="1789719"/>
+                  </a:lnTo>
+                  <a:lnTo>
+                    <a:pt x="2053620" y="1833281"/>
+                  </a:lnTo>
+                  <a:lnTo>
+                    <a:pt x="2125243" y="1875724"/>
+                  </a:lnTo>
+                  <a:lnTo>
+                    <a:pt x="2196865" y="1917075"/>
+                  </a:lnTo>
+                  <a:lnTo>
+                    <a:pt x="2268488" y="1957362"/>
+                  </a:lnTo>
+                  <a:lnTo>
+                    <a:pt x="2340110" y="1996613"/>
+                  </a:lnTo>
+                  <a:lnTo>
+                    <a:pt x="2411733" y="2034856"/>
+                  </a:lnTo>
+                  <a:lnTo>
+                    <a:pt x="2483355" y="2072114"/>
+                  </a:lnTo>
+                  <a:lnTo>
+                    <a:pt x="2554978" y="2108415"/>
+                  </a:lnTo>
+                  <a:lnTo>
+                    <a:pt x="2626600" y="2143782"/>
+                  </a:lnTo>
+                  <a:lnTo>
+                    <a:pt x="2698223" y="2178239"/>
+                  </a:lnTo>
+                  <a:lnTo>
+                    <a:pt x="2769846" y="2211811"/>
+                  </a:lnTo>
+                  <a:lnTo>
+                    <a:pt x="2841468" y="2244519"/>
+                  </a:lnTo>
+                  <a:lnTo>
+                    <a:pt x="2913091" y="2276386"/>
+                  </a:lnTo>
+                  <a:lnTo>
+                    <a:pt x="2984713" y="2307434"/>
+                  </a:lnTo>
+                  <a:lnTo>
+                    <a:pt x="3056336" y="2337683"/>
+                  </a:lnTo>
+                  <a:lnTo>
+                    <a:pt x="3127958" y="2367155"/>
+                  </a:lnTo>
+                  <a:lnTo>
+                    <a:pt x="3199581" y="2395868"/>
+                  </a:lnTo>
+                  <a:lnTo>
+                    <a:pt x="3271203" y="2423843"/>
+                  </a:lnTo>
+                  <a:lnTo>
+                    <a:pt x="3342826" y="2451099"/>
+                  </a:lnTo>
+                  <a:lnTo>
+                    <a:pt x="3414448" y="2477654"/>
+                  </a:lnTo>
+                  <a:lnTo>
+                    <a:pt x="3486071" y="2503526"/>
+                  </a:lnTo>
+                  <a:lnTo>
+                    <a:pt x="3557693" y="2528732"/>
+                  </a:lnTo>
+                  <a:lnTo>
+                    <a:pt x="3629316" y="2553291"/>
+                  </a:lnTo>
+                  <a:lnTo>
+                    <a:pt x="3700938" y="2577218"/>
+                  </a:lnTo>
+                  <a:lnTo>
+                    <a:pt x="3772561" y="2600530"/>
+                  </a:lnTo>
+                  <a:lnTo>
+                    <a:pt x="3844183" y="2623242"/>
+                  </a:lnTo>
+                  <a:lnTo>
+                    <a:pt x="3915806" y="2645370"/>
+                  </a:lnTo>
+                  <a:lnTo>
+                    <a:pt x="3987428" y="2666929"/>
+                  </a:lnTo>
+                  <a:lnTo>
+                    <a:pt x="4059051" y="2687934"/>
+                  </a:lnTo>
+                  <a:lnTo>
+                    <a:pt x="4130673" y="2708398"/>
+                  </a:lnTo>
+                  <a:lnTo>
+                    <a:pt x="4202296" y="2728337"/>
+                  </a:lnTo>
+                  <a:lnTo>
+                    <a:pt x="4273919" y="2747762"/>
+                  </a:lnTo>
+                  <a:lnTo>
+                    <a:pt x="4345541" y="2766688"/>
+                  </a:lnTo>
+                  <a:lnTo>
+                    <a:pt x="4417164" y="2785128"/>
+                  </a:lnTo>
+                  <a:lnTo>
+                    <a:pt x="4488786" y="2803093"/>
+                  </a:lnTo>
+                  <a:lnTo>
+                    <a:pt x="4560409" y="2820596"/>
+                  </a:lnTo>
+                  <a:lnTo>
+                    <a:pt x="4632031" y="2837649"/>
+                  </a:lnTo>
+                  <a:lnTo>
+                    <a:pt x="4703654" y="2854264"/>
+                  </a:lnTo>
+                  <a:lnTo>
+                    <a:pt x="4775276" y="2870451"/>
+                  </a:lnTo>
+                  <a:lnTo>
+                    <a:pt x="4846899" y="2886222"/>
+                  </a:lnTo>
+                  <a:lnTo>
+                    <a:pt x="4918521" y="2901588"/>
+                  </a:lnTo>
+                  <a:lnTo>
+                    <a:pt x="4990144" y="2916558"/>
+                  </a:lnTo>
+                  <a:lnTo>
+                    <a:pt x="5061766" y="2931144"/>
+                  </a:lnTo>
+                  <a:lnTo>
+                    <a:pt x="5133389" y="2945354"/>
+                  </a:lnTo>
+                  <a:lnTo>
+                    <a:pt x="5205011" y="2959199"/>
+                  </a:lnTo>
+                  <a:lnTo>
+                    <a:pt x="5276634" y="2972688"/>
+                  </a:lnTo>
+                  <a:lnTo>
+                    <a:pt x="5348256" y="2985830"/>
+                  </a:lnTo>
+                  <a:lnTo>
+                    <a:pt x="5419879" y="2998634"/>
+                  </a:lnTo>
+                  <a:lnTo>
+                    <a:pt x="5491501" y="3011109"/>
+                  </a:lnTo>
+                  <a:lnTo>
+                    <a:pt x="5563124" y="3023263"/>
+                  </a:lnTo>
+                  <a:lnTo>
+                    <a:pt x="5634747" y="3035104"/>
+                  </a:lnTo>
+                  <a:lnTo>
+                    <a:pt x="5706369" y="3046641"/>
+                  </a:lnTo>
+                  <a:lnTo>
+                    <a:pt x="5777992" y="3057881"/>
+                  </a:lnTo>
+                  <a:lnTo>
+                    <a:pt x="5849614" y="3068833"/>
+                  </a:lnTo>
+                  <a:lnTo>
+                    <a:pt x="5921237" y="3079502"/>
+                  </a:lnTo>
+                  <a:lnTo>
+                    <a:pt x="5992859" y="3089898"/>
+                  </a:lnTo>
+                  <a:lnTo>
+                    <a:pt x="6064482" y="3100026"/>
+                  </a:lnTo>
+                  <a:lnTo>
+                    <a:pt x="6136104" y="3109893"/>
                   </a:lnTo>
                 </a:path>
               </a:pathLst>
@@ -5001,7 +5028,7 @@
                   <a:latin typeface="Helvetica"/>
                   <a:cs typeface="Helvetica"/>
                 </a:rPr>
-                <a:t>subHR per 1 mL/min: 0.96 (0.93-0.99)  |  per IQR (Δ = 18.2): 0.46 (0.26-0.82)  |  IQR: [-11.5, 6.7]</a:t>
+                <a:t>subHR per 1 mL/min: 0.97 (0.93-1.01)  |  per IQR (Δ = 18.2): 0.54 (0.25-1.20)  |  IQR: [-11.5, 6.7]</a:t>
               </a:r>
             </a:p>
           </p:txBody>

--- a/docs/plots/carbo/jx_carbo_linsubhr_egfrdisc_anemia3.pptx
+++ b/docs/plots/carbo/jx_carbo_linsubhr_egfrdisc_anemia3.pptx
@@ -3013,7 +3013,7 @@
                     <a:pt x="3178969" y="0"/>
                   </a:moveTo>
                   <a:lnTo>
-                    <a:pt x="3223013" y="127019"/>
+                    <a:pt x="3223013" y="127018"/>
                   </a:lnTo>
                   <a:lnTo>
                     <a:pt x="3294636" y="321598"/>
@@ -3091,7 +3091,7 @@
                     <a:pt x="5013576" y="2644185"/>
                   </a:lnTo>
                   <a:lnTo>
-                    <a:pt x="5085199" y="2637770"/>
+                    <a:pt x="5085199" y="2637771"/>
                   </a:lnTo>
                   <a:lnTo>
                     <a:pt x="5156821" y="2631307"/>
@@ -3403,7 +3403,7 @@
                     <a:pt x="1790563" y="2887674"/>
                   </a:lnTo>
                   <a:lnTo>
-                    <a:pt x="1718940" y="2892194"/>
+                    <a:pt x="1718940" y="2892193"/>
                   </a:lnTo>
                   <a:lnTo>
                     <a:pt x="1647318" y="2896679"/>
@@ -3427,7 +3427,7 @@
                     <a:pt x="1217582" y="2922887"/>
                   </a:lnTo>
                   <a:lnTo>
-                    <a:pt x="1145960" y="2927140"/>
+                    <a:pt x="1145960" y="2927139"/>
                   </a:lnTo>
                   <a:lnTo>
                     <a:pt x="1074337" y="2931360"/>
@@ -3442,7 +3442,7 @@
                     <a:pt x="859470" y="2943831"/>
                   </a:lnTo>
                   <a:lnTo>
-                    <a:pt x="787847" y="2947925"/>
+                    <a:pt x="787847" y="2947924"/>
                   </a:lnTo>
                   <a:lnTo>
                     <a:pt x="716225" y="2951987"/>
@@ -3515,7 +3515,7 @@
                     <a:pt x="0" y="0"/>
                   </a:moveTo>
                   <a:lnTo>
-                    <a:pt x="44044" y="127019"/>
+                    <a:pt x="44044" y="127018"/>
                   </a:lnTo>
                   <a:lnTo>
                     <a:pt x="115666" y="321598"/>
@@ -3593,7 +3593,7 @@
                     <a:pt x="1834607" y="2644185"/>
                   </a:lnTo>
                   <a:lnTo>
-                    <a:pt x="1906229" y="2637770"/>
+                    <a:pt x="1906229" y="2637771"/>
                   </a:lnTo>
                   <a:lnTo>
                     <a:pt x="1977852" y="2631307"/>
@@ -3888,7 +3888,7 @@
                     <a:pt x="2793278" y="163778"/>
                   </a:lnTo>
                   <a:lnTo>
-                    <a:pt x="2721655" y="168807"/>
+                    <a:pt x="2721655" y="168806"/>
                   </a:lnTo>
                   <a:lnTo>
                     <a:pt x="2650033" y="173796"/>
@@ -3999,7 +3999,7 @@
                     <a:pt x="143245" y="326532"/>
                   </a:lnTo>
                   <a:lnTo>
-                    <a:pt x="71622" y="330326"/>
+                    <a:pt x="71622" y="330325"/>
                   </a:lnTo>
                   <a:lnTo>
                     <a:pt x="0" y="334091"/>
@@ -4033,19 +4033,19 @@
                     <a:pt x="0" y="0"/>
                   </a:moveTo>
                   <a:lnTo>
-                    <a:pt x="48190" y="60787"/>
-                  </a:lnTo>
-                  <a:lnTo>
-                    <a:pt x="119812" y="148810"/>
-                  </a:lnTo>
-                  <a:lnTo>
-                    <a:pt x="191435" y="234569"/>
+                    <a:pt x="48189" y="60787"/>
+                  </a:lnTo>
+                  <a:lnTo>
+                    <a:pt x="119812" y="148809"/>
+                  </a:lnTo>
+                  <a:lnTo>
+                    <a:pt x="191434" y="234568"/>
                   </a:lnTo>
                   <a:lnTo>
                     <a:pt x="263057" y="318122"/>
                   </a:lnTo>
                   <a:lnTo>
-                    <a:pt x="334680" y="399527"/>
+                    <a:pt x="334679" y="399527"/>
                   </a:lnTo>
                   <a:lnTo>
                     <a:pt x="406302" y="478839"/>
@@ -4084,25 +4084,25 @@
                     <a:pt x="1194150" y="1227556"/>
                   </a:lnTo>
                   <a:lnTo>
-                    <a:pt x="1265772" y="1285575"/>
+                    <a:pt x="1265772" y="1285574"/>
                   </a:lnTo>
                   <a:lnTo>
                     <a:pt x="1337395" y="1342101"/>
                   </a:lnTo>
                   <a:lnTo>
-                    <a:pt x="1409018" y="1397174"/>
+                    <a:pt x="1409017" y="1397174"/>
                   </a:lnTo>
                   <a:lnTo>
                     <a:pt x="1480640" y="1450831"/>
                   </a:lnTo>
                   <a:lnTo>
-                    <a:pt x="1552263" y="1503108"/>
+                    <a:pt x="1552262" y="1503108"/>
                   </a:lnTo>
                   <a:lnTo>
                     <a:pt x="1623885" y="1554041"/>
                   </a:lnTo>
                   <a:lnTo>
-                    <a:pt x="1695508" y="1603664"/>
+                    <a:pt x="1695507" y="1603664"/>
                   </a:lnTo>
                   <a:lnTo>
                     <a:pt x="1767130" y="1652011"/>
@@ -4123,7 +4123,7 @@
                     <a:pt x="2125243" y="1875724"/>
                   </a:lnTo>
                   <a:lnTo>
-                    <a:pt x="2196865" y="1917075"/>
+                    <a:pt x="2196865" y="1917074"/>
                   </a:lnTo>
                   <a:lnTo>
                     <a:pt x="2268488" y="1957362"/>
@@ -4132,7 +4132,7 @@
                     <a:pt x="2340110" y="1996613"/>
                   </a:lnTo>
                   <a:lnTo>
-                    <a:pt x="2411733" y="2034856"/>
+                    <a:pt x="2411733" y="2034855"/>
                   </a:lnTo>
                   <a:lnTo>
                     <a:pt x="2483355" y="2072114"/>
@@ -4147,19 +4147,19 @@
                     <a:pt x="2698223" y="2178239"/>
                   </a:lnTo>
                   <a:lnTo>
-                    <a:pt x="2769846" y="2211811"/>
+                    <a:pt x="2769845" y="2211811"/>
                   </a:lnTo>
                   <a:lnTo>
                     <a:pt x="2841468" y="2244519"/>
                   </a:lnTo>
                   <a:lnTo>
-                    <a:pt x="2913091" y="2276386"/>
+                    <a:pt x="2913090" y="2276386"/>
                   </a:lnTo>
                   <a:lnTo>
                     <a:pt x="2984713" y="2307434"/>
                   </a:lnTo>
                   <a:lnTo>
-                    <a:pt x="3056336" y="2337683"/>
+                    <a:pt x="3056335" y="2337683"/>
                   </a:lnTo>
                   <a:lnTo>
                     <a:pt x="3127958" y="2367155"/>
@@ -4210,13 +4210,13 @@
                     <a:pt x="4202296" y="2728337"/>
                   </a:lnTo>
                   <a:lnTo>
-                    <a:pt x="4273919" y="2747762"/>
+                    <a:pt x="4273918" y="2747762"/>
                   </a:lnTo>
                   <a:lnTo>
                     <a:pt x="4345541" y="2766688"/>
                   </a:lnTo>
                   <a:lnTo>
-                    <a:pt x="4417164" y="2785128"/>
+                    <a:pt x="4417163" y="2785128"/>
                   </a:lnTo>
                   <a:lnTo>
                     <a:pt x="4488786" y="2803093"/>
@@ -4267,13 +4267,13 @@
                     <a:pt x="5563124" y="3023263"/>
                   </a:lnTo>
                   <a:lnTo>
-                    <a:pt x="5634747" y="3035104"/>
+                    <a:pt x="5634746" y="3035104"/>
                   </a:lnTo>
                   <a:lnTo>
                     <a:pt x="5706369" y="3046641"/>
                   </a:lnTo>
                   <a:lnTo>
-                    <a:pt x="5777992" y="3057881"/>
+                    <a:pt x="5777991" y="3057881"/>
                   </a:lnTo>
                   <a:lnTo>
                     <a:pt x="5849614" y="3068833"/>

--- a/docs/plots/carbo/jx_carbo_linsubhr_egfrdisc_anemia3.pptx
+++ b/docs/plots/carbo/jx_carbo_linsubhr_egfrdisc_anemia3.pptx
@@ -4996,7 +4996,7 @@
           <p:spPr>
             <a:xfrm>
               <a:off x="817517" y="1896563"/>
-              <a:ext cx="4869911" cy="82021"/>
+              <a:ext cx="5413065" cy="82021"/>
             </a:xfrm>
             <a:prstGeom prst="rect">
               <a:avLst/>
@@ -5028,7 +5028,7 @@
                   <a:latin typeface="Helvetica"/>
                   <a:cs typeface="Helvetica"/>
                 </a:rPr>
-                <a:t>subHR per 1 mL/min: 0.97 (0.93-1.01)  |  per IQR (Δ = 18.2): 0.54 (0.25-1.20)  |  IQR: [-11.5, 6.7]</a:t>
+                <a:t>subHR per 1 mL/min: 0.97 (0.93-1.01), p = 0.129  |  per IQR (Δ = 18.2): 0.54 (0.25-1.20)  |  IQR: [-11.5, 6.7]</a:t>
               </a:r>
             </a:p>
           </p:txBody>

--- a/docs/plots/carbo/jx_carbo_linsubhr_egfrdisc_anemia3.pptx
+++ b/docs/plots/carbo/jx_carbo_linsubhr_egfrdisc_anemia3.pptx
@@ -2271,26 +2271,26 @@
           </p:nvSpPr>
           <p:spPr>
             <a:xfrm>
-              <a:off x="817517" y="5142518"/>
-              <a:ext cx="7799693" cy="0"/>
+              <a:off x="915645" y="5071743"/>
+              <a:ext cx="7682587" cy="0"/>
             </a:xfrm>
             <a:custGeom>
               <a:avLst/>
               <a:pathLst>
-                <a:path w="7799693" h="0">
+                <a:path w="7682587" h="0">
                   <a:moveTo>
                     <a:pt x="0" y="0"/>
                   </a:moveTo>
                   <a:lnTo>
-                    <a:pt x="7799693" y="0"/>
-                  </a:lnTo>
-                  <a:lnTo>
-                    <a:pt x="7799693" y="0"/>
+                    <a:pt x="7682587" y="0"/>
+                  </a:lnTo>
+                  <a:lnTo>
+                    <a:pt x="7682587" y="0"/>
                   </a:lnTo>
                 </a:path>
               </a:pathLst>
             </a:custGeom>
-            <a:ln w="6775" cap="flat">
+            <a:ln w="8623" cap="flat">
               <a:solidFill>
                 <a:srgbClr val="EBEBEB">
                   <a:alpha val="100000"/>
@@ -2314,26 +2314,26 @@
           </p:nvSpPr>
           <p:spPr>
             <a:xfrm>
-              <a:off x="817517" y="4313054"/>
-              <a:ext cx="7799693" cy="0"/>
+              <a:off x="915645" y="4298074"/>
+              <a:ext cx="7682587" cy="0"/>
             </a:xfrm>
             <a:custGeom>
               <a:avLst/>
               <a:pathLst>
-                <a:path w="7799693" h="0">
+                <a:path w="7682587" h="0">
                   <a:moveTo>
                     <a:pt x="0" y="0"/>
                   </a:moveTo>
                   <a:lnTo>
-                    <a:pt x="7799693" y="0"/>
-                  </a:lnTo>
-                  <a:lnTo>
-                    <a:pt x="7799693" y="0"/>
+                    <a:pt x="7682587" y="0"/>
+                  </a:lnTo>
+                  <a:lnTo>
+                    <a:pt x="7682587" y="0"/>
                   </a:lnTo>
                 </a:path>
               </a:pathLst>
             </a:custGeom>
-            <a:ln w="6775" cap="flat">
+            <a:ln w="8623" cap="flat">
               <a:solidFill>
                 <a:srgbClr val="EBEBEB">
                   <a:alpha val="100000"/>
@@ -2357,26 +2357,26 @@
           </p:nvSpPr>
           <p:spPr>
             <a:xfrm>
-              <a:off x="817517" y="3483591"/>
-              <a:ext cx="7799693" cy="0"/>
+              <a:off x="915645" y="3524405"/>
+              <a:ext cx="7682587" cy="0"/>
             </a:xfrm>
             <a:custGeom>
               <a:avLst/>
               <a:pathLst>
-                <a:path w="7799693" h="0">
+                <a:path w="7682587" h="0">
                   <a:moveTo>
                     <a:pt x="0" y="0"/>
                   </a:moveTo>
                   <a:lnTo>
-                    <a:pt x="7799693" y="0"/>
-                  </a:lnTo>
-                  <a:lnTo>
-                    <a:pt x="7799693" y="0"/>
+                    <a:pt x="7682587" y="0"/>
+                  </a:lnTo>
+                  <a:lnTo>
+                    <a:pt x="7682587" y="0"/>
                   </a:lnTo>
                 </a:path>
               </a:pathLst>
             </a:custGeom>
-            <a:ln w="6775" cap="flat">
+            <a:ln w="8623" cap="flat">
               <a:solidFill>
                 <a:srgbClr val="EBEBEB">
                   <a:alpha val="100000"/>
@@ -2400,26 +2400,26 @@
           </p:nvSpPr>
           <p:spPr>
             <a:xfrm>
-              <a:off x="817517" y="2654127"/>
-              <a:ext cx="7799693" cy="0"/>
+              <a:off x="915645" y="2750737"/>
+              <a:ext cx="7682587" cy="0"/>
             </a:xfrm>
             <a:custGeom>
               <a:avLst/>
               <a:pathLst>
-                <a:path w="7799693" h="0">
+                <a:path w="7682587" h="0">
                   <a:moveTo>
                     <a:pt x="0" y="0"/>
                   </a:moveTo>
                   <a:lnTo>
-                    <a:pt x="7799693" y="0"/>
-                  </a:lnTo>
-                  <a:lnTo>
-                    <a:pt x="7799693" y="0"/>
+                    <a:pt x="7682587" y="0"/>
+                  </a:lnTo>
+                  <a:lnTo>
+                    <a:pt x="7682587" y="0"/>
                   </a:lnTo>
                 </a:path>
               </a:pathLst>
             </a:custGeom>
-            <a:ln w="6775" cap="flat">
+            <a:ln w="8623" cap="flat">
               <a:solidFill>
                 <a:srgbClr val="EBEBEB">
                   <a:alpha val="100000"/>
@@ -2443,15 +2443,15 @@
           </p:nvSpPr>
           <p:spPr>
             <a:xfrm>
-              <a:off x="1487487" y="2073503"/>
-              <a:ext cx="0" cy="3649639"/>
+              <a:off x="1575555" y="2209169"/>
+              <a:ext cx="0" cy="3404141"/>
             </a:xfrm>
             <a:custGeom>
               <a:avLst/>
               <a:pathLst>
-                <a:path w="0" h="3649639">
+                <a:path w="0" h="3404141">
                   <a:moveTo>
-                    <a:pt x="0" y="3649639"/>
+                    <a:pt x="0" y="3404141"/>
                   </a:moveTo>
                   <a:lnTo>
                     <a:pt x="0" y="0"/>
@@ -2462,7 +2462,7 @@
                 </a:path>
               </a:pathLst>
             </a:custGeom>
-            <a:ln w="6775" cap="flat">
+            <a:ln w="8623" cap="flat">
               <a:solidFill>
                 <a:srgbClr val="EBEBEB">
                   <a:alpha val="100000"/>
@@ -2486,15 +2486,15 @@
           </p:nvSpPr>
           <p:spPr>
             <a:xfrm>
-              <a:off x="3337360" y="2073503"/>
-              <a:ext cx="0" cy="3649639"/>
+              <a:off x="3397654" y="2209169"/>
+              <a:ext cx="0" cy="3404141"/>
             </a:xfrm>
             <a:custGeom>
               <a:avLst/>
               <a:pathLst>
-                <a:path w="0" h="3649639">
+                <a:path w="0" h="3404141">
                   <a:moveTo>
-                    <a:pt x="0" y="3649639"/>
+                    <a:pt x="0" y="3404141"/>
                   </a:moveTo>
                   <a:lnTo>
                     <a:pt x="0" y="0"/>
@@ -2505,7 +2505,7 @@
                 </a:path>
               </a:pathLst>
             </a:custGeom>
-            <a:ln w="6775" cap="flat">
+            <a:ln w="8623" cap="flat">
               <a:solidFill>
                 <a:srgbClr val="EBEBEB">
                   <a:alpha val="100000"/>
@@ -2529,15 +2529,15 @@
           </p:nvSpPr>
           <p:spPr>
             <a:xfrm>
-              <a:off x="5187233" y="2073503"/>
-              <a:ext cx="0" cy="3649639"/>
+              <a:off x="5219752" y="2209169"/>
+              <a:ext cx="0" cy="3404141"/>
             </a:xfrm>
             <a:custGeom>
               <a:avLst/>
               <a:pathLst>
-                <a:path w="0" h="3649639">
+                <a:path w="0" h="3404141">
                   <a:moveTo>
-                    <a:pt x="0" y="3649639"/>
+                    <a:pt x="0" y="3404141"/>
                   </a:moveTo>
                   <a:lnTo>
                     <a:pt x="0" y="0"/>
@@ -2548,7 +2548,7 @@
                 </a:path>
               </a:pathLst>
             </a:custGeom>
-            <a:ln w="6775" cap="flat">
+            <a:ln w="8623" cap="flat">
               <a:solidFill>
                 <a:srgbClr val="EBEBEB">
                   <a:alpha val="100000"/>
@@ -2572,15 +2572,15 @@
           </p:nvSpPr>
           <p:spPr>
             <a:xfrm>
-              <a:off x="7037106" y="2073503"/>
-              <a:ext cx="0" cy="3649639"/>
+              <a:off x="7041851" y="2209169"/>
+              <a:ext cx="0" cy="3404141"/>
             </a:xfrm>
             <a:custGeom>
               <a:avLst/>
               <a:pathLst>
-                <a:path w="0" h="3649639">
+                <a:path w="0" h="3404141">
                   <a:moveTo>
-                    <a:pt x="0" y="3649639"/>
+                    <a:pt x="0" y="3404141"/>
                   </a:moveTo>
                   <a:lnTo>
                     <a:pt x="0" y="0"/>
@@ -2591,7 +2591,7 @@
                 </a:path>
               </a:pathLst>
             </a:custGeom>
-            <a:ln w="6775" cap="flat">
+            <a:ln w="8623" cap="flat">
               <a:solidFill>
                 <a:srgbClr val="EBEBEB">
                   <a:alpha val="100000"/>
@@ -2615,26 +2615,26 @@
           </p:nvSpPr>
           <p:spPr>
             <a:xfrm>
-              <a:off x="817517" y="5557249"/>
-              <a:ext cx="7799693" cy="0"/>
+              <a:off x="915645" y="5458577"/>
+              <a:ext cx="7682587" cy="0"/>
             </a:xfrm>
             <a:custGeom>
               <a:avLst/>
               <a:pathLst>
-                <a:path w="7799693" h="0">
+                <a:path w="7682587" h="0">
                   <a:moveTo>
                     <a:pt x="0" y="0"/>
                   </a:moveTo>
                   <a:lnTo>
-                    <a:pt x="7799693" y="0"/>
-                  </a:lnTo>
-                  <a:lnTo>
-                    <a:pt x="7799693" y="0"/>
+                    <a:pt x="7682587" y="0"/>
+                  </a:lnTo>
+                  <a:lnTo>
+                    <a:pt x="7682587" y="0"/>
                   </a:lnTo>
                 </a:path>
               </a:pathLst>
             </a:custGeom>
-            <a:ln w="13550" cap="flat">
+            <a:ln w="17246" cap="flat">
               <a:solidFill>
                 <a:srgbClr val="EBEBEB">
                   <a:alpha val="100000"/>
@@ -2658,26 +2658,26 @@
           </p:nvSpPr>
           <p:spPr>
             <a:xfrm>
-              <a:off x="817517" y="4727786"/>
-              <a:ext cx="7799693" cy="0"/>
+              <a:off x="915645" y="4684908"/>
+              <a:ext cx="7682587" cy="0"/>
             </a:xfrm>
             <a:custGeom>
               <a:avLst/>
               <a:pathLst>
-                <a:path w="7799693" h="0">
+                <a:path w="7682587" h="0">
                   <a:moveTo>
                     <a:pt x="0" y="0"/>
                   </a:moveTo>
                   <a:lnTo>
-                    <a:pt x="7799693" y="0"/>
-                  </a:lnTo>
-                  <a:lnTo>
-                    <a:pt x="7799693" y="0"/>
+                    <a:pt x="7682587" y="0"/>
+                  </a:lnTo>
+                  <a:lnTo>
+                    <a:pt x="7682587" y="0"/>
                   </a:lnTo>
                 </a:path>
               </a:pathLst>
             </a:custGeom>
-            <a:ln w="13550" cap="flat">
+            <a:ln w="17246" cap="flat">
               <a:solidFill>
                 <a:srgbClr val="EBEBEB">
                   <a:alpha val="100000"/>
@@ -2701,26 +2701,26 @@
           </p:nvSpPr>
           <p:spPr>
             <a:xfrm>
-              <a:off x="817517" y="3898322"/>
-              <a:ext cx="7799693" cy="0"/>
+              <a:off x="915645" y="3911240"/>
+              <a:ext cx="7682587" cy="0"/>
             </a:xfrm>
             <a:custGeom>
               <a:avLst/>
               <a:pathLst>
-                <a:path w="7799693" h="0">
+                <a:path w="7682587" h="0">
                   <a:moveTo>
                     <a:pt x="0" y="0"/>
                   </a:moveTo>
                   <a:lnTo>
-                    <a:pt x="7799693" y="0"/>
-                  </a:lnTo>
-                  <a:lnTo>
-                    <a:pt x="7799693" y="0"/>
+                    <a:pt x="7682587" y="0"/>
+                  </a:lnTo>
+                  <a:lnTo>
+                    <a:pt x="7682587" y="0"/>
                   </a:lnTo>
                 </a:path>
               </a:pathLst>
             </a:custGeom>
-            <a:ln w="13550" cap="flat">
+            <a:ln w="17246" cap="flat">
               <a:solidFill>
                 <a:srgbClr val="EBEBEB">
                   <a:alpha val="100000"/>
@@ -2744,26 +2744,26 @@
           </p:nvSpPr>
           <p:spPr>
             <a:xfrm>
-              <a:off x="817517" y="3068859"/>
-              <a:ext cx="7799693" cy="0"/>
+              <a:off x="915645" y="3137571"/>
+              <a:ext cx="7682587" cy="0"/>
             </a:xfrm>
             <a:custGeom>
               <a:avLst/>
               <a:pathLst>
-                <a:path w="7799693" h="0">
+                <a:path w="7682587" h="0">
                   <a:moveTo>
                     <a:pt x="0" y="0"/>
                   </a:moveTo>
                   <a:lnTo>
-                    <a:pt x="7799693" y="0"/>
-                  </a:lnTo>
-                  <a:lnTo>
-                    <a:pt x="7799693" y="0"/>
+                    <a:pt x="7682587" y="0"/>
+                  </a:lnTo>
+                  <a:lnTo>
+                    <a:pt x="7682587" y="0"/>
                   </a:lnTo>
                 </a:path>
               </a:pathLst>
             </a:custGeom>
-            <a:ln w="13550" cap="flat">
+            <a:ln w="17246" cap="flat">
               <a:solidFill>
                 <a:srgbClr val="EBEBEB">
                   <a:alpha val="100000"/>
@@ -2787,26 +2787,26 @@
           </p:nvSpPr>
           <p:spPr>
             <a:xfrm>
-              <a:off x="817517" y="2239395"/>
-              <a:ext cx="7799693" cy="0"/>
+              <a:off x="915645" y="2363903"/>
+              <a:ext cx="7682587" cy="0"/>
             </a:xfrm>
             <a:custGeom>
               <a:avLst/>
               <a:pathLst>
-                <a:path w="7799693" h="0">
+                <a:path w="7682587" h="0">
                   <a:moveTo>
                     <a:pt x="0" y="0"/>
                   </a:moveTo>
                   <a:lnTo>
-                    <a:pt x="7799693" y="0"/>
-                  </a:lnTo>
-                  <a:lnTo>
-                    <a:pt x="7799693" y="0"/>
+                    <a:pt x="7682587" y="0"/>
+                  </a:lnTo>
+                  <a:lnTo>
+                    <a:pt x="7682587" y="0"/>
                   </a:lnTo>
                 </a:path>
               </a:pathLst>
             </a:custGeom>
-            <a:ln w="13550" cap="flat">
+            <a:ln w="17246" cap="flat">
               <a:solidFill>
                 <a:srgbClr val="EBEBEB">
                   <a:alpha val="100000"/>
@@ -2830,15 +2830,15 @@
           </p:nvSpPr>
           <p:spPr>
             <a:xfrm>
-              <a:off x="2412424" y="2073503"/>
-              <a:ext cx="0" cy="3649639"/>
+              <a:off x="2486605" y="2209169"/>
+              <a:ext cx="0" cy="3404141"/>
             </a:xfrm>
             <a:custGeom>
               <a:avLst/>
               <a:pathLst>
-                <a:path w="0" h="3649639">
+                <a:path w="0" h="3404141">
                   <a:moveTo>
-                    <a:pt x="0" y="3649639"/>
+                    <a:pt x="0" y="3404141"/>
                   </a:moveTo>
                   <a:lnTo>
                     <a:pt x="0" y="0"/>
@@ -2849,7 +2849,7 @@
                 </a:path>
               </a:pathLst>
             </a:custGeom>
-            <a:ln w="13550" cap="flat">
+            <a:ln w="17246" cap="flat">
               <a:solidFill>
                 <a:srgbClr val="EBEBEB">
                   <a:alpha val="100000"/>
@@ -2873,15 +2873,15 @@
           </p:nvSpPr>
           <p:spPr>
             <a:xfrm>
-              <a:off x="4262297" y="2073503"/>
-              <a:ext cx="0" cy="3649639"/>
+              <a:off x="4308703" y="2209169"/>
+              <a:ext cx="0" cy="3404141"/>
             </a:xfrm>
             <a:custGeom>
               <a:avLst/>
               <a:pathLst>
-                <a:path w="0" h="3649639">
+                <a:path w="0" h="3404141">
                   <a:moveTo>
-                    <a:pt x="0" y="3649639"/>
+                    <a:pt x="0" y="3404141"/>
                   </a:moveTo>
                   <a:lnTo>
                     <a:pt x="0" y="0"/>
@@ -2892,7 +2892,7 @@
                 </a:path>
               </a:pathLst>
             </a:custGeom>
-            <a:ln w="13550" cap="flat">
+            <a:ln w="17246" cap="flat">
               <a:solidFill>
                 <a:srgbClr val="EBEBEB">
                   <a:alpha val="100000"/>
@@ -2916,15 +2916,15 @@
           </p:nvSpPr>
           <p:spPr>
             <a:xfrm>
-              <a:off x="6112169" y="2073503"/>
-              <a:ext cx="0" cy="3649639"/>
+              <a:off x="6130802" y="2209169"/>
+              <a:ext cx="0" cy="3404141"/>
             </a:xfrm>
             <a:custGeom>
               <a:avLst/>
               <a:pathLst>
-                <a:path w="0" h="3649639">
+                <a:path w="0" h="3404141">
                   <a:moveTo>
-                    <a:pt x="0" y="3649639"/>
+                    <a:pt x="0" y="3404141"/>
                   </a:moveTo>
                   <a:lnTo>
                     <a:pt x="0" y="0"/>
@@ -2935,7 +2935,7 @@
                 </a:path>
               </a:pathLst>
             </a:custGeom>
-            <a:ln w="13550" cap="flat">
+            <a:ln w="17246" cap="flat">
               <a:solidFill>
                 <a:srgbClr val="EBEBEB">
                   <a:alpha val="100000"/>
@@ -2959,15 +2959,15 @@
           </p:nvSpPr>
           <p:spPr>
             <a:xfrm>
-              <a:off x="7962042" y="2073503"/>
-              <a:ext cx="0" cy="3649639"/>
+              <a:off x="7952900" y="2209169"/>
+              <a:ext cx="0" cy="3404141"/>
             </a:xfrm>
             <a:custGeom>
               <a:avLst/>
               <a:pathLst>
-                <a:path w="0" h="3649639">
+                <a:path w="0" h="3404141">
                   <a:moveTo>
-                    <a:pt x="0" y="3649639"/>
+                    <a:pt x="0" y="3404141"/>
                   </a:moveTo>
                   <a:lnTo>
                     <a:pt x="0" y="0"/>
@@ -2978,7 +2978,7 @@
                 </a:path>
               </a:pathLst>
             </a:custGeom>
-            <a:ln w="13550" cap="flat">
+            <a:ln w="17246" cap="flat">
               <a:solidFill>
                 <a:srgbClr val="EBEBEB">
                   <a:alpha val="100000"/>
@@ -3002,480 +3002,480 @@
           </p:nvSpPr>
           <p:spPr>
             <a:xfrm>
-              <a:off x="1172049" y="2073503"/>
-              <a:ext cx="7090630" cy="3350245"/>
+              <a:off x="1264853" y="2209169"/>
+              <a:ext cx="6984170" cy="3124886"/>
             </a:xfrm>
             <a:custGeom>
               <a:avLst/>
               <a:pathLst>
-                <a:path w="7090630" h="3350245">
+                <a:path w="6984170" h="3124886">
                   <a:moveTo>
-                    <a:pt x="3178969" y="0"/>
+                    <a:pt x="3131239" y="0"/>
                   </a:moveTo>
                   <a:lnTo>
-                    <a:pt x="3223013" y="127018"/>
-                  </a:lnTo>
-                  <a:lnTo>
-                    <a:pt x="3294636" y="321598"/>
-                  </a:lnTo>
-                  <a:lnTo>
-                    <a:pt x="3366258" y="504898"/>
-                  </a:lnTo>
-                  <a:lnTo>
-                    <a:pt x="3437881" y="677573"/>
-                  </a:lnTo>
-                  <a:lnTo>
-                    <a:pt x="3509503" y="840238"/>
-                  </a:lnTo>
-                  <a:lnTo>
-                    <a:pt x="3581126" y="993474"/>
-                  </a:lnTo>
-                  <a:lnTo>
-                    <a:pt x="3652748" y="1137828"/>
-                  </a:lnTo>
-                  <a:lnTo>
-                    <a:pt x="3724371" y="1273814"/>
-                  </a:lnTo>
-                  <a:lnTo>
-                    <a:pt x="3795993" y="1401917"/>
-                  </a:lnTo>
-                  <a:lnTo>
-                    <a:pt x="3867616" y="1522594"/>
-                  </a:lnTo>
-                  <a:lnTo>
-                    <a:pt x="3939238" y="1636276"/>
-                  </a:lnTo>
-                  <a:lnTo>
-                    <a:pt x="4010861" y="1743369"/>
-                  </a:lnTo>
-                  <a:lnTo>
-                    <a:pt x="4082483" y="1844253"/>
-                  </a:lnTo>
-                  <a:lnTo>
-                    <a:pt x="4154106" y="1939289"/>
-                  </a:lnTo>
-                  <a:lnTo>
-                    <a:pt x="4225729" y="2028817"/>
-                  </a:lnTo>
-                  <a:lnTo>
-                    <a:pt x="4297351" y="2113155"/>
-                  </a:lnTo>
-                  <a:lnTo>
-                    <a:pt x="4368974" y="2192604"/>
-                  </a:lnTo>
-                  <a:lnTo>
-                    <a:pt x="4440596" y="2267447"/>
-                  </a:lnTo>
-                  <a:lnTo>
-                    <a:pt x="4512219" y="2337953"/>
-                  </a:lnTo>
-                  <a:lnTo>
-                    <a:pt x="4583841" y="2404371"/>
-                  </a:lnTo>
-                  <a:lnTo>
-                    <a:pt x="4655464" y="2466939"/>
-                  </a:lnTo>
-                  <a:lnTo>
-                    <a:pt x="4727086" y="2525880"/>
-                  </a:lnTo>
-                  <a:lnTo>
-                    <a:pt x="4798709" y="2581405"/>
-                  </a:lnTo>
-                  <a:lnTo>
-                    <a:pt x="4870331" y="2633711"/>
-                  </a:lnTo>
-                  <a:lnTo>
-                    <a:pt x="4941954" y="2650551"/>
-                  </a:lnTo>
-                  <a:lnTo>
-                    <a:pt x="5013576" y="2644185"/>
-                  </a:lnTo>
-                  <a:lnTo>
-                    <a:pt x="5085199" y="2637771"/>
-                  </a:lnTo>
-                  <a:lnTo>
-                    <a:pt x="5156821" y="2631307"/>
-                  </a:lnTo>
-                  <a:lnTo>
-                    <a:pt x="5228444" y="2624794"/>
-                  </a:lnTo>
-                  <a:lnTo>
-                    <a:pt x="5300066" y="2618231"/>
-                  </a:lnTo>
-                  <a:lnTo>
-                    <a:pt x="5371689" y="2611618"/>
-                  </a:lnTo>
-                  <a:lnTo>
-                    <a:pt x="5443311" y="2604954"/>
-                  </a:lnTo>
-                  <a:lnTo>
-                    <a:pt x="5514934" y="2598240"/>
-                  </a:lnTo>
-                  <a:lnTo>
-                    <a:pt x="5586557" y="2591474"/>
-                  </a:lnTo>
-                  <a:lnTo>
-                    <a:pt x="5658179" y="2584657"/>
-                  </a:lnTo>
-                  <a:lnTo>
-                    <a:pt x="5729802" y="2577787"/>
-                  </a:lnTo>
-                  <a:lnTo>
-                    <a:pt x="5801424" y="2570865"/>
-                  </a:lnTo>
-                  <a:lnTo>
-                    <a:pt x="5873047" y="2563890"/>
-                  </a:lnTo>
-                  <a:lnTo>
-                    <a:pt x="5944669" y="2556862"/>
-                  </a:lnTo>
-                  <a:lnTo>
-                    <a:pt x="6016292" y="2549780"/>
-                  </a:lnTo>
-                  <a:lnTo>
-                    <a:pt x="6087914" y="2542644"/>
-                  </a:lnTo>
-                  <a:lnTo>
-                    <a:pt x="6159537" y="2535454"/>
-                  </a:lnTo>
-                  <a:lnTo>
-                    <a:pt x="6231159" y="2528208"/>
-                  </a:lnTo>
-                  <a:lnTo>
-                    <a:pt x="6302782" y="2520908"/>
-                  </a:lnTo>
-                  <a:lnTo>
-                    <a:pt x="6374404" y="2513551"/>
-                  </a:lnTo>
-                  <a:lnTo>
-                    <a:pt x="6446027" y="2506138"/>
-                  </a:lnTo>
-                  <a:lnTo>
-                    <a:pt x="6517649" y="2498669"/>
-                  </a:lnTo>
-                  <a:lnTo>
-                    <a:pt x="6589272" y="2491142"/>
-                  </a:lnTo>
-                  <a:lnTo>
-                    <a:pt x="6660894" y="2483558"/>
-                  </a:lnTo>
-                  <a:lnTo>
-                    <a:pt x="6732517" y="2475916"/>
-                  </a:lnTo>
-                  <a:lnTo>
-                    <a:pt x="6804139" y="2468216"/>
-                  </a:lnTo>
-                  <a:lnTo>
-                    <a:pt x="6875762" y="2460457"/>
-                  </a:lnTo>
-                  <a:lnTo>
-                    <a:pt x="6947385" y="2452638"/>
-                  </a:lnTo>
-                  <a:lnTo>
-                    <a:pt x="7019007" y="2444760"/>
-                  </a:lnTo>
-                  <a:lnTo>
-                    <a:pt x="7090630" y="2436822"/>
-                  </a:lnTo>
-                  <a:lnTo>
-                    <a:pt x="7090630" y="3350245"/>
-                  </a:lnTo>
-                  <a:lnTo>
-                    <a:pt x="7019007" y="3342030"/>
-                  </a:lnTo>
-                  <a:lnTo>
-                    <a:pt x="6947385" y="3333309"/>
-                  </a:lnTo>
-                  <a:lnTo>
-                    <a:pt x="6875762" y="3324052"/>
-                  </a:lnTo>
-                  <a:lnTo>
-                    <a:pt x="6804139" y="3314226"/>
-                  </a:lnTo>
-                  <a:lnTo>
-                    <a:pt x="6732517" y="3303795"/>
-                  </a:lnTo>
-                  <a:lnTo>
-                    <a:pt x="6660894" y="3292721"/>
-                  </a:lnTo>
-                  <a:lnTo>
-                    <a:pt x="6589272" y="3280967"/>
-                  </a:lnTo>
-                  <a:lnTo>
-                    <a:pt x="6517649" y="3268489"/>
-                  </a:lnTo>
-                  <a:lnTo>
-                    <a:pt x="6446027" y="3255243"/>
-                  </a:lnTo>
-                  <a:lnTo>
-                    <a:pt x="6374404" y="3241183"/>
-                  </a:lnTo>
-                  <a:lnTo>
-                    <a:pt x="6302782" y="3226257"/>
-                  </a:lnTo>
-                  <a:lnTo>
-                    <a:pt x="6231159" y="3210412"/>
-                  </a:lnTo>
-                  <a:lnTo>
-                    <a:pt x="6159537" y="3193593"/>
-                  </a:lnTo>
-                  <a:lnTo>
-                    <a:pt x="6087914" y="3175739"/>
-                  </a:lnTo>
-                  <a:lnTo>
-                    <a:pt x="6016292" y="3156786"/>
-                  </a:lnTo>
-                  <a:lnTo>
-                    <a:pt x="5944669" y="3136667"/>
-                  </a:lnTo>
-                  <a:lnTo>
-                    <a:pt x="5873047" y="3115310"/>
-                  </a:lnTo>
-                  <a:lnTo>
-                    <a:pt x="5801424" y="3092638"/>
-                  </a:lnTo>
-                  <a:lnTo>
-                    <a:pt x="5729802" y="3068572"/>
-                  </a:lnTo>
-                  <a:lnTo>
-                    <a:pt x="5658179" y="3043025"/>
-                  </a:lnTo>
-                  <a:lnTo>
-                    <a:pt x="5586557" y="3015905"/>
-                  </a:lnTo>
-                  <a:lnTo>
-                    <a:pt x="5514934" y="2987117"/>
-                  </a:lnTo>
-                  <a:lnTo>
-                    <a:pt x="5443311" y="2956558"/>
-                  </a:lnTo>
-                  <a:lnTo>
-                    <a:pt x="5371689" y="2924118"/>
-                  </a:lnTo>
-                  <a:lnTo>
-                    <a:pt x="5300066" y="2889682"/>
-                  </a:lnTo>
-                  <a:lnTo>
-                    <a:pt x="5228444" y="2853126"/>
-                  </a:lnTo>
-                  <a:lnTo>
-                    <a:pt x="5156821" y="2814322"/>
-                  </a:lnTo>
-                  <a:lnTo>
-                    <a:pt x="5085199" y="2773130"/>
-                  </a:lnTo>
-                  <a:lnTo>
-                    <a:pt x="5013576" y="2729403"/>
-                  </a:lnTo>
-                  <a:lnTo>
-                    <a:pt x="4941954" y="2682985"/>
-                  </a:lnTo>
-                  <a:lnTo>
-                    <a:pt x="4870331" y="2656869"/>
-                  </a:lnTo>
-                  <a:lnTo>
-                    <a:pt x="4798709" y="2663139"/>
-                  </a:lnTo>
-                  <a:lnTo>
-                    <a:pt x="4727086" y="2669361"/>
-                  </a:lnTo>
-                  <a:lnTo>
-                    <a:pt x="4655464" y="2675536"/>
-                  </a:lnTo>
-                  <a:lnTo>
-                    <a:pt x="4583841" y="2681665"/>
-                  </a:lnTo>
-                  <a:lnTo>
-                    <a:pt x="4512219" y="2687747"/>
-                  </a:lnTo>
-                  <a:lnTo>
-                    <a:pt x="4440596" y="2693782"/>
-                  </a:lnTo>
-                  <a:lnTo>
-                    <a:pt x="4368974" y="2699772"/>
-                  </a:lnTo>
-                  <a:lnTo>
-                    <a:pt x="4297351" y="2705717"/>
-                  </a:lnTo>
-                  <a:lnTo>
-                    <a:pt x="4225729" y="2711616"/>
-                  </a:lnTo>
-                  <a:lnTo>
-                    <a:pt x="4154106" y="2717471"/>
-                  </a:lnTo>
-                  <a:lnTo>
-                    <a:pt x="4082483" y="2723281"/>
-                  </a:lnTo>
-                  <a:lnTo>
-                    <a:pt x="4010861" y="2729048"/>
-                  </a:lnTo>
-                  <a:lnTo>
-                    <a:pt x="3939238" y="2734770"/>
-                  </a:lnTo>
-                  <a:lnTo>
-                    <a:pt x="3867616" y="2740449"/>
-                  </a:lnTo>
-                  <a:lnTo>
-                    <a:pt x="3795993" y="2746086"/>
-                  </a:lnTo>
-                  <a:lnTo>
-                    <a:pt x="3724371" y="2751679"/>
-                  </a:lnTo>
-                  <a:lnTo>
-                    <a:pt x="3652748" y="2757230"/>
-                  </a:lnTo>
-                  <a:lnTo>
-                    <a:pt x="3581126" y="2762739"/>
-                  </a:lnTo>
-                  <a:lnTo>
-                    <a:pt x="3509503" y="2768206"/>
-                  </a:lnTo>
-                  <a:lnTo>
-                    <a:pt x="3437881" y="2773632"/>
-                  </a:lnTo>
-                  <a:lnTo>
-                    <a:pt x="3366258" y="2779016"/>
-                  </a:lnTo>
-                  <a:lnTo>
-                    <a:pt x="3294636" y="2784360"/>
-                  </a:lnTo>
-                  <a:lnTo>
-                    <a:pt x="3223013" y="2789663"/>
-                  </a:lnTo>
-                  <a:lnTo>
-                    <a:pt x="3151391" y="2794926"/>
-                  </a:lnTo>
-                  <a:lnTo>
-                    <a:pt x="3079768" y="2800149"/>
-                  </a:lnTo>
-                  <a:lnTo>
-                    <a:pt x="3008146" y="2805332"/>
-                  </a:lnTo>
-                  <a:lnTo>
-                    <a:pt x="2936523" y="2810476"/>
-                  </a:lnTo>
-                  <a:lnTo>
-                    <a:pt x="2864901" y="2815582"/>
-                  </a:lnTo>
-                  <a:lnTo>
-                    <a:pt x="2793278" y="2820648"/>
-                  </a:lnTo>
-                  <a:lnTo>
-                    <a:pt x="2721655" y="2825676"/>
-                  </a:lnTo>
-                  <a:lnTo>
-                    <a:pt x="2650033" y="2830666"/>
-                  </a:lnTo>
-                  <a:lnTo>
-                    <a:pt x="2578410" y="2835618"/>
-                  </a:lnTo>
-                  <a:lnTo>
-                    <a:pt x="2506788" y="2840532"/>
-                  </a:lnTo>
-                  <a:lnTo>
-                    <a:pt x="2435165" y="2845410"/>
-                  </a:lnTo>
-                  <a:lnTo>
-                    <a:pt x="2363543" y="2850250"/>
-                  </a:lnTo>
-                  <a:lnTo>
-                    <a:pt x="2291920" y="2855053"/>
-                  </a:lnTo>
-                  <a:lnTo>
-                    <a:pt x="2220298" y="2859821"/>
-                  </a:lnTo>
-                  <a:lnTo>
-                    <a:pt x="2148675" y="2864552"/>
-                  </a:lnTo>
-                  <a:lnTo>
-                    <a:pt x="2077053" y="2869247"/>
-                  </a:lnTo>
-                  <a:lnTo>
-                    <a:pt x="2005430" y="2873906"/>
-                  </a:lnTo>
-                  <a:lnTo>
-                    <a:pt x="1933808" y="2878530"/>
-                  </a:lnTo>
-                  <a:lnTo>
-                    <a:pt x="1862185" y="2883119"/>
-                  </a:lnTo>
-                  <a:lnTo>
-                    <a:pt x="1790563" y="2887674"/>
-                  </a:lnTo>
-                  <a:lnTo>
-                    <a:pt x="1718940" y="2892193"/>
-                  </a:lnTo>
-                  <a:lnTo>
-                    <a:pt x="1647318" y="2896679"/>
-                  </a:lnTo>
-                  <a:lnTo>
-                    <a:pt x="1575695" y="2901130"/>
-                  </a:lnTo>
-                  <a:lnTo>
-                    <a:pt x="1504073" y="2905548"/>
-                  </a:lnTo>
-                  <a:lnTo>
-                    <a:pt x="1432450" y="2909932"/>
-                  </a:lnTo>
-                  <a:lnTo>
-                    <a:pt x="1360827" y="2914283"/>
-                  </a:lnTo>
-                  <a:lnTo>
-                    <a:pt x="1289205" y="2918601"/>
-                  </a:lnTo>
-                  <a:lnTo>
-                    <a:pt x="1217582" y="2922887"/>
-                  </a:lnTo>
-                  <a:lnTo>
-                    <a:pt x="1145960" y="2927139"/>
-                  </a:lnTo>
-                  <a:lnTo>
-                    <a:pt x="1074337" y="2931360"/>
-                  </a:lnTo>
-                  <a:lnTo>
-                    <a:pt x="1002715" y="2935549"/>
-                  </a:lnTo>
-                  <a:lnTo>
-                    <a:pt x="931092" y="2939705"/>
-                  </a:lnTo>
-                  <a:lnTo>
-                    <a:pt x="859470" y="2943831"/>
-                  </a:lnTo>
-                  <a:lnTo>
-                    <a:pt x="787847" y="2947924"/>
-                  </a:lnTo>
-                  <a:lnTo>
-                    <a:pt x="716225" y="2951987"/>
-                  </a:lnTo>
-                  <a:lnTo>
-                    <a:pt x="644602" y="2956020"/>
-                  </a:lnTo>
-                  <a:lnTo>
-                    <a:pt x="572980" y="2960021"/>
-                  </a:lnTo>
-                  <a:lnTo>
-                    <a:pt x="501357" y="2963992"/>
-                  </a:lnTo>
-                  <a:lnTo>
-                    <a:pt x="429735" y="2967933"/>
-                  </a:lnTo>
-                  <a:lnTo>
-                    <a:pt x="358112" y="2971845"/>
-                  </a:lnTo>
-                  <a:lnTo>
-                    <a:pt x="286490" y="2975726"/>
-                  </a:lnTo>
-                  <a:lnTo>
-                    <a:pt x="214867" y="2979578"/>
-                  </a:lnTo>
-                  <a:lnTo>
-                    <a:pt x="143245" y="2983401"/>
-                  </a:lnTo>
-                  <a:lnTo>
-                    <a:pt x="71622" y="2987195"/>
-                  </a:lnTo>
-                  <a:lnTo>
-                    <a:pt x="0" y="2990960"/>
+                    <a:pt x="3174622" y="118474"/>
+                  </a:lnTo>
+                  <a:lnTo>
+                    <a:pt x="3245169" y="299965"/>
+                  </a:lnTo>
+                  <a:lnTo>
+                    <a:pt x="3315717" y="470935"/>
+                  </a:lnTo>
+                  <a:lnTo>
+                    <a:pt x="3386264" y="631995"/>
+                  </a:lnTo>
+                  <a:lnTo>
+                    <a:pt x="3456811" y="783718"/>
+                  </a:lnTo>
+                  <a:lnTo>
+                    <a:pt x="3527358" y="926647"/>
+                  </a:lnTo>
+                  <a:lnTo>
+                    <a:pt x="3597905" y="1061290"/>
+                  </a:lnTo>
+                  <a:lnTo>
+                    <a:pt x="3668452" y="1188129"/>
+                  </a:lnTo>
+                  <a:lnTo>
+                    <a:pt x="3739000" y="1307615"/>
+                  </a:lnTo>
+                  <a:lnTo>
+                    <a:pt x="3809547" y="1420175"/>
+                  </a:lnTo>
+                  <a:lnTo>
+                    <a:pt x="3880094" y="1526210"/>
+                  </a:lnTo>
+                  <a:lnTo>
+                    <a:pt x="3950641" y="1626098"/>
+                  </a:lnTo>
+                  <a:lnTo>
+                    <a:pt x="4021188" y="1720197"/>
+                  </a:lnTo>
+                  <a:lnTo>
+                    <a:pt x="4091736" y="1808841"/>
+                  </a:lnTo>
+                  <a:lnTo>
+                    <a:pt x="4162283" y="1892346"/>
+                  </a:lnTo>
+                  <a:lnTo>
+                    <a:pt x="4232830" y="1971011"/>
+                  </a:lnTo>
+                  <a:lnTo>
+                    <a:pt x="4303377" y="2045115"/>
+                  </a:lnTo>
+                  <a:lnTo>
+                    <a:pt x="4373924" y="2114925"/>
+                  </a:lnTo>
+                  <a:lnTo>
+                    <a:pt x="4444471" y="2180687"/>
+                  </a:lnTo>
+                  <a:lnTo>
+                    <a:pt x="4515019" y="2242638"/>
+                  </a:lnTo>
+                  <a:lnTo>
+                    <a:pt x="4585566" y="2300997"/>
+                  </a:lnTo>
+                  <a:lnTo>
+                    <a:pt x="4656113" y="2355974"/>
+                  </a:lnTo>
+                  <a:lnTo>
+                    <a:pt x="4726660" y="2407763"/>
+                  </a:lnTo>
+                  <a:lnTo>
+                    <a:pt x="4797207" y="2456551"/>
+                  </a:lnTo>
+                  <a:lnTo>
+                    <a:pt x="4867754" y="2472258"/>
+                  </a:lnTo>
+                  <a:lnTo>
+                    <a:pt x="4938302" y="2466321"/>
+                  </a:lnTo>
+                  <a:lnTo>
+                    <a:pt x="5008849" y="2460337"/>
+                  </a:lnTo>
+                  <a:lnTo>
+                    <a:pt x="5079396" y="2454308"/>
+                  </a:lnTo>
+                  <a:lnTo>
+                    <a:pt x="5149943" y="2448233"/>
+                  </a:lnTo>
+                  <a:lnTo>
+                    <a:pt x="5220490" y="2442112"/>
+                  </a:lnTo>
+                  <a:lnTo>
+                    <a:pt x="5291037" y="2435944"/>
+                  </a:lnTo>
+                  <a:lnTo>
+                    <a:pt x="5361585" y="2429729"/>
+                  </a:lnTo>
+                  <a:lnTo>
+                    <a:pt x="5432132" y="2423466"/>
+                  </a:lnTo>
+                  <a:lnTo>
+                    <a:pt x="5502679" y="2417155"/>
+                  </a:lnTo>
+                  <a:lnTo>
+                    <a:pt x="5573226" y="2410796"/>
+                  </a:lnTo>
+                  <a:lnTo>
+                    <a:pt x="5643773" y="2404389"/>
+                  </a:lnTo>
+                  <a:lnTo>
+                    <a:pt x="5714320" y="2397933"/>
+                  </a:lnTo>
+                  <a:lnTo>
+                    <a:pt x="5784868" y="2391427"/>
+                  </a:lnTo>
+                  <a:lnTo>
+                    <a:pt x="5855415" y="2384871"/>
+                  </a:lnTo>
+                  <a:lnTo>
+                    <a:pt x="5925962" y="2378266"/>
+                  </a:lnTo>
+                  <a:lnTo>
+                    <a:pt x="5996509" y="2371610"/>
+                  </a:lnTo>
+                  <a:lnTo>
+                    <a:pt x="6067056" y="2364903"/>
+                  </a:lnTo>
+                  <a:lnTo>
+                    <a:pt x="6137604" y="2358145"/>
+                  </a:lnTo>
+                  <a:lnTo>
+                    <a:pt x="6208151" y="2351335"/>
+                  </a:lnTo>
+                  <a:lnTo>
+                    <a:pt x="6278698" y="2344474"/>
+                  </a:lnTo>
+                  <a:lnTo>
+                    <a:pt x="6349245" y="2337559"/>
+                  </a:lnTo>
+                  <a:lnTo>
+                    <a:pt x="6419792" y="2330592"/>
+                  </a:lnTo>
+                  <a:lnTo>
+                    <a:pt x="6490339" y="2323572"/>
+                  </a:lnTo>
+                  <a:lnTo>
+                    <a:pt x="6560887" y="2316498"/>
+                  </a:lnTo>
+                  <a:lnTo>
+                    <a:pt x="6631434" y="2309370"/>
+                  </a:lnTo>
+                  <a:lnTo>
+                    <a:pt x="6701981" y="2302188"/>
+                  </a:lnTo>
+                  <a:lnTo>
+                    <a:pt x="6772528" y="2294951"/>
+                  </a:lnTo>
+                  <a:lnTo>
+                    <a:pt x="6843075" y="2287658"/>
+                  </a:lnTo>
+                  <a:lnTo>
+                    <a:pt x="6913622" y="2280310"/>
+                  </a:lnTo>
+                  <a:lnTo>
+                    <a:pt x="6984170" y="2272906"/>
+                  </a:lnTo>
+                  <a:lnTo>
+                    <a:pt x="6984170" y="3124886"/>
+                  </a:lnTo>
+                  <a:lnTo>
+                    <a:pt x="6913622" y="3117224"/>
+                  </a:lnTo>
+                  <a:lnTo>
+                    <a:pt x="6843075" y="3109090"/>
+                  </a:lnTo>
+                  <a:lnTo>
+                    <a:pt x="6772528" y="3100456"/>
+                  </a:lnTo>
+                  <a:lnTo>
+                    <a:pt x="6701981" y="3091290"/>
+                  </a:lnTo>
+                  <a:lnTo>
+                    <a:pt x="6631434" y="3081560"/>
+                  </a:lnTo>
+                  <a:lnTo>
+                    <a:pt x="6560887" y="3071232"/>
+                  </a:lnTo>
+                  <a:lnTo>
+                    <a:pt x="6490339" y="3060268"/>
+                  </a:lnTo>
+                  <a:lnTo>
+                    <a:pt x="6419792" y="3048630"/>
+                  </a:lnTo>
+                  <a:lnTo>
+                    <a:pt x="6349245" y="3036275"/>
+                  </a:lnTo>
+                  <a:lnTo>
+                    <a:pt x="6278698" y="3023160"/>
+                  </a:lnTo>
+                  <a:lnTo>
+                    <a:pt x="6208151" y="3009238"/>
+                  </a:lnTo>
+                  <a:lnTo>
+                    <a:pt x="6137604" y="2994460"/>
+                  </a:lnTo>
+                  <a:lnTo>
+                    <a:pt x="6067056" y="2978772"/>
+                  </a:lnTo>
+                  <a:lnTo>
+                    <a:pt x="5996509" y="2962119"/>
+                  </a:lnTo>
+                  <a:lnTo>
+                    <a:pt x="5925962" y="2944441"/>
+                  </a:lnTo>
+                  <a:lnTo>
+                    <a:pt x="5855415" y="2925675"/>
+                  </a:lnTo>
+                  <a:lnTo>
+                    <a:pt x="5784868" y="2905754"/>
+                  </a:lnTo>
+                  <a:lnTo>
+                    <a:pt x="5714320" y="2884608"/>
+                  </a:lnTo>
+                  <a:lnTo>
+                    <a:pt x="5643773" y="2862160"/>
+                  </a:lnTo>
+                  <a:lnTo>
+                    <a:pt x="5573226" y="2838332"/>
+                  </a:lnTo>
+                  <a:lnTo>
+                    <a:pt x="5502679" y="2813036"/>
+                  </a:lnTo>
+                  <a:lnTo>
+                    <a:pt x="5432132" y="2786185"/>
+                  </a:lnTo>
+                  <a:lnTo>
+                    <a:pt x="5361585" y="2757681"/>
+                  </a:lnTo>
+                  <a:lnTo>
+                    <a:pt x="5291037" y="2727423"/>
+                  </a:lnTo>
+                  <a:lnTo>
+                    <a:pt x="5220490" y="2695303"/>
+                  </a:lnTo>
+                  <a:lnTo>
+                    <a:pt x="5149943" y="2661207"/>
+                  </a:lnTo>
+                  <a:lnTo>
+                    <a:pt x="5079396" y="2625013"/>
+                  </a:lnTo>
+                  <a:lnTo>
+                    <a:pt x="5008849" y="2586591"/>
+                  </a:lnTo>
+                  <a:lnTo>
+                    <a:pt x="4938302" y="2545806"/>
+                  </a:lnTo>
+                  <a:lnTo>
+                    <a:pt x="4867754" y="2502510"/>
+                  </a:lnTo>
+                  <a:lnTo>
+                    <a:pt x="4797207" y="2478151"/>
+                  </a:lnTo>
+                  <a:lnTo>
+                    <a:pt x="4726660" y="2483999"/>
+                  </a:lnTo>
+                  <a:lnTo>
+                    <a:pt x="4656113" y="2489803"/>
+                  </a:lnTo>
+                  <a:lnTo>
+                    <a:pt x="4585566" y="2495563"/>
+                  </a:lnTo>
+                  <a:lnTo>
+                    <a:pt x="4515019" y="2501279"/>
+                  </a:lnTo>
+                  <a:lnTo>
+                    <a:pt x="4444471" y="2506952"/>
+                  </a:lnTo>
+                  <a:lnTo>
+                    <a:pt x="4373924" y="2512581"/>
+                  </a:lnTo>
+                  <a:lnTo>
+                    <a:pt x="4303377" y="2518168"/>
+                  </a:lnTo>
+                  <a:lnTo>
+                    <a:pt x="4232830" y="2523713"/>
+                  </a:lnTo>
+                  <a:lnTo>
+                    <a:pt x="4162283" y="2529216"/>
+                  </a:lnTo>
+                  <a:lnTo>
+                    <a:pt x="4091736" y="2534677"/>
+                  </a:lnTo>
+                  <a:lnTo>
+                    <a:pt x="4021188" y="2540096"/>
+                  </a:lnTo>
+                  <a:lnTo>
+                    <a:pt x="3950641" y="2545475"/>
+                  </a:lnTo>
+                  <a:lnTo>
+                    <a:pt x="3880094" y="2550812"/>
+                  </a:lnTo>
+                  <a:lnTo>
+                    <a:pt x="3809547" y="2556109"/>
+                  </a:lnTo>
+                  <a:lnTo>
+                    <a:pt x="3739000" y="2561366"/>
+                  </a:lnTo>
+                  <a:lnTo>
+                    <a:pt x="3668452" y="2566584"/>
+                  </a:lnTo>
+                  <a:lnTo>
+                    <a:pt x="3597905" y="2571761"/>
+                  </a:lnTo>
+                  <a:lnTo>
+                    <a:pt x="3527358" y="2576899"/>
+                  </a:lnTo>
+                  <a:lnTo>
+                    <a:pt x="3456811" y="2581999"/>
+                  </a:lnTo>
+                  <a:lnTo>
+                    <a:pt x="3386264" y="2587060"/>
+                  </a:lnTo>
+                  <a:lnTo>
+                    <a:pt x="3315717" y="2592082"/>
+                  </a:lnTo>
+                  <a:lnTo>
+                    <a:pt x="3245169" y="2597066"/>
+                  </a:lnTo>
+                  <a:lnTo>
+                    <a:pt x="3174622" y="2602012"/>
+                  </a:lnTo>
+                  <a:lnTo>
+                    <a:pt x="3104075" y="2606921"/>
+                  </a:lnTo>
+                  <a:lnTo>
+                    <a:pt x="3033528" y="2611793"/>
+                  </a:lnTo>
+                  <a:lnTo>
+                    <a:pt x="2962981" y="2616628"/>
+                  </a:lnTo>
+                  <a:lnTo>
+                    <a:pt x="2892434" y="2621426"/>
+                  </a:lnTo>
+                  <a:lnTo>
+                    <a:pt x="2821886" y="2626188"/>
+                  </a:lnTo>
+                  <a:lnTo>
+                    <a:pt x="2751339" y="2630913"/>
+                  </a:lnTo>
+                  <a:lnTo>
+                    <a:pt x="2680792" y="2635603"/>
+                  </a:lnTo>
+                  <a:lnTo>
+                    <a:pt x="2610245" y="2640257"/>
+                  </a:lnTo>
+                  <a:lnTo>
+                    <a:pt x="2539698" y="2644876"/>
+                  </a:lnTo>
+                  <a:lnTo>
+                    <a:pt x="2469151" y="2649460"/>
+                  </a:lnTo>
+                  <a:lnTo>
+                    <a:pt x="2398603" y="2654009"/>
+                  </a:lnTo>
+                  <a:lnTo>
+                    <a:pt x="2328056" y="2658524"/>
+                  </a:lnTo>
+                  <a:lnTo>
+                    <a:pt x="2257509" y="2663004"/>
+                  </a:lnTo>
+                  <a:lnTo>
+                    <a:pt x="2186962" y="2667451"/>
+                  </a:lnTo>
+                  <a:lnTo>
+                    <a:pt x="2116415" y="2671864"/>
+                  </a:lnTo>
+                  <a:lnTo>
+                    <a:pt x="2045868" y="2676243"/>
+                  </a:lnTo>
+                  <a:lnTo>
+                    <a:pt x="1975320" y="2680589"/>
+                  </a:lnTo>
+                  <a:lnTo>
+                    <a:pt x="1904773" y="2684902"/>
+                  </a:lnTo>
+                  <a:lnTo>
+                    <a:pt x="1834226" y="2689183"/>
+                  </a:lnTo>
+                  <a:lnTo>
+                    <a:pt x="1763679" y="2693430"/>
+                  </a:lnTo>
+                  <a:lnTo>
+                    <a:pt x="1693132" y="2697646"/>
+                  </a:lnTo>
+                  <a:lnTo>
+                    <a:pt x="1622584" y="2701830"/>
+                  </a:lnTo>
+                  <a:lnTo>
+                    <a:pt x="1552037" y="2705982"/>
+                  </a:lnTo>
+                  <a:lnTo>
+                    <a:pt x="1481490" y="2710103"/>
+                  </a:lnTo>
+                  <a:lnTo>
+                    <a:pt x="1410943" y="2714192"/>
+                  </a:lnTo>
+                  <a:lnTo>
+                    <a:pt x="1340396" y="2718250"/>
+                  </a:lnTo>
+                  <a:lnTo>
+                    <a:pt x="1269849" y="2722278"/>
+                  </a:lnTo>
+                  <a:lnTo>
+                    <a:pt x="1199301" y="2726275"/>
+                  </a:lnTo>
+                  <a:lnTo>
+                    <a:pt x="1128754" y="2730242"/>
+                  </a:lnTo>
+                  <a:lnTo>
+                    <a:pt x="1058207" y="2734178"/>
+                  </a:lnTo>
+                  <a:lnTo>
+                    <a:pt x="987660" y="2738085"/>
+                  </a:lnTo>
+                  <a:lnTo>
+                    <a:pt x="917113" y="2741962"/>
+                  </a:lnTo>
+                  <a:lnTo>
+                    <a:pt x="846566" y="2745810"/>
+                  </a:lnTo>
+                  <a:lnTo>
+                    <a:pt x="776018" y="2749628"/>
+                  </a:lnTo>
+                  <a:lnTo>
+                    <a:pt x="705471" y="2753418"/>
+                  </a:lnTo>
+                  <a:lnTo>
+                    <a:pt x="634924" y="2757179"/>
+                  </a:lnTo>
+                  <a:lnTo>
+                    <a:pt x="564377" y="2760911"/>
+                  </a:lnTo>
+                  <a:lnTo>
+                    <a:pt x="493830" y="2764615"/>
+                  </a:lnTo>
+                  <a:lnTo>
+                    <a:pt x="423283" y="2768291"/>
+                  </a:lnTo>
+                  <a:lnTo>
+                    <a:pt x="352735" y="2771939"/>
+                  </a:lnTo>
+                  <a:lnTo>
+                    <a:pt x="282188" y="2775560"/>
+                  </a:lnTo>
+                  <a:lnTo>
+                    <a:pt x="211641" y="2779153"/>
+                  </a:lnTo>
+                  <a:lnTo>
+                    <a:pt x="141094" y="2782719"/>
+                  </a:lnTo>
+                  <a:lnTo>
+                    <a:pt x="70547" y="2786257"/>
+                  </a:lnTo>
+                  <a:lnTo>
+                    <a:pt x="0" y="2789769"/>
                   </a:lnTo>
                   <a:lnTo>
                     <a:pt x="0" y="0"/>
@@ -3504,180 +3504,180 @@
           </p:nvSpPr>
           <p:spPr>
             <a:xfrm>
-              <a:off x="4351018" y="2073503"/>
-              <a:ext cx="3911660" cy="2650551"/>
+              <a:off x="4396093" y="2209169"/>
+              <a:ext cx="3852930" cy="2472258"/>
             </a:xfrm>
             <a:custGeom>
               <a:avLst/>
               <a:pathLst>
-                <a:path w="3911660" h="2650551">
+                <a:path w="3852930" h="2472258">
                   <a:moveTo>
                     <a:pt x="0" y="0"/>
                   </a:moveTo>
                   <a:lnTo>
-                    <a:pt x="44044" y="127018"/>
-                  </a:lnTo>
-                  <a:lnTo>
-                    <a:pt x="115666" y="321598"/>
-                  </a:lnTo>
-                  <a:lnTo>
-                    <a:pt x="187289" y="504898"/>
-                  </a:lnTo>
-                  <a:lnTo>
-                    <a:pt x="258911" y="677573"/>
-                  </a:lnTo>
-                  <a:lnTo>
-                    <a:pt x="330534" y="840238"/>
-                  </a:lnTo>
-                  <a:lnTo>
-                    <a:pt x="402156" y="993474"/>
-                  </a:lnTo>
-                  <a:lnTo>
-                    <a:pt x="473779" y="1137828"/>
-                  </a:lnTo>
-                  <a:lnTo>
-                    <a:pt x="545401" y="1273814"/>
-                  </a:lnTo>
-                  <a:lnTo>
-                    <a:pt x="617024" y="1401917"/>
-                  </a:lnTo>
-                  <a:lnTo>
-                    <a:pt x="688646" y="1522594"/>
-                  </a:lnTo>
-                  <a:lnTo>
-                    <a:pt x="760269" y="1636276"/>
-                  </a:lnTo>
-                  <a:lnTo>
-                    <a:pt x="831891" y="1743369"/>
-                  </a:lnTo>
-                  <a:lnTo>
-                    <a:pt x="903514" y="1844253"/>
-                  </a:lnTo>
-                  <a:lnTo>
-                    <a:pt x="975136" y="1939289"/>
-                  </a:lnTo>
-                  <a:lnTo>
-                    <a:pt x="1046759" y="2028817"/>
-                  </a:lnTo>
-                  <a:lnTo>
-                    <a:pt x="1118381" y="2113155"/>
-                  </a:lnTo>
-                  <a:lnTo>
-                    <a:pt x="1190004" y="2192604"/>
-                  </a:lnTo>
-                  <a:lnTo>
-                    <a:pt x="1261627" y="2267447"/>
-                  </a:lnTo>
-                  <a:lnTo>
-                    <a:pt x="1333249" y="2337953"/>
-                  </a:lnTo>
-                  <a:lnTo>
-                    <a:pt x="1404872" y="2404371"/>
-                  </a:lnTo>
-                  <a:lnTo>
-                    <a:pt x="1476494" y="2466939"/>
-                  </a:lnTo>
-                  <a:lnTo>
-                    <a:pt x="1548117" y="2525880"/>
-                  </a:lnTo>
-                  <a:lnTo>
-                    <a:pt x="1619739" y="2581405"/>
-                  </a:lnTo>
-                  <a:lnTo>
-                    <a:pt x="1691362" y="2633711"/>
-                  </a:lnTo>
-                  <a:lnTo>
-                    <a:pt x="1762984" y="2650551"/>
-                  </a:lnTo>
-                  <a:lnTo>
-                    <a:pt x="1834607" y="2644185"/>
-                  </a:lnTo>
-                  <a:lnTo>
-                    <a:pt x="1906229" y="2637771"/>
-                  </a:lnTo>
-                  <a:lnTo>
-                    <a:pt x="1977852" y="2631307"/>
-                  </a:lnTo>
-                  <a:lnTo>
-                    <a:pt x="2049474" y="2624794"/>
-                  </a:lnTo>
-                  <a:lnTo>
-                    <a:pt x="2121097" y="2618231"/>
-                  </a:lnTo>
-                  <a:lnTo>
-                    <a:pt x="2192719" y="2611618"/>
-                  </a:lnTo>
-                  <a:lnTo>
-                    <a:pt x="2264342" y="2604954"/>
-                  </a:lnTo>
-                  <a:lnTo>
-                    <a:pt x="2335964" y="2598240"/>
-                  </a:lnTo>
-                  <a:lnTo>
-                    <a:pt x="2407587" y="2591474"/>
-                  </a:lnTo>
-                  <a:lnTo>
-                    <a:pt x="2479209" y="2584657"/>
-                  </a:lnTo>
-                  <a:lnTo>
-                    <a:pt x="2550832" y="2577787"/>
-                  </a:lnTo>
-                  <a:lnTo>
-                    <a:pt x="2622455" y="2570865"/>
-                  </a:lnTo>
-                  <a:lnTo>
-                    <a:pt x="2694077" y="2563890"/>
-                  </a:lnTo>
-                  <a:lnTo>
-                    <a:pt x="2765700" y="2556862"/>
-                  </a:lnTo>
-                  <a:lnTo>
-                    <a:pt x="2837322" y="2549780"/>
-                  </a:lnTo>
-                  <a:lnTo>
-                    <a:pt x="2908945" y="2542644"/>
-                  </a:lnTo>
-                  <a:lnTo>
-                    <a:pt x="2980567" y="2535454"/>
-                  </a:lnTo>
-                  <a:lnTo>
-                    <a:pt x="3052190" y="2528208"/>
-                  </a:lnTo>
-                  <a:lnTo>
-                    <a:pt x="3123812" y="2520908"/>
-                  </a:lnTo>
-                  <a:lnTo>
-                    <a:pt x="3195435" y="2513551"/>
-                  </a:lnTo>
-                  <a:lnTo>
-                    <a:pt x="3267057" y="2506138"/>
-                  </a:lnTo>
-                  <a:lnTo>
-                    <a:pt x="3338680" y="2498669"/>
-                  </a:lnTo>
-                  <a:lnTo>
-                    <a:pt x="3410302" y="2491142"/>
-                  </a:lnTo>
-                  <a:lnTo>
-                    <a:pt x="3481925" y="2483558"/>
-                  </a:lnTo>
-                  <a:lnTo>
-                    <a:pt x="3553547" y="2475916"/>
-                  </a:lnTo>
-                  <a:lnTo>
-                    <a:pt x="3625170" y="2468216"/>
-                  </a:lnTo>
-                  <a:lnTo>
-                    <a:pt x="3696792" y="2460457"/>
-                  </a:lnTo>
-                  <a:lnTo>
-                    <a:pt x="3768415" y="2452638"/>
-                  </a:lnTo>
-                  <a:lnTo>
-                    <a:pt x="3840037" y="2444760"/>
-                  </a:lnTo>
-                  <a:lnTo>
-                    <a:pt x="3911660" y="2436822"/>
+                    <a:pt x="43382" y="118474"/>
+                  </a:lnTo>
+                  <a:lnTo>
+                    <a:pt x="113929" y="299965"/>
+                  </a:lnTo>
+                  <a:lnTo>
+                    <a:pt x="184477" y="470935"/>
+                  </a:lnTo>
+                  <a:lnTo>
+                    <a:pt x="255024" y="631995"/>
+                  </a:lnTo>
+                  <a:lnTo>
+                    <a:pt x="325571" y="783718"/>
+                  </a:lnTo>
+                  <a:lnTo>
+                    <a:pt x="396118" y="926647"/>
+                  </a:lnTo>
+                  <a:lnTo>
+                    <a:pt x="466665" y="1061290"/>
+                  </a:lnTo>
+                  <a:lnTo>
+                    <a:pt x="537212" y="1188129"/>
+                  </a:lnTo>
+                  <a:lnTo>
+                    <a:pt x="607760" y="1307615"/>
+                  </a:lnTo>
+                  <a:lnTo>
+                    <a:pt x="678307" y="1420175"/>
+                  </a:lnTo>
+                  <a:lnTo>
+                    <a:pt x="748854" y="1526210"/>
+                  </a:lnTo>
+                  <a:lnTo>
+                    <a:pt x="819401" y="1626098"/>
+                  </a:lnTo>
+                  <a:lnTo>
+                    <a:pt x="889948" y="1720197"/>
+                  </a:lnTo>
+                  <a:lnTo>
+                    <a:pt x="960496" y="1808841"/>
+                  </a:lnTo>
+                  <a:lnTo>
+                    <a:pt x="1031043" y="1892346"/>
+                  </a:lnTo>
+                  <a:lnTo>
+                    <a:pt x="1101590" y="1971011"/>
+                  </a:lnTo>
+                  <a:lnTo>
+                    <a:pt x="1172137" y="2045115"/>
+                  </a:lnTo>
+                  <a:lnTo>
+                    <a:pt x="1242684" y="2114925"/>
+                  </a:lnTo>
+                  <a:lnTo>
+                    <a:pt x="1313231" y="2180687"/>
+                  </a:lnTo>
+                  <a:lnTo>
+                    <a:pt x="1383779" y="2242638"/>
+                  </a:lnTo>
+                  <a:lnTo>
+                    <a:pt x="1454326" y="2300997"/>
+                  </a:lnTo>
+                  <a:lnTo>
+                    <a:pt x="1524873" y="2355974"/>
+                  </a:lnTo>
+                  <a:lnTo>
+                    <a:pt x="1595420" y="2407763"/>
+                  </a:lnTo>
+                  <a:lnTo>
+                    <a:pt x="1665967" y="2456551"/>
+                  </a:lnTo>
+                  <a:lnTo>
+                    <a:pt x="1736514" y="2472258"/>
+                  </a:lnTo>
+                  <a:lnTo>
+                    <a:pt x="1807062" y="2466321"/>
+                  </a:lnTo>
+                  <a:lnTo>
+                    <a:pt x="1877609" y="2460337"/>
+                  </a:lnTo>
+                  <a:lnTo>
+                    <a:pt x="1948156" y="2454308"/>
+                  </a:lnTo>
+                  <a:lnTo>
+                    <a:pt x="2018703" y="2448233"/>
+                  </a:lnTo>
+                  <a:lnTo>
+                    <a:pt x="2089250" y="2442112"/>
+                  </a:lnTo>
+                  <a:lnTo>
+                    <a:pt x="2159797" y="2435944"/>
+                  </a:lnTo>
+                  <a:lnTo>
+                    <a:pt x="2230345" y="2429729"/>
+                  </a:lnTo>
+                  <a:lnTo>
+                    <a:pt x="2300892" y="2423466"/>
+                  </a:lnTo>
+                  <a:lnTo>
+                    <a:pt x="2371439" y="2417155"/>
+                  </a:lnTo>
+                  <a:lnTo>
+                    <a:pt x="2441986" y="2410796"/>
+                  </a:lnTo>
+                  <a:lnTo>
+                    <a:pt x="2512533" y="2404389"/>
+                  </a:lnTo>
+                  <a:lnTo>
+                    <a:pt x="2583080" y="2397933"/>
+                  </a:lnTo>
+                  <a:lnTo>
+                    <a:pt x="2653628" y="2391427"/>
+                  </a:lnTo>
+                  <a:lnTo>
+                    <a:pt x="2724175" y="2384871"/>
+                  </a:lnTo>
+                  <a:lnTo>
+                    <a:pt x="2794722" y="2378266"/>
+                  </a:lnTo>
+                  <a:lnTo>
+                    <a:pt x="2865269" y="2371610"/>
+                  </a:lnTo>
+                  <a:lnTo>
+                    <a:pt x="2935816" y="2364903"/>
+                  </a:lnTo>
+                  <a:lnTo>
+                    <a:pt x="3006364" y="2358145"/>
+                  </a:lnTo>
+                  <a:lnTo>
+                    <a:pt x="3076911" y="2351335"/>
+                  </a:lnTo>
+                  <a:lnTo>
+                    <a:pt x="3147458" y="2344474"/>
+                  </a:lnTo>
+                  <a:lnTo>
+                    <a:pt x="3218005" y="2337559"/>
+                  </a:lnTo>
+                  <a:lnTo>
+                    <a:pt x="3288552" y="2330592"/>
+                  </a:lnTo>
+                  <a:lnTo>
+                    <a:pt x="3359099" y="2323572"/>
+                  </a:lnTo>
+                  <a:lnTo>
+                    <a:pt x="3429647" y="2316498"/>
+                  </a:lnTo>
+                  <a:lnTo>
+                    <a:pt x="3500194" y="2309370"/>
+                  </a:lnTo>
+                  <a:lnTo>
+                    <a:pt x="3570741" y="2302188"/>
+                  </a:lnTo>
+                  <a:lnTo>
+                    <a:pt x="3641288" y="2294951"/>
+                  </a:lnTo>
+                  <a:lnTo>
+                    <a:pt x="3711835" y="2287658"/>
+                  </a:lnTo>
+                  <a:lnTo>
+                    <a:pt x="3782382" y="2280310"/>
+                  </a:lnTo>
+                  <a:lnTo>
+                    <a:pt x="3852930" y="2272906"/>
                   </a:lnTo>
                 </a:path>
               </a:pathLst>
@@ -3697,312 +3697,312 @@
           </p:nvSpPr>
           <p:spPr>
             <a:xfrm>
-              <a:off x="1172049" y="4730372"/>
-              <a:ext cx="7090630" cy="693375"/>
+              <a:off x="1264853" y="4687321"/>
+              <a:ext cx="6984170" cy="646734"/>
             </a:xfrm>
             <a:custGeom>
               <a:avLst/>
               <a:pathLst>
-                <a:path w="7090630" h="693375">
+                <a:path w="6984170" h="646734">
                   <a:moveTo>
-                    <a:pt x="7090630" y="693375"/>
+                    <a:pt x="6984170" y="646734"/>
                   </a:moveTo>
                   <a:lnTo>
-                    <a:pt x="7019007" y="685160"/>
-                  </a:lnTo>
-                  <a:lnTo>
-                    <a:pt x="6947385" y="676440"/>
-                  </a:lnTo>
-                  <a:lnTo>
-                    <a:pt x="6875762" y="667183"/>
-                  </a:lnTo>
-                  <a:lnTo>
-                    <a:pt x="6804139" y="657356"/>
-                  </a:lnTo>
-                  <a:lnTo>
-                    <a:pt x="6732517" y="646925"/>
-                  </a:lnTo>
-                  <a:lnTo>
-                    <a:pt x="6660894" y="635852"/>
-                  </a:lnTo>
-                  <a:lnTo>
-                    <a:pt x="6589272" y="624097"/>
-                  </a:lnTo>
-                  <a:lnTo>
-                    <a:pt x="6517649" y="611620"/>
-                  </a:lnTo>
-                  <a:lnTo>
-                    <a:pt x="6446027" y="598374"/>
-                  </a:lnTo>
-                  <a:lnTo>
-                    <a:pt x="6374404" y="584313"/>
-                  </a:lnTo>
-                  <a:lnTo>
-                    <a:pt x="6302782" y="569387"/>
-                  </a:lnTo>
-                  <a:lnTo>
-                    <a:pt x="6231159" y="553543"/>
-                  </a:lnTo>
-                  <a:lnTo>
-                    <a:pt x="6159537" y="536724"/>
-                  </a:lnTo>
-                  <a:lnTo>
-                    <a:pt x="6087914" y="518869"/>
-                  </a:lnTo>
-                  <a:lnTo>
-                    <a:pt x="6016292" y="499916"/>
-                  </a:lnTo>
-                  <a:lnTo>
-                    <a:pt x="5944669" y="479797"/>
-                  </a:lnTo>
-                  <a:lnTo>
-                    <a:pt x="5873047" y="458440"/>
-                  </a:lnTo>
-                  <a:lnTo>
-                    <a:pt x="5801424" y="435769"/>
-                  </a:lnTo>
-                  <a:lnTo>
-                    <a:pt x="5729802" y="411702"/>
-                  </a:lnTo>
-                  <a:lnTo>
-                    <a:pt x="5658179" y="386155"/>
-                  </a:lnTo>
-                  <a:lnTo>
-                    <a:pt x="5586557" y="359036"/>
-                  </a:lnTo>
-                  <a:lnTo>
-                    <a:pt x="5514934" y="330248"/>
-                  </a:lnTo>
-                  <a:lnTo>
-                    <a:pt x="5443311" y="299688"/>
-                  </a:lnTo>
-                  <a:lnTo>
-                    <a:pt x="5371689" y="267248"/>
-                  </a:lnTo>
-                  <a:lnTo>
-                    <a:pt x="5300066" y="232812"/>
-                  </a:lnTo>
-                  <a:lnTo>
-                    <a:pt x="5228444" y="196257"/>
-                  </a:lnTo>
-                  <a:lnTo>
-                    <a:pt x="5156821" y="157452"/>
-                  </a:lnTo>
-                  <a:lnTo>
-                    <a:pt x="5085199" y="116260"/>
-                  </a:lnTo>
-                  <a:lnTo>
-                    <a:pt x="5013576" y="72533"/>
-                  </a:lnTo>
-                  <a:lnTo>
-                    <a:pt x="4941954" y="26115"/>
-                  </a:lnTo>
-                  <a:lnTo>
-                    <a:pt x="4870331" y="0"/>
-                  </a:lnTo>
-                  <a:lnTo>
-                    <a:pt x="4798709" y="6269"/>
-                  </a:lnTo>
-                  <a:lnTo>
-                    <a:pt x="4727086" y="12492"/>
-                  </a:lnTo>
-                  <a:lnTo>
-                    <a:pt x="4655464" y="18667"/>
-                  </a:lnTo>
-                  <a:lnTo>
-                    <a:pt x="4583841" y="24795"/>
-                  </a:lnTo>
-                  <a:lnTo>
-                    <a:pt x="4512219" y="30877"/>
-                  </a:lnTo>
-                  <a:lnTo>
-                    <a:pt x="4440596" y="36913"/>
-                  </a:lnTo>
-                  <a:lnTo>
-                    <a:pt x="4368974" y="42903"/>
-                  </a:lnTo>
-                  <a:lnTo>
-                    <a:pt x="4297351" y="48847"/>
-                  </a:lnTo>
-                  <a:lnTo>
-                    <a:pt x="4225729" y="54747"/>
-                  </a:lnTo>
-                  <a:lnTo>
-                    <a:pt x="4154106" y="60602"/>
-                  </a:lnTo>
-                  <a:lnTo>
-                    <a:pt x="4082483" y="66412"/>
-                  </a:lnTo>
-                  <a:lnTo>
-                    <a:pt x="4010861" y="72178"/>
-                  </a:lnTo>
-                  <a:lnTo>
-                    <a:pt x="3939238" y="77901"/>
-                  </a:lnTo>
-                  <a:lnTo>
-                    <a:pt x="3867616" y="83580"/>
-                  </a:lnTo>
-                  <a:lnTo>
-                    <a:pt x="3795993" y="89216"/>
-                  </a:lnTo>
-                  <a:lnTo>
-                    <a:pt x="3724371" y="94809"/>
-                  </a:lnTo>
-                  <a:lnTo>
-                    <a:pt x="3652748" y="100360"/>
-                  </a:lnTo>
-                  <a:lnTo>
-                    <a:pt x="3581126" y="105869"/>
-                  </a:lnTo>
-                  <a:lnTo>
-                    <a:pt x="3509503" y="111336"/>
-                  </a:lnTo>
-                  <a:lnTo>
-                    <a:pt x="3437881" y="116762"/>
-                  </a:lnTo>
-                  <a:lnTo>
-                    <a:pt x="3366258" y="122147"/>
-                  </a:lnTo>
-                  <a:lnTo>
-                    <a:pt x="3294636" y="127490"/>
-                  </a:lnTo>
-                  <a:lnTo>
-                    <a:pt x="3223013" y="132793"/>
-                  </a:lnTo>
-                  <a:lnTo>
-                    <a:pt x="3151391" y="138056"/>
-                  </a:lnTo>
-                  <a:lnTo>
-                    <a:pt x="3079768" y="143279"/>
-                  </a:lnTo>
-                  <a:lnTo>
-                    <a:pt x="3008146" y="148463"/>
-                  </a:lnTo>
-                  <a:lnTo>
-                    <a:pt x="2936523" y="153607"/>
-                  </a:lnTo>
-                  <a:lnTo>
-                    <a:pt x="2864901" y="158712"/>
-                  </a:lnTo>
-                  <a:lnTo>
-                    <a:pt x="2793278" y="163778"/>
-                  </a:lnTo>
-                  <a:lnTo>
-                    <a:pt x="2721655" y="168806"/>
-                  </a:lnTo>
-                  <a:lnTo>
-                    <a:pt x="2650033" y="173796"/>
-                  </a:lnTo>
-                  <a:lnTo>
-                    <a:pt x="2578410" y="178748"/>
-                  </a:lnTo>
-                  <a:lnTo>
-                    <a:pt x="2506788" y="183663"/>
-                  </a:lnTo>
-                  <a:lnTo>
-                    <a:pt x="2435165" y="188540"/>
-                  </a:lnTo>
-                  <a:lnTo>
-                    <a:pt x="2363543" y="193380"/>
-                  </a:lnTo>
-                  <a:lnTo>
-                    <a:pt x="2291920" y="198184"/>
-                  </a:lnTo>
-                  <a:lnTo>
-                    <a:pt x="2220298" y="202951"/>
-                  </a:lnTo>
-                  <a:lnTo>
-                    <a:pt x="2148675" y="207682"/>
-                  </a:lnTo>
-                  <a:lnTo>
-                    <a:pt x="2077053" y="212377"/>
-                  </a:lnTo>
-                  <a:lnTo>
-                    <a:pt x="2005430" y="217037"/>
-                  </a:lnTo>
-                  <a:lnTo>
-                    <a:pt x="1933808" y="221661"/>
-                  </a:lnTo>
-                  <a:lnTo>
-                    <a:pt x="1862185" y="226250"/>
-                  </a:lnTo>
-                  <a:lnTo>
-                    <a:pt x="1790563" y="230804"/>
-                  </a:lnTo>
-                  <a:lnTo>
-                    <a:pt x="1718940" y="235324"/>
-                  </a:lnTo>
-                  <a:lnTo>
-                    <a:pt x="1647318" y="239809"/>
-                  </a:lnTo>
-                  <a:lnTo>
-                    <a:pt x="1575695" y="244261"/>
-                  </a:lnTo>
-                  <a:lnTo>
-                    <a:pt x="1504073" y="248679"/>
-                  </a:lnTo>
-                  <a:lnTo>
-                    <a:pt x="1432450" y="253063"/>
-                  </a:lnTo>
-                  <a:lnTo>
-                    <a:pt x="1360827" y="257414"/>
-                  </a:lnTo>
-                  <a:lnTo>
-                    <a:pt x="1289205" y="261732"/>
-                  </a:lnTo>
-                  <a:lnTo>
-                    <a:pt x="1217582" y="266017"/>
-                  </a:lnTo>
-                  <a:lnTo>
-                    <a:pt x="1145960" y="270270"/>
-                  </a:lnTo>
-                  <a:lnTo>
-                    <a:pt x="1074337" y="274491"/>
-                  </a:lnTo>
-                  <a:lnTo>
-                    <a:pt x="1002715" y="278679"/>
-                  </a:lnTo>
-                  <a:lnTo>
-                    <a:pt x="931092" y="282836"/>
-                  </a:lnTo>
-                  <a:lnTo>
-                    <a:pt x="859470" y="286961"/>
-                  </a:lnTo>
-                  <a:lnTo>
-                    <a:pt x="787847" y="291055"/>
-                  </a:lnTo>
-                  <a:lnTo>
-                    <a:pt x="716225" y="295118"/>
-                  </a:lnTo>
-                  <a:lnTo>
-                    <a:pt x="644602" y="299150"/>
-                  </a:lnTo>
-                  <a:lnTo>
-                    <a:pt x="572980" y="303152"/>
-                  </a:lnTo>
-                  <a:lnTo>
-                    <a:pt x="501357" y="307123"/>
-                  </a:lnTo>
-                  <a:lnTo>
-                    <a:pt x="429735" y="311064"/>
-                  </a:lnTo>
-                  <a:lnTo>
-                    <a:pt x="358112" y="314975"/>
-                  </a:lnTo>
-                  <a:lnTo>
-                    <a:pt x="286490" y="318857"/>
-                  </a:lnTo>
-                  <a:lnTo>
-                    <a:pt x="214867" y="322709"/>
-                  </a:lnTo>
-                  <a:lnTo>
-                    <a:pt x="143245" y="326532"/>
-                  </a:lnTo>
-                  <a:lnTo>
-                    <a:pt x="71622" y="330325"/>
-                  </a:lnTo>
-                  <a:lnTo>
-                    <a:pt x="0" y="334091"/>
+                    <a:pt x="6913622" y="639072"/>
+                  </a:lnTo>
+                  <a:lnTo>
+                    <a:pt x="6843075" y="630938"/>
+                  </a:lnTo>
+                  <a:lnTo>
+                    <a:pt x="6772528" y="622304"/>
+                  </a:lnTo>
+                  <a:lnTo>
+                    <a:pt x="6701981" y="613138"/>
+                  </a:lnTo>
+                  <a:lnTo>
+                    <a:pt x="6631434" y="603409"/>
+                  </a:lnTo>
+                  <a:lnTo>
+                    <a:pt x="6560887" y="593080"/>
+                  </a:lnTo>
+                  <a:lnTo>
+                    <a:pt x="6490339" y="582117"/>
+                  </a:lnTo>
+                  <a:lnTo>
+                    <a:pt x="6419792" y="570478"/>
+                  </a:lnTo>
+                  <a:lnTo>
+                    <a:pt x="6349245" y="558123"/>
+                  </a:lnTo>
+                  <a:lnTo>
+                    <a:pt x="6278698" y="545009"/>
+                  </a:lnTo>
+                  <a:lnTo>
+                    <a:pt x="6208151" y="531087"/>
+                  </a:lnTo>
+                  <a:lnTo>
+                    <a:pt x="6137604" y="516308"/>
+                  </a:lnTo>
+                  <a:lnTo>
+                    <a:pt x="6067056" y="500620"/>
+                  </a:lnTo>
+                  <a:lnTo>
+                    <a:pt x="5996509" y="483967"/>
+                  </a:lnTo>
+                  <a:lnTo>
+                    <a:pt x="5925962" y="466289"/>
+                  </a:lnTo>
+                  <a:lnTo>
+                    <a:pt x="5855415" y="447523"/>
+                  </a:lnTo>
+                  <a:lnTo>
+                    <a:pt x="5784868" y="427603"/>
+                  </a:lnTo>
+                  <a:lnTo>
+                    <a:pt x="5714320" y="406456"/>
+                  </a:lnTo>
+                  <a:lnTo>
+                    <a:pt x="5643773" y="384009"/>
+                  </a:lnTo>
+                  <a:lnTo>
+                    <a:pt x="5573226" y="360180"/>
+                  </a:lnTo>
+                  <a:lnTo>
+                    <a:pt x="5502679" y="334885"/>
+                  </a:lnTo>
+                  <a:lnTo>
+                    <a:pt x="5432132" y="308033"/>
+                  </a:lnTo>
+                  <a:lnTo>
+                    <a:pt x="5361585" y="279529"/>
+                  </a:lnTo>
+                  <a:lnTo>
+                    <a:pt x="5291037" y="249271"/>
+                  </a:lnTo>
+                  <a:lnTo>
+                    <a:pt x="5220490" y="217152"/>
+                  </a:lnTo>
+                  <a:lnTo>
+                    <a:pt x="5149943" y="183055"/>
+                  </a:lnTo>
+                  <a:lnTo>
+                    <a:pt x="5079396" y="146861"/>
+                  </a:lnTo>
+                  <a:lnTo>
+                    <a:pt x="5008849" y="108440"/>
+                  </a:lnTo>
+                  <a:lnTo>
+                    <a:pt x="4938302" y="67654"/>
+                  </a:lnTo>
+                  <a:lnTo>
+                    <a:pt x="4867754" y="24359"/>
+                  </a:lnTo>
+                  <a:lnTo>
+                    <a:pt x="4797207" y="0"/>
+                  </a:lnTo>
+                  <a:lnTo>
+                    <a:pt x="4726660" y="5848"/>
+                  </a:lnTo>
+                  <a:lnTo>
+                    <a:pt x="4656113" y="11651"/>
+                  </a:lnTo>
+                  <a:lnTo>
+                    <a:pt x="4585566" y="17411"/>
+                  </a:lnTo>
+                  <a:lnTo>
+                    <a:pt x="4515019" y="23127"/>
+                  </a:lnTo>
+                  <a:lnTo>
+                    <a:pt x="4444471" y="28800"/>
+                  </a:lnTo>
+                  <a:lnTo>
+                    <a:pt x="4373924" y="34430"/>
+                  </a:lnTo>
+                  <a:lnTo>
+                    <a:pt x="4303377" y="40017"/>
+                  </a:lnTo>
+                  <a:lnTo>
+                    <a:pt x="4232830" y="45561"/>
+                  </a:lnTo>
+                  <a:lnTo>
+                    <a:pt x="4162283" y="51064"/>
+                  </a:lnTo>
+                  <a:lnTo>
+                    <a:pt x="4091736" y="56525"/>
+                  </a:lnTo>
+                  <a:lnTo>
+                    <a:pt x="4021188" y="61945"/>
+                  </a:lnTo>
+                  <a:lnTo>
+                    <a:pt x="3950641" y="67323"/>
+                  </a:lnTo>
+                  <a:lnTo>
+                    <a:pt x="3880094" y="72661"/>
+                  </a:lnTo>
+                  <a:lnTo>
+                    <a:pt x="3809547" y="77958"/>
+                  </a:lnTo>
+                  <a:lnTo>
+                    <a:pt x="3739000" y="83215"/>
+                  </a:lnTo>
+                  <a:lnTo>
+                    <a:pt x="3668452" y="88432"/>
+                  </a:lnTo>
+                  <a:lnTo>
+                    <a:pt x="3597905" y="93609"/>
+                  </a:lnTo>
+                  <a:lnTo>
+                    <a:pt x="3527358" y="98748"/>
+                  </a:lnTo>
+                  <a:lnTo>
+                    <a:pt x="3456811" y="103847"/>
+                  </a:lnTo>
+                  <a:lnTo>
+                    <a:pt x="3386264" y="108908"/>
+                  </a:lnTo>
+                  <a:lnTo>
+                    <a:pt x="3315717" y="113930"/>
+                  </a:lnTo>
+                  <a:lnTo>
+                    <a:pt x="3245169" y="118914"/>
+                  </a:lnTo>
+                  <a:lnTo>
+                    <a:pt x="3174622" y="123861"/>
+                  </a:lnTo>
+                  <a:lnTo>
+                    <a:pt x="3104075" y="128770"/>
+                  </a:lnTo>
+                  <a:lnTo>
+                    <a:pt x="3033528" y="133641"/>
+                  </a:lnTo>
+                  <a:lnTo>
+                    <a:pt x="2962981" y="138476"/>
+                  </a:lnTo>
+                  <a:lnTo>
+                    <a:pt x="2892434" y="143274"/>
+                  </a:lnTo>
+                  <a:lnTo>
+                    <a:pt x="2821886" y="148036"/>
+                  </a:lnTo>
+                  <a:lnTo>
+                    <a:pt x="2751339" y="152762"/>
+                  </a:lnTo>
+                  <a:lnTo>
+                    <a:pt x="2680792" y="157451"/>
+                  </a:lnTo>
+                  <a:lnTo>
+                    <a:pt x="2610245" y="162106"/>
+                  </a:lnTo>
+                  <a:lnTo>
+                    <a:pt x="2539698" y="166725"/>
+                  </a:lnTo>
+                  <a:lnTo>
+                    <a:pt x="2469151" y="171309"/>
+                  </a:lnTo>
+                  <a:lnTo>
+                    <a:pt x="2398603" y="175858"/>
+                  </a:lnTo>
+                  <a:lnTo>
+                    <a:pt x="2328056" y="180372"/>
+                  </a:lnTo>
+                  <a:lnTo>
+                    <a:pt x="2257509" y="184853"/>
+                  </a:lnTo>
+                  <a:lnTo>
+                    <a:pt x="2186962" y="189299"/>
+                  </a:lnTo>
+                  <a:lnTo>
+                    <a:pt x="2116415" y="193712"/>
+                  </a:lnTo>
+                  <a:lnTo>
+                    <a:pt x="2045868" y="198091"/>
+                  </a:lnTo>
+                  <a:lnTo>
+                    <a:pt x="1975320" y="202437"/>
+                  </a:lnTo>
+                  <a:lnTo>
+                    <a:pt x="1904773" y="206750"/>
+                  </a:lnTo>
+                  <a:lnTo>
+                    <a:pt x="1834226" y="211031"/>
+                  </a:lnTo>
+                  <a:lnTo>
+                    <a:pt x="1763679" y="215279"/>
+                  </a:lnTo>
+                  <a:lnTo>
+                    <a:pt x="1693132" y="219495"/>
+                  </a:lnTo>
+                  <a:lnTo>
+                    <a:pt x="1622584" y="223678"/>
+                  </a:lnTo>
+                  <a:lnTo>
+                    <a:pt x="1552037" y="227830"/>
+                  </a:lnTo>
+                  <a:lnTo>
+                    <a:pt x="1481490" y="231951"/>
+                  </a:lnTo>
+                  <a:lnTo>
+                    <a:pt x="1410943" y="236040"/>
+                  </a:lnTo>
+                  <a:lnTo>
+                    <a:pt x="1340396" y="240099"/>
+                  </a:lnTo>
+                  <a:lnTo>
+                    <a:pt x="1269849" y="244126"/>
+                  </a:lnTo>
+                  <a:lnTo>
+                    <a:pt x="1199301" y="248123"/>
+                  </a:lnTo>
+                  <a:lnTo>
+                    <a:pt x="1128754" y="252090"/>
+                  </a:lnTo>
+                  <a:lnTo>
+                    <a:pt x="1058207" y="256027"/>
+                  </a:lnTo>
+                  <a:lnTo>
+                    <a:pt x="987660" y="259933"/>
+                  </a:lnTo>
+                  <a:lnTo>
+                    <a:pt x="917113" y="263810"/>
+                  </a:lnTo>
+                  <a:lnTo>
+                    <a:pt x="846566" y="267658"/>
+                  </a:lnTo>
+                  <a:lnTo>
+                    <a:pt x="776018" y="271477"/>
+                  </a:lnTo>
+                  <a:lnTo>
+                    <a:pt x="705471" y="275266"/>
+                  </a:lnTo>
+                  <a:lnTo>
+                    <a:pt x="634924" y="279027"/>
+                  </a:lnTo>
+                  <a:lnTo>
+                    <a:pt x="564377" y="282760"/>
+                  </a:lnTo>
+                  <a:lnTo>
+                    <a:pt x="493830" y="286464"/>
+                  </a:lnTo>
+                  <a:lnTo>
+                    <a:pt x="423283" y="290140"/>
+                  </a:lnTo>
+                  <a:lnTo>
+                    <a:pt x="352735" y="293788"/>
+                  </a:lnTo>
+                  <a:lnTo>
+                    <a:pt x="282188" y="297408"/>
+                  </a:lnTo>
+                  <a:lnTo>
+                    <a:pt x="211641" y="301001"/>
+                  </a:lnTo>
+                  <a:lnTo>
+                    <a:pt x="141094" y="304567"/>
+                  </a:lnTo>
+                  <a:lnTo>
+                    <a:pt x="70547" y="308106"/>
+                  </a:lnTo>
+                  <a:lnTo>
+                    <a:pt x="0" y="311618"/>
                   </a:lnTo>
                 </a:path>
               </a:pathLst>
@@ -4022,273 +4022,273 @@
           </p:nvSpPr>
           <p:spPr>
             <a:xfrm>
-              <a:off x="2126574" y="2073503"/>
-              <a:ext cx="6136104" cy="3109893"/>
+              <a:off x="2205047" y="2209169"/>
+              <a:ext cx="6043976" cy="2900702"/>
             </a:xfrm>
             <a:custGeom>
               <a:avLst/>
               <a:pathLst>
-                <a:path w="6136104" h="3109893">
+                <a:path w="6043976" h="2900702">
                   <a:moveTo>
                     <a:pt x="0" y="0"/>
                   </a:moveTo>
                   <a:lnTo>
-                    <a:pt x="48189" y="60787"/>
-                  </a:lnTo>
-                  <a:lnTo>
-                    <a:pt x="119812" y="148809"/>
-                  </a:lnTo>
-                  <a:lnTo>
-                    <a:pt x="191434" y="234568"/>
-                  </a:lnTo>
-                  <a:lnTo>
-                    <a:pt x="263057" y="318122"/>
-                  </a:lnTo>
-                  <a:lnTo>
-                    <a:pt x="334679" y="399527"/>
-                  </a:lnTo>
-                  <a:lnTo>
-                    <a:pt x="406302" y="478839"/>
-                  </a:lnTo>
-                  <a:lnTo>
-                    <a:pt x="477925" y="556111"/>
-                  </a:lnTo>
-                  <a:lnTo>
-                    <a:pt x="549547" y="631396"/>
-                  </a:lnTo>
-                  <a:lnTo>
-                    <a:pt x="621170" y="704745"/>
-                  </a:lnTo>
-                  <a:lnTo>
-                    <a:pt x="692792" y="776208"/>
-                  </a:lnTo>
-                  <a:lnTo>
-                    <a:pt x="764415" y="845833"/>
-                  </a:lnTo>
-                  <a:lnTo>
-                    <a:pt x="836037" y="913668"/>
-                  </a:lnTo>
-                  <a:lnTo>
-                    <a:pt x="907660" y="979758"/>
-                  </a:lnTo>
-                  <a:lnTo>
-                    <a:pt x="979282" y="1044149"/>
-                  </a:lnTo>
-                  <a:lnTo>
-                    <a:pt x="1050905" y="1106884"/>
-                  </a:lnTo>
-                  <a:lnTo>
-                    <a:pt x="1122527" y="1168006"/>
-                  </a:lnTo>
-                  <a:lnTo>
-                    <a:pt x="1194150" y="1227556"/>
-                  </a:lnTo>
-                  <a:lnTo>
-                    <a:pt x="1265772" y="1285574"/>
-                  </a:lnTo>
-                  <a:lnTo>
-                    <a:pt x="1337395" y="1342101"/>
-                  </a:lnTo>
-                  <a:lnTo>
-                    <a:pt x="1409017" y="1397174"/>
-                  </a:lnTo>
-                  <a:lnTo>
-                    <a:pt x="1480640" y="1450831"/>
-                  </a:lnTo>
-                  <a:lnTo>
-                    <a:pt x="1552262" y="1503108"/>
-                  </a:lnTo>
-                  <a:lnTo>
-                    <a:pt x="1623885" y="1554041"/>
-                  </a:lnTo>
-                  <a:lnTo>
-                    <a:pt x="1695507" y="1603664"/>
-                  </a:lnTo>
-                  <a:lnTo>
-                    <a:pt x="1767130" y="1652011"/>
-                  </a:lnTo>
-                  <a:lnTo>
-                    <a:pt x="1838753" y="1699114"/>
-                  </a:lnTo>
-                  <a:lnTo>
-                    <a:pt x="1910375" y="1745007"/>
-                  </a:lnTo>
-                  <a:lnTo>
-                    <a:pt x="1981998" y="1789719"/>
-                  </a:lnTo>
-                  <a:lnTo>
-                    <a:pt x="2053620" y="1833281"/>
-                  </a:lnTo>
-                  <a:lnTo>
-                    <a:pt x="2125243" y="1875724"/>
-                  </a:lnTo>
-                  <a:lnTo>
-                    <a:pt x="2196865" y="1917074"/>
-                  </a:lnTo>
-                  <a:lnTo>
-                    <a:pt x="2268488" y="1957362"/>
-                  </a:lnTo>
-                  <a:lnTo>
-                    <a:pt x="2340110" y="1996613"/>
-                  </a:lnTo>
-                  <a:lnTo>
-                    <a:pt x="2411733" y="2034855"/>
-                  </a:lnTo>
-                  <a:lnTo>
-                    <a:pt x="2483355" y="2072114"/>
-                  </a:lnTo>
-                  <a:lnTo>
-                    <a:pt x="2554978" y="2108415"/>
-                  </a:lnTo>
-                  <a:lnTo>
-                    <a:pt x="2626600" y="2143782"/>
-                  </a:lnTo>
-                  <a:lnTo>
-                    <a:pt x="2698223" y="2178239"/>
-                  </a:lnTo>
-                  <a:lnTo>
-                    <a:pt x="2769845" y="2211811"/>
-                  </a:lnTo>
-                  <a:lnTo>
-                    <a:pt x="2841468" y="2244519"/>
-                  </a:lnTo>
-                  <a:lnTo>
-                    <a:pt x="2913090" y="2276386"/>
-                  </a:lnTo>
-                  <a:lnTo>
-                    <a:pt x="2984713" y="2307434"/>
-                  </a:lnTo>
-                  <a:lnTo>
-                    <a:pt x="3056335" y="2337683"/>
-                  </a:lnTo>
-                  <a:lnTo>
-                    <a:pt x="3127958" y="2367155"/>
-                  </a:lnTo>
-                  <a:lnTo>
-                    <a:pt x="3199581" y="2395868"/>
-                  </a:lnTo>
-                  <a:lnTo>
-                    <a:pt x="3271203" y="2423843"/>
-                  </a:lnTo>
-                  <a:lnTo>
-                    <a:pt x="3342826" y="2451099"/>
-                  </a:lnTo>
-                  <a:lnTo>
-                    <a:pt x="3414448" y="2477654"/>
-                  </a:lnTo>
-                  <a:lnTo>
-                    <a:pt x="3486071" y="2503526"/>
-                  </a:lnTo>
-                  <a:lnTo>
-                    <a:pt x="3557693" y="2528732"/>
-                  </a:lnTo>
-                  <a:lnTo>
-                    <a:pt x="3629316" y="2553291"/>
-                  </a:lnTo>
-                  <a:lnTo>
-                    <a:pt x="3700938" y="2577218"/>
-                  </a:lnTo>
-                  <a:lnTo>
-                    <a:pt x="3772561" y="2600530"/>
-                  </a:lnTo>
-                  <a:lnTo>
-                    <a:pt x="3844183" y="2623242"/>
-                  </a:lnTo>
-                  <a:lnTo>
-                    <a:pt x="3915806" y="2645370"/>
-                  </a:lnTo>
-                  <a:lnTo>
-                    <a:pt x="3987428" y="2666929"/>
-                  </a:lnTo>
-                  <a:lnTo>
-                    <a:pt x="4059051" y="2687934"/>
-                  </a:lnTo>
-                  <a:lnTo>
-                    <a:pt x="4130673" y="2708398"/>
-                  </a:lnTo>
-                  <a:lnTo>
-                    <a:pt x="4202296" y="2728337"/>
-                  </a:lnTo>
-                  <a:lnTo>
-                    <a:pt x="4273918" y="2747762"/>
-                  </a:lnTo>
-                  <a:lnTo>
-                    <a:pt x="4345541" y="2766688"/>
-                  </a:lnTo>
-                  <a:lnTo>
-                    <a:pt x="4417163" y="2785128"/>
-                  </a:lnTo>
-                  <a:lnTo>
-                    <a:pt x="4488786" y="2803093"/>
-                  </a:lnTo>
-                  <a:lnTo>
-                    <a:pt x="4560409" y="2820596"/>
-                  </a:lnTo>
-                  <a:lnTo>
-                    <a:pt x="4632031" y="2837649"/>
-                  </a:lnTo>
-                  <a:lnTo>
-                    <a:pt x="4703654" y="2854264"/>
-                  </a:lnTo>
-                  <a:lnTo>
-                    <a:pt x="4775276" y="2870451"/>
-                  </a:lnTo>
-                  <a:lnTo>
-                    <a:pt x="4846899" y="2886222"/>
-                  </a:lnTo>
-                  <a:lnTo>
-                    <a:pt x="4918521" y="2901588"/>
-                  </a:lnTo>
-                  <a:lnTo>
-                    <a:pt x="4990144" y="2916558"/>
-                  </a:lnTo>
-                  <a:lnTo>
-                    <a:pt x="5061766" y="2931144"/>
-                  </a:lnTo>
-                  <a:lnTo>
-                    <a:pt x="5133389" y="2945354"/>
-                  </a:lnTo>
-                  <a:lnTo>
-                    <a:pt x="5205011" y="2959199"/>
-                  </a:lnTo>
-                  <a:lnTo>
-                    <a:pt x="5276634" y="2972688"/>
-                  </a:lnTo>
-                  <a:lnTo>
-                    <a:pt x="5348256" y="2985830"/>
-                  </a:lnTo>
-                  <a:lnTo>
-                    <a:pt x="5419879" y="2998634"/>
-                  </a:lnTo>
-                  <a:lnTo>
-                    <a:pt x="5491501" y="3011109"/>
-                  </a:lnTo>
-                  <a:lnTo>
-                    <a:pt x="5563124" y="3023263"/>
-                  </a:lnTo>
-                  <a:lnTo>
-                    <a:pt x="5634746" y="3035104"/>
-                  </a:lnTo>
-                  <a:lnTo>
-                    <a:pt x="5706369" y="3046641"/>
-                  </a:lnTo>
-                  <a:lnTo>
-                    <a:pt x="5777991" y="3057881"/>
-                  </a:lnTo>
-                  <a:lnTo>
-                    <a:pt x="5849614" y="3068833"/>
-                  </a:lnTo>
-                  <a:lnTo>
-                    <a:pt x="5921237" y="3079502"/>
-                  </a:lnTo>
-                  <a:lnTo>
-                    <a:pt x="5992859" y="3089898"/>
-                  </a:lnTo>
-                  <a:lnTo>
-                    <a:pt x="6064482" y="3100026"/>
-                  </a:lnTo>
-                  <a:lnTo>
-                    <a:pt x="6136104" y="3109893"/>
+                    <a:pt x="47466" y="56698"/>
+                  </a:lnTo>
+                  <a:lnTo>
+                    <a:pt x="118013" y="138800"/>
+                  </a:lnTo>
+                  <a:lnTo>
+                    <a:pt x="188560" y="218790"/>
+                  </a:lnTo>
+                  <a:lnTo>
+                    <a:pt x="259107" y="296723"/>
+                  </a:lnTo>
+                  <a:lnTo>
+                    <a:pt x="329655" y="372652"/>
+                  </a:lnTo>
+                  <a:lnTo>
+                    <a:pt x="400202" y="446629"/>
+                  </a:lnTo>
+                  <a:lnTo>
+                    <a:pt x="470749" y="518703"/>
+                  </a:lnTo>
+                  <a:lnTo>
+                    <a:pt x="541296" y="588924"/>
+                  </a:lnTo>
+                  <a:lnTo>
+                    <a:pt x="611843" y="657339"/>
+                  </a:lnTo>
+                  <a:lnTo>
+                    <a:pt x="682390" y="723995"/>
+                  </a:lnTo>
+                  <a:lnTo>
+                    <a:pt x="752938" y="788937"/>
+                  </a:lnTo>
+                  <a:lnTo>
+                    <a:pt x="823485" y="852209"/>
+                  </a:lnTo>
+                  <a:lnTo>
+                    <a:pt x="894032" y="913853"/>
+                  </a:lnTo>
+                  <a:lnTo>
+                    <a:pt x="964579" y="973913"/>
+                  </a:lnTo>
+                  <a:lnTo>
+                    <a:pt x="1035126" y="1032428"/>
+                  </a:lnTo>
+                  <a:lnTo>
+                    <a:pt x="1105673" y="1089438"/>
+                  </a:lnTo>
+                  <a:lnTo>
+                    <a:pt x="1176221" y="1144983"/>
+                  </a:lnTo>
+                  <a:lnTo>
+                    <a:pt x="1246768" y="1199099"/>
+                  </a:lnTo>
+                  <a:lnTo>
+                    <a:pt x="1317315" y="1251823"/>
+                  </a:lnTo>
+                  <a:lnTo>
+                    <a:pt x="1387862" y="1303191"/>
+                  </a:lnTo>
+                  <a:lnTo>
+                    <a:pt x="1458409" y="1353239"/>
+                  </a:lnTo>
+                  <a:lnTo>
+                    <a:pt x="1528956" y="1402000"/>
+                  </a:lnTo>
+                  <a:lnTo>
+                    <a:pt x="1599504" y="1449506"/>
+                  </a:lnTo>
+                  <a:lnTo>
+                    <a:pt x="1670051" y="1495791"/>
+                  </a:lnTo>
+                  <a:lnTo>
+                    <a:pt x="1740598" y="1540886"/>
+                  </a:lnTo>
+                  <a:lnTo>
+                    <a:pt x="1811145" y="1584821"/>
+                  </a:lnTo>
+                  <a:lnTo>
+                    <a:pt x="1881692" y="1627627"/>
+                  </a:lnTo>
+                  <a:lnTo>
+                    <a:pt x="1952239" y="1669331"/>
+                  </a:lnTo>
+                  <a:lnTo>
+                    <a:pt x="2022787" y="1709963"/>
+                  </a:lnTo>
+                  <a:lnTo>
+                    <a:pt x="2093334" y="1749551"/>
+                  </a:lnTo>
+                  <a:lnTo>
+                    <a:pt x="2163881" y="1788120"/>
+                  </a:lnTo>
+                  <a:lnTo>
+                    <a:pt x="2234428" y="1825697"/>
+                  </a:lnTo>
+                  <a:lnTo>
+                    <a:pt x="2304975" y="1862309"/>
+                  </a:lnTo>
+                  <a:lnTo>
+                    <a:pt x="2375523" y="1897978"/>
+                  </a:lnTo>
+                  <a:lnTo>
+                    <a:pt x="2446070" y="1932731"/>
+                  </a:lnTo>
+                  <a:lnTo>
+                    <a:pt x="2516617" y="1966589"/>
+                  </a:lnTo>
+                  <a:lnTo>
+                    <a:pt x="2587164" y="1999577"/>
+                  </a:lnTo>
+                  <a:lnTo>
+                    <a:pt x="2657711" y="2031717"/>
+                  </a:lnTo>
+                  <a:lnTo>
+                    <a:pt x="2728258" y="2063031"/>
+                  </a:lnTo>
+                  <a:lnTo>
+                    <a:pt x="2798806" y="2093539"/>
+                  </a:lnTo>
+                  <a:lnTo>
+                    <a:pt x="2869353" y="2123262"/>
+                  </a:lnTo>
+                  <a:lnTo>
+                    <a:pt x="2939900" y="2152221"/>
+                  </a:lnTo>
+                  <a:lnTo>
+                    <a:pt x="3010447" y="2180436"/>
+                  </a:lnTo>
+                  <a:lnTo>
+                    <a:pt x="3080994" y="2207925"/>
+                  </a:lnTo>
+                  <a:lnTo>
+                    <a:pt x="3151541" y="2234707"/>
+                  </a:lnTo>
+                  <a:lnTo>
+                    <a:pt x="3222089" y="2260800"/>
+                  </a:lnTo>
+                  <a:lnTo>
+                    <a:pt x="3292636" y="2286222"/>
+                  </a:lnTo>
+                  <a:lnTo>
+                    <a:pt x="3363183" y="2310991"/>
+                  </a:lnTo>
+                  <a:lnTo>
+                    <a:pt x="3433730" y="2335123"/>
+                  </a:lnTo>
+                  <a:lnTo>
+                    <a:pt x="3504277" y="2358634"/>
+                  </a:lnTo>
+                  <a:lnTo>
+                    <a:pt x="3574824" y="2381540"/>
+                  </a:lnTo>
+                  <a:lnTo>
+                    <a:pt x="3645372" y="2403858"/>
+                  </a:lnTo>
+                  <a:lnTo>
+                    <a:pt x="3715919" y="2425601"/>
+                  </a:lnTo>
+                  <a:lnTo>
+                    <a:pt x="3786466" y="2446786"/>
+                  </a:lnTo>
+                  <a:lnTo>
+                    <a:pt x="3857013" y="2467426"/>
+                  </a:lnTo>
+                  <a:lnTo>
+                    <a:pt x="3927560" y="2487534"/>
+                  </a:lnTo>
+                  <a:lnTo>
+                    <a:pt x="3998107" y="2507126"/>
+                  </a:lnTo>
+                  <a:lnTo>
+                    <a:pt x="4068655" y="2526214"/>
+                  </a:lnTo>
+                  <a:lnTo>
+                    <a:pt x="4139202" y="2544811"/>
+                  </a:lnTo>
+                  <a:lnTo>
+                    <a:pt x="4209749" y="2562930"/>
+                  </a:lnTo>
+                  <a:lnTo>
+                    <a:pt x="4280296" y="2580583"/>
+                  </a:lnTo>
+                  <a:lnTo>
+                    <a:pt x="4350843" y="2597782"/>
+                  </a:lnTo>
+                  <a:lnTo>
+                    <a:pt x="4421391" y="2614539"/>
+                  </a:lnTo>
+                  <a:lnTo>
+                    <a:pt x="4491938" y="2630865"/>
+                  </a:lnTo>
+                  <a:lnTo>
+                    <a:pt x="4562485" y="2646771"/>
+                  </a:lnTo>
+                  <a:lnTo>
+                    <a:pt x="4633032" y="2662268"/>
+                  </a:lnTo>
+                  <a:lnTo>
+                    <a:pt x="4703579" y="2677366"/>
+                  </a:lnTo>
+                  <a:lnTo>
+                    <a:pt x="4774126" y="2692077"/>
+                  </a:lnTo>
+                  <a:lnTo>
+                    <a:pt x="4844674" y="2706409"/>
+                  </a:lnTo>
+                  <a:lnTo>
+                    <a:pt x="4915221" y="2720372"/>
+                  </a:lnTo>
+                  <a:lnTo>
+                    <a:pt x="4985768" y="2733976"/>
+                  </a:lnTo>
+                  <a:lnTo>
+                    <a:pt x="5056315" y="2747231"/>
+                  </a:lnTo>
+                  <a:lnTo>
+                    <a:pt x="5126862" y="2760144"/>
+                  </a:lnTo>
+                  <a:lnTo>
+                    <a:pt x="5197409" y="2772726"/>
+                  </a:lnTo>
+                  <a:lnTo>
+                    <a:pt x="5267957" y="2784984"/>
+                  </a:lnTo>
+                  <a:lnTo>
+                    <a:pt x="5338504" y="2796927"/>
+                  </a:lnTo>
+                  <a:lnTo>
+                    <a:pt x="5409051" y="2808562"/>
+                  </a:lnTo>
+                  <a:lnTo>
+                    <a:pt x="5479598" y="2819899"/>
+                  </a:lnTo>
+                  <a:lnTo>
+                    <a:pt x="5550145" y="2830944"/>
+                  </a:lnTo>
+                  <a:lnTo>
+                    <a:pt x="5620692" y="2841705"/>
+                  </a:lnTo>
+                  <a:lnTo>
+                    <a:pt x="5691240" y="2852189"/>
+                  </a:lnTo>
+                  <a:lnTo>
+                    <a:pt x="5761787" y="2862404"/>
+                  </a:lnTo>
+                  <a:lnTo>
+                    <a:pt x="5832334" y="2872355"/>
+                  </a:lnTo>
+                  <a:lnTo>
+                    <a:pt x="5902881" y="2882052"/>
+                  </a:lnTo>
+                  <a:lnTo>
+                    <a:pt x="5973428" y="2891498"/>
+                  </a:lnTo>
+                  <a:lnTo>
+                    <a:pt x="6043976" y="2900702"/>
                   </a:lnTo>
                 </a:path>
               </a:pathLst>
@@ -4317,21 +4317,21 @@
           </p:nvSpPr>
           <p:spPr>
             <a:xfrm>
-              <a:off x="817517" y="4727786"/>
-              <a:ext cx="7799693" cy="0"/>
+              <a:off x="915645" y="4684908"/>
+              <a:ext cx="7682587" cy="0"/>
             </a:xfrm>
             <a:custGeom>
               <a:avLst/>
               <a:pathLst>
-                <a:path w="7799693" h="0">
+                <a:path w="7682587" h="0">
                   <a:moveTo>
                     <a:pt x="0" y="0"/>
                   </a:moveTo>
                   <a:lnTo>
-                    <a:pt x="7799693" y="0"/>
-                  </a:lnTo>
-                  <a:lnTo>
-                    <a:pt x="7799693" y="0"/>
+                    <a:pt x="7682587" y="0"/>
+                  </a:lnTo>
+                  <a:lnTo>
+                    <a:pt x="7682587" y="0"/>
                   </a:lnTo>
                 </a:path>
               </a:pathLst>
@@ -4360,15 +4360,15 @@
           </p:nvSpPr>
           <p:spPr>
             <a:xfrm>
-              <a:off x="6071765" y="2073503"/>
-              <a:ext cx="0" cy="3649639"/>
+              <a:off x="6091004" y="2209169"/>
+              <a:ext cx="0" cy="3404141"/>
             </a:xfrm>
             <a:custGeom>
               <a:avLst/>
               <a:pathLst>
-                <a:path w="0" h="3649639">
+                <a:path w="0" h="3404141">
                   <a:moveTo>
-                    <a:pt x="0" y="3649639"/>
+                    <a:pt x="0" y="3404141"/>
                   </a:moveTo>
                   <a:lnTo>
                     <a:pt x="0" y="0"/>
@@ -4403,15 +4403,15 @@
           </p:nvSpPr>
           <p:spPr>
             <a:xfrm>
-              <a:off x="5051213" y="2073503"/>
-              <a:ext cx="0" cy="3649639"/>
+              <a:off x="5085775" y="2209169"/>
+              <a:ext cx="0" cy="3404141"/>
             </a:xfrm>
             <a:custGeom>
               <a:avLst/>
               <a:pathLst>
-                <a:path w="0" h="3649639">
+                <a:path w="0" h="3404141">
                   <a:moveTo>
-                    <a:pt x="0" y="3649639"/>
+                    <a:pt x="0" y="3404141"/>
                   </a:moveTo>
                   <a:lnTo>
                     <a:pt x="0" y="0"/>
@@ -4446,15 +4446,15 @@
           </p:nvSpPr>
           <p:spPr>
             <a:xfrm>
-              <a:off x="6733531" y="2073503"/>
-              <a:ext cx="0" cy="3649639"/>
+              <a:off x="6742834" y="2209169"/>
+              <a:ext cx="0" cy="3404141"/>
             </a:xfrm>
             <a:custGeom>
               <a:avLst/>
               <a:pathLst>
-                <a:path w="0" h="3649639">
+                <a:path w="0" h="3404141">
                   <a:moveTo>
-                    <a:pt x="0" y="3649639"/>
+                    <a:pt x="0" y="3404141"/>
                   </a:moveTo>
                   <a:lnTo>
                     <a:pt x="0" y="0"/>
@@ -4489,8 +4489,8 @@
           </p:nvSpPr>
           <p:spPr>
             <a:xfrm>
-              <a:off x="692708" y="5517199"/>
-              <a:ext cx="62179" cy="80101"/>
+              <a:off x="756929" y="5407599"/>
+              <a:ext cx="79004" cy="101955"/>
             </a:xfrm>
             <a:prstGeom prst="rect">
               <a:avLst/>
@@ -4503,7 +4503,7 @@
             <a:p>
               <a:pPr algn="l" marL="0" marR="0" indent="0">
                 <a:lnSpc>
-                  <a:spcPts val="880"/>
+                  <a:spcPts val="1120"/>
                 </a:lnSpc>
                 <a:spcBef>
                   <a:spcPts val="0"/>
@@ -4513,7 +4513,7 @@
                 </a:spcAft>
               </a:pPr>
               <a:r>
-                <a:rPr sz="880">
+                <a:rPr sz="1120">
                   <a:solidFill>
                     <a:srgbClr val="4D4D4D">
                       <a:alpha val="100000"/>
@@ -4535,8 +4535,8 @@
           </p:nvSpPr>
           <p:spPr>
             <a:xfrm>
-              <a:off x="692708" y="4687735"/>
-              <a:ext cx="62179" cy="80101"/>
+              <a:off x="756929" y="4633931"/>
+              <a:ext cx="79004" cy="101955"/>
             </a:xfrm>
             <a:prstGeom prst="rect">
               <a:avLst/>
@@ -4549,7 +4549,7 @@
             <a:p>
               <a:pPr algn="l" marL="0" marR="0" indent="0">
                 <a:lnSpc>
-                  <a:spcPts val="880"/>
+                  <a:spcPts val="1120"/>
                 </a:lnSpc>
                 <a:spcBef>
                   <a:spcPts val="0"/>
@@ -4559,7 +4559,7 @@
                 </a:spcAft>
               </a:pPr>
               <a:r>
-                <a:rPr sz="880">
+                <a:rPr sz="1120">
                   <a:solidFill>
                     <a:srgbClr val="4D4D4D">
                       <a:alpha val="100000"/>
@@ -4581,8 +4581,8 @@
           </p:nvSpPr>
           <p:spPr>
             <a:xfrm>
-              <a:off x="692708" y="3858272"/>
-              <a:ext cx="62179" cy="80101"/>
+              <a:off x="756929" y="3860262"/>
+              <a:ext cx="79004" cy="101955"/>
             </a:xfrm>
             <a:prstGeom prst="rect">
               <a:avLst/>
@@ -4595,7 +4595,7 @@
             <a:p>
               <a:pPr algn="l" marL="0" marR="0" indent="0">
                 <a:lnSpc>
-                  <a:spcPts val="880"/>
+                  <a:spcPts val="1120"/>
                 </a:lnSpc>
                 <a:spcBef>
                   <a:spcPts val="0"/>
@@ -4605,7 +4605,7 @@
                 </a:spcAft>
               </a:pPr>
               <a:r>
-                <a:rPr sz="880">
+                <a:rPr sz="1120">
                   <a:solidFill>
                     <a:srgbClr val="4D4D4D">
                       <a:alpha val="100000"/>
@@ -4627,8 +4627,8 @@
           </p:nvSpPr>
           <p:spPr>
             <a:xfrm>
-              <a:off x="692708" y="3028808"/>
-              <a:ext cx="62179" cy="80101"/>
+              <a:off x="756929" y="3086593"/>
+              <a:ext cx="79004" cy="101955"/>
             </a:xfrm>
             <a:prstGeom prst="rect">
               <a:avLst/>
@@ -4641,7 +4641,7 @@
             <a:p>
               <a:pPr algn="l" marL="0" marR="0" indent="0">
                 <a:lnSpc>
-                  <a:spcPts val="880"/>
+                  <a:spcPts val="1120"/>
                 </a:lnSpc>
                 <a:spcBef>
                   <a:spcPts val="0"/>
@@ -4651,7 +4651,7 @@
                 </a:spcAft>
               </a:pPr>
               <a:r>
-                <a:rPr sz="880">
+                <a:rPr sz="1120">
                   <a:solidFill>
                     <a:srgbClr val="4D4D4D">
                       <a:alpha val="100000"/>
@@ -4673,8 +4673,8 @@
           </p:nvSpPr>
           <p:spPr>
             <a:xfrm>
-              <a:off x="692708" y="2199345"/>
-              <a:ext cx="62179" cy="80101"/>
+              <a:off x="756929" y="2312925"/>
+              <a:ext cx="79004" cy="101955"/>
             </a:xfrm>
             <a:prstGeom prst="rect">
               <a:avLst/>
@@ -4687,7 +4687,7 @@
             <a:p>
               <a:pPr algn="l" marL="0" marR="0" indent="0">
                 <a:lnSpc>
-                  <a:spcPts val="880"/>
+                  <a:spcPts val="1120"/>
                 </a:lnSpc>
                 <a:spcBef>
                   <a:spcPts val="0"/>
@@ -4697,7 +4697,7 @@
                 </a:spcAft>
               </a:pPr>
               <a:r>
-                <a:rPr sz="880">
+                <a:rPr sz="1120">
                   <a:solidFill>
                     <a:srgbClr val="4D4D4D">
                       <a:alpha val="100000"/>
@@ -4719,8 +4719,8 @@
           </p:nvSpPr>
           <p:spPr>
             <a:xfrm>
-              <a:off x="2331636" y="5785772"/>
-              <a:ext cx="161574" cy="80101"/>
+              <a:off x="2383963" y="5693022"/>
+              <a:ext cx="205282" cy="101955"/>
             </a:xfrm>
             <a:prstGeom prst="rect">
               <a:avLst/>
@@ -4733,7 +4733,7 @@
             <a:p>
               <a:pPr algn="l" marL="0" marR="0" indent="0">
                 <a:lnSpc>
-                  <a:spcPts val="880"/>
+                  <a:spcPts val="1120"/>
                 </a:lnSpc>
                 <a:spcBef>
                   <a:spcPts val="0"/>
@@ -4743,7 +4743,7 @@
                 </a:spcAft>
               </a:pPr>
               <a:r>
-                <a:rPr sz="880">
+                <a:rPr sz="1120">
                   <a:solidFill>
                     <a:srgbClr val="4D4D4D">
                       <a:alpha val="100000"/>
@@ -4765,8 +4765,8 @@
           </p:nvSpPr>
           <p:spPr>
             <a:xfrm>
-              <a:off x="4181509" y="5785772"/>
-              <a:ext cx="161574" cy="80101"/>
+              <a:off x="4206062" y="5693022"/>
+              <a:ext cx="205282" cy="101955"/>
             </a:xfrm>
             <a:prstGeom prst="rect">
               <a:avLst/>
@@ -4779,7 +4779,7 @@
             <a:p>
               <a:pPr algn="l" marL="0" marR="0" indent="0">
                 <a:lnSpc>
-                  <a:spcPts val="880"/>
+                  <a:spcPts val="1120"/>
                 </a:lnSpc>
                 <a:spcBef>
                   <a:spcPts val="0"/>
@@ -4789,7 +4789,7 @@
                 </a:spcAft>
               </a:pPr>
               <a:r>
-                <a:rPr sz="880">
+                <a:rPr sz="1120">
                   <a:solidFill>
                     <a:srgbClr val="4D4D4D">
                       <a:alpha val="100000"/>
@@ -4811,8 +4811,8 @@
           </p:nvSpPr>
           <p:spPr>
             <a:xfrm>
-              <a:off x="6081080" y="5785772"/>
-              <a:ext cx="62179" cy="80101"/>
+              <a:off x="6091300" y="5693022"/>
+              <a:ext cx="79004" cy="101955"/>
             </a:xfrm>
             <a:prstGeom prst="rect">
               <a:avLst/>
@@ -4825,7 +4825,7 @@
             <a:p>
               <a:pPr algn="l" marL="0" marR="0" indent="0">
                 <a:lnSpc>
-                  <a:spcPts val="880"/>
+                  <a:spcPts val="1120"/>
                 </a:lnSpc>
                 <a:spcBef>
                   <a:spcPts val="0"/>
@@ -4835,7 +4835,7 @@
                 </a:spcAft>
               </a:pPr>
               <a:r>
-                <a:rPr sz="880">
+                <a:rPr sz="1120">
                   <a:solidFill>
                     <a:srgbClr val="4D4D4D">
                       <a:alpha val="100000"/>
@@ -4857,8 +4857,8 @@
           </p:nvSpPr>
           <p:spPr>
             <a:xfrm>
-              <a:off x="7899863" y="5785772"/>
-              <a:ext cx="124358" cy="80101"/>
+              <a:off x="7873896" y="5693022"/>
+              <a:ext cx="158008" cy="101955"/>
             </a:xfrm>
             <a:prstGeom prst="rect">
               <a:avLst/>
@@ -4871,7 +4871,7 @@
             <a:p>
               <a:pPr algn="l" marL="0" marR="0" indent="0">
                 <a:lnSpc>
-                  <a:spcPts val="880"/>
+                  <a:spcPts val="1120"/>
                 </a:lnSpc>
                 <a:spcBef>
                   <a:spcPts val="0"/>
@@ -4881,7 +4881,7 @@
                 </a:spcAft>
               </a:pPr>
               <a:r>
-                <a:rPr sz="880">
+                <a:rPr sz="1120">
                   <a:solidFill>
                     <a:srgbClr val="4D4D4D">
                       <a:alpha val="100000"/>
@@ -4903,8 +4903,8 @@
           </p:nvSpPr>
           <p:spPr>
             <a:xfrm>
-              <a:off x="3832408" y="5925448"/>
-              <a:ext cx="1769912" cy="100218"/>
+              <a:off x="3630809" y="5870717"/>
+              <a:ext cx="2252258" cy="127558"/>
             </a:xfrm>
             <a:prstGeom prst="rect">
               <a:avLst/>
@@ -4917,7 +4917,7 @@
             <a:p>
               <a:pPr algn="l" marL="0" marR="0" indent="0">
                 <a:lnSpc>
-                  <a:spcPts val="1100"/>
+                  <a:spcPts val="1400"/>
                 </a:lnSpc>
                 <a:spcBef>
                   <a:spcPts val="0"/>
@@ -4927,7 +4927,7 @@
                 </a:spcAft>
               </a:pPr>
               <a:r>
-                <a:rPr sz="1100">
+                <a:rPr sz="1400">
                   <a:solidFill>
                     <a:srgbClr val="000000">
                       <a:alpha val="100000"/>
@@ -4949,8 +4949,8 @@
           </p:nvSpPr>
           <p:spPr>
             <a:xfrm rot="-5400000">
-              <a:off x="68446" y="3848213"/>
-              <a:ext cx="1016904" cy="100218"/>
+              <a:off x="-37527" y="3847460"/>
+              <a:ext cx="1294150" cy="127558"/>
             </a:xfrm>
             <a:prstGeom prst="rect">
               <a:avLst/>
@@ -4963,7 +4963,7 @@
             <a:p>
               <a:pPr algn="l" marL="0" marR="0" indent="0">
                 <a:lnSpc>
-                  <a:spcPts val="1100"/>
+                  <a:spcPts val="1400"/>
                 </a:lnSpc>
                 <a:spcBef>
                   <a:spcPts val="0"/>
@@ -4973,7 +4973,7 @@
                 </a:spcAft>
               </a:pPr>
               <a:r>
-                <a:rPr sz="1100">
+                <a:rPr sz="1400">
                   <a:solidFill>
                     <a:srgbClr val="000000">
                       <a:alpha val="100000"/>
@@ -4995,8 +4995,8 @@
           </p:nvSpPr>
           <p:spPr>
             <a:xfrm>
-              <a:off x="817517" y="1896563"/>
-              <a:ext cx="5413065" cy="82021"/>
+              <a:off x="915645" y="1977589"/>
+              <a:ext cx="7220102" cy="109362"/>
             </a:xfrm>
             <a:prstGeom prst="rect">
               <a:avLst/>
@@ -5009,7 +5009,7 @@
             <a:p>
               <a:pPr algn="l" marL="0" marR="0" indent="0">
                 <a:lnSpc>
-                  <a:spcPts val="900"/>
+                  <a:spcPts val="1200"/>
                 </a:lnSpc>
                 <a:spcBef>
                   <a:spcPts val="0"/>
@@ -5019,7 +5019,7 @@
                 </a:spcAft>
               </a:pPr>
               <a:r>
-                <a:rPr sz="900">
+                <a:rPr sz="1200">
                   <a:solidFill>
                     <a:srgbClr val="404040">
                       <a:alpha val="100000"/>
@@ -5041,8 +5041,8 @@
           </p:nvSpPr>
           <p:spPr>
             <a:xfrm>
-              <a:off x="817517" y="1669789"/>
-              <a:ext cx="2234793" cy="120152"/>
+              <a:off x="915645" y="1688767"/>
+              <a:ext cx="2845064" cy="153070"/>
             </a:xfrm>
             <a:prstGeom prst="rect">
               <a:avLst/>
@@ -5055,7 +5055,7 @@
             <a:p>
               <a:pPr algn="l" marL="0" marR="0" indent="0">
                 <a:lnSpc>
-                  <a:spcPts val="1320"/>
+                  <a:spcPts val="1680"/>
                 </a:lnSpc>
                 <a:spcBef>
                   <a:spcPts val="0"/>
@@ -5065,7 +5065,7 @@
                 </a:spcAft>
               </a:pPr>
               <a:r>
-                <a:rPr sz="1320">
+                <a:rPr sz="1680">
                   <a:solidFill>
                     <a:srgbClr val="000000">
                       <a:alpha val="100000"/>
